--- a/pptx/Module14_JOIN_multitables.pptx
+++ b/pptx/Module14_JOIN_multitables.pptx
@@ -12,9 +12,11 @@
     <p:sldId id="260" r:id="rId6"/>
     <p:sldId id="261" r:id="rId7"/>
     <p:sldId id="262" r:id="rId8"/>
+    <p:sldId id="263" r:id="rId9"/>
+    <p:sldId id="264" r:id="rId10"/>
   </p:sldIdLst>
   <p:notesMasterIdLst>
-    <p:notesMasterId r:id="rId9"/>
+    <p:notesMasterId r:id="rId11"/>
   </p:notesMasterIdLst>
   <p:sldSz cx="9144000" cy="5143500"/>
   <p:notesSz cx="5143500" cy="9144000"/>
@@ -596,7 +598,7 @@
           <a:p>
             <a:r>
               <a:rPr lang="en-US" dirty="0"/>
-              <a:t/>
+              <a:t>Les JOIN sont le concept le plus difficile et le plus important. Y consacrer du temps.</a:t>
             </a:r>
             <a:endParaRPr lang="en-US" dirty="0"/>
           </a:p>
@@ -684,7 +686,7 @@
           <a:p>
             <a:r>
               <a:rPr lang="en-US" dirty="0"/>
-              <a:t/>
+              <a:t>Dessiner un diagramme de Venn : INNER JOIN = l'intersection.</a:t>
             </a:r>
             <a:endParaRPr lang="en-US" dirty="0"/>
           </a:p>
@@ -772,7 +774,7 @@
           <a:p>
             <a:r>
               <a:rPr lang="en-US" dirty="0"/>
-              <a:t/>
+              <a:t>LEFT JOIN est essentiel pour les rapports : 'tous les artistes avec leur nombre d'albums (y compris 0)'.</a:t>
             </a:r>
             <a:endParaRPr lang="en-US" dirty="0"/>
           </a:p>
@@ -860,7 +862,7 @@
           <a:p>
             <a:r>
               <a:rPr lang="en-US" dirty="0"/>
-              <a:t/>
+              <a:t>SwissSound est parfait pour les jointures 3+ tables grâce à la table session qui a 3 FK.</a:t>
             </a:r>
             <a:endParaRPr lang="en-US" dirty="0"/>
           </a:p>
@@ -948,7 +950,7 @@
           <a:p>
             <a:r>
               <a:rPr lang="en-US" dirty="0"/>
-              <a:t/>
+              <a:t>Le CROSS JOIN peut servir pour générer des créneaux horaires (jours × heures × salles).</a:t>
             </a:r>
             <a:endParaRPr lang="en-US" dirty="0"/>
           </a:p>
@@ -1036,7 +1038,7 @@
           <a:p>
             <a:r>
               <a:rPr lang="en-US" dirty="0"/>
-              <a:t/>
+              <a:t>Les jointures sont le sujet principal de P3/M3. Bien les pratiquer.</a:t>
             </a:r>
             <a:endParaRPr lang="en-US" dirty="0"/>
           </a:p>
@@ -1060,6 +1062,182 @@
             <a:fld id="{F7021451-1387-4CA6-816F-3879F97B5CBC}" type="slidenum">
               <a:rPr lang="en-US"/>
               <a:t>7</a:t>
+            </a:fld>
+            <a:endParaRPr lang="en-US"/>
+          </a:p>
+        </p:txBody>
+      </p:sp>
+    </p:spTree>
+    <p:extLst>
+      <p:ext uri="{BB962C8B-B14F-4D97-AF65-F5344CB8AC3E}">
+        <p14:creationId xmlns:p14="http://schemas.microsoft.com/office/powerpoint/2010/main" val="1024086991"/>
+      </p:ext>
+    </p:extLst>
+  </p:cSld>
+  <p:clrMapOvr>
+    <a:masterClrMapping/>
+  </p:clrMapOvr>
+</p:notes>
+</file>
+
+<file path=ppt/notesSlides/notesSlide8.xml><?xml version="1.0" encoding="utf-8"?>
+<p:notes xmlns:a="http://schemas.openxmlformats.org/drawingml/2006/main" xmlns:r="http://schemas.openxmlformats.org/officeDocument/2006/relationships" xmlns:p="http://schemas.openxmlformats.org/presentationml/2006/main">
+  <p:cSld>
+    <p:spTree>
+      <p:nvGrpSpPr>
+        <p:cNvPr id="1" name=""/>
+        <p:cNvGrpSpPr/>
+        <p:nvPr/>
+      </p:nvGrpSpPr>
+      <p:grpSpPr>
+        <a:xfrm>
+          <a:off x="0" y="0"/>
+          <a:ext cx="0" cy="0"/>
+          <a:chOff x="0" y="0"/>
+          <a:chExt cx="0" cy="0"/>
+        </a:xfrm>
+      </p:grpSpPr>
+      <p:sp>
+        <p:nvSpPr>
+          <p:cNvPr id="2" name="Slide Image Placeholder 1"/>
+          <p:cNvSpPr>
+            <a:spLocks noGrp="1" noRot="1" noChangeAspect="1"/>
+          </p:cNvSpPr>
+          <p:nvPr>
+            <p:ph type="sldImg"/>
+          </p:nvPr>
+        </p:nvSpPr>
+        <p:spPr/>
+      </p:sp>
+      <p:sp>
+        <p:nvSpPr>
+          <p:cNvPr id="3" name="Notes Placeholder 2"/>
+          <p:cNvSpPr>
+            <a:spLocks noGrp="1"/>
+          </p:cNvSpPr>
+          <p:nvPr>
+            <p:ph type="body" idx="1"/>
+          </p:nvPr>
+        </p:nvSpPr>
+        <p:spPr/>
+        <p:txBody>
+          <a:bodyPr/>
+          <a:lstStyle/>
+          <a:p>
+            <a:r>
+              <a:rPr lang="en-US" dirty="0"/>
+              <a:t/>
+            </a:r>
+            <a:endParaRPr lang="en-US" dirty="0"/>
+          </a:p>
+        </p:txBody>
+      </p:sp>
+      <p:sp>
+        <p:nvSpPr>
+          <p:cNvPr id="4" name="Slide Number Placeholder 3"/>
+          <p:cNvSpPr>
+            <a:spLocks noGrp="1"/>
+          </p:cNvSpPr>
+          <p:nvPr>
+            <p:ph type="sldNum" sz="quarter" idx="10"/>
+          </p:nvPr>
+        </p:nvSpPr>
+        <p:spPr/>
+        <p:txBody>
+          <a:bodyPr/>
+          <a:lstStyle/>
+          <a:p>
+            <a:fld id="{F7021451-1387-4CA6-816F-3879F97B5CBC}" type="slidenum">
+              <a:rPr lang="en-US"/>
+              <a:t>8</a:t>
+            </a:fld>
+            <a:endParaRPr lang="en-US"/>
+          </a:p>
+        </p:txBody>
+      </p:sp>
+    </p:spTree>
+    <p:extLst>
+      <p:ext uri="{BB962C8B-B14F-4D97-AF65-F5344CB8AC3E}">
+        <p14:creationId xmlns:p14="http://schemas.microsoft.com/office/powerpoint/2010/main" val="1024086991"/>
+      </p:ext>
+    </p:extLst>
+  </p:cSld>
+  <p:clrMapOvr>
+    <a:masterClrMapping/>
+  </p:clrMapOvr>
+</p:notes>
+</file>
+
+<file path=ppt/notesSlides/notesSlide9.xml><?xml version="1.0" encoding="utf-8"?>
+<p:notes xmlns:a="http://schemas.openxmlformats.org/drawingml/2006/main" xmlns:r="http://schemas.openxmlformats.org/officeDocument/2006/relationships" xmlns:p="http://schemas.openxmlformats.org/presentationml/2006/main">
+  <p:cSld>
+    <p:spTree>
+      <p:nvGrpSpPr>
+        <p:cNvPr id="1" name=""/>
+        <p:cNvGrpSpPr/>
+        <p:nvPr/>
+      </p:nvGrpSpPr>
+      <p:grpSpPr>
+        <a:xfrm>
+          <a:off x="0" y="0"/>
+          <a:ext cx="0" cy="0"/>
+          <a:chOff x="0" y="0"/>
+          <a:chExt cx="0" cy="0"/>
+        </a:xfrm>
+      </p:grpSpPr>
+      <p:sp>
+        <p:nvSpPr>
+          <p:cNvPr id="2" name="Slide Image Placeholder 1"/>
+          <p:cNvSpPr>
+            <a:spLocks noGrp="1" noRot="1" noChangeAspect="1"/>
+          </p:cNvSpPr>
+          <p:nvPr>
+            <p:ph type="sldImg"/>
+          </p:nvPr>
+        </p:nvSpPr>
+        <p:spPr/>
+      </p:sp>
+      <p:sp>
+        <p:nvSpPr>
+          <p:cNvPr id="3" name="Notes Placeholder 2"/>
+          <p:cNvSpPr>
+            <a:spLocks noGrp="1"/>
+          </p:cNvSpPr>
+          <p:nvPr>
+            <p:ph type="body" idx="1"/>
+          </p:nvPr>
+        </p:nvSpPr>
+        <p:spPr/>
+        <p:txBody>
+          <a:bodyPr/>
+          <a:lstStyle/>
+          <a:p>
+            <a:r>
+              <a:rPr lang="en-US" dirty="0"/>
+              <a:t/>
+            </a:r>
+            <a:endParaRPr lang="en-US" dirty="0"/>
+          </a:p>
+        </p:txBody>
+      </p:sp>
+      <p:sp>
+        <p:nvSpPr>
+          <p:cNvPr id="4" name="Slide Number Placeholder 3"/>
+          <p:cNvSpPr>
+            <a:spLocks noGrp="1"/>
+          </p:cNvSpPr>
+          <p:nvPr>
+            <p:ph type="sldNum" sz="quarter" idx="10"/>
+          </p:nvPr>
+        </p:nvSpPr>
+        <p:spPr/>
+        <p:txBody>
+          <a:bodyPr/>
+          <a:lstStyle/>
+          <a:p>
+            <a:fld id="{F7021451-1387-4CA6-816F-3879F97B5CBC}" type="slidenum">
+              <a:rPr lang="en-US"/>
+              <a:t>9</a:t>
             </a:fld>
             <a:endParaRPr lang="en-US"/>
           </a:p>
@@ -1445,7 +1623,7 @@
         </p:blipFill>
         <p:spPr>
           <a:xfrm>
-            <a:off x="3931920" y="457200"/>
+            <a:off x="3931920" y="365760"/>
             <a:ext cx="1280160" cy="1280160"/>
           </a:xfrm>
           <a:prstGeom prst="rect">
@@ -1461,7 +1639,7 @@
         </p:nvSpPr>
         <p:spPr>
           <a:xfrm>
-            <a:off x="457200" y="1828800"/>
+            <a:off x="457200" y="1737360"/>
             <a:ext cx="8229600" cy="457200"/>
           </a:xfrm>
           <a:prstGeom prst="rect">
@@ -1500,8 +1678,8 @@
         </p:nvSpPr>
         <p:spPr>
           <a:xfrm>
-            <a:off x="457200" y="2286000"/>
-            <a:ext cx="8229600" cy="822960"/>
+            <a:off x="274320" y="2194560"/>
+            <a:ext cx="8595360" cy="822960"/>
           </a:xfrm>
           <a:prstGeom prst="rect">
             <a:avLst/>
@@ -1517,7 +1695,7 @@
               <a:buNone/>
             </a:pPr>
             <a:r>
-              <a:rPr lang="en-US" sz="3400" b="1" dirty="0">
+              <a:rPr lang="en-US" sz="3200" b="1" dirty="0">
                 <a:solidFill>
                   <a:srgbClr val="FFFFFF"/>
                 </a:solidFill>
@@ -1525,9 +1703,9 @@
                 <a:ea typeface="Trebuchet MS" pitchFamily="34" charset="-122"/>
                 <a:cs typeface="Trebuchet MS" pitchFamily="34" charset="-120"/>
               </a:rPr>
-              <a:t>JOIN multi-tables</a:t>
-            </a:r>
-            <a:endParaRPr lang="en-US" sz="3400" dirty="0"/>
+              <a:t>JOIN multitables</a:t>
+            </a:r>
+            <a:endParaRPr lang="en-US" sz="3200" dirty="0"/>
           </a:p>
         </p:txBody>
       </p:sp>
@@ -1539,7 +1717,7 @@
         </p:nvSpPr>
         <p:spPr>
           <a:xfrm>
-            <a:off x="457200" y="3108960"/>
+            <a:off x="457200" y="3017520"/>
             <a:ext cx="8229600" cy="457200"/>
           </a:xfrm>
           <a:prstGeom prst="rect">
@@ -1556,7 +1734,7 @@
               <a:buNone/>
             </a:pPr>
             <a:r>
-              <a:rPr lang="en-US" sz="1600" dirty="0">
+              <a:rPr lang="en-US" sz="1500" dirty="0">
                 <a:solidFill>
                   <a:srgbClr val="CCCCCC"/>
                 </a:solidFill>
@@ -1564,9 +1742,9 @@
                 <a:ea typeface="Calibri" pitchFamily="34" charset="-122"/>
                 <a:cs typeface="Calibri" pitchFamily="34" charset="-120"/>
               </a:rPr>
-              <a:t>INNER, LEFT, RIGHT, CROSS, réflexive</a:t>
-            </a:r>
-            <a:endParaRPr lang="en-US" sz="1600" dirty="0"/>
+              <a:t>INNER · LEFT · RIGHT · CROSS · Réflexive</a:t>
+            </a:r>
+            <a:endParaRPr lang="en-US" sz="1500" dirty="0"/>
           </a:p>
         </p:txBody>
       </p:sp>
@@ -1597,54 +1775,15 @@
             <a:r>
               <a:rPr lang="en-US" sz="1100" dirty="0">
                 <a:solidFill>
-                  <a:srgbClr val="AAAACC"/>
+                  <a:srgbClr val="AA99CC"/>
                 </a:solidFill>
                 <a:latin typeface="Calibri" pitchFamily="34" charset="0"/>
                 <a:ea typeface="Calibri" pitchFamily="34" charset="-122"/>
                 <a:cs typeface="Calibri" pitchFamily="34" charset="-120"/>
               </a:rPr>
-              <a:t>Unit 4 — Database Design &amp; Development | SwissSound Studios</a:t>
+              <a:t>SwissSound Studios | BTEC: P2 P3 M3 | LO2</a:t>
             </a:r>
             <a:endParaRPr lang="en-US" sz="1100" dirty="0"/>
-          </a:p>
-        </p:txBody>
-      </p:sp>
-      <p:sp>
-        <p:nvSpPr>
-          <p:cNvPr id="8" name="Text 5"/>
-          <p:cNvSpPr/>
-          <p:nvPr/>
-        </p:nvSpPr>
-        <p:spPr>
-          <a:xfrm>
-            <a:off x="457200" y="4434840"/>
-            <a:ext cx="8229600" cy="274320"/>
-          </a:xfrm>
-          <a:prstGeom prst="rect">
-            <a:avLst/>
-          </a:prstGeom>
-          <a:noFill/>
-          <a:ln/>
-        </p:spPr>
-        <p:txBody>
-          <a:bodyPr wrap="square" lIns="0" tIns="0" rIns="0" bIns="0" rtlCol="0" anchor="ctr"/>
-          <a:lstStyle/>
-          <a:p>
-            <a:pPr algn="ctr" indent="0" marL="0">
-              <a:buNone/>
-            </a:pPr>
-            <a:r>
-              <a:rPr lang="en-US" sz="1000" dirty="0">
-                <a:solidFill>
-                  <a:srgbClr val="8888AA"/>
-                </a:solidFill>
-                <a:latin typeface="Calibri" pitchFamily="34" charset="0"/>
-                <a:ea typeface="Calibri" pitchFamily="34" charset="-122"/>
-                <a:cs typeface="Calibri" pitchFamily="34" charset="-120"/>
-              </a:rPr>
-              <a:t>BTEC : P2 P3 M3 | LO2</a:t>
-            </a:r>
-            <a:endParaRPr lang="en-US" sz="1000" dirty="0"/>
           </a:p>
         </p:txBody>
       </p:sp>
@@ -1689,7 +1828,7 @@
         <p:spPr>
           <a:xfrm>
             <a:off x="0" y="0"/>
-            <a:ext cx="9144000" cy="73152"/>
+            <a:ext cx="9144000" cy="54864"/>
           </a:xfrm>
           <a:prstGeom prst="rect">
             <a:avLst/>
@@ -1708,8 +1847,8 @@
         </p:nvSpPr>
         <p:spPr>
           <a:xfrm>
-            <a:off x="457200" y="228600"/>
-            <a:ext cx="8229600" cy="640080"/>
+            <a:off x="457200" y="182880"/>
+            <a:ext cx="8229600" cy="594360"/>
           </a:xfrm>
           <a:prstGeom prst="rect">
             <a:avLst/>
@@ -1725,7 +1864,7 @@
               <a:buNone/>
             </a:pPr>
             <a:r>
-              <a:rPr lang="en-US" sz="2600" b="1" dirty="0">
+              <a:rPr lang="en-US" sz="2400" b="1" dirty="0">
                 <a:solidFill>
                   <a:srgbClr val="0D47A1"/>
                 </a:solidFill>
@@ -1733,9 +1872,9 @@
                 <a:ea typeface="Trebuchet MS" pitchFamily="34" charset="-122"/>
                 <a:cs typeface="Trebuchet MS" pitchFamily="34" charset="-120"/>
               </a:rPr>
-              <a:t>INNER JOIN : intersection</a:t>
-            </a:r>
-            <a:endParaRPr lang="en-US" sz="2600" dirty="0"/>
+              <a:t>Pourquoi les JOIN ?</a:t>
+            </a:r>
+            <a:endParaRPr lang="en-US" sz="2400" dirty="0"/>
           </a:p>
         </p:txBody>
       </p:sp>
@@ -1747,8 +1886,8 @@
         </p:nvSpPr>
         <p:spPr>
           <a:xfrm>
-            <a:off x="457200" y="1051560"/>
-            <a:ext cx="8229600" cy="640080"/>
+            <a:off x="457200" y="914400"/>
+            <a:ext cx="8229600" cy="521208"/>
           </a:xfrm>
           <a:prstGeom prst="rect">
             <a:avLst/>
@@ -1774,8 +1913,8 @@
         </p:nvSpPr>
         <p:spPr>
           <a:xfrm>
-            <a:off x="457200" y="1051560"/>
-            <a:ext cx="54864" cy="640080"/>
+            <a:off x="457200" y="914400"/>
+            <a:ext cx="45720" cy="521208"/>
           </a:xfrm>
           <a:prstGeom prst="rect">
             <a:avLst/>
@@ -1794,8 +1933,8 @@
         </p:nvSpPr>
         <p:spPr>
           <a:xfrm>
-            <a:off x="731520" y="1051560"/>
-            <a:ext cx="7772400" cy="640080"/>
+            <a:off x="685800" y="914400"/>
+            <a:ext cx="7818120" cy="521208"/>
           </a:xfrm>
           <a:prstGeom prst="rect">
             <a:avLst/>
@@ -1811,7 +1950,179 @@
               <a:buNone/>
             </a:pPr>
             <a:r>
-              <a:rPr lang="en-US" sz="1100" dirty="0">
+              <a:rPr lang="en-US" sz="1200" dirty="0">
+                <a:solidFill>
+                  <a:srgbClr val="1A1A2E"/>
+                </a:solidFill>
+                <a:latin typeface="Calibri" pitchFamily="34" charset="0"/>
+                <a:ea typeface="Calibri" pitchFamily="34" charset="-122"/>
+                <a:cs typeface="Calibri" pitchFamily="34" charset="-120"/>
+              </a:rPr>
+              <a:t>Les données sont réparties dans PLUSIEURS tables (normalisation)</a:t>
+            </a:r>
+            <a:endParaRPr lang="en-US" sz="1200" dirty="0"/>
+          </a:p>
+        </p:txBody>
+      </p:sp>
+      <p:sp>
+        <p:nvSpPr>
+          <p:cNvPr id="7" name="Shape 5"/>
+          <p:cNvSpPr/>
+          <p:nvPr/>
+        </p:nvSpPr>
+        <p:spPr>
+          <a:xfrm>
+            <a:off x="457200" y="1463040"/>
+            <a:ext cx="8229600" cy="521208"/>
+          </a:xfrm>
+          <a:prstGeom prst="rect">
+            <a:avLst/>
+          </a:prstGeom>
+          <a:solidFill>
+            <a:srgbClr val="E3F2FD"/>
+          </a:solidFill>
+          <a:ln/>
+          <a:effectLst>
+            <a:outerShdw sx="100000" sy="100000" kx="0" ky="0" algn="bl" rotWithShape="0" blurRad="50800" dist="25400" dir="8100000">
+              <a:srgbClr val="000000">
+                <a:alpha val="12000"/>
+              </a:srgbClr>
+            </a:outerShdw>
+          </a:effectLst>
+        </p:spPr>
+      </p:sp>
+      <p:sp>
+        <p:nvSpPr>
+          <p:cNvPr id="8" name="Shape 6"/>
+          <p:cNvSpPr/>
+          <p:nvPr/>
+        </p:nvSpPr>
+        <p:spPr>
+          <a:xfrm>
+            <a:off x="457200" y="1463040"/>
+            <a:ext cx="45720" cy="521208"/>
+          </a:xfrm>
+          <a:prstGeom prst="rect">
+            <a:avLst/>
+          </a:prstGeom>
+          <a:solidFill>
+            <a:srgbClr val="1565C0"/>
+          </a:solidFill>
+          <a:ln/>
+        </p:spPr>
+      </p:sp>
+      <p:sp>
+        <p:nvSpPr>
+          <p:cNvPr id="9" name="Text 7"/>
+          <p:cNvSpPr/>
+          <p:nvPr/>
+        </p:nvSpPr>
+        <p:spPr>
+          <a:xfrm>
+            <a:off x="685800" y="1463040"/>
+            <a:ext cx="7818120" cy="521208"/>
+          </a:xfrm>
+          <a:prstGeom prst="rect">
+            <a:avLst/>
+          </a:prstGeom>
+          <a:noFill/>
+          <a:ln/>
+        </p:spPr>
+        <p:txBody>
+          <a:bodyPr wrap="square" lIns="0" tIns="0" rIns="0" bIns="0" rtlCol="0" anchor="ctr"/>
+          <a:lstStyle/>
+          <a:p>
+            <a:pPr indent="0" marL="0">
+              <a:buNone/>
+            </a:pPr>
+            <a:r>
+              <a:rPr lang="en-US" sz="1200" dirty="0">
+                <a:solidFill>
+                  <a:srgbClr val="1A1A2E"/>
+                </a:solidFill>
+                <a:latin typeface="Calibri" pitchFamily="34" charset="0"/>
+                <a:ea typeface="Calibri" pitchFamily="34" charset="-122"/>
+                <a:cs typeface="Calibri" pitchFamily="34" charset="-120"/>
+              </a:rPr>
+              <a:t>Pour afficher 'nom artiste + titre album' → il faut JOINDRE artiste et album</a:t>
+            </a:r>
+            <a:endParaRPr lang="en-US" sz="1200" dirty="0"/>
+          </a:p>
+        </p:txBody>
+      </p:sp>
+      <p:sp>
+        <p:nvSpPr>
+          <p:cNvPr id="10" name="Shape 8"/>
+          <p:cNvSpPr/>
+          <p:nvPr/>
+        </p:nvSpPr>
+        <p:spPr>
+          <a:xfrm>
+            <a:off x="457200" y="2011680"/>
+            <a:ext cx="8229600" cy="521208"/>
+          </a:xfrm>
+          <a:prstGeom prst="rect">
+            <a:avLst/>
+          </a:prstGeom>
+          <a:solidFill>
+            <a:srgbClr val="FFFFFF"/>
+          </a:solidFill>
+          <a:ln/>
+          <a:effectLst>
+            <a:outerShdw sx="100000" sy="100000" kx="0" ky="0" algn="bl" rotWithShape="0" blurRad="50800" dist="25400" dir="8100000">
+              <a:srgbClr val="000000">
+                <a:alpha val="12000"/>
+              </a:srgbClr>
+            </a:outerShdw>
+          </a:effectLst>
+        </p:spPr>
+      </p:sp>
+      <p:sp>
+        <p:nvSpPr>
+          <p:cNvPr id="11" name="Shape 9"/>
+          <p:cNvSpPr/>
+          <p:nvPr/>
+        </p:nvSpPr>
+        <p:spPr>
+          <a:xfrm>
+            <a:off x="457200" y="2011680"/>
+            <a:ext cx="45720" cy="521208"/>
+          </a:xfrm>
+          <a:prstGeom prst="rect">
+            <a:avLst/>
+          </a:prstGeom>
+          <a:solidFill>
+            <a:srgbClr val="1565C0"/>
+          </a:solidFill>
+          <a:ln/>
+        </p:spPr>
+      </p:sp>
+      <p:sp>
+        <p:nvSpPr>
+          <p:cNvPr id="12" name="Text 10"/>
+          <p:cNvSpPr/>
+          <p:nvPr/>
+        </p:nvSpPr>
+        <p:spPr>
+          <a:xfrm>
+            <a:off x="685800" y="2011680"/>
+            <a:ext cx="7818120" cy="521208"/>
+          </a:xfrm>
+          <a:prstGeom prst="rect">
+            <a:avLst/>
+          </a:prstGeom>
+          <a:noFill/>
+          <a:ln/>
+        </p:spPr>
+        <p:txBody>
+          <a:bodyPr wrap="square" lIns="0" tIns="0" rIns="0" bIns="0" rtlCol="0" anchor="ctr"/>
+          <a:lstStyle/>
+          <a:p>
+            <a:pPr indent="0" marL="0">
+              <a:buNone/>
+            </a:pPr>
+            <a:r>
+              <a:rPr lang="en-US" sz="1000" dirty="0">
                 <a:solidFill>
                   <a:srgbClr val="0D47A1"/>
                 </a:solidFill>
@@ -1819,22 +2130,22 @@
                 <a:ea typeface="JetBrains Mono" pitchFamily="34" charset="-122"/>
                 <a:cs typeface="JetBrains Mono" pitchFamily="34" charset="-120"/>
               </a:rPr>
-              <a:t>SELECT a.nom, al.titre FROM artiste a</a:t>
-            </a:r>
-            <a:endParaRPr lang="en-US" sz="1100" dirty="0"/>
-          </a:p>
-        </p:txBody>
-      </p:sp>
-      <p:sp>
-        <p:nvSpPr>
-          <p:cNvPr id="7" name="Shape 5"/>
-          <p:cNvSpPr/>
-          <p:nvPr/>
-        </p:nvSpPr>
-        <p:spPr>
-          <a:xfrm>
-            <a:off x="457200" y="1783080"/>
-            <a:ext cx="8229600" cy="640080"/>
+              <a:t>JOIN = combiner les lignes de 2+ tables sur une condition de correspondance</a:t>
+            </a:r>
+            <a:endParaRPr lang="en-US" sz="1000" dirty="0"/>
+          </a:p>
+        </p:txBody>
+      </p:sp>
+      <p:sp>
+        <p:nvSpPr>
+          <p:cNvPr id="13" name="Shape 11"/>
+          <p:cNvSpPr/>
+          <p:nvPr/>
+        </p:nvSpPr>
+        <p:spPr>
+          <a:xfrm>
+            <a:off x="457200" y="2560320"/>
+            <a:ext cx="8229600" cy="521208"/>
           </a:xfrm>
           <a:prstGeom prst="rect">
             <a:avLst/>
@@ -1854,14 +2165,14 @@
       </p:sp>
       <p:sp>
         <p:nvSpPr>
-          <p:cNvPr id="8" name="Shape 6"/>
-          <p:cNvSpPr/>
-          <p:nvPr/>
-        </p:nvSpPr>
-        <p:spPr>
-          <a:xfrm>
-            <a:off x="457200" y="1783080"/>
-            <a:ext cx="54864" cy="640080"/>
+          <p:cNvPr id="14" name="Shape 12"/>
+          <p:cNvSpPr/>
+          <p:nvPr/>
+        </p:nvSpPr>
+        <p:spPr>
+          <a:xfrm>
+            <a:off x="457200" y="2560320"/>
+            <a:ext cx="45720" cy="521208"/>
           </a:xfrm>
           <a:prstGeom prst="rect">
             <a:avLst/>
@@ -1874,14 +2185,14 @@
       </p:sp>
       <p:sp>
         <p:nvSpPr>
-          <p:cNvPr id="9" name="Text 7"/>
-          <p:cNvSpPr/>
-          <p:nvPr/>
-        </p:nvSpPr>
-        <p:spPr>
-          <a:xfrm>
-            <a:off x="731520" y="1783080"/>
-            <a:ext cx="7772400" cy="640080"/>
+          <p:cNvPr id="15" name="Text 13"/>
+          <p:cNvSpPr/>
+          <p:nvPr/>
+        </p:nvSpPr>
+        <p:spPr>
+          <a:xfrm>
+            <a:off x="685800" y="2560320"/>
+            <a:ext cx="7818120" cy="521208"/>
           </a:xfrm>
           <a:prstGeom prst="rect">
             <a:avLst/>
@@ -1897,7 +2208,7 @@
               <a:buNone/>
             </a:pPr>
             <a:r>
-              <a:rPr lang="en-US" sz="1300" dirty="0">
+              <a:rPr lang="en-US" sz="1200" dirty="0">
                 <a:solidFill>
                   <a:srgbClr val="1A1A2E"/>
                 </a:solidFill>
@@ -1905,22 +2216,22 @@
                 <a:ea typeface="Calibri" pitchFamily="34" charset="-122"/>
                 <a:cs typeface="Calibri" pitchFamily="34" charset="-120"/>
               </a:rPr>
-              <a:t>INNER JOIN album al ON a.id_artiste = al.id_artiste;</a:t>
-            </a:r>
-            <a:endParaRPr lang="en-US" sz="1300" dirty="0"/>
-          </a:p>
-        </p:txBody>
-      </p:sp>
-      <p:sp>
-        <p:nvSpPr>
-          <p:cNvPr id="10" name="Shape 8"/>
-          <p:cNvSpPr/>
-          <p:nvPr/>
-        </p:nvSpPr>
-        <p:spPr>
-          <a:xfrm>
-            <a:off x="457200" y="2514600"/>
-            <a:ext cx="8229600" cy="640080"/>
+              <a:t>Sans JOIN, on ne peut afficher que les données d'UNE table à la fois</a:t>
+            </a:r>
+            <a:endParaRPr lang="en-US" sz="1200" dirty="0"/>
+          </a:p>
+        </p:txBody>
+      </p:sp>
+      <p:sp>
+        <p:nvSpPr>
+          <p:cNvPr id="16" name="Shape 14"/>
+          <p:cNvSpPr/>
+          <p:nvPr/>
+        </p:nvSpPr>
+        <p:spPr>
+          <a:xfrm>
+            <a:off x="457200" y="3108960"/>
+            <a:ext cx="8229600" cy="521208"/>
           </a:xfrm>
           <a:prstGeom prst="rect">
             <a:avLst/>
@@ -1940,14 +2251,14 @@
       </p:sp>
       <p:sp>
         <p:nvSpPr>
-          <p:cNvPr id="11" name="Shape 9"/>
-          <p:cNvSpPr/>
-          <p:nvPr/>
-        </p:nvSpPr>
-        <p:spPr>
-          <a:xfrm>
-            <a:off x="457200" y="2514600"/>
-            <a:ext cx="54864" cy="640080"/>
+          <p:cNvPr id="17" name="Shape 15"/>
+          <p:cNvSpPr/>
+          <p:nvPr/>
+        </p:nvSpPr>
+        <p:spPr>
+          <a:xfrm>
+            <a:off x="457200" y="3108960"/>
+            <a:ext cx="45720" cy="521208"/>
           </a:xfrm>
           <a:prstGeom prst="rect">
             <a:avLst/>
@@ -1960,14 +2271,14 @@
       </p:sp>
       <p:sp>
         <p:nvSpPr>
-          <p:cNvPr id="12" name="Text 10"/>
-          <p:cNvSpPr/>
-          <p:nvPr/>
-        </p:nvSpPr>
-        <p:spPr>
-          <a:xfrm>
-            <a:off x="731520" y="2514600"/>
-            <a:ext cx="7772400" cy="640080"/>
+          <p:cNvPr id="18" name="Text 16"/>
+          <p:cNvSpPr/>
+          <p:nvPr/>
+        </p:nvSpPr>
+        <p:spPr>
+          <a:xfrm>
+            <a:off x="685800" y="3108960"/>
+            <a:ext cx="7818120" cy="521208"/>
           </a:xfrm>
           <a:prstGeom prst="rect">
             <a:avLst/>
@@ -1983,7 +2294,7 @@
               <a:buNone/>
             </a:pPr>
             <a:r>
-              <a:rPr lang="en-US" sz="1300" dirty="0">
+              <a:rPr lang="en-US" sz="1200" dirty="0">
                 <a:solidFill>
                   <a:srgbClr val="1A1A2E"/>
                 </a:solidFill>
@@ -1991,22 +2302,22 @@
                 <a:ea typeface="Calibri" pitchFamily="34" charset="-122"/>
                 <a:cs typeface="Calibri" pitchFamily="34" charset="-120"/>
               </a:rPr>
-              <a:t>Retourne uniquement les lignes avec correspondance</a:t>
-            </a:r>
-            <a:endParaRPr lang="en-US" sz="1300" dirty="0"/>
-          </a:p>
-        </p:txBody>
-      </p:sp>
-      <p:sp>
-        <p:nvSpPr>
-          <p:cNvPr id="13" name="Shape 11"/>
-          <p:cNvSpPr/>
-          <p:nvPr/>
-        </p:nvSpPr>
-        <p:spPr>
-          <a:xfrm>
-            <a:off x="457200" y="3246120"/>
-            <a:ext cx="8229600" cy="640080"/>
+              <a:t>SwissSound : session a id_artiste, id_salle, id_ingenieur → 3 JOIN nécessaires</a:t>
+            </a:r>
+            <a:endParaRPr lang="en-US" sz="1200" dirty="0"/>
+          </a:p>
+        </p:txBody>
+      </p:sp>
+      <p:sp>
+        <p:nvSpPr>
+          <p:cNvPr id="19" name="Shape 17"/>
+          <p:cNvSpPr/>
+          <p:nvPr/>
+        </p:nvSpPr>
+        <p:spPr>
+          <a:xfrm>
+            <a:off x="457200" y="3657600"/>
+            <a:ext cx="8229600" cy="521208"/>
           </a:xfrm>
           <a:prstGeom prst="rect">
             <a:avLst/>
@@ -2026,14 +2337,14 @@
       </p:sp>
       <p:sp>
         <p:nvSpPr>
-          <p:cNvPr id="14" name="Shape 12"/>
-          <p:cNvSpPr/>
-          <p:nvPr/>
-        </p:nvSpPr>
-        <p:spPr>
-          <a:xfrm>
-            <a:off x="457200" y="3246120"/>
-            <a:ext cx="54864" cy="640080"/>
+          <p:cNvPr id="20" name="Shape 18"/>
+          <p:cNvSpPr/>
+          <p:nvPr/>
+        </p:nvSpPr>
+        <p:spPr>
+          <a:xfrm>
+            <a:off x="457200" y="3657600"/>
+            <a:ext cx="45720" cy="521208"/>
           </a:xfrm>
           <a:prstGeom prst="rect">
             <a:avLst/>
@@ -2046,14 +2357,14 @@
       </p:sp>
       <p:sp>
         <p:nvSpPr>
-          <p:cNvPr id="15" name="Text 13"/>
-          <p:cNvSpPr/>
-          <p:nvPr/>
-        </p:nvSpPr>
-        <p:spPr>
-          <a:xfrm>
-            <a:off x="731520" y="3246120"/>
-            <a:ext cx="7772400" cy="640080"/>
+          <p:cNvPr id="21" name="Text 19"/>
+          <p:cNvSpPr/>
+          <p:nvPr/>
+        </p:nvSpPr>
+        <p:spPr>
+          <a:xfrm>
+            <a:off x="685800" y="3657600"/>
+            <a:ext cx="7818120" cy="521208"/>
           </a:xfrm>
           <a:prstGeom prst="rect">
             <a:avLst/>
@@ -2069,93 +2380,7 @@
               <a:buNone/>
             </a:pPr>
             <a:r>
-              <a:rPr lang="en-US" sz="1100" dirty="0">
-                <a:solidFill>
-                  <a:srgbClr val="0D47A1"/>
-                </a:solidFill>
-                <a:latin typeface="JetBrains Mono" pitchFamily="34" charset="0"/>
-                <a:ea typeface="JetBrains Mono" pitchFamily="34" charset="-122"/>
-                <a:cs typeface="JetBrains Mono" pitchFamily="34" charset="-120"/>
-              </a:rPr>
-              <a:t>Artistes SANS album → exclus du résultat</a:t>
-            </a:r>
-            <a:endParaRPr lang="en-US" sz="1100" dirty="0"/>
-          </a:p>
-        </p:txBody>
-      </p:sp>
-      <p:sp>
-        <p:nvSpPr>
-          <p:cNvPr id="16" name="Shape 14"/>
-          <p:cNvSpPr/>
-          <p:nvPr/>
-        </p:nvSpPr>
-        <p:spPr>
-          <a:xfrm>
-            <a:off x="457200" y="3977640"/>
-            <a:ext cx="8229600" cy="640080"/>
-          </a:xfrm>
-          <a:prstGeom prst="rect">
-            <a:avLst/>
-          </a:prstGeom>
-          <a:solidFill>
-            <a:srgbClr val="FFFFFF"/>
-          </a:solidFill>
-          <a:ln/>
-          <a:effectLst>
-            <a:outerShdw sx="100000" sy="100000" kx="0" ky="0" algn="bl" rotWithShape="0" blurRad="50800" dist="25400" dir="8100000">
-              <a:srgbClr val="000000">
-                <a:alpha val="12000"/>
-              </a:srgbClr>
-            </a:outerShdw>
-          </a:effectLst>
-        </p:spPr>
-      </p:sp>
-      <p:sp>
-        <p:nvSpPr>
-          <p:cNvPr id="17" name="Shape 15"/>
-          <p:cNvSpPr/>
-          <p:nvPr/>
-        </p:nvSpPr>
-        <p:spPr>
-          <a:xfrm>
-            <a:off x="457200" y="3977640"/>
-            <a:ext cx="54864" cy="640080"/>
-          </a:xfrm>
-          <a:prstGeom prst="rect">
-            <a:avLst/>
-          </a:prstGeom>
-          <a:solidFill>
-            <a:srgbClr val="1565C0"/>
-          </a:solidFill>
-          <a:ln/>
-        </p:spPr>
-      </p:sp>
-      <p:sp>
-        <p:nvSpPr>
-          <p:cNvPr id="18" name="Text 16"/>
-          <p:cNvSpPr/>
-          <p:nvPr/>
-        </p:nvSpPr>
-        <p:spPr>
-          <a:xfrm>
-            <a:off x="731520" y="3977640"/>
-            <a:ext cx="7772400" cy="640080"/>
-          </a:xfrm>
-          <a:prstGeom prst="rect">
-            <a:avLst/>
-          </a:prstGeom>
-          <a:noFill/>
-          <a:ln/>
-        </p:spPr>
-        <p:txBody>
-          <a:bodyPr wrap="square" lIns="0" tIns="0" rIns="0" bIns="0" rtlCol="0" anchor="ctr"/>
-          <a:lstStyle/>
-          <a:p>
-            <a:pPr indent="0" marL="0">
-              <a:buNone/>
-            </a:pPr>
-            <a:r>
-              <a:rPr lang="en-US" sz="1300" dirty="0">
+              <a:rPr lang="en-US" sz="1200" dirty="0">
                 <a:solidFill>
                   <a:srgbClr val="1A1A2E"/>
                 </a:solidFill>
@@ -2163,48 +2388,9 @@
                 <a:ea typeface="Calibri" pitchFamily="34" charset="-122"/>
                 <a:cs typeface="Calibri" pitchFamily="34" charset="-120"/>
               </a:rPr>
-              <a:t>Le JOIN le plus courant et le plus utilisé</a:t>
-            </a:r>
-            <a:endParaRPr lang="en-US" sz="1300" dirty="0"/>
-          </a:p>
-        </p:txBody>
-      </p:sp>
-      <p:sp>
-        <p:nvSpPr>
-          <p:cNvPr id="19" name="Text 17"/>
-          <p:cNvSpPr/>
-          <p:nvPr/>
-        </p:nvSpPr>
-        <p:spPr>
-          <a:xfrm>
-            <a:off x="8229600" y="4754880"/>
-            <a:ext cx="731520" cy="274320"/>
-          </a:xfrm>
-          <a:prstGeom prst="rect">
-            <a:avLst/>
-          </a:prstGeom>
-          <a:noFill/>
-          <a:ln/>
-        </p:spPr>
-        <p:txBody>
-          <a:bodyPr wrap="square" lIns="0" tIns="0" rIns="0" bIns="0" rtlCol="0" anchor="ctr"/>
-          <a:lstStyle/>
-          <a:p>
-            <a:pPr algn="r" indent="0" marL="0">
-              <a:buNone/>
-            </a:pPr>
-            <a:r>
-              <a:rPr lang="en-US" sz="900" dirty="0">
-                <a:solidFill>
-                  <a:srgbClr val="AAAAAA"/>
-                </a:solidFill>
-                <a:latin typeface="Calibri" pitchFamily="34" charset="0"/>
-                <a:ea typeface="Calibri" pitchFamily="34" charset="-122"/>
-                <a:cs typeface="Calibri" pitchFamily="34" charset="-120"/>
-              </a:rPr>
-              <a:t>2/6</a:t>
-            </a:r>
-            <a:endParaRPr lang="en-US" sz="900" dirty="0"/>
+              <a:t>Les JOIN sont la compétence SQL LA PLUS IMPORTANTE pour P2 et P3</a:t>
+            </a:r>
+            <a:endParaRPr lang="en-US" sz="1200" dirty="0"/>
           </a:p>
         </p:txBody>
       </p:sp>
@@ -2249,7 +2435,7 @@
         <p:spPr>
           <a:xfrm>
             <a:off x="0" y="0"/>
-            <a:ext cx="9144000" cy="73152"/>
+            <a:ext cx="9144000" cy="54864"/>
           </a:xfrm>
           <a:prstGeom prst="rect">
             <a:avLst/>
@@ -2268,8 +2454,8 @@
         </p:nvSpPr>
         <p:spPr>
           <a:xfrm>
-            <a:off x="457200" y="228600"/>
-            <a:ext cx="8229600" cy="640080"/>
+            <a:off x="457200" y="182880"/>
+            <a:ext cx="8229600" cy="594360"/>
           </a:xfrm>
           <a:prstGeom prst="rect">
             <a:avLst/>
@@ -2285,7 +2471,7 @@
               <a:buNone/>
             </a:pPr>
             <a:r>
-              <a:rPr lang="en-US" sz="2600" b="1" dirty="0">
+              <a:rPr lang="en-US" sz="2400" b="1" dirty="0">
                 <a:solidFill>
                   <a:srgbClr val="0D47A1"/>
                 </a:solidFill>
@@ -2293,9 +2479,9 @@
                 <a:ea typeface="Trebuchet MS" pitchFamily="34" charset="-122"/>
                 <a:cs typeface="Trebuchet MS" pitchFamily="34" charset="-120"/>
               </a:rPr>
-              <a:t>LEFT JOIN : tout à gauche</a:t>
-            </a:r>
-            <a:endParaRPr lang="en-US" sz="2600" dirty="0"/>
+              <a:t>INNER JOIN : l'intersection</a:t>
+            </a:r>
+            <a:endParaRPr lang="en-US" sz="2400" dirty="0"/>
           </a:p>
         </p:txBody>
       </p:sp>
@@ -2307,8 +2493,8 @@
         </p:nvSpPr>
         <p:spPr>
           <a:xfrm>
-            <a:off x="457200" y="1051560"/>
-            <a:ext cx="8229600" cy="640080"/>
+            <a:off x="457200" y="914400"/>
+            <a:ext cx="8229600" cy="521208"/>
           </a:xfrm>
           <a:prstGeom prst="rect">
             <a:avLst/>
@@ -2334,8 +2520,8 @@
         </p:nvSpPr>
         <p:spPr>
           <a:xfrm>
-            <a:off x="457200" y="1051560"/>
-            <a:ext cx="54864" cy="640080"/>
+            <a:off x="457200" y="914400"/>
+            <a:ext cx="45720" cy="521208"/>
           </a:xfrm>
           <a:prstGeom prst="rect">
             <a:avLst/>
@@ -2354,8 +2540,8 @@
         </p:nvSpPr>
         <p:spPr>
           <a:xfrm>
-            <a:off x="731520" y="1051560"/>
-            <a:ext cx="7772400" cy="640080"/>
+            <a:off x="685800" y="914400"/>
+            <a:ext cx="7818120" cy="521208"/>
           </a:xfrm>
           <a:prstGeom prst="rect">
             <a:avLst/>
@@ -2371,7 +2557,7 @@
               <a:buNone/>
             </a:pPr>
             <a:r>
-              <a:rPr lang="en-US" sz="1100" dirty="0">
+              <a:rPr lang="en-US" sz="1000" dirty="0">
                 <a:solidFill>
                   <a:srgbClr val="0D47A1"/>
                 </a:solidFill>
@@ -2381,7 +2567,7 @@
               </a:rPr>
               <a:t>SELECT a.nom, al.titre FROM artiste a</a:t>
             </a:r>
-            <a:endParaRPr lang="en-US" sz="1100" dirty="0"/>
+            <a:endParaRPr lang="en-US" sz="1000" dirty="0"/>
           </a:p>
         </p:txBody>
       </p:sp>
@@ -2393,8 +2579,8 @@
         </p:nvSpPr>
         <p:spPr>
           <a:xfrm>
-            <a:off x="457200" y="1783080"/>
-            <a:ext cx="8229600" cy="640080"/>
+            <a:off x="457200" y="1463040"/>
+            <a:ext cx="8229600" cy="521208"/>
           </a:xfrm>
           <a:prstGeom prst="rect">
             <a:avLst/>
@@ -2420,8 +2606,8 @@
         </p:nvSpPr>
         <p:spPr>
           <a:xfrm>
-            <a:off x="457200" y="1783080"/>
-            <a:ext cx="54864" cy="640080"/>
+            <a:off x="457200" y="1463040"/>
+            <a:ext cx="45720" cy="521208"/>
           </a:xfrm>
           <a:prstGeom prst="rect">
             <a:avLst/>
@@ -2440,8 +2626,8 @@
         </p:nvSpPr>
         <p:spPr>
           <a:xfrm>
-            <a:off x="731520" y="1783080"/>
-            <a:ext cx="7772400" cy="640080"/>
+            <a:off x="685800" y="1463040"/>
+            <a:ext cx="7818120" cy="521208"/>
           </a:xfrm>
           <a:prstGeom prst="rect">
             <a:avLst/>
@@ -2457,7 +2643,7 @@
               <a:buNone/>
             </a:pPr>
             <a:r>
-              <a:rPr lang="en-US" sz="1300" dirty="0">
+              <a:rPr lang="en-US" sz="1200" dirty="0">
                 <a:solidFill>
                   <a:srgbClr val="1A1A2E"/>
                 </a:solidFill>
@@ -2465,9 +2651,9 @@
                 <a:ea typeface="Calibri" pitchFamily="34" charset="-122"/>
                 <a:cs typeface="Calibri" pitchFamily="34" charset="-120"/>
               </a:rPr>
-              <a:t>LEFT JOIN album al ON a.id_artiste = al.id_artiste;</a:t>
-            </a:r>
-            <a:endParaRPr lang="en-US" sz="1300" dirty="0"/>
+              <a:t>INNER JOIN album al ON a.id_artiste = al.id_artiste;</a:t>
+            </a:r>
+            <a:endParaRPr lang="en-US" sz="1200" dirty="0"/>
           </a:p>
         </p:txBody>
       </p:sp>
@@ -2479,8 +2665,8 @@
         </p:nvSpPr>
         <p:spPr>
           <a:xfrm>
-            <a:off x="457200" y="2514600"/>
-            <a:ext cx="8229600" cy="640080"/>
+            <a:off x="457200" y="2011680"/>
+            <a:ext cx="8229600" cy="521208"/>
           </a:xfrm>
           <a:prstGeom prst="rect">
             <a:avLst/>
@@ -2506,8 +2692,8 @@
         </p:nvSpPr>
         <p:spPr>
           <a:xfrm>
-            <a:off x="457200" y="2514600"/>
-            <a:ext cx="54864" cy="640080"/>
+            <a:off x="457200" y="2011680"/>
+            <a:ext cx="45720" cy="521208"/>
           </a:xfrm>
           <a:prstGeom prst="rect">
             <a:avLst/>
@@ -2526,8 +2712,8 @@
         </p:nvSpPr>
         <p:spPr>
           <a:xfrm>
-            <a:off x="731520" y="2514600"/>
-            <a:ext cx="7772400" cy="640080"/>
+            <a:off x="685800" y="2011680"/>
+            <a:ext cx="7818120" cy="521208"/>
           </a:xfrm>
           <a:prstGeom prst="rect">
             <a:avLst/>
@@ -2543,7 +2729,7 @@
               <a:buNone/>
             </a:pPr>
             <a:r>
-              <a:rPr lang="en-US" sz="1300" dirty="0">
+              <a:rPr lang="en-US" sz="1200" dirty="0">
                 <a:solidFill>
                   <a:srgbClr val="1A1A2E"/>
                 </a:solidFill>
@@ -2551,9 +2737,9 @@
                 <a:ea typeface="Calibri" pitchFamily="34" charset="-122"/>
                 <a:cs typeface="Calibri" pitchFamily="34" charset="-120"/>
               </a:rPr>
-              <a:t>Retourne TOUS les artistes, même sans album</a:t>
-            </a:r>
-            <a:endParaRPr lang="en-US" sz="1300" dirty="0"/>
+              <a:t>Retourne UNIQUEMENT les lignes avec correspondance dans les 2 tables</a:t>
+            </a:r>
+            <a:endParaRPr lang="en-US" sz="1200" dirty="0"/>
           </a:p>
         </p:txBody>
       </p:sp>
@@ -2565,8 +2751,8 @@
         </p:nvSpPr>
         <p:spPr>
           <a:xfrm>
-            <a:off x="457200" y="3246120"/>
-            <a:ext cx="8229600" cy="640080"/>
+            <a:off x="457200" y="2560320"/>
+            <a:ext cx="8229600" cy="521208"/>
           </a:xfrm>
           <a:prstGeom prst="rect">
             <a:avLst/>
@@ -2592,8 +2778,8 @@
         </p:nvSpPr>
         <p:spPr>
           <a:xfrm>
-            <a:off x="457200" y="3246120"/>
-            <a:ext cx="54864" cy="640080"/>
+            <a:off x="457200" y="2560320"/>
+            <a:ext cx="45720" cy="521208"/>
           </a:xfrm>
           <a:prstGeom prst="rect">
             <a:avLst/>
@@ -2612,8 +2798,8 @@
         </p:nvSpPr>
         <p:spPr>
           <a:xfrm>
-            <a:off x="731520" y="3246120"/>
-            <a:ext cx="7772400" cy="640080"/>
+            <a:off x="685800" y="2560320"/>
+            <a:ext cx="7818120" cy="521208"/>
           </a:xfrm>
           <a:prstGeom prst="rect">
             <a:avLst/>
@@ -2629,7 +2815,7 @@
               <a:buNone/>
             </a:pPr>
             <a:r>
-              <a:rPr lang="en-US" sz="1300" dirty="0">
+              <a:rPr lang="en-US" sz="1200" dirty="0">
                 <a:solidFill>
                   <a:srgbClr val="1A1A2E"/>
                 </a:solidFill>
@@ -2637,9 +2823,9 @@
                 <a:ea typeface="Calibri" pitchFamily="34" charset="-122"/>
                 <a:cs typeface="Calibri" pitchFamily="34" charset="-120"/>
               </a:rPr>
-              <a:t>Colonnes album = NULL si pas de correspondance</a:t>
-            </a:r>
-            <a:endParaRPr lang="en-US" sz="1300" dirty="0"/>
+              <a:t>Artiste sans album → EXCLU du résultat</a:t>
+            </a:r>
+            <a:endParaRPr lang="en-US" sz="1200" dirty="0"/>
           </a:p>
         </p:txBody>
       </p:sp>
@@ -2651,8 +2837,8 @@
         </p:nvSpPr>
         <p:spPr>
           <a:xfrm>
-            <a:off x="457200" y="3977640"/>
-            <a:ext cx="8229600" cy="640080"/>
+            <a:off x="457200" y="3108960"/>
+            <a:ext cx="8229600" cy="521208"/>
           </a:xfrm>
           <a:prstGeom prst="rect">
             <a:avLst/>
@@ -2678,8 +2864,8 @@
         </p:nvSpPr>
         <p:spPr>
           <a:xfrm>
-            <a:off x="457200" y="3977640"/>
-            <a:ext cx="54864" cy="640080"/>
+            <a:off x="457200" y="3108960"/>
+            <a:ext cx="45720" cy="521208"/>
           </a:xfrm>
           <a:prstGeom prst="rect">
             <a:avLst/>
@@ -2698,8 +2884,8 @@
         </p:nvSpPr>
         <p:spPr>
           <a:xfrm>
-            <a:off x="731520" y="3977640"/>
-            <a:ext cx="7772400" cy="640080"/>
+            <a:off x="685800" y="3108960"/>
+            <a:ext cx="7818120" cy="521208"/>
           </a:xfrm>
           <a:prstGeom prst="rect">
             <a:avLst/>
@@ -2715,56 +2901,189 @@
               <a:buNone/>
             </a:pPr>
             <a:r>
-              <a:rPr lang="en-US" sz="1100" dirty="0">
+              <a:rPr lang="en-US" sz="1200" dirty="0">
                 <a:solidFill>
-                  <a:srgbClr val="0D47A1"/>
-                </a:solidFill>
-                <a:latin typeface="JetBrains Mono" pitchFamily="34" charset="0"/>
-                <a:ea typeface="JetBrains Mono" pitchFamily="34" charset="-122"/>
-                <a:cs typeface="JetBrains Mono" pitchFamily="34" charset="-120"/>
-              </a:rPr>
-              <a:t>Astuce : WHERE al.id IS NULL → artistes SANS album</a:t>
-            </a:r>
-            <a:endParaRPr lang="en-US" sz="1100" dirty="0"/>
-          </a:p>
-        </p:txBody>
-      </p:sp>
-      <p:sp>
-        <p:nvSpPr>
-          <p:cNvPr id="19" name="Text 17"/>
-          <p:cNvSpPr/>
-          <p:nvPr/>
-        </p:nvSpPr>
-        <p:spPr>
-          <a:xfrm>
-            <a:off x="8229600" y="4754880"/>
-            <a:ext cx="731520" cy="274320"/>
-          </a:xfrm>
-          <a:prstGeom prst="rect">
-            <a:avLst/>
-          </a:prstGeom>
-          <a:noFill/>
-          <a:ln/>
-        </p:spPr>
-        <p:txBody>
-          <a:bodyPr wrap="square" lIns="0" tIns="0" rIns="0" bIns="0" rtlCol="0" anchor="ctr"/>
-          <a:lstStyle/>
-          <a:p>
-            <a:pPr algn="r" indent="0" marL="0">
-              <a:buNone/>
-            </a:pPr>
-            <a:r>
-              <a:rPr lang="en-US" sz="900" dirty="0">
-                <a:solidFill>
-                  <a:srgbClr val="AAAAAA"/>
+                  <a:srgbClr val="1A1A2E"/>
                 </a:solidFill>
                 <a:latin typeface="Calibri" pitchFamily="34" charset="0"/>
                 <a:ea typeface="Calibri" pitchFamily="34" charset="-122"/>
                 <a:cs typeface="Calibri" pitchFamily="34" charset="-120"/>
               </a:rPr>
-              <a:t>3/6</a:t>
-            </a:r>
-            <a:endParaRPr lang="en-US" sz="900" dirty="0"/>
+              <a:t>Album sans artiste → EXCLU (impossible grâce à la FK NOT NULL)</a:t>
+            </a:r>
+            <a:endParaRPr lang="en-US" sz="1200" dirty="0"/>
+          </a:p>
+        </p:txBody>
+      </p:sp>
+      <p:sp>
+        <p:nvSpPr>
+          <p:cNvPr id="19" name="Shape 17"/>
+          <p:cNvSpPr/>
+          <p:nvPr/>
+        </p:nvSpPr>
+        <p:spPr>
+          <a:xfrm>
+            <a:off x="457200" y="3657600"/>
+            <a:ext cx="8229600" cy="521208"/>
+          </a:xfrm>
+          <a:prstGeom prst="rect">
+            <a:avLst/>
+          </a:prstGeom>
+          <a:solidFill>
+            <a:srgbClr val="E3F2FD"/>
+          </a:solidFill>
+          <a:ln/>
+          <a:effectLst>
+            <a:outerShdw sx="100000" sy="100000" kx="0" ky="0" algn="bl" rotWithShape="0" blurRad="50800" dist="25400" dir="8100000">
+              <a:srgbClr val="000000">
+                <a:alpha val="12000"/>
+              </a:srgbClr>
+            </a:outerShdw>
+          </a:effectLst>
+        </p:spPr>
+      </p:sp>
+      <p:sp>
+        <p:nvSpPr>
+          <p:cNvPr id="20" name="Shape 18"/>
+          <p:cNvSpPr/>
+          <p:nvPr/>
+        </p:nvSpPr>
+        <p:spPr>
+          <a:xfrm>
+            <a:off x="457200" y="3657600"/>
+            <a:ext cx="45720" cy="521208"/>
+          </a:xfrm>
+          <a:prstGeom prst="rect">
+            <a:avLst/>
+          </a:prstGeom>
+          <a:solidFill>
+            <a:srgbClr val="1565C0"/>
+          </a:solidFill>
+          <a:ln/>
+        </p:spPr>
+      </p:sp>
+      <p:sp>
+        <p:nvSpPr>
+          <p:cNvPr id="21" name="Text 19"/>
+          <p:cNvSpPr/>
+          <p:nvPr/>
+        </p:nvSpPr>
+        <p:spPr>
+          <a:xfrm>
+            <a:off x="685800" y="3657600"/>
+            <a:ext cx="7818120" cy="521208"/>
+          </a:xfrm>
+          <a:prstGeom prst="rect">
+            <a:avLst/>
+          </a:prstGeom>
+          <a:noFill/>
+          <a:ln/>
+        </p:spPr>
+        <p:txBody>
+          <a:bodyPr wrap="square" lIns="0" tIns="0" rIns="0" bIns="0" rtlCol="0" anchor="ctr"/>
+          <a:lstStyle/>
+          <a:p>
+            <a:pPr indent="0" marL="0">
+              <a:buNone/>
+            </a:pPr>
+            <a:r>
+              <a:rPr lang="en-US" sz="1200" dirty="0">
+                <a:solidFill>
+                  <a:srgbClr val="1A1A2E"/>
+                </a:solidFill>
+                <a:latin typeface="Calibri" pitchFamily="34" charset="0"/>
+                <a:ea typeface="Calibri" pitchFamily="34" charset="-122"/>
+                <a:cs typeface="Calibri" pitchFamily="34" charset="-120"/>
+              </a:rPr>
+              <a:t>C'est le JOIN par défaut (JOIN = INNER JOIN)</a:t>
+            </a:r>
+            <a:endParaRPr lang="en-US" sz="1200" dirty="0"/>
+          </a:p>
+        </p:txBody>
+      </p:sp>
+      <p:sp>
+        <p:nvSpPr>
+          <p:cNvPr id="22" name="Shape 20"/>
+          <p:cNvSpPr/>
+          <p:nvPr/>
+        </p:nvSpPr>
+        <p:spPr>
+          <a:xfrm>
+            <a:off x="457200" y="4206240"/>
+            <a:ext cx="8229600" cy="521208"/>
+          </a:xfrm>
+          <a:prstGeom prst="rect">
+            <a:avLst/>
+          </a:prstGeom>
+          <a:solidFill>
+            <a:srgbClr val="FFFFFF"/>
+          </a:solidFill>
+          <a:ln/>
+          <a:effectLst>
+            <a:outerShdw sx="100000" sy="100000" kx="0" ky="0" algn="bl" rotWithShape="0" blurRad="50800" dist="25400" dir="8100000">
+              <a:srgbClr val="000000">
+                <a:alpha val="12000"/>
+              </a:srgbClr>
+            </a:outerShdw>
+          </a:effectLst>
+        </p:spPr>
+      </p:sp>
+      <p:sp>
+        <p:nvSpPr>
+          <p:cNvPr id="23" name="Shape 21"/>
+          <p:cNvSpPr/>
+          <p:nvPr/>
+        </p:nvSpPr>
+        <p:spPr>
+          <a:xfrm>
+            <a:off x="457200" y="4206240"/>
+            <a:ext cx="45720" cy="521208"/>
+          </a:xfrm>
+          <a:prstGeom prst="rect">
+            <a:avLst/>
+          </a:prstGeom>
+          <a:solidFill>
+            <a:srgbClr val="1565C0"/>
+          </a:solidFill>
+          <a:ln/>
+        </p:spPr>
+      </p:sp>
+      <p:sp>
+        <p:nvSpPr>
+          <p:cNvPr id="24" name="Text 22"/>
+          <p:cNvSpPr/>
+          <p:nvPr/>
+        </p:nvSpPr>
+        <p:spPr>
+          <a:xfrm>
+            <a:off x="685800" y="4206240"/>
+            <a:ext cx="7818120" cy="521208"/>
+          </a:xfrm>
+          <a:prstGeom prst="rect">
+            <a:avLst/>
+          </a:prstGeom>
+          <a:noFill/>
+          <a:ln/>
+        </p:spPr>
+        <p:txBody>
+          <a:bodyPr wrap="square" lIns="0" tIns="0" rIns="0" bIns="0" rtlCol="0" anchor="ctr"/>
+          <a:lstStyle/>
+          <a:p>
+            <a:pPr indent="0" marL="0">
+              <a:buNone/>
+            </a:pPr>
+            <a:r>
+              <a:rPr lang="en-US" sz="1200" dirty="0">
+                <a:solidFill>
+                  <a:srgbClr val="1A1A2E"/>
+                </a:solidFill>
+                <a:latin typeface="Calibri" pitchFamily="34" charset="0"/>
+                <a:ea typeface="Calibri" pitchFamily="34" charset="-122"/>
+                <a:cs typeface="Calibri" pitchFamily="34" charset="-120"/>
+              </a:rPr>
+              <a:t>Le plus utilisé : ~80% des cas</a:t>
+            </a:r>
+            <a:endParaRPr lang="en-US" sz="1200" dirty="0"/>
           </a:p>
         </p:txBody>
       </p:sp>
@@ -2809,7 +3128,7 @@
         <p:spPr>
           <a:xfrm>
             <a:off x="0" y="0"/>
-            <a:ext cx="9144000" cy="73152"/>
+            <a:ext cx="9144000" cy="54864"/>
           </a:xfrm>
           <a:prstGeom prst="rect">
             <a:avLst/>
@@ -2828,8 +3147,8 @@
         </p:nvSpPr>
         <p:spPr>
           <a:xfrm>
-            <a:off x="457200" y="228600"/>
-            <a:ext cx="8229600" cy="640080"/>
+            <a:off x="457200" y="182880"/>
+            <a:ext cx="8229600" cy="594360"/>
           </a:xfrm>
           <a:prstGeom prst="rect">
             <a:avLst/>
@@ -2845,7 +3164,7 @@
               <a:buNone/>
             </a:pPr>
             <a:r>
-              <a:rPr lang="en-US" sz="2600" b="1" dirty="0">
+              <a:rPr lang="en-US" sz="2400" b="1" dirty="0">
                 <a:solidFill>
                   <a:srgbClr val="0D47A1"/>
                 </a:solidFill>
@@ -2853,9 +3172,9 @@
                 <a:ea typeface="Trebuchet MS" pitchFamily="34" charset="-122"/>
                 <a:cs typeface="Trebuchet MS" pitchFamily="34" charset="-120"/>
               </a:rPr>
-              <a:t>Jointures 3+ tables</a:t>
-            </a:r>
-            <a:endParaRPr lang="en-US" sz="2600" dirty="0"/>
+              <a:t>LEFT JOIN : tout à gauche</a:t>
+            </a:r>
+            <a:endParaRPr lang="en-US" sz="2400" dirty="0"/>
           </a:p>
         </p:txBody>
       </p:sp>
@@ -2867,8 +3186,8 @@
         </p:nvSpPr>
         <p:spPr>
           <a:xfrm>
-            <a:off x="457200" y="1051560"/>
-            <a:ext cx="8229600" cy="579120"/>
+            <a:off x="457200" y="914400"/>
+            <a:ext cx="8229600" cy="521208"/>
           </a:xfrm>
           <a:prstGeom prst="rect">
             <a:avLst/>
@@ -2894,8 +3213,8 @@
         </p:nvSpPr>
         <p:spPr>
           <a:xfrm>
-            <a:off x="457200" y="1051560"/>
-            <a:ext cx="54864" cy="579120"/>
+            <a:off x="457200" y="914400"/>
+            <a:ext cx="45720" cy="521208"/>
           </a:xfrm>
           <a:prstGeom prst="rect">
             <a:avLst/>
@@ -2914,8 +3233,8 @@
         </p:nvSpPr>
         <p:spPr>
           <a:xfrm>
-            <a:off x="731520" y="1051560"/>
-            <a:ext cx="7772400" cy="579120"/>
+            <a:off x="685800" y="914400"/>
+            <a:ext cx="7818120" cy="521208"/>
           </a:xfrm>
           <a:prstGeom prst="rect">
             <a:avLst/>
@@ -2931,7 +3250,7 @@
               <a:buNone/>
             </a:pPr>
             <a:r>
-              <a:rPr lang="en-US" sz="1100" dirty="0">
+              <a:rPr lang="en-US" sz="1000" dirty="0">
                 <a:solidFill>
                   <a:srgbClr val="0D47A1"/>
                 </a:solidFill>
@@ -2939,9 +3258,9 @@
                 <a:ea typeface="JetBrains Mono" pitchFamily="34" charset="-122"/>
                 <a:cs typeface="JetBrains Mono" pitchFamily="34" charset="-120"/>
               </a:rPr>
-              <a:t>SELECT se.date_session, a.nom, s.nom AS salle, i.nom AS ingenieur</a:t>
-            </a:r>
-            <a:endParaRPr lang="en-US" sz="1100" dirty="0"/>
+              <a:t>SELECT a.nom, al.titre FROM artiste a</a:t>
+            </a:r>
+            <a:endParaRPr lang="en-US" sz="1000" dirty="0"/>
           </a:p>
         </p:txBody>
       </p:sp>
@@ -2953,8 +3272,8 @@
         </p:nvSpPr>
         <p:spPr>
           <a:xfrm>
-            <a:off x="457200" y="1661160"/>
-            <a:ext cx="8229600" cy="579120"/>
+            <a:off x="457200" y="1463040"/>
+            <a:ext cx="8229600" cy="521208"/>
           </a:xfrm>
           <a:prstGeom prst="rect">
             <a:avLst/>
@@ -2980,8 +3299,8 @@
         </p:nvSpPr>
         <p:spPr>
           <a:xfrm>
-            <a:off x="457200" y="1661160"/>
-            <a:ext cx="54864" cy="579120"/>
+            <a:off x="457200" y="1463040"/>
+            <a:ext cx="45720" cy="521208"/>
           </a:xfrm>
           <a:prstGeom prst="rect">
             <a:avLst/>
@@ -3000,8 +3319,8 @@
         </p:nvSpPr>
         <p:spPr>
           <a:xfrm>
-            <a:off x="731520" y="1661160"/>
-            <a:ext cx="7772400" cy="579120"/>
+            <a:off x="685800" y="1463040"/>
+            <a:ext cx="7818120" cy="521208"/>
           </a:xfrm>
           <a:prstGeom prst="rect">
             <a:avLst/>
@@ -3017,7 +3336,7 @@
               <a:buNone/>
             </a:pPr>
             <a:r>
-              <a:rPr lang="en-US" sz="1300" dirty="0">
+              <a:rPr lang="en-US" sz="1200" dirty="0">
                 <a:solidFill>
                   <a:srgbClr val="1A1A2E"/>
                 </a:solidFill>
@@ -3025,9 +3344,9 @@
                 <a:ea typeface="Calibri" pitchFamily="34" charset="-122"/>
                 <a:cs typeface="Calibri" pitchFamily="34" charset="-120"/>
               </a:rPr>
-              <a:t>FROM session_enregistrement se</a:t>
-            </a:r>
-            <a:endParaRPr lang="en-US" sz="1300" dirty="0"/>
+              <a:t>LEFT JOIN album al ON a.id_artiste = al.id_artiste;</a:t>
+            </a:r>
+            <a:endParaRPr lang="en-US" sz="1200" dirty="0"/>
           </a:p>
         </p:txBody>
       </p:sp>
@@ -3039,8 +3358,8 @@
         </p:nvSpPr>
         <p:spPr>
           <a:xfrm>
-            <a:off x="457200" y="2270760"/>
-            <a:ext cx="8229600" cy="579120"/>
+            <a:off x="457200" y="2011680"/>
+            <a:ext cx="8229600" cy="521208"/>
           </a:xfrm>
           <a:prstGeom prst="rect">
             <a:avLst/>
@@ -3066,8 +3385,8 @@
         </p:nvSpPr>
         <p:spPr>
           <a:xfrm>
-            <a:off x="457200" y="2270760"/>
-            <a:ext cx="54864" cy="579120"/>
+            <a:off x="457200" y="2011680"/>
+            <a:ext cx="45720" cy="521208"/>
           </a:xfrm>
           <a:prstGeom prst="rect">
             <a:avLst/>
@@ -3086,8 +3405,8 @@
         </p:nvSpPr>
         <p:spPr>
           <a:xfrm>
-            <a:off x="731520" y="2270760"/>
-            <a:ext cx="7772400" cy="579120"/>
+            <a:off x="685800" y="2011680"/>
+            <a:ext cx="7818120" cy="521208"/>
           </a:xfrm>
           <a:prstGeom prst="rect">
             <a:avLst/>
@@ -3103,7 +3422,7 @@
               <a:buNone/>
             </a:pPr>
             <a:r>
-              <a:rPr lang="en-US" sz="1300" dirty="0">
+              <a:rPr lang="en-US" sz="1200" dirty="0">
                 <a:solidFill>
                   <a:srgbClr val="1A1A2E"/>
                 </a:solidFill>
@@ -3111,9 +3430,9 @@
                 <a:ea typeface="Calibri" pitchFamily="34" charset="-122"/>
                 <a:cs typeface="Calibri" pitchFamily="34" charset="-120"/>
               </a:rPr>
-              <a:t>JOIN artiste a ON se.id_artiste = a.id_artiste</a:t>
-            </a:r>
-            <a:endParaRPr lang="en-US" sz="1300" dirty="0"/>
+              <a:t>Retourne TOUS les artistes, même ceux sans album</a:t>
+            </a:r>
+            <a:endParaRPr lang="en-US" sz="1200" dirty="0"/>
           </a:p>
         </p:txBody>
       </p:sp>
@@ -3125,8 +3444,8 @@
         </p:nvSpPr>
         <p:spPr>
           <a:xfrm>
-            <a:off x="457200" y="2880360"/>
-            <a:ext cx="8229600" cy="579120"/>
+            <a:off x="457200" y="2560320"/>
+            <a:ext cx="8229600" cy="521208"/>
           </a:xfrm>
           <a:prstGeom prst="rect">
             <a:avLst/>
@@ -3152,8 +3471,8 @@
         </p:nvSpPr>
         <p:spPr>
           <a:xfrm>
-            <a:off x="457200" y="2880360"/>
-            <a:ext cx="54864" cy="579120"/>
+            <a:off x="457200" y="2560320"/>
+            <a:ext cx="45720" cy="521208"/>
           </a:xfrm>
           <a:prstGeom prst="rect">
             <a:avLst/>
@@ -3172,8 +3491,8 @@
         </p:nvSpPr>
         <p:spPr>
           <a:xfrm>
-            <a:off x="731520" y="2880360"/>
-            <a:ext cx="7772400" cy="579120"/>
+            <a:off x="685800" y="2560320"/>
+            <a:ext cx="7818120" cy="521208"/>
           </a:xfrm>
           <a:prstGeom prst="rect">
             <a:avLst/>
@@ -3189,7 +3508,7 @@
               <a:buNone/>
             </a:pPr>
             <a:r>
-              <a:rPr lang="en-US" sz="1300" dirty="0">
+              <a:rPr lang="en-US" sz="1200" dirty="0">
                 <a:solidFill>
                   <a:srgbClr val="1A1A2E"/>
                 </a:solidFill>
@@ -3197,9 +3516,9 @@
                 <a:ea typeface="Calibri" pitchFamily="34" charset="-122"/>
                 <a:cs typeface="Calibri" pitchFamily="34" charset="-120"/>
               </a:rPr>
-              <a:t>JOIN salle s ON se.id_salle = s.id_salle</a:t>
-            </a:r>
-            <a:endParaRPr lang="en-US" sz="1300" dirty="0"/>
+              <a:t>Colonnes album = NULL si pas de correspondance</a:t>
+            </a:r>
+            <a:endParaRPr lang="en-US" sz="1200" dirty="0"/>
           </a:p>
         </p:txBody>
       </p:sp>
@@ -3211,8 +3530,8 @@
         </p:nvSpPr>
         <p:spPr>
           <a:xfrm>
-            <a:off x="457200" y="3489960"/>
-            <a:ext cx="8229600" cy="579120"/>
+            <a:off x="457200" y="3108960"/>
+            <a:ext cx="8229600" cy="521208"/>
           </a:xfrm>
           <a:prstGeom prst="rect">
             <a:avLst/>
@@ -3238,8 +3557,8 @@
         </p:nvSpPr>
         <p:spPr>
           <a:xfrm>
-            <a:off x="457200" y="3489960"/>
-            <a:ext cx="54864" cy="579120"/>
+            <a:off x="457200" y="3108960"/>
+            <a:ext cx="45720" cy="521208"/>
           </a:xfrm>
           <a:prstGeom prst="rect">
             <a:avLst/>
@@ -3258,8 +3577,8 @@
         </p:nvSpPr>
         <p:spPr>
           <a:xfrm>
-            <a:off x="731520" y="3489960"/>
-            <a:ext cx="7772400" cy="579120"/>
+            <a:off x="685800" y="3108960"/>
+            <a:ext cx="7818120" cy="521208"/>
           </a:xfrm>
           <a:prstGeom prst="rect">
             <a:avLst/>
@@ -3275,7 +3594,7 @@
               <a:buNone/>
             </a:pPr>
             <a:r>
-              <a:rPr lang="en-US" sz="1300" dirty="0">
+              <a:rPr lang="en-US" sz="1200" dirty="0">
                 <a:solidFill>
                   <a:srgbClr val="1A1A2E"/>
                 </a:solidFill>
@@ -3283,9 +3602,9 @@
                 <a:ea typeface="Calibri" pitchFamily="34" charset="-122"/>
                 <a:cs typeface="Calibri" pitchFamily="34" charset="-120"/>
               </a:rPr>
-              <a:t>JOIN ingenieur i ON se.id_ingenieur = i.id_ingenieur;</a:t>
-            </a:r>
-            <a:endParaRPr lang="en-US" sz="1300" dirty="0"/>
+              <a:t>Astuce pour trouver les 'orphelins' :</a:t>
+            </a:r>
+            <a:endParaRPr lang="en-US" sz="1200" dirty="0"/>
           </a:p>
         </p:txBody>
       </p:sp>
@@ -3297,8 +3616,8 @@
         </p:nvSpPr>
         <p:spPr>
           <a:xfrm>
-            <a:off x="457200" y="4099560"/>
-            <a:ext cx="8229600" cy="579120"/>
+            <a:off x="457200" y="3657600"/>
+            <a:ext cx="8229600" cy="521208"/>
           </a:xfrm>
           <a:prstGeom prst="rect">
             <a:avLst/>
@@ -3324,8 +3643,8 @@
         </p:nvSpPr>
         <p:spPr>
           <a:xfrm>
-            <a:off x="457200" y="4099560"/>
-            <a:ext cx="54864" cy="579120"/>
+            <a:off x="457200" y="3657600"/>
+            <a:ext cx="45720" cy="521208"/>
           </a:xfrm>
           <a:prstGeom prst="rect">
             <a:avLst/>
@@ -3344,8 +3663,8 @@
         </p:nvSpPr>
         <p:spPr>
           <a:xfrm>
-            <a:off x="731520" y="4099560"/>
-            <a:ext cx="7772400" cy="579120"/>
+            <a:off x="685800" y="3657600"/>
+            <a:ext cx="7818120" cy="521208"/>
           </a:xfrm>
           <a:prstGeom prst="rect">
             <a:avLst/>
@@ -3361,7 +3680,93 @@
               <a:buNone/>
             </a:pPr>
             <a:r>
-              <a:rPr lang="en-US" sz="1300" dirty="0">
+              <a:rPr lang="en-US" sz="1000" dirty="0">
+                <a:solidFill>
+                  <a:srgbClr val="0D47A1"/>
+                </a:solidFill>
+                <a:latin typeface="JetBrains Mono" pitchFamily="34" charset="0"/>
+                <a:ea typeface="JetBrains Mono" pitchFamily="34" charset="-122"/>
+                <a:cs typeface="JetBrains Mono" pitchFamily="34" charset="-120"/>
+              </a:rPr>
+              <a:t>SELECT a.nom FROM artiste a LEFT JOIN album al ON ... WHERE al.id_album IS NULL;</a:t>
+            </a:r>
+            <a:endParaRPr lang="en-US" sz="1000" dirty="0"/>
+          </a:p>
+        </p:txBody>
+      </p:sp>
+      <p:sp>
+        <p:nvSpPr>
+          <p:cNvPr id="22" name="Shape 20"/>
+          <p:cNvSpPr/>
+          <p:nvPr/>
+        </p:nvSpPr>
+        <p:spPr>
+          <a:xfrm>
+            <a:off x="457200" y="4206240"/>
+            <a:ext cx="8229600" cy="521208"/>
+          </a:xfrm>
+          <a:prstGeom prst="rect">
+            <a:avLst/>
+          </a:prstGeom>
+          <a:solidFill>
+            <a:srgbClr val="FFFFFF"/>
+          </a:solidFill>
+          <a:ln/>
+          <a:effectLst>
+            <a:outerShdw sx="100000" sy="100000" kx="0" ky="0" algn="bl" rotWithShape="0" blurRad="50800" dist="25400" dir="8100000">
+              <a:srgbClr val="000000">
+                <a:alpha val="12000"/>
+              </a:srgbClr>
+            </a:outerShdw>
+          </a:effectLst>
+        </p:spPr>
+      </p:sp>
+      <p:sp>
+        <p:nvSpPr>
+          <p:cNvPr id="23" name="Shape 21"/>
+          <p:cNvSpPr/>
+          <p:nvPr/>
+        </p:nvSpPr>
+        <p:spPr>
+          <a:xfrm>
+            <a:off x="457200" y="4206240"/>
+            <a:ext cx="45720" cy="521208"/>
+          </a:xfrm>
+          <a:prstGeom prst="rect">
+            <a:avLst/>
+          </a:prstGeom>
+          <a:solidFill>
+            <a:srgbClr val="1565C0"/>
+          </a:solidFill>
+          <a:ln/>
+        </p:spPr>
+      </p:sp>
+      <p:sp>
+        <p:nvSpPr>
+          <p:cNvPr id="24" name="Text 22"/>
+          <p:cNvSpPr/>
+          <p:nvPr/>
+        </p:nvSpPr>
+        <p:spPr>
+          <a:xfrm>
+            <a:off x="685800" y="4206240"/>
+            <a:ext cx="7818120" cy="521208"/>
+          </a:xfrm>
+          <a:prstGeom prst="rect">
+            <a:avLst/>
+          </a:prstGeom>
+          <a:noFill/>
+          <a:ln/>
+        </p:spPr>
+        <p:txBody>
+          <a:bodyPr wrap="square" lIns="0" tIns="0" rIns="0" bIns="0" rtlCol="0" anchor="ctr"/>
+          <a:lstStyle/>
+          <a:p>
+            <a:pPr indent="0" marL="0">
+              <a:buNone/>
+            </a:pPr>
+            <a:r>
+              <a:rPr lang="en-US" sz="1200" dirty="0">
                 <a:solidFill>
                   <a:srgbClr val="1A1A2E"/>
                 </a:solidFill>
@@ -3369,48 +3774,9 @@
                 <a:ea typeface="Calibri" pitchFamily="34" charset="-122"/>
                 <a:cs typeface="Calibri" pitchFamily="34" charset="-120"/>
               </a:rPr>
-              <a:t>Enchaîner les JOIN pour connecter autant de tables que nécessaire</a:t>
-            </a:r>
-            <a:endParaRPr lang="en-US" sz="1300" dirty="0"/>
-          </a:p>
-        </p:txBody>
-      </p:sp>
-      <p:sp>
-        <p:nvSpPr>
-          <p:cNvPr id="22" name="Text 20"/>
-          <p:cNvSpPr/>
-          <p:nvPr/>
-        </p:nvSpPr>
-        <p:spPr>
-          <a:xfrm>
-            <a:off x="8229600" y="4754880"/>
-            <a:ext cx="731520" cy="274320"/>
-          </a:xfrm>
-          <a:prstGeom prst="rect">
-            <a:avLst/>
-          </a:prstGeom>
-          <a:noFill/>
-          <a:ln/>
-        </p:spPr>
-        <p:txBody>
-          <a:bodyPr wrap="square" lIns="0" tIns="0" rIns="0" bIns="0" rtlCol="0" anchor="ctr"/>
-          <a:lstStyle/>
-          <a:p>
-            <a:pPr algn="r" indent="0" marL="0">
-              <a:buNone/>
-            </a:pPr>
-            <a:r>
-              <a:rPr lang="en-US" sz="900" dirty="0">
-                <a:solidFill>
-                  <a:srgbClr val="AAAAAA"/>
-                </a:solidFill>
-                <a:latin typeface="Calibri" pitchFamily="34" charset="0"/>
-                <a:ea typeface="Calibri" pitchFamily="34" charset="-122"/>
-                <a:cs typeface="Calibri" pitchFamily="34" charset="-120"/>
-              </a:rPr>
-              <a:t>4/6</a:t>
-            </a:r>
-            <a:endParaRPr lang="en-US" sz="900" dirty="0"/>
+              <a:t>→ Artistes sans aucun album</a:t>
+            </a:r>
+            <a:endParaRPr lang="en-US" sz="1200" dirty="0"/>
           </a:p>
         </p:txBody>
       </p:sp>
@@ -3455,7 +3821,7 @@
         <p:spPr>
           <a:xfrm>
             <a:off x="0" y="0"/>
-            <a:ext cx="9144000" cy="73152"/>
+            <a:ext cx="9144000" cy="54864"/>
           </a:xfrm>
           <a:prstGeom prst="rect">
             <a:avLst/>
@@ -3474,8 +3840,8 @@
         </p:nvSpPr>
         <p:spPr>
           <a:xfrm>
-            <a:off x="457200" y="228600"/>
-            <a:ext cx="8229600" cy="640080"/>
+            <a:off x="457200" y="182880"/>
+            <a:ext cx="8229600" cy="594360"/>
           </a:xfrm>
           <a:prstGeom prst="rect">
             <a:avLst/>
@@ -3491,7 +3857,7 @@
               <a:buNone/>
             </a:pPr>
             <a:r>
-              <a:rPr lang="en-US" sz="2600" b="1" dirty="0">
+              <a:rPr lang="en-US" sz="2400" b="1" dirty="0">
                 <a:solidFill>
                   <a:srgbClr val="0D47A1"/>
                 </a:solidFill>
@@ -3499,9 +3865,9 @@
                 <a:ea typeface="Trebuchet MS" pitchFamily="34" charset="-122"/>
                 <a:cs typeface="Trebuchet MS" pitchFamily="34" charset="-120"/>
               </a:rPr>
-              <a:t>Cas spéciaux</a:t>
-            </a:r>
-            <a:endParaRPr lang="en-US" sz="2600" dirty="0"/>
+              <a:t>Jointure sur 3+ tables</a:t>
+            </a:r>
+            <a:endParaRPr lang="en-US" sz="2400" dirty="0"/>
           </a:p>
         </p:txBody>
       </p:sp>
@@ -3513,8 +3879,8 @@
         </p:nvSpPr>
         <p:spPr>
           <a:xfrm>
-            <a:off x="457200" y="1051560"/>
-            <a:ext cx="8229600" cy="640080"/>
+            <a:off x="457200" y="914400"/>
+            <a:ext cx="8229600" cy="464058"/>
           </a:xfrm>
           <a:prstGeom prst="rect">
             <a:avLst/>
@@ -3540,8 +3906,8 @@
         </p:nvSpPr>
         <p:spPr>
           <a:xfrm>
-            <a:off x="457200" y="1051560"/>
-            <a:ext cx="54864" cy="640080"/>
+            <a:off x="457200" y="914400"/>
+            <a:ext cx="45720" cy="464058"/>
           </a:xfrm>
           <a:prstGeom prst="rect">
             <a:avLst/>
@@ -3560,8 +3926,8 @@
         </p:nvSpPr>
         <p:spPr>
           <a:xfrm>
-            <a:off x="731520" y="1051560"/>
-            <a:ext cx="7772400" cy="640080"/>
+            <a:off x="685800" y="914400"/>
+            <a:ext cx="7818120" cy="464058"/>
           </a:xfrm>
           <a:prstGeom prst="rect">
             <a:avLst/>
@@ -3577,7 +3943,523 @@
               <a:buNone/>
             </a:pPr>
             <a:r>
-              <a:rPr lang="en-US" sz="1300" dirty="0">
+              <a:rPr lang="en-US" sz="1000" dirty="0">
+                <a:solidFill>
+                  <a:srgbClr val="0D47A1"/>
+                </a:solidFill>
+                <a:latin typeface="JetBrains Mono" pitchFamily="34" charset="0"/>
+                <a:ea typeface="JetBrains Mono" pitchFamily="34" charset="-122"/>
+                <a:cs typeface="JetBrains Mono" pitchFamily="34" charset="-120"/>
+              </a:rPr>
+              <a:t>SELECT se.date_session, a.nom AS artiste, s.nom AS salle,</a:t>
+            </a:r>
+            <a:endParaRPr lang="en-US" sz="1000" dirty="0"/>
+          </a:p>
+        </p:txBody>
+      </p:sp>
+      <p:sp>
+        <p:nvSpPr>
+          <p:cNvPr id="7" name="Shape 5"/>
+          <p:cNvSpPr/>
+          <p:nvPr/>
+        </p:nvSpPr>
+        <p:spPr>
+          <a:xfrm>
+            <a:off x="457200" y="1405890"/>
+            <a:ext cx="8229600" cy="464058"/>
+          </a:xfrm>
+          <a:prstGeom prst="rect">
+            <a:avLst/>
+          </a:prstGeom>
+          <a:solidFill>
+            <a:srgbClr val="E3F2FD"/>
+          </a:solidFill>
+          <a:ln/>
+          <a:effectLst>
+            <a:outerShdw sx="100000" sy="100000" kx="0" ky="0" algn="bl" rotWithShape="0" blurRad="50800" dist="25400" dir="8100000">
+              <a:srgbClr val="000000">
+                <a:alpha val="12000"/>
+              </a:srgbClr>
+            </a:outerShdw>
+          </a:effectLst>
+        </p:spPr>
+      </p:sp>
+      <p:sp>
+        <p:nvSpPr>
+          <p:cNvPr id="8" name="Shape 6"/>
+          <p:cNvSpPr/>
+          <p:nvPr/>
+        </p:nvSpPr>
+        <p:spPr>
+          <a:xfrm>
+            <a:off x="457200" y="1405890"/>
+            <a:ext cx="45720" cy="464058"/>
+          </a:xfrm>
+          <a:prstGeom prst="rect">
+            <a:avLst/>
+          </a:prstGeom>
+          <a:solidFill>
+            <a:srgbClr val="1565C0"/>
+          </a:solidFill>
+          <a:ln/>
+        </p:spPr>
+      </p:sp>
+      <p:sp>
+        <p:nvSpPr>
+          <p:cNvPr id="9" name="Text 7"/>
+          <p:cNvSpPr/>
+          <p:nvPr/>
+        </p:nvSpPr>
+        <p:spPr>
+          <a:xfrm>
+            <a:off x="685800" y="1405890"/>
+            <a:ext cx="7818120" cy="464058"/>
+          </a:xfrm>
+          <a:prstGeom prst="rect">
+            <a:avLst/>
+          </a:prstGeom>
+          <a:noFill/>
+          <a:ln/>
+        </p:spPr>
+        <p:txBody>
+          <a:bodyPr wrap="square" lIns="0" tIns="0" rIns="0" bIns="0" rtlCol="0" anchor="ctr"/>
+          <a:lstStyle/>
+          <a:p>
+            <a:pPr indent="0" marL="0">
+              <a:buNone/>
+            </a:pPr>
+            <a:r>
+              <a:rPr lang="en-US" sz="1000" dirty="0">
+                <a:solidFill>
+                  <a:srgbClr val="0D47A1"/>
+                </a:solidFill>
+                <a:latin typeface="JetBrains Mono" pitchFamily="34" charset="0"/>
+                <a:ea typeface="JetBrains Mono" pitchFamily="34" charset="-122"/>
+                <a:cs typeface="JetBrains Mono" pitchFamily="34" charset="-120"/>
+              </a:rPr>
+              <a:t>       CONCAT(i.prenom, ' ', i.nom) AS ingenieur</a:t>
+            </a:r>
+            <a:endParaRPr lang="en-US" sz="1000" dirty="0"/>
+          </a:p>
+        </p:txBody>
+      </p:sp>
+      <p:sp>
+        <p:nvSpPr>
+          <p:cNvPr id="10" name="Shape 8"/>
+          <p:cNvSpPr/>
+          <p:nvPr/>
+        </p:nvSpPr>
+        <p:spPr>
+          <a:xfrm>
+            <a:off x="457200" y="1897380"/>
+            <a:ext cx="8229600" cy="464058"/>
+          </a:xfrm>
+          <a:prstGeom prst="rect">
+            <a:avLst/>
+          </a:prstGeom>
+          <a:solidFill>
+            <a:srgbClr val="FFFFFF"/>
+          </a:solidFill>
+          <a:ln/>
+          <a:effectLst>
+            <a:outerShdw sx="100000" sy="100000" kx="0" ky="0" algn="bl" rotWithShape="0" blurRad="50800" dist="25400" dir="8100000">
+              <a:srgbClr val="000000">
+                <a:alpha val="12000"/>
+              </a:srgbClr>
+            </a:outerShdw>
+          </a:effectLst>
+        </p:spPr>
+      </p:sp>
+      <p:sp>
+        <p:nvSpPr>
+          <p:cNvPr id="11" name="Shape 9"/>
+          <p:cNvSpPr/>
+          <p:nvPr/>
+        </p:nvSpPr>
+        <p:spPr>
+          <a:xfrm>
+            <a:off x="457200" y="1897380"/>
+            <a:ext cx="45720" cy="464058"/>
+          </a:xfrm>
+          <a:prstGeom prst="rect">
+            <a:avLst/>
+          </a:prstGeom>
+          <a:solidFill>
+            <a:srgbClr val="1565C0"/>
+          </a:solidFill>
+          <a:ln/>
+        </p:spPr>
+      </p:sp>
+      <p:sp>
+        <p:nvSpPr>
+          <p:cNvPr id="12" name="Text 10"/>
+          <p:cNvSpPr/>
+          <p:nvPr/>
+        </p:nvSpPr>
+        <p:spPr>
+          <a:xfrm>
+            <a:off x="685800" y="1897380"/>
+            <a:ext cx="7818120" cy="464058"/>
+          </a:xfrm>
+          <a:prstGeom prst="rect">
+            <a:avLst/>
+          </a:prstGeom>
+          <a:noFill/>
+          <a:ln/>
+        </p:spPr>
+        <p:txBody>
+          <a:bodyPr wrap="square" lIns="0" tIns="0" rIns="0" bIns="0" rtlCol="0" anchor="ctr"/>
+          <a:lstStyle/>
+          <a:p>
+            <a:pPr indent="0" marL="0">
+              <a:buNone/>
+            </a:pPr>
+            <a:r>
+              <a:rPr lang="en-US" sz="1000" dirty="0">
+                <a:solidFill>
+                  <a:srgbClr val="0D47A1"/>
+                </a:solidFill>
+                <a:latin typeface="JetBrains Mono" pitchFamily="34" charset="0"/>
+                <a:ea typeface="JetBrains Mono" pitchFamily="34" charset="-122"/>
+                <a:cs typeface="JetBrains Mono" pitchFamily="34" charset="-120"/>
+              </a:rPr>
+              <a:t>FROM session_enregistrement se</a:t>
+            </a:r>
+            <a:endParaRPr lang="en-US" sz="1000" dirty="0"/>
+          </a:p>
+        </p:txBody>
+      </p:sp>
+      <p:sp>
+        <p:nvSpPr>
+          <p:cNvPr id="13" name="Shape 11"/>
+          <p:cNvSpPr/>
+          <p:nvPr/>
+        </p:nvSpPr>
+        <p:spPr>
+          <a:xfrm>
+            <a:off x="457200" y="2388870"/>
+            <a:ext cx="8229600" cy="464058"/>
+          </a:xfrm>
+          <a:prstGeom prst="rect">
+            <a:avLst/>
+          </a:prstGeom>
+          <a:solidFill>
+            <a:srgbClr val="E3F2FD"/>
+          </a:solidFill>
+          <a:ln/>
+          <a:effectLst>
+            <a:outerShdw sx="100000" sy="100000" kx="0" ky="0" algn="bl" rotWithShape="0" blurRad="50800" dist="25400" dir="8100000">
+              <a:srgbClr val="000000">
+                <a:alpha val="12000"/>
+              </a:srgbClr>
+            </a:outerShdw>
+          </a:effectLst>
+        </p:spPr>
+      </p:sp>
+      <p:sp>
+        <p:nvSpPr>
+          <p:cNvPr id="14" name="Shape 12"/>
+          <p:cNvSpPr/>
+          <p:nvPr/>
+        </p:nvSpPr>
+        <p:spPr>
+          <a:xfrm>
+            <a:off x="457200" y="2388870"/>
+            <a:ext cx="45720" cy="464058"/>
+          </a:xfrm>
+          <a:prstGeom prst="rect">
+            <a:avLst/>
+          </a:prstGeom>
+          <a:solidFill>
+            <a:srgbClr val="1565C0"/>
+          </a:solidFill>
+          <a:ln/>
+        </p:spPr>
+      </p:sp>
+      <p:sp>
+        <p:nvSpPr>
+          <p:cNvPr id="15" name="Text 13"/>
+          <p:cNvSpPr/>
+          <p:nvPr/>
+        </p:nvSpPr>
+        <p:spPr>
+          <a:xfrm>
+            <a:off x="685800" y="2388870"/>
+            <a:ext cx="7818120" cy="464058"/>
+          </a:xfrm>
+          <a:prstGeom prst="rect">
+            <a:avLst/>
+          </a:prstGeom>
+          <a:noFill/>
+          <a:ln/>
+        </p:spPr>
+        <p:txBody>
+          <a:bodyPr wrap="square" lIns="0" tIns="0" rIns="0" bIns="0" rtlCol="0" anchor="ctr"/>
+          <a:lstStyle/>
+          <a:p>
+            <a:pPr indent="0" marL="0">
+              <a:buNone/>
+            </a:pPr>
+            <a:r>
+              <a:rPr lang="en-US" sz="1000" dirty="0">
+                <a:solidFill>
+                  <a:srgbClr val="0D47A1"/>
+                </a:solidFill>
+                <a:latin typeface="JetBrains Mono" pitchFamily="34" charset="0"/>
+                <a:ea typeface="JetBrains Mono" pitchFamily="34" charset="-122"/>
+                <a:cs typeface="JetBrains Mono" pitchFamily="34" charset="-120"/>
+              </a:rPr>
+              <a:t>JOIN artiste a ON se.id_artiste = a.id_artiste</a:t>
+            </a:r>
+            <a:endParaRPr lang="en-US" sz="1000" dirty="0"/>
+          </a:p>
+        </p:txBody>
+      </p:sp>
+      <p:sp>
+        <p:nvSpPr>
+          <p:cNvPr id="16" name="Shape 14"/>
+          <p:cNvSpPr/>
+          <p:nvPr/>
+        </p:nvSpPr>
+        <p:spPr>
+          <a:xfrm>
+            <a:off x="457200" y="2880360"/>
+            <a:ext cx="8229600" cy="464058"/>
+          </a:xfrm>
+          <a:prstGeom prst="rect">
+            <a:avLst/>
+          </a:prstGeom>
+          <a:solidFill>
+            <a:srgbClr val="FFFFFF"/>
+          </a:solidFill>
+          <a:ln/>
+          <a:effectLst>
+            <a:outerShdw sx="100000" sy="100000" kx="0" ky="0" algn="bl" rotWithShape="0" blurRad="50800" dist="25400" dir="8100000">
+              <a:srgbClr val="000000">
+                <a:alpha val="12000"/>
+              </a:srgbClr>
+            </a:outerShdw>
+          </a:effectLst>
+        </p:spPr>
+      </p:sp>
+      <p:sp>
+        <p:nvSpPr>
+          <p:cNvPr id="17" name="Shape 15"/>
+          <p:cNvSpPr/>
+          <p:nvPr/>
+        </p:nvSpPr>
+        <p:spPr>
+          <a:xfrm>
+            <a:off x="457200" y="2880360"/>
+            <a:ext cx="45720" cy="464058"/>
+          </a:xfrm>
+          <a:prstGeom prst="rect">
+            <a:avLst/>
+          </a:prstGeom>
+          <a:solidFill>
+            <a:srgbClr val="1565C0"/>
+          </a:solidFill>
+          <a:ln/>
+        </p:spPr>
+      </p:sp>
+      <p:sp>
+        <p:nvSpPr>
+          <p:cNvPr id="18" name="Text 16"/>
+          <p:cNvSpPr/>
+          <p:nvPr/>
+        </p:nvSpPr>
+        <p:spPr>
+          <a:xfrm>
+            <a:off x="685800" y="2880360"/>
+            <a:ext cx="7818120" cy="464058"/>
+          </a:xfrm>
+          <a:prstGeom prst="rect">
+            <a:avLst/>
+          </a:prstGeom>
+          <a:noFill/>
+          <a:ln/>
+        </p:spPr>
+        <p:txBody>
+          <a:bodyPr wrap="square" lIns="0" tIns="0" rIns="0" bIns="0" rtlCol="0" anchor="ctr"/>
+          <a:lstStyle/>
+          <a:p>
+            <a:pPr indent="0" marL="0">
+              <a:buNone/>
+            </a:pPr>
+            <a:r>
+              <a:rPr lang="en-US" sz="1000" dirty="0">
+                <a:solidFill>
+                  <a:srgbClr val="0D47A1"/>
+                </a:solidFill>
+                <a:latin typeface="JetBrains Mono" pitchFamily="34" charset="0"/>
+                <a:ea typeface="JetBrains Mono" pitchFamily="34" charset="-122"/>
+                <a:cs typeface="JetBrains Mono" pitchFamily="34" charset="-120"/>
+              </a:rPr>
+              <a:t>JOIN salle s ON se.id_salle = s.id_salle</a:t>
+            </a:r>
+            <a:endParaRPr lang="en-US" sz="1000" dirty="0"/>
+          </a:p>
+        </p:txBody>
+      </p:sp>
+      <p:sp>
+        <p:nvSpPr>
+          <p:cNvPr id="19" name="Shape 17"/>
+          <p:cNvSpPr/>
+          <p:nvPr/>
+        </p:nvSpPr>
+        <p:spPr>
+          <a:xfrm>
+            <a:off x="457200" y="3371850"/>
+            <a:ext cx="8229600" cy="464058"/>
+          </a:xfrm>
+          <a:prstGeom prst="rect">
+            <a:avLst/>
+          </a:prstGeom>
+          <a:solidFill>
+            <a:srgbClr val="E3F2FD"/>
+          </a:solidFill>
+          <a:ln/>
+          <a:effectLst>
+            <a:outerShdw sx="100000" sy="100000" kx="0" ky="0" algn="bl" rotWithShape="0" blurRad="50800" dist="25400" dir="8100000">
+              <a:srgbClr val="000000">
+                <a:alpha val="12000"/>
+              </a:srgbClr>
+            </a:outerShdw>
+          </a:effectLst>
+        </p:spPr>
+      </p:sp>
+      <p:sp>
+        <p:nvSpPr>
+          <p:cNvPr id="20" name="Shape 18"/>
+          <p:cNvSpPr/>
+          <p:nvPr/>
+        </p:nvSpPr>
+        <p:spPr>
+          <a:xfrm>
+            <a:off x="457200" y="3371850"/>
+            <a:ext cx="45720" cy="464058"/>
+          </a:xfrm>
+          <a:prstGeom prst="rect">
+            <a:avLst/>
+          </a:prstGeom>
+          <a:solidFill>
+            <a:srgbClr val="1565C0"/>
+          </a:solidFill>
+          <a:ln/>
+        </p:spPr>
+      </p:sp>
+      <p:sp>
+        <p:nvSpPr>
+          <p:cNvPr id="21" name="Text 19"/>
+          <p:cNvSpPr/>
+          <p:nvPr/>
+        </p:nvSpPr>
+        <p:spPr>
+          <a:xfrm>
+            <a:off x="685800" y="3371850"/>
+            <a:ext cx="7818120" cy="464058"/>
+          </a:xfrm>
+          <a:prstGeom prst="rect">
+            <a:avLst/>
+          </a:prstGeom>
+          <a:noFill/>
+          <a:ln/>
+        </p:spPr>
+        <p:txBody>
+          <a:bodyPr wrap="square" lIns="0" tIns="0" rIns="0" bIns="0" rtlCol="0" anchor="ctr"/>
+          <a:lstStyle/>
+          <a:p>
+            <a:pPr indent="0" marL="0">
+              <a:buNone/>
+            </a:pPr>
+            <a:r>
+              <a:rPr lang="en-US" sz="1000" dirty="0">
+                <a:solidFill>
+                  <a:srgbClr val="0D47A1"/>
+                </a:solidFill>
+                <a:latin typeface="JetBrains Mono" pitchFamily="34" charset="0"/>
+                <a:ea typeface="JetBrains Mono" pitchFamily="34" charset="-122"/>
+                <a:cs typeface="JetBrains Mono" pitchFamily="34" charset="-120"/>
+              </a:rPr>
+              <a:t>JOIN ingenieur i ON se.id_ingenieur = i.id_ingenieur;</a:t>
+            </a:r>
+            <a:endParaRPr lang="en-US" sz="1000" dirty="0"/>
+          </a:p>
+        </p:txBody>
+      </p:sp>
+      <p:sp>
+        <p:nvSpPr>
+          <p:cNvPr id="22" name="Shape 20"/>
+          <p:cNvSpPr/>
+          <p:nvPr/>
+        </p:nvSpPr>
+        <p:spPr>
+          <a:xfrm>
+            <a:off x="457200" y="3863340"/>
+            <a:ext cx="8229600" cy="464058"/>
+          </a:xfrm>
+          <a:prstGeom prst="rect">
+            <a:avLst/>
+          </a:prstGeom>
+          <a:solidFill>
+            <a:srgbClr val="FFFFFF"/>
+          </a:solidFill>
+          <a:ln/>
+          <a:effectLst>
+            <a:outerShdw sx="100000" sy="100000" kx="0" ky="0" algn="bl" rotWithShape="0" blurRad="50800" dist="25400" dir="8100000">
+              <a:srgbClr val="000000">
+                <a:alpha val="12000"/>
+              </a:srgbClr>
+            </a:outerShdw>
+          </a:effectLst>
+        </p:spPr>
+      </p:sp>
+      <p:sp>
+        <p:nvSpPr>
+          <p:cNvPr id="23" name="Shape 21"/>
+          <p:cNvSpPr/>
+          <p:nvPr/>
+        </p:nvSpPr>
+        <p:spPr>
+          <a:xfrm>
+            <a:off x="457200" y="3863340"/>
+            <a:ext cx="45720" cy="464058"/>
+          </a:xfrm>
+          <a:prstGeom prst="rect">
+            <a:avLst/>
+          </a:prstGeom>
+          <a:solidFill>
+            <a:srgbClr val="1565C0"/>
+          </a:solidFill>
+          <a:ln/>
+        </p:spPr>
+      </p:sp>
+      <p:sp>
+        <p:nvSpPr>
+          <p:cNvPr id="24" name="Text 22"/>
+          <p:cNvSpPr/>
+          <p:nvPr/>
+        </p:nvSpPr>
+        <p:spPr>
+          <a:xfrm>
+            <a:off x="685800" y="3863340"/>
+            <a:ext cx="7818120" cy="464058"/>
+          </a:xfrm>
+          <a:prstGeom prst="rect">
+            <a:avLst/>
+          </a:prstGeom>
+          <a:noFill/>
+          <a:ln/>
+        </p:spPr>
+        <p:txBody>
+          <a:bodyPr wrap="square" lIns="0" tIns="0" rIns="0" bIns="0" rtlCol="0" anchor="ctr"/>
+          <a:lstStyle/>
+          <a:p>
+            <a:pPr indent="0" marL="0">
+              <a:buNone/>
+            </a:pPr>
+            <a:r>
+              <a:rPr lang="en-US" sz="1200" dirty="0">
                 <a:solidFill>
                   <a:srgbClr val="1A1A2E"/>
                 </a:solidFill>
@@ -3585,22 +4467,22 @@
                 <a:ea typeface="Calibri" pitchFamily="34" charset="-122"/>
                 <a:cs typeface="Calibri" pitchFamily="34" charset="-120"/>
               </a:rPr>
-              <a:t>CROSS JOIN : produit cartésien (toutes les combinaisons)</a:t>
-            </a:r>
-            <a:endParaRPr lang="en-US" sz="1300" dirty="0"/>
-          </a:p>
-        </p:txBody>
-      </p:sp>
-      <p:sp>
-        <p:nvSpPr>
-          <p:cNvPr id="7" name="Shape 5"/>
-          <p:cNvSpPr/>
-          <p:nvPr/>
-        </p:nvSpPr>
-        <p:spPr>
-          <a:xfrm>
-            <a:off x="457200" y="1783080"/>
-            <a:ext cx="8229600" cy="640080"/>
+              <a:t>On enchaîne les JOIN — chaque JOIN ajoute une table</a:t>
+            </a:r>
+            <a:endParaRPr lang="en-US" sz="1200" dirty="0"/>
+          </a:p>
+        </p:txBody>
+      </p:sp>
+      <p:sp>
+        <p:nvSpPr>
+          <p:cNvPr id="25" name="Shape 23"/>
+          <p:cNvSpPr/>
+          <p:nvPr/>
+        </p:nvSpPr>
+        <p:spPr>
+          <a:xfrm>
+            <a:off x="457200" y="4354830"/>
+            <a:ext cx="8229600" cy="464058"/>
           </a:xfrm>
           <a:prstGeom prst="rect">
             <a:avLst/>
@@ -3620,14 +4502,14 @@
       </p:sp>
       <p:sp>
         <p:nvSpPr>
-          <p:cNvPr id="8" name="Shape 6"/>
-          <p:cNvSpPr/>
-          <p:nvPr/>
-        </p:nvSpPr>
-        <p:spPr>
-          <a:xfrm>
-            <a:off x="457200" y="1783080"/>
-            <a:ext cx="54864" cy="640080"/>
+          <p:cNvPr id="26" name="Shape 24"/>
+          <p:cNvSpPr/>
+          <p:nvPr/>
+        </p:nvSpPr>
+        <p:spPr>
+          <a:xfrm>
+            <a:off x="457200" y="4354830"/>
+            <a:ext cx="45720" cy="464058"/>
           </a:xfrm>
           <a:prstGeom prst="rect">
             <a:avLst/>
@@ -3640,14 +4522,14 @@
       </p:sp>
       <p:sp>
         <p:nvSpPr>
-          <p:cNvPr id="9" name="Text 7"/>
-          <p:cNvSpPr/>
-          <p:nvPr/>
-        </p:nvSpPr>
-        <p:spPr>
-          <a:xfrm>
-            <a:off x="731520" y="1783080"/>
-            <a:ext cx="7772400" cy="640080"/>
+          <p:cNvPr id="27" name="Text 25"/>
+          <p:cNvSpPr/>
+          <p:nvPr/>
+        </p:nvSpPr>
+        <p:spPr>
+          <a:xfrm>
+            <a:off x="685800" y="4354830"/>
+            <a:ext cx="7818120" cy="464058"/>
           </a:xfrm>
           <a:prstGeom prst="rect">
             <a:avLst/>
@@ -3663,7 +4545,7 @@
               <a:buNone/>
             </a:pPr>
             <a:r>
-              <a:rPr lang="en-US" sz="1300" dirty="0">
+              <a:rPr lang="en-US" sz="1200" dirty="0">
                 <a:solidFill>
                   <a:srgbClr val="1A1A2E"/>
                 </a:solidFill>
@@ -3671,306 +4553,9 @@
                 <a:ea typeface="Calibri" pitchFamily="34" charset="-122"/>
                 <a:cs typeface="Calibri" pitchFamily="34" charset="-120"/>
               </a:rPr>
-              <a:t>RIGHT JOIN : tout à droite (inverse du LEFT)</a:t>
-            </a:r>
-            <a:endParaRPr lang="en-US" sz="1300" dirty="0"/>
-          </a:p>
-        </p:txBody>
-      </p:sp>
-      <p:sp>
-        <p:nvSpPr>
-          <p:cNvPr id="10" name="Shape 8"/>
-          <p:cNvSpPr/>
-          <p:nvPr/>
-        </p:nvSpPr>
-        <p:spPr>
-          <a:xfrm>
-            <a:off x="457200" y="2514600"/>
-            <a:ext cx="8229600" cy="640080"/>
-          </a:xfrm>
-          <a:prstGeom prst="rect">
-            <a:avLst/>
-          </a:prstGeom>
-          <a:solidFill>
-            <a:srgbClr val="FFFFFF"/>
-          </a:solidFill>
-          <a:ln/>
-          <a:effectLst>
-            <a:outerShdw sx="100000" sy="100000" kx="0" ky="0" algn="bl" rotWithShape="0" blurRad="50800" dist="25400" dir="8100000">
-              <a:srgbClr val="000000">
-                <a:alpha val="12000"/>
-              </a:srgbClr>
-            </a:outerShdw>
-          </a:effectLst>
-        </p:spPr>
-      </p:sp>
-      <p:sp>
-        <p:nvSpPr>
-          <p:cNvPr id="11" name="Shape 9"/>
-          <p:cNvSpPr/>
-          <p:nvPr/>
-        </p:nvSpPr>
-        <p:spPr>
-          <a:xfrm>
-            <a:off x="457200" y="2514600"/>
-            <a:ext cx="54864" cy="640080"/>
-          </a:xfrm>
-          <a:prstGeom prst="rect">
-            <a:avLst/>
-          </a:prstGeom>
-          <a:solidFill>
-            <a:srgbClr val="1565C0"/>
-          </a:solidFill>
-          <a:ln/>
-        </p:spPr>
-      </p:sp>
-      <p:sp>
-        <p:nvSpPr>
-          <p:cNvPr id="12" name="Text 10"/>
-          <p:cNvSpPr/>
-          <p:nvPr/>
-        </p:nvSpPr>
-        <p:spPr>
-          <a:xfrm>
-            <a:off x="731520" y="2514600"/>
-            <a:ext cx="7772400" cy="640080"/>
-          </a:xfrm>
-          <a:prstGeom prst="rect">
-            <a:avLst/>
-          </a:prstGeom>
-          <a:noFill/>
-          <a:ln/>
-        </p:spPr>
-        <p:txBody>
-          <a:bodyPr wrap="square" lIns="0" tIns="0" rIns="0" bIns="0" rtlCol="0" anchor="ctr"/>
-          <a:lstStyle/>
-          <a:p>
-            <a:pPr indent="0" marL="0">
-              <a:buNone/>
-            </a:pPr>
-            <a:r>
-              <a:rPr lang="en-US" sz="1300" dirty="0">
-                <a:solidFill>
-                  <a:srgbClr val="1A1A2E"/>
-                </a:solidFill>
-                <a:latin typeface="Calibri" pitchFamily="34" charset="0"/>
-                <a:ea typeface="Calibri" pitchFamily="34" charset="-122"/>
-                <a:cs typeface="Calibri" pitchFamily="34" charset="-120"/>
-              </a:rPr>
-              <a:t>Jointure réflexive : table avec elle-même (auto-référence)</a:t>
-            </a:r>
-            <a:endParaRPr lang="en-US" sz="1300" dirty="0"/>
-          </a:p>
-        </p:txBody>
-      </p:sp>
-      <p:sp>
-        <p:nvSpPr>
-          <p:cNvPr id="13" name="Shape 11"/>
-          <p:cNvSpPr/>
-          <p:nvPr/>
-        </p:nvSpPr>
-        <p:spPr>
-          <a:xfrm>
-            <a:off x="457200" y="3246120"/>
-            <a:ext cx="8229600" cy="640080"/>
-          </a:xfrm>
-          <a:prstGeom prst="rect">
-            <a:avLst/>
-          </a:prstGeom>
-          <a:solidFill>
-            <a:srgbClr val="E3F2FD"/>
-          </a:solidFill>
-          <a:ln/>
-          <a:effectLst>
-            <a:outerShdw sx="100000" sy="100000" kx="0" ky="0" algn="bl" rotWithShape="0" blurRad="50800" dist="25400" dir="8100000">
-              <a:srgbClr val="000000">
-                <a:alpha val="12000"/>
-              </a:srgbClr>
-            </a:outerShdw>
-          </a:effectLst>
-        </p:spPr>
-      </p:sp>
-      <p:sp>
-        <p:nvSpPr>
-          <p:cNvPr id="14" name="Shape 12"/>
-          <p:cNvSpPr/>
-          <p:nvPr/>
-        </p:nvSpPr>
-        <p:spPr>
-          <a:xfrm>
-            <a:off x="457200" y="3246120"/>
-            <a:ext cx="54864" cy="640080"/>
-          </a:xfrm>
-          <a:prstGeom prst="rect">
-            <a:avLst/>
-          </a:prstGeom>
-          <a:solidFill>
-            <a:srgbClr val="1565C0"/>
-          </a:solidFill>
-          <a:ln/>
-        </p:spPr>
-      </p:sp>
-      <p:sp>
-        <p:nvSpPr>
-          <p:cNvPr id="15" name="Text 13"/>
-          <p:cNvSpPr/>
-          <p:nvPr/>
-        </p:nvSpPr>
-        <p:spPr>
-          <a:xfrm>
-            <a:off x="731520" y="3246120"/>
-            <a:ext cx="7772400" cy="640080"/>
-          </a:xfrm>
-          <a:prstGeom prst="rect">
-            <a:avLst/>
-          </a:prstGeom>
-          <a:noFill/>
-          <a:ln/>
-        </p:spPr>
-        <p:txBody>
-          <a:bodyPr wrap="square" lIns="0" tIns="0" rIns="0" bIns="0" rtlCol="0" anchor="ctr"/>
-          <a:lstStyle/>
-          <a:p>
-            <a:pPr indent="0" marL="0">
-              <a:buNone/>
-            </a:pPr>
-            <a:r>
-              <a:rPr lang="en-US" sz="1300" dirty="0">
-                <a:solidFill>
-                  <a:srgbClr val="1A1A2E"/>
-                </a:solidFill>
-                <a:latin typeface="Calibri" pitchFamily="34" charset="0"/>
-                <a:ea typeface="Calibri" pitchFamily="34" charset="-122"/>
-                <a:cs typeface="Calibri" pitchFamily="34" charset="-120"/>
-              </a:rPr>
-              <a:t>Ex: employé JOIN employé ON e.manager_id = m.id</a:t>
-            </a:r>
-            <a:endParaRPr lang="en-US" sz="1300" dirty="0"/>
-          </a:p>
-        </p:txBody>
-      </p:sp>
-      <p:sp>
-        <p:nvSpPr>
-          <p:cNvPr id="16" name="Shape 14"/>
-          <p:cNvSpPr/>
-          <p:nvPr/>
-        </p:nvSpPr>
-        <p:spPr>
-          <a:xfrm>
-            <a:off x="457200" y="3977640"/>
-            <a:ext cx="8229600" cy="640080"/>
-          </a:xfrm>
-          <a:prstGeom prst="rect">
-            <a:avLst/>
-          </a:prstGeom>
-          <a:solidFill>
-            <a:srgbClr val="FFFFFF"/>
-          </a:solidFill>
-          <a:ln/>
-          <a:effectLst>
-            <a:outerShdw sx="100000" sy="100000" kx="0" ky="0" algn="bl" rotWithShape="0" blurRad="50800" dist="25400" dir="8100000">
-              <a:srgbClr val="000000">
-                <a:alpha val="12000"/>
-              </a:srgbClr>
-            </a:outerShdw>
-          </a:effectLst>
-        </p:spPr>
-      </p:sp>
-      <p:sp>
-        <p:nvSpPr>
-          <p:cNvPr id="17" name="Shape 15"/>
-          <p:cNvSpPr/>
-          <p:nvPr/>
-        </p:nvSpPr>
-        <p:spPr>
-          <a:xfrm>
-            <a:off x="457200" y="3977640"/>
-            <a:ext cx="54864" cy="640080"/>
-          </a:xfrm>
-          <a:prstGeom prst="rect">
-            <a:avLst/>
-          </a:prstGeom>
-          <a:solidFill>
-            <a:srgbClr val="1565C0"/>
-          </a:solidFill>
-          <a:ln/>
-        </p:spPr>
-      </p:sp>
-      <p:sp>
-        <p:nvSpPr>
-          <p:cNvPr id="18" name="Text 16"/>
-          <p:cNvSpPr/>
-          <p:nvPr/>
-        </p:nvSpPr>
-        <p:spPr>
-          <a:xfrm>
-            <a:off x="731520" y="3977640"/>
-            <a:ext cx="7772400" cy="640080"/>
-          </a:xfrm>
-          <a:prstGeom prst="rect">
-            <a:avLst/>
-          </a:prstGeom>
-          <a:noFill/>
-          <a:ln/>
-        </p:spPr>
-        <p:txBody>
-          <a:bodyPr wrap="square" lIns="0" tIns="0" rIns="0" bIns="0" rtlCol="0" anchor="ctr"/>
-          <a:lstStyle/>
-          <a:p>
-            <a:pPr indent="0" marL="0">
-              <a:buNone/>
-            </a:pPr>
-            <a:r>
-              <a:rPr lang="en-US" sz="1300" dirty="0">
-                <a:solidFill>
-                  <a:srgbClr val="1A1A2E"/>
-                </a:solidFill>
-                <a:latin typeface="Calibri" pitchFamily="34" charset="0"/>
-                <a:ea typeface="Calibri" pitchFamily="34" charset="-122"/>
-                <a:cs typeface="Calibri" pitchFamily="34" charset="-120"/>
-              </a:rPr>
-              <a:t>GROUP_CONCAT avec JOIN : genres d'un artiste en une ligne</a:t>
-            </a:r>
-            <a:endParaRPr lang="en-US" sz="1300" dirty="0"/>
-          </a:p>
-        </p:txBody>
-      </p:sp>
-      <p:sp>
-        <p:nvSpPr>
-          <p:cNvPr id="19" name="Text 17"/>
-          <p:cNvSpPr/>
-          <p:nvPr/>
-        </p:nvSpPr>
-        <p:spPr>
-          <a:xfrm>
-            <a:off x="8229600" y="4754880"/>
-            <a:ext cx="731520" cy="274320"/>
-          </a:xfrm>
-          <a:prstGeom prst="rect">
-            <a:avLst/>
-          </a:prstGeom>
-          <a:noFill/>
-          <a:ln/>
-        </p:spPr>
-        <p:txBody>
-          <a:bodyPr wrap="square" lIns="0" tIns="0" rIns="0" bIns="0" rtlCol="0" anchor="ctr"/>
-          <a:lstStyle/>
-          <a:p>
-            <a:pPr algn="r" indent="0" marL="0">
-              <a:buNone/>
-            </a:pPr>
-            <a:r>
-              <a:rPr lang="en-US" sz="900" dirty="0">
-                <a:solidFill>
-                  <a:srgbClr val="AAAAAA"/>
-                </a:solidFill>
-                <a:latin typeface="Calibri" pitchFamily="34" charset="0"/>
-                <a:ea typeface="Calibri" pitchFamily="34" charset="-122"/>
-                <a:cs typeface="Calibri" pitchFamily="34" charset="-120"/>
-              </a:rPr>
-              <a:t>5/6</a:t>
-            </a:r>
-            <a:endParaRPr lang="en-US" sz="900" dirty="0"/>
+              <a:t>Avec alias : se, a, s, i pour raccourcir les noms</a:t>
+            </a:r>
+            <a:endParaRPr lang="en-US" sz="1200" dirty="0"/>
           </a:p>
         </p:txBody>
       </p:sp>
@@ -3988,7 +4573,7 @@
     <p:bg>
       <p:bgPr>
         <a:solidFill>
-          <a:srgbClr val="0D47A1"/>
+          <a:srgbClr val="F5F7FA"/>
         </a:solidFill>
       </p:bgPr>
     </p:bg>
@@ -4006,40 +4591,36 @@
           <a:chExt cx="0" cy="0"/>
         </a:xfrm>
       </p:grpSpPr>
-      <p:pic>
-        <p:nvPicPr>
-          <p:cNvPr id="2" name="Image 0" descr="preencoded.png">    </p:cNvPr>
-          <p:cNvPicPr>
-            <a:picLocks noChangeAspect="1"/>
-          </p:cNvPicPr>
-          <p:nvPr/>
-        </p:nvPicPr>
-        <p:blipFill>
-          <a:blip r:embed="rId1"/>
-          <a:stretch>
-            <a:fillRect/>
-          </a:stretch>
-        </p:blipFill>
-        <p:spPr>
-          <a:xfrm>
-            <a:off x="4023360" y="457200"/>
-            <a:ext cx="1097280" cy="1097280"/>
-          </a:xfrm>
-          <a:prstGeom prst="rect">
-            <a:avLst/>
-          </a:prstGeom>
-        </p:spPr>
-      </p:pic>
-      <p:sp>
-        <p:nvSpPr>
-          <p:cNvPr id="3" name="Text 0"/>
-          <p:cNvSpPr/>
-          <p:nvPr/>
-        </p:nvSpPr>
-        <p:spPr>
-          <a:xfrm>
-            <a:off x="457200" y="1737360"/>
-            <a:ext cx="8229600" cy="548640"/>
+      <p:sp>
+        <p:nvSpPr>
+          <p:cNvPr id="2" name="Shape 0"/>
+          <p:cNvSpPr/>
+          <p:nvPr/>
+        </p:nvSpPr>
+        <p:spPr>
+          <a:xfrm>
+            <a:off x="0" y="0"/>
+            <a:ext cx="9144000" cy="54864"/>
+          </a:xfrm>
+          <a:prstGeom prst="rect">
+            <a:avLst/>
+          </a:prstGeom>
+          <a:solidFill>
+            <a:srgbClr val="1565C0"/>
+          </a:solidFill>
+          <a:ln/>
+        </p:spPr>
+      </p:sp>
+      <p:sp>
+        <p:nvSpPr>
+          <p:cNvPr id="3" name="Text 1"/>
+          <p:cNvSpPr/>
+          <p:nvPr/>
+        </p:nvSpPr>
+        <p:spPr>
+          <a:xfrm>
+            <a:off x="457200" y="182880"/>
+            <a:ext cx="8229600" cy="594360"/>
           </a:xfrm>
           <a:prstGeom prst="rect">
             <a:avLst/>
@@ -4051,34 +4632,81 @@
           <a:bodyPr wrap="square" lIns="0" tIns="0" rIns="0" bIns="0" rtlCol="0" anchor="ctr"/>
           <a:lstStyle/>
           <a:p>
-            <a:pPr algn="ctr" indent="0" marL="0">
+            <a:pPr indent="0" marL="0">
               <a:buNone/>
             </a:pPr>
             <a:r>
-              <a:rPr lang="en-US" sz="2600" b="1" dirty="0">
+              <a:rPr lang="en-US" sz="2400" b="1" dirty="0">
                 <a:solidFill>
-                  <a:srgbClr val="FFFFFF"/>
+                  <a:srgbClr val="0D47A1"/>
                 </a:solidFill>
                 <a:latin typeface="Trebuchet MS" pitchFamily="34" charset="0"/>
                 <a:ea typeface="Trebuchet MS" pitchFamily="34" charset="-122"/>
                 <a:cs typeface="Trebuchet MS" pitchFamily="34" charset="-120"/>
               </a:rPr>
-              <a:t>🎮 Mini-jeu : Module 14</a:t>
-            </a:r>
-            <a:endParaRPr lang="en-US" sz="2600" dirty="0"/>
-          </a:p>
-        </p:txBody>
-      </p:sp>
-      <p:sp>
-        <p:nvSpPr>
-          <p:cNvPr id="4" name="Text 1"/>
-          <p:cNvSpPr/>
-          <p:nvPr/>
-        </p:nvSpPr>
-        <p:spPr>
-          <a:xfrm>
-            <a:off x="914400" y="2377440"/>
-            <a:ext cx="7315200" cy="457200"/>
+              <a:t>Cas spéciaux : CROSS JOIN et réflexive</a:t>
+            </a:r>
+            <a:endParaRPr lang="en-US" sz="2400" dirty="0"/>
+          </a:p>
+        </p:txBody>
+      </p:sp>
+      <p:sp>
+        <p:nvSpPr>
+          <p:cNvPr id="4" name="Shape 2"/>
+          <p:cNvSpPr/>
+          <p:nvPr/>
+        </p:nvSpPr>
+        <p:spPr>
+          <a:xfrm>
+            <a:off x="457200" y="914400"/>
+            <a:ext cx="8229600" cy="521208"/>
+          </a:xfrm>
+          <a:prstGeom prst="rect">
+            <a:avLst/>
+          </a:prstGeom>
+          <a:solidFill>
+            <a:srgbClr val="FFFFFF"/>
+          </a:solidFill>
+          <a:ln/>
+          <a:effectLst>
+            <a:outerShdw sx="100000" sy="100000" kx="0" ky="0" algn="bl" rotWithShape="0" blurRad="50800" dist="25400" dir="8100000">
+              <a:srgbClr val="000000">
+                <a:alpha val="12000"/>
+              </a:srgbClr>
+            </a:outerShdw>
+          </a:effectLst>
+        </p:spPr>
+      </p:sp>
+      <p:sp>
+        <p:nvSpPr>
+          <p:cNvPr id="5" name="Shape 3"/>
+          <p:cNvSpPr/>
+          <p:nvPr/>
+        </p:nvSpPr>
+        <p:spPr>
+          <a:xfrm>
+            <a:off x="457200" y="914400"/>
+            <a:ext cx="45720" cy="521208"/>
+          </a:xfrm>
+          <a:prstGeom prst="rect">
+            <a:avLst/>
+          </a:prstGeom>
+          <a:solidFill>
+            <a:srgbClr val="1565C0"/>
+          </a:solidFill>
+          <a:ln/>
+        </p:spPr>
+      </p:sp>
+      <p:sp>
+        <p:nvSpPr>
+          <p:cNvPr id="6" name="Text 4"/>
+          <p:cNvSpPr/>
+          <p:nvPr/>
+        </p:nvSpPr>
+        <p:spPr>
+          <a:xfrm>
+            <a:off x="685800" y="914400"/>
+            <a:ext cx="7818120" cy="521208"/>
           </a:xfrm>
           <a:prstGeom prst="rect">
             <a:avLst/>
@@ -4090,54 +4718,81 @@
           <a:bodyPr wrap="square" lIns="0" tIns="0" rIns="0" bIns="0" rtlCol="0" anchor="ctr"/>
           <a:lstStyle/>
           <a:p>
-            <a:pPr algn="ctr" indent="0" marL="0">
+            <a:pPr indent="0" marL="0">
               <a:buNone/>
             </a:pPr>
             <a:r>
-              <a:rPr lang="en-US" sz="1400" dirty="0">
+              <a:rPr lang="en-US" sz="1200" dirty="0">
                 <a:solidFill>
-                  <a:srgbClr val="CCCCCC"/>
+                  <a:srgbClr val="1A1A2E"/>
                 </a:solidFill>
                 <a:latin typeface="Calibri" pitchFamily="34" charset="0"/>
                 <a:ea typeface="Calibri" pitchFamily="34" charset="-122"/>
                 <a:cs typeface="Calibri" pitchFamily="34" charset="-120"/>
               </a:rPr>
-              <a:t>Quiz interactif + Score + Correction automatique</a:t>
-            </a:r>
-            <a:endParaRPr lang="en-US" sz="1400" dirty="0"/>
-          </a:p>
-        </p:txBody>
-      </p:sp>
-      <p:sp>
-        <p:nvSpPr>
-          <p:cNvPr id="5" name="Shape 2"/>
-          <p:cNvSpPr/>
-          <p:nvPr/>
-        </p:nvSpPr>
-        <p:spPr>
-          <a:xfrm>
-            <a:off x="2286000" y="3200400"/>
-            <a:ext cx="4572000" cy="548640"/>
-          </a:xfrm>
-          <a:prstGeom prst="rect">
-            <a:avLst/>
-          </a:prstGeom>
-          <a:solidFill>
-            <a:srgbClr val="FF6F00"/>
-          </a:solidFill>
-          <a:ln/>
-        </p:spPr>
-      </p:sp>
-      <p:sp>
-        <p:nvSpPr>
-          <p:cNvPr id="6" name="Text 3"/>
-          <p:cNvSpPr/>
-          <p:nvPr/>
-        </p:nvSpPr>
-        <p:spPr>
-          <a:xfrm>
-            <a:off x="2286000" y="3200400"/>
-            <a:ext cx="4572000" cy="548640"/>
+              <a:t>CROSS JOIN : produit cartésien (TOUTES les combinaisons)</a:t>
+            </a:r>
+            <a:endParaRPr lang="en-US" sz="1200" dirty="0"/>
+          </a:p>
+        </p:txBody>
+      </p:sp>
+      <p:sp>
+        <p:nvSpPr>
+          <p:cNvPr id="7" name="Shape 5"/>
+          <p:cNvSpPr/>
+          <p:nvPr/>
+        </p:nvSpPr>
+        <p:spPr>
+          <a:xfrm>
+            <a:off x="457200" y="1463040"/>
+            <a:ext cx="8229600" cy="521208"/>
+          </a:xfrm>
+          <a:prstGeom prst="rect">
+            <a:avLst/>
+          </a:prstGeom>
+          <a:solidFill>
+            <a:srgbClr val="E3F2FD"/>
+          </a:solidFill>
+          <a:ln/>
+          <a:effectLst>
+            <a:outerShdw sx="100000" sy="100000" kx="0" ky="0" algn="bl" rotWithShape="0" blurRad="50800" dist="25400" dir="8100000">
+              <a:srgbClr val="000000">
+                <a:alpha val="12000"/>
+              </a:srgbClr>
+            </a:outerShdw>
+          </a:effectLst>
+        </p:spPr>
+      </p:sp>
+      <p:sp>
+        <p:nvSpPr>
+          <p:cNvPr id="8" name="Shape 6"/>
+          <p:cNvSpPr/>
+          <p:nvPr/>
+        </p:nvSpPr>
+        <p:spPr>
+          <a:xfrm>
+            <a:off x="457200" y="1463040"/>
+            <a:ext cx="45720" cy="521208"/>
+          </a:xfrm>
+          <a:prstGeom prst="rect">
+            <a:avLst/>
+          </a:prstGeom>
+          <a:solidFill>
+            <a:srgbClr val="1565C0"/>
+          </a:solidFill>
+          <a:ln/>
+        </p:spPr>
+      </p:sp>
+      <p:sp>
+        <p:nvSpPr>
+          <p:cNvPr id="9" name="Text 7"/>
+          <p:cNvSpPr/>
+          <p:nvPr/>
+        </p:nvSpPr>
+        <p:spPr>
+          <a:xfrm>
+            <a:off x="685800" y="1463040"/>
+            <a:ext cx="7818120" cy="521208"/>
           </a:xfrm>
           <a:prstGeom prst="rect">
             <a:avLst/>
@@ -4149,21 +4804,451 @@
           <a:bodyPr wrap="square" lIns="0" tIns="0" rIns="0" bIns="0" rtlCol="0" anchor="ctr"/>
           <a:lstStyle/>
           <a:p>
-            <a:pPr algn="ctr" indent="0" marL="0">
+            <a:pPr indent="0" marL="0">
               <a:buNone/>
             </a:pPr>
             <a:r>
-              <a:rPr lang="en-US" sz="1800" b="1" dirty="0">
+              <a:rPr lang="en-US" sz="1000" dirty="0">
                 <a:solidFill>
-                  <a:srgbClr val="FFFFFF"/>
+                  <a:srgbClr val="0D47A1"/>
                 </a:solidFill>
-                <a:latin typeface="Trebuchet MS" pitchFamily="34" charset="0"/>
-                <a:ea typeface="Trebuchet MS" pitchFamily="34" charset="-122"/>
-                <a:cs typeface="Trebuchet MS" pitchFamily="34" charset="-120"/>
+                <a:latin typeface="JetBrains Mono" pitchFamily="34" charset="0"/>
+                <a:ea typeface="JetBrains Mono" pitchFamily="34" charset="-122"/>
+                <a:cs typeface="JetBrains Mono" pitchFamily="34" charset="-120"/>
               </a:rPr>
-              <a:t>▶  Lancer le jeu sur Vercel</a:t>
-            </a:r>
-            <a:endParaRPr lang="en-US" sz="1800" dirty="0"/>
+              <a:t>SELECT * FROM salle CROSS JOIN ingenieur; → 5×6 = 30 lignes</a:t>
+            </a:r>
+            <a:endParaRPr lang="en-US" sz="1000" dirty="0"/>
+          </a:p>
+        </p:txBody>
+      </p:sp>
+      <p:sp>
+        <p:nvSpPr>
+          <p:cNvPr id="10" name="Shape 8"/>
+          <p:cNvSpPr/>
+          <p:nvPr/>
+        </p:nvSpPr>
+        <p:spPr>
+          <a:xfrm>
+            <a:off x="457200" y="2011680"/>
+            <a:ext cx="8229600" cy="521208"/>
+          </a:xfrm>
+          <a:prstGeom prst="rect">
+            <a:avLst/>
+          </a:prstGeom>
+          <a:solidFill>
+            <a:srgbClr val="FFFFFF"/>
+          </a:solidFill>
+          <a:ln/>
+          <a:effectLst>
+            <a:outerShdw sx="100000" sy="100000" kx="0" ky="0" algn="bl" rotWithShape="0" blurRad="50800" dist="25400" dir="8100000">
+              <a:srgbClr val="000000">
+                <a:alpha val="12000"/>
+              </a:srgbClr>
+            </a:outerShdw>
+          </a:effectLst>
+        </p:spPr>
+      </p:sp>
+      <p:sp>
+        <p:nvSpPr>
+          <p:cNvPr id="11" name="Shape 9"/>
+          <p:cNvSpPr/>
+          <p:nvPr/>
+        </p:nvSpPr>
+        <p:spPr>
+          <a:xfrm>
+            <a:off x="457200" y="2011680"/>
+            <a:ext cx="45720" cy="521208"/>
+          </a:xfrm>
+          <a:prstGeom prst="rect">
+            <a:avLst/>
+          </a:prstGeom>
+          <a:solidFill>
+            <a:srgbClr val="1565C0"/>
+          </a:solidFill>
+          <a:ln/>
+        </p:spPr>
+      </p:sp>
+      <p:sp>
+        <p:nvSpPr>
+          <p:cNvPr id="12" name="Text 10"/>
+          <p:cNvSpPr/>
+          <p:nvPr/>
+        </p:nvSpPr>
+        <p:spPr>
+          <a:xfrm>
+            <a:off x="685800" y="2011680"/>
+            <a:ext cx="7818120" cy="521208"/>
+          </a:xfrm>
+          <a:prstGeom prst="rect">
+            <a:avLst/>
+          </a:prstGeom>
+          <a:noFill/>
+          <a:ln/>
+        </p:spPr>
+        <p:txBody>
+          <a:bodyPr wrap="square" lIns="0" tIns="0" rIns="0" bIns="0" rtlCol="0" anchor="ctr"/>
+          <a:lstStyle/>
+          <a:p>
+            <a:pPr indent="0" marL="0">
+              <a:buNone/>
+            </a:pPr>
+            <a:r>
+              <a:rPr lang="en-US" sz="1200" dirty="0">
+                <a:solidFill>
+                  <a:srgbClr val="1A1A2E"/>
+                </a:solidFill>
+                <a:latin typeface="Calibri" pitchFamily="34" charset="0"/>
+                <a:ea typeface="Calibri" pitchFamily="34" charset="-122"/>
+                <a:cs typeface="Calibri" pitchFamily="34" charset="-120"/>
+              </a:rPr>
+              <a:t>Rarement utile, mais bon à connaître (ex: grille horaire)</a:t>
+            </a:r>
+            <a:endParaRPr lang="en-US" sz="1200" dirty="0"/>
+          </a:p>
+        </p:txBody>
+      </p:sp>
+      <p:sp>
+        <p:nvSpPr>
+          <p:cNvPr id="13" name="Shape 11"/>
+          <p:cNvSpPr/>
+          <p:nvPr/>
+        </p:nvSpPr>
+        <p:spPr>
+          <a:xfrm>
+            <a:off x="457200" y="2560320"/>
+            <a:ext cx="8229600" cy="521208"/>
+          </a:xfrm>
+          <a:prstGeom prst="rect">
+            <a:avLst/>
+          </a:prstGeom>
+          <a:solidFill>
+            <a:srgbClr val="E3F2FD"/>
+          </a:solidFill>
+          <a:ln/>
+          <a:effectLst>
+            <a:outerShdw sx="100000" sy="100000" kx="0" ky="0" algn="bl" rotWithShape="0" blurRad="50800" dist="25400" dir="8100000">
+              <a:srgbClr val="000000">
+                <a:alpha val="12000"/>
+              </a:srgbClr>
+            </a:outerShdw>
+          </a:effectLst>
+        </p:spPr>
+      </p:sp>
+      <p:sp>
+        <p:nvSpPr>
+          <p:cNvPr id="14" name="Shape 12"/>
+          <p:cNvSpPr/>
+          <p:nvPr/>
+        </p:nvSpPr>
+        <p:spPr>
+          <a:xfrm>
+            <a:off x="457200" y="2560320"/>
+            <a:ext cx="45720" cy="521208"/>
+          </a:xfrm>
+          <a:prstGeom prst="rect">
+            <a:avLst/>
+          </a:prstGeom>
+          <a:solidFill>
+            <a:srgbClr val="1565C0"/>
+          </a:solidFill>
+          <a:ln/>
+        </p:spPr>
+      </p:sp>
+      <p:sp>
+        <p:nvSpPr>
+          <p:cNvPr id="15" name="Text 13"/>
+          <p:cNvSpPr/>
+          <p:nvPr/>
+        </p:nvSpPr>
+        <p:spPr>
+          <a:xfrm>
+            <a:off x="685800" y="2560320"/>
+            <a:ext cx="7818120" cy="521208"/>
+          </a:xfrm>
+          <a:prstGeom prst="rect">
+            <a:avLst/>
+          </a:prstGeom>
+          <a:noFill/>
+          <a:ln/>
+        </p:spPr>
+        <p:txBody>
+          <a:bodyPr wrap="square" lIns="0" tIns="0" rIns="0" bIns="0" rtlCol="0" anchor="ctr"/>
+          <a:lstStyle/>
+          <a:p>
+            <a:pPr indent="0" marL="0">
+              <a:buNone/>
+            </a:pPr>
+            <a:r>
+              <a:rPr lang="en-US" sz="1000" dirty="0">
+                <a:solidFill>
+                  <a:srgbClr val="0D47A1"/>
+                </a:solidFill>
+                <a:latin typeface="JetBrains Mono" pitchFamily="34" charset="0"/>
+                <a:ea typeface="JetBrains Mono" pitchFamily="34" charset="-122"/>
+                <a:cs typeface="JetBrains Mono" pitchFamily="34" charset="-120"/>
+              </a:rPr>
+              <a:t>JOIN réflexive : une table avec ELLE-MÊME</a:t>
+            </a:r>
+            <a:endParaRPr lang="en-US" sz="1000" dirty="0"/>
+          </a:p>
+        </p:txBody>
+      </p:sp>
+      <p:sp>
+        <p:nvSpPr>
+          <p:cNvPr id="16" name="Shape 14"/>
+          <p:cNvSpPr/>
+          <p:nvPr/>
+        </p:nvSpPr>
+        <p:spPr>
+          <a:xfrm>
+            <a:off x="457200" y="3108960"/>
+            <a:ext cx="8229600" cy="521208"/>
+          </a:xfrm>
+          <a:prstGeom prst="rect">
+            <a:avLst/>
+          </a:prstGeom>
+          <a:solidFill>
+            <a:srgbClr val="FFFFFF"/>
+          </a:solidFill>
+          <a:ln/>
+          <a:effectLst>
+            <a:outerShdw sx="100000" sy="100000" kx="0" ky="0" algn="bl" rotWithShape="0" blurRad="50800" dist="25400" dir="8100000">
+              <a:srgbClr val="000000">
+                <a:alpha val="12000"/>
+              </a:srgbClr>
+            </a:outerShdw>
+          </a:effectLst>
+        </p:spPr>
+      </p:sp>
+      <p:sp>
+        <p:nvSpPr>
+          <p:cNvPr id="17" name="Shape 15"/>
+          <p:cNvSpPr/>
+          <p:nvPr/>
+        </p:nvSpPr>
+        <p:spPr>
+          <a:xfrm>
+            <a:off x="457200" y="3108960"/>
+            <a:ext cx="45720" cy="521208"/>
+          </a:xfrm>
+          <a:prstGeom prst="rect">
+            <a:avLst/>
+          </a:prstGeom>
+          <a:solidFill>
+            <a:srgbClr val="1565C0"/>
+          </a:solidFill>
+          <a:ln/>
+        </p:spPr>
+      </p:sp>
+      <p:sp>
+        <p:nvSpPr>
+          <p:cNvPr id="18" name="Text 16"/>
+          <p:cNvSpPr/>
+          <p:nvPr/>
+        </p:nvSpPr>
+        <p:spPr>
+          <a:xfrm>
+            <a:off x="685800" y="3108960"/>
+            <a:ext cx="7818120" cy="521208"/>
+          </a:xfrm>
+          <a:prstGeom prst="rect">
+            <a:avLst/>
+          </a:prstGeom>
+          <a:noFill/>
+          <a:ln/>
+        </p:spPr>
+        <p:txBody>
+          <a:bodyPr wrap="square" lIns="0" tIns="0" rIns="0" bIns="0" rtlCol="0" anchor="ctr"/>
+          <a:lstStyle/>
+          <a:p>
+            <a:pPr indent="0" marL="0">
+              <a:buNone/>
+            </a:pPr>
+            <a:r>
+              <a:rPr lang="en-US" sz="1200" dirty="0">
+                <a:solidFill>
+                  <a:srgbClr val="1A1A2E"/>
+                </a:solidFill>
+                <a:latin typeface="Calibri" pitchFamily="34" charset="0"/>
+                <a:ea typeface="Calibri" pitchFamily="34" charset="-122"/>
+                <a:cs typeface="Calibri" pitchFamily="34" charset="-120"/>
+              </a:rPr>
+              <a:t>Ex: employé JOIN employé ON e.manager_id = m.id_employe</a:t>
+            </a:r>
+            <a:endParaRPr lang="en-US" sz="1200" dirty="0"/>
+          </a:p>
+        </p:txBody>
+      </p:sp>
+      <p:sp>
+        <p:nvSpPr>
+          <p:cNvPr id="19" name="Shape 17"/>
+          <p:cNvSpPr/>
+          <p:nvPr/>
+        </p:nvSpPr>
+        <p:spPr>
+          <a:xfrm>
+            <a:off x="457200" y="3657600"/>
+            <a:ext cx="8229600" cy="521208"/>
+          </a:xfrm>
+          <a:prstGeom prst="rect">
+            <a:avLst/>
+          </a:prstGeom>
+          <a:solidFill>
+            <a:srgbClr val="E3F2FD"/>
+          </a:solidFill>
+          <a:ln/>
+          <a:effectLst>
+            <a:outerShdw sx="100000" sy="100000" kx="0" ky="0" algn="bl" rotWithShape="0" blurRad="50800" dist="25400" dir="8100000">
+              <a:srgbClr val="000000">
+                <a:alpha val="12000"/>
+              </a:srgbClr>
+            </a:outerShdw>
+          </a:effectLst>
+        </p:spPr>
+      </p:sp>
+      <p:sp>
+        <p:nvSpPr>
+          <p:cNvPr id="20" name="Shape 18"/>
+          <p:cNvSpPr/>
+          <p:nvPr/>
+        </p:nvSpPr>
+        <p:spPr>
+          <a:xfrm>
+            <a:off x="457200" y="3657600"/>
+            <a:ext cx="45720" cy="521208"/>
+          </a:xfrm>
+          <a:prstGeom prst="rect">
+            <a:avLst/>
+          </a:prstGeom>
+          <a:solidFill>
+            <a:srgbClr val="1565C0"/>
+          </a:solidFill>
+          <a:ln/>
+        </p:spPr>
+      </p:sp>
+      <p:sp>
+        <p:nvSpPr>
+          <p:cNvPr id="21" name="Text 19"/>
+          <p:cNvSpPr/>
+          <p:nvPr/>
+        </p:nvSpPr>
+        <p:spPr>
+          <a:xfrm>
+            <a:off x="685800" y="3657600"/>
+            <a:ext cx="7818120" cy="521208"/>
+          </a:xfrm>
+          <a:prstGeom prst="rect">
+            <a:avLst/>
+          </a:prstGeom>
+          <a:noFill/>
+          <a:ln/>
+        </p:spPr>
+        <p:txBody>
+          <a:bodyPr wrap="square" lIns="0" tIns="0" rIns="0" bIns="0" rtlCol="0" anchor="ctr"/>
+          <a:lstStyle/>
+          <a:p>
+            <a:pPr indent="0" marL="0">
+              <a:buNone/>
+            </a:pPr>
+            <a:r>
+              <a:rPr lang="en-US" sz="1200" dirty="0">
+                <a:solidFill>
+                  <a:srgbClr val="1A1A2E"/>
+                </a:solidFill>
+                <a:latin typeface="Calibri" pitchFamily="34" charset="0"/>
+                <a:ea typeface="Calibri" pitchFamily="34" charset="-122"/>
+                <a:cs typeface="Calibri" pitchFamily="34" charset="-120"/>
+              </a:rPr>
+              <a:t>SwissSound : Artiste collabore_avec Artiste (via table COLLABORATION)</a:t>
+            </a:r>
+            <a:endParaRPr lang="en-US" sz="1200" dirty="0"/>
+          </a:p>
+        </p:txBody>
+      </p:sp>
+      <p:sp>
+        <p:nvSpPr>
+          <p:cNvPr id="22" name="Shape 20"/>
+          <p:cNvSpPr/>
+          <p:nvPr/>
+        </p:nvSpPr>
+        <p:spPr>
+          <a:xfrm>
+            <a:off x="457200" y="4206240"/>
+            <a:ext cx="8229600" cy="521208"/>
+          </a:xfrm>
+          <a:prstGeom prst="rect">
+            <a:avLst/>
+          </a:prstGeom>
+          <a:solidFill>
+            <a:srgbClr val="FFFFFF"/>
+          </a:solidFill>
+          <a:ln/>
+          <a:effectLst>
+            <a:outerShdw sx="100000" sy="100000" kx="0" ky="0" algn="bl" rotWithShape="0" blurRad="50800" dist="25400" dir="8100000">
+              <a:srgbClr val="000000">
+                <a:alpha val="12000"/>
+              </a:srgbClr>
+            </a:outerShdw>
+          </a:effectLst>
+        </p:spPr>
+      </p:sp>
+      <p:sp>
+        <p:nvSpPr>
+          <p:cNvPr id="23" name="Shape 21"/>
+          <p:cNvSpPr/>
+          <p:nvPr/>
+        </p:nvSpPr>
+        <p:spPr>
+          <a:xfrm>
+            <a:off x="457200" y="4206240"/>
+            <a:ext cx="45720" cy="521208"/>
+          </a:xfrm>
+          <a:prstGeom prst="rect">
+            <a:avLst/>
+          </a:prstGeom>
+          <a:solidFill>
+            <a:srgbClr val="1565C0"/>
+          </a:solidFill>
+          <a:ln/>
+        </p:spPr>
+      </p:sp>
+      <p:sp>
+        <p:nvSpPr>
+          <p:cNvPr id="24" name="Text 22"/>
+          <p:cNvSpPr/>
+          <p:nvPr/>
+        </p:nvSpPr>
+        <p:spPr>
+          <a:xfrm>
+            <a:off x="685800" y="4206240"/>
+            <a:ext cx="7818120" cy="521208"/>
+          </a:xfrm>
+          <a:prstGeom prst="rect">
+            <a:avLst/>
+          </a:prstGeom>
+          <a:noFill/>
+          <a:ln/>
+        </p:spPr>
+        <p:txBody>
+          <a:bodyPr wrap="square" lIns="0" tIns="0" rIns="0" bIns="0" rtlCol="0" anchor="ctr"/>
+          <a:lstStyle/>
+          <a:p>
+            <a:pPr indent="0" marL="0">
+              <a:buNone/>
+            </a:pPr>
+            <a:r>
+              <a:rPr lang="en-US" sz="1000" dirty="0">
+                <a:solidFill>
+                  <a:srgbClr val="0D47A1"/>
+                </a:solidFill>
+                <a:latin typeface="JetBrains Mono" pitchFamily="34" charset="0"/>
+                <a:ea typeface="JetBrains Mono" pitchFamily="34" charset="-122"/>
+                <a:cs typeface="JetBrains Mono" pitchFamily="34" charset="-120"/>
+              </a:rPr>
+              <a:t>GROUP_CONCAT avec JOIN : lister les genres d'un artiste en une ligne</a:t>
+            </a:r>
+            <a:endParaRPr lang="en-US" sz="1000" dirty="0"/>
           </a:p>
         </p:txBody>
       </p:sp>
@@ -4201,14 +5286,34 @@
       </p:grpSpPr>
       <p:sp>
         <p:nvSpPr>
-          <p:cNvPr id="2" name="Text 0"/>
-          <p:cNvSpPr/>
-          <p:nvPr/>
-        </p:nvSpPr>
-        <p:spPr>
-          <a:xfrm>
-            <a:off x="457200" y="228600"/>
-            <a:ext cx="8229600" cy="457200"/>
+          <p:cNvPr id="2" name="Shape 0"/>
+          <p:cNvSpPr/>
+          <p:nvPr/>
+        </p:nvSpPr>
+        <p:spPr>
+          <a:xfrm>
+            <a:off x="0" y="0"/>
+            <a:ext cx="9144000" cy="54864"/>
+          </a:xfrm>
+          <a:prstGeom prst="rect">
+            <a:avLst/>
+          </a:prstGeom>
+          <a:solidFill>
+            <a:srgbClr val="1565C0"/>
+          </a:solidFill>
+          <a:ln/>
+        </p:spPr>
+      </p:sp>
+      <p:sp>
+        <p:nvSpPr>
+          <p:cNvPr id="3" name="Text 1"/>
+          <p:cNvSpPr/>
+          <p:nvPr/>
+        </p:nvSpPr>
+        <p:spPr>
+          <a:xfrm>
+            <a:off x="457200" y="182880"/>
+            <a:ext cx="8229600" cy="594360"/>
           </a:xfrm>
           <a:prstGeom prst="rect">
             <a:avLst/>
@@ -4224,7 +5329,7 @@
               <a:buNone/>
             </a:pPr>
             <a:r>
-              <a:rPr lang="en-US" sz="2000" b="1" dirty="0">
+              <a:rPr lang="en-US" sz="2400" b="1" dirty="0">
                 <a:solidFill>
                   <a:srgbClr val="0D47A1"/>
                 </a:solidFill>
@@ -4232,42 +5337,69 @@
                 <a:ea typeface="Trebuchet MS" pitchFamily="34" charset="-122"/>
                 <a:cs typeface="Trebuchet MS" pitchFamily="34" charset="-120"/>
               </a:rPr>
-              <a:t>📋 Mémo Module 14 — JOIN multi-tables</a:t>
-            </a:r>
-            <a:endParaRPr lang="en-US" sz="2000" dirty="0"/>
-          </a:p>
-        </p:txBody>
-      </p:sp>
-      <p:sp>
-        <p:nvSpPr>
-          <p:cNvPr id="3" name="Shape 1"/>
-          <p:cNvSpPr/>
-          <p:nvPr/>
-        </p:nvSpPr>
-        <p:spPr>
-          <a:xfrm>
-            <a:off x="457200" y="731520"/>
-            <a:ext cx="8229600" cy="320040"/>
-          </a:xfrm>
-          <a:prstGeom prst="rect">
-            <a:avLst/>
-          </a:prstGeom>
-          <a:solidFill>
-            <a:srgbClr val="FFF3E0"/>
-          </a:solidFill>
-          <a:ln/>
-        </p:spPr>
-      </p:sp>
-      <p:sp>
-        <p:nvSpPr>
-          <p:cNvPr id="4" name="Text 2"/>
-          <p:cNvSpPr/>
-          <p:nvPr/>
-        </p:nvSpPr>
-        <p:spPr>
-          <a:xfrm>
-            <a:off x="640080" y="731520"/>
-            <a:ext cx="7772400" cy="320040"/>
+              <a:t>Exercice Module 14</a:t>
+            </a:r>
+            <a:endParaRPr lang="en-US" sz="2400" dirty="0"/>
+          </a:p>
+        </p:txBody>
+      </p:sp>
+      <p:sp>
+        <p:nvSpPr>
+          <p:cNvPr id="4" name="Shape 2"/>
+          <p:cNvSpPr/>
+          <p:nvPr/>
+        </p:nvSpPr>
+        <p:spPr>
+          <a:xfrm>
+            <a:off x="457200" y="914400"/>
+            <a:ext cx="8229600" cy="521208"/>
+          </a:xfrm>
+          <a:prstGeom prst="rect">
+            <a:avLst/>
+          </a:prstGeom>
+          <a:solidFill>
+            <a:srgbClr val="FFFFFF"/>
+          </a:solidFill>
+          <a:ln/>
+          <a:effectLst>
+            <a:outerShdw sx="100000" sy="100000" kx="0" ky="0" algn="bl" rotWithShape="0" blurRad="50800" dist="25400" dir="8100000">
+              <a:srgbClr val="000000">
+                <a:alpha val="12000"/>
+              </a:srgbClr>
+            </a:outerShdw>
+          </a:effectLst>
+        </p:spPr>
+      </p:sp>
+      <p:sp>
+        <p:nvSpPr>
+          <p:cNvPr id="5" name="Shape 3"/>
+          <p:cNvSpPr/>
+          <p:nvPr/>
+        </p:nvSpPr>
+        <p:spPr>
+          <a:xfrm>
+            <a:off x="457200" y="914400"/>
+            <a:ext cx="45720" cy="521208"/>
+          </a:xfrm>
+          <a:prstGeom prst="rect">
+            <a:avLst/>
+          </a:prstGeom>
+          <a:solidFill>
+            <a:srgbClr val="1565C0"/>
+          </a:solidFill>
+          <a:ln/>
+        </p:spPr>
+      </p:sp>
+      <p:sp>
+        <p:nvSpPr>
+          <p:cNvPr id="6" name="Text 4"/>
+          <p:cNvSpPr/>
+          <p:nvPr/>
+        </p:nvSpPr>
+        <p:spPr>
+          <a:xfrm>
+            <a:off x="685800" y="914400"/>
+            <a:ext cx="7818120" cy="521208"/>
           </a:xfrm>
           <a:prstGeom prst="rect">
             <a:avLst/>
@@ -4283,7 +5415,858 @@
               <a:buNone/>
             </a:pPr>
             <a:r>
-              <a:rPr lang="en-US" sz="1000" b="1" dirty="0">
+              <a:rPr lang="en-US" sz="1200" dirty="0">
+                <a:solidFill>
+                  <a:srgbClr val="1A1A2E"/>
+                </a:solidFill>
+                <a:latin typeface="Calibri" pitchFamily="34" charset="0"/>
+                <a:ea typeface="Calibri" pitchFamily="34" charset="-122"/>
+                <a:cs typeface="Calibri" pitchFamily="34" charset="-120"/>
+              </a:rPr>
+              <a:t>Écrire 10 requêtes multi-tables (voir sql/02_queries.sql, requêtes 21-30)</a:t>
+            </a:r>
+            <a:endParaRPr lang="en-US" sz="1200" dirty="0"/>
+          </a:p>
+        </p:txBody>
+      </p:sp>
+      <p:sp>
+        <p:nvSpPr>
+          <p:cNvPr id="7" name="Shape 5"/>
+          <p:cNvSpPr/>
+          <p:nvPr/>
+        </p:nvSpPr>
+        <p:spPr>
+          <a:xfrm>
+            <a:off x="457200" y="1463040"/>
+            <a:ext cx="8229600" cy="521208"/>
+          </a:xfrm>
+          <a:prstGeom prst="rect">
+            <a:avLst/>
+          </a:prstGeom>
+          <a:solidFill>
+            <a:srgbClr val="E3F2FD"/>
+          </a:solidFill>
+          <a:ln/>
+          <a:effectLst>
+            <a:outerShdw sx="100000" sy="100000" kx="0" ky="0" algn="bl" rotWithShape="0" blurRad="50800" dist="25400" dir="8100000">
+              <a:srgbClr val="000000">
+                <a:alpha val="12000"/>
+              </a:srgbClr>
+            </a:outerShdw>
+          </a:effectLst>
+        </p:spPr>
+      </p:sp>
+      <p:sp>
+        <p:nvSpPr>
+          <p:cNvPr id="8" name="Shape 6"/>
+          <p:cNvSpPr/>
+          <p:nvPr/>
+        </p:nvSpPr>
+        <p:spPr>
+          <a:xfrm>
+            <a:off x="457200" y="1463040"/>
+            <a:ext cx="45720" cy="521208"/>
+          </a:xfrm>
+          <a:prstGeom prst="rect">
+            <a:avLst/>
+          </a:prstGeom>
+          <a:solidFill>
+            <a:srgbClr val="1565C0"/>
+          </a:solidFill>
+          <a:ln/>
+        </p:spPr>
+      </p:sp>
+      <p:sp>
+        <p:nvSpPr>
+          <p:cNvPr id="9" name="Text 7"/>
+          <p:cNvSpPr/>
+          <p:nvPr/>
+        </p:nvSpPr>
+        <p:spPr>
+          <a:xfrm>
+            <a:off x="685800" y="1463040"/>
+            <a:ext cx="7818120" cy="521208"/>
+          </a:xfrm>
+          <a:prstGeom prst="rect">
+            <a:avLst/>
+          </a:prstGeom>
+          <a:noFill/>
+          <a:ln/>
+        </p:spPr>
+        <p:txBody>
+          <a:bodyPr wrap="square" lIns="0" tIns="0" rIns="0" bIns="0" rtlCol="0" anchor="ctr"/>
+          <a:lstStyle/>
+          <a:p>
+            <a:pPr indent="0" marL="0">
+              <a:buNone/>
+            </a:pPr>
+            <a:r>
+              <a:rPr lang="en-US" sz="1200" dirty="0">
+                <a:solidFill>
+                  <a:srgbClr val="1A1A2E"/>
+                </a:solidFill>
+                <a:latin typeface="Calibri" pitchFamily="34" charset="0"/>
+                <a:ea typeface="Calibri" pitchFamily="34" charset="-122"/>
+                <a:cs typeface="Calibri" pitchFamily="34" charset="-120"/>
+              </a:rPr>
+              <a:t>Au moins 1 INNER JOIN, 1 LEFT JOIN, 1 jointure 3+ tables</a:t>
+            </a:r>
+            <a:endParaRPr lang="en-US" sz="1200" dirty="0"/>
+          </a:p>
+        </p:txBody>
+      </p:sp>
+      <p:sp>
+        <p:nvSpPr>
+          <p:cNvPr id="10" name="Shape 8"/>
+          <p:cNvSpPr/>
+          <p:nvPr/>
+        </p:nvSpPr>
+        <p:spPr>
+          <a:xfrm>
+            <a:off x="457200" y="2011680"/>
+            <a:ext cx="8229600" cy="521208"/>
+          </a:xfrm>
+          <a:prstGeom prst="rect">
+            <a:avLst/>
+          </a:prstGeom>
+          <a:solidFill>
+            <a:srgbClr val="FFFFFF"/>
+          </a:solidFill>
+          <a:ln/>
+          <a:effectLst>
+            <a:outerShdw sx="100000" sy="100000" kx="0" ky="0" algn="bl" rotWithShape="0" blurRad="50800" dist="25400" dir="8100000">
+              <a:srgbClr val="000000">
+                <a:alpha val="12000"/>
+              </a:srgbClr>
+            </a:outerShdw>
+          </a:effectLst>
+        </p:spPr>
+      </p:sp>
+      <p:sp>
+        <p:nvSpPr>
+          <p:cNvPr id="11" name="Shape 9"/>
+          <p:cNvSpPr/>
+          <p:nvPr/>
+        </p:nvSpPr>
+        <p:spPr>
+          <a:xfrm>
+            <a:off x="457200" y="2011680"/>
+            <a:ext cx="45720" cy="521208"/>
+          </a:xfrm>
+          <a:prstGeom prst="rect">
+            <a:avLst/>
+          </a:prstGeom>
+          <a:solidFill>
+            <a:srgbClr val="1565C0"/>
+          </a:solidFill>
+          <a:ln/>
+        </p:spPr>
+      </p:sp>
+      <p:sp>
+        <p:nvSpPr>
+          <p:cNvPr id="12" name="Text 10"/>
+          <p:cNvSpPr/>
+          <p:nvPr/>
+        </p:nvSpPr>
+        <p:spPr>
+          <a:xfrm>
+            <a:off x="685800" y="2011680"/>
+            <a:ext cx="7818120" cy="521208"/>
+          </a:xfrm>
+          <a:prstGeom prst="rect">
+            <a:avLst/>
+          </a:prstGeom>
+          <a:noFill/>
+          <a:ln/>
+        </p:spPr>
+        <p:txBody>
+          <a:bodyPr wrap="square" lIns="0" tIns="0" rIns="0" bIns="0" rtlCol="0" anchor="ctr"/>
+          <a:lstStyle/>
+          <a:p>
+            <a:pPr indent="0" marL="0">
+              <a:buNone/>
+            </a:pPr>
+            <a:r>
+              <a:rPr lang="en-US" sz="1200" dirty="0">
+                <a:solidFill>
+                  <a:srgbClr val="1A1A2E"/>
+                </a:solidFill>
+                <a:latin typeface="Calibri" pitchFamily="34" charset="0"/>
+                <a:ea typeface="Calibri" pitchFamily="34" charset="-122"/>
+                <a:cs typeface="Calibri" pitchFamily="34" charset="-120"/>
+              </a:rPr>
+              <a:t>Trouver les artistes SANS album (LEFT JOIN + IS NULL)</a:t>
+            </a:r>
+            <a:endParaRPr lang="en-US" sz="1200" dirty="0"/>
+          </a:p>
+        </p:txBody>
+      </p:sp>
+      <p:sp>
+        <p:nvSpPr>
+          <p:cNvPr id="13" name="Shape 11"/>
+          <p:cNvSpPr/>
+          <p:nvPr/>
+        </p:nvSpPr>
+        <p:spPr>
+          <a:xfrm>
+            <a:off x="457200" y="2560320"/>
+            <a:ext cx="8229600" cy="521208"/>
+          </a:xfrm>
+          <a:prstGeom prst="rect">
+            <a:avLst/>
+          </a:prstGeom>
+          <a:solidFill>
+            <a:srgbClr val="E3F2FD"/>
+          </a:solidFill>
+          <a:ln/>
+          <a:effectLst>
+            <a:outerShdw sx="100000" sy="100000" kx="0" ky="0" algn="bl" rotWithShape="0" blurRad="50800" dist="25400" dir="8100000">
+              <a:srgbClr val="000000">
+                <a:alpha val="12000"/>
+              </a:srgbClr>
+            </a:outerShdw>
+          </a:effectLst>
+        </p:spPr>
+      </p:sp>
+      <p:sp>
+        <p:nvSpPr>
+          <p:cNvPr id="14" name="Shape 12"/>
+          <p:cNvSpPr/>
+          <p:nvPr/>
+        </p:nvSpPr>
+        <p:spPr>
+          <a:xfrm>
+            <a:off x="457200" y="2560320"/>
+            <a:ext cx="45720" cy="521208"/>
+          </a:xfrm>
+          <a:prstGeom prst="rect">
+            <a:avLst/>
+          </a:prstGeom>
+          <a:solidFill>
+            <a:srgbClr val="1565C0"/>
+          </a:solidFill>
+          <a:ln/>
+        </p:spPr>
+      </p:sp>
+      <p:sp>
+        <p:nvSpPr>
+          <p:cNvPr id="15" name="Text 13"/>
+          <p:cNvSpPr/>
+          <p:nvPr/>
+        </p:nvSpPr>
+        <p:spPr>
+          <a:xfrm>
+            <a:off x="685800" y="2560320"/>
+            <a:ext cx="7818120" cy="521208"/>
+          </a:xfrm>
+          <a:prstGeom prst="rect">
+            <a:avLst/>
+          </a:prstGeom>
+          <a:noFill/>
+          <a:ln/>
+        </p:spPr>
+        <p:txBody>
+          <a:bodyPr wrap="square" lIns="0" tIns="0" rIns="0" bIns="0" rtlCol="0" anchor="ctr"/>
+          <a:lstStyle/>
+          <a:p>
+            <a:pPr indent="0" marL="0">
+              <a:buNone/>
+            </a:pPr>
+            <a:r>
+              <a:rPr lang="en-US" sz="1200" dirty="0">
+                <a:solidFill>
+                  <a:srgbClr val="1A1A2E"/>
+                </a:solidFill>
+                <a:latin typeface="Calibri" pitchFamily="34" charset="0"/>
+                <a:ea typeface="Calibri" pitchFamily="34" charset="-122"/>
+                <a:cs typeface="Calibri" pitchFamily="34" charset="-120"/>
+              </a:rPr>
+              <a:t>Afficher sessions complètes (artiste + salle + ingénieur)</a:t>
+            </a:r>
+            <a:endParaRPr lang="en-US" sz="1200" dirty="0"/>
+          </a:p>
+        </p:txBody>
+      </p:sp>
+      <p:sp>
+        <p:nvSpPr>
+          <p:cNvPr id="16" name="Shape 14"/>
+          <p:cNvSpPr/>
+          <p:nvPr/>
+        </p:nvSpPr>
+        <p:spPr>
+          <a:xfrm>
+            <a:off x="457200" y="3108960"/>
+            <a:ext cx="8229600" cy="521208"/>
+          </a:xfrm>
+          <a:prstGeom prst="rect">
+            <a:avLst/>
+          </a:prstGeom>
+          <a:solidFill>
+            <a:srgbClr val="FFFFFF"/>
+          </a:solidFill>
+          <a:ln/>
+          <a:effectLst>
+            <a:outerShdw sx="100000" sy="100000" kx="0" ky="0" algn="bl" rotWithShape="0" blurRad="50800" dist="25400" dir="8100000">
+              <a:srgbClr val="000000">
+                <a:alpha val="12000"/>
+              </a:srgbClr>
+            </a:outerShdw>
+          </a:effectLst>
+        </p:spPr>
+      </p:sp>
+      <p:sp>
+        <p:nvSpPr>
+          <p:cNvPr id="17" name="Shape 15"/>
+          <p:cNvSpPr/>
+          <p:nvPr/>
+        </p:nvSpPr>
+        <p:spPr>
+          <a:xfrm>
+            <a:off x="457200" y="3108960"/>
+            <a:ext cx="45720" cy="521208"/>
+          </a:xfrm>
+          <a:prstGeom prst="rect">
+            <a:avLst/>
+          </a:prstGeom>
+          <a:solidFill>
+            <a:srgbClr val="1565C0"/>
+          </a:solidFill>
+          <a:ln/>
+        </p:spPr>
+      </p:sp>
+      <p:sp>
+        <p:nvSpPr>
+          <p:cNvPr id="18" name="Text 16"/>
+          <p:cNvSpPr/>
+          <p:nvPr/>
+        </p:nvSpPr>
+        <p:spPr>
+          <a:xfrm>
+            <a:off x="685800" y="3108960"/>
+            <a:ext cx="7818120" cy="521208"/>
+          </a:xfrm>
+          <a:prstGeom prst="rect">
+            <a:avLst/>
+          </a:prstGeom>
+          <a:noFill/>
+          <a:ln/>
+        </p:spPr>
+        <p:txBody>
+          <a:bodyPr wrap="square" lIns="0" tIns="0" rIns="0" bIns="0" rtlCol="0" anchor="ctr"/>
+          <a:lstStyle/>
+          <a:p>
+            <a:pPr indent="0" marL="0">
+              <a:buNone/>
+            </a:pPr>
+            <a:r>
+              <a:rPr lang="en-US" sz="1200" dirty="0">
+                <a:solidFill>
+                  <a:srgbClr val="1A1A2E"/>
+                </a:solidFill>
+                <a:latin typeface="Calibri" pitchFamily="34" charset="0"/>
+                <a:ea typeface="Calibri" pitchFamily="34" charset="-122"/>
+                <a:cs typeface="Calibri" pitchFamily="34" charset="-120"/>
+              </a:rPr>
+              <a:t>Factures impayées avec nom d'artiste (JOIN + WHERE)</a:t>
+            </a:r>
+            <a:endParaRPr lang="en-US" sz="1200" dirty="0"/>
+          </a:p>
+        </p:txBody>
+      </p:sp>
+      <p:sp>
+        <p:nvSpPr>
+          <p:cNvPr id="19" name="Shape 17"/>
+          <p:cNvSpPr/>
+          <p:nvPr/>
+        </p:nvSpPr>
+        <p:spPr>
+          <a:xfrm>
+            <a:off x="457200" y="3657600"/>
+            <a:ext cx="8229600" cy="521208"/>
+          </a:xfrm>
+          <a:prstGeom prst="rect">
+            <a:avLst/>
+          </a:prstGeom>
+          <a:solidFill>
+            <a:srgbClr val="E3F2FD"/>
+          </a:solidFill>
+          <a:ln/>
+          <a:effectLst>
+            <a:outerShdw sx="100000" sy="100000" kx="0" ky="0" algn="bl" rotWithShape="0" blurRad="50800" dist="25400" dir="8100000">
+              <a:srgbClr val="000000">
+                <a:alpha val="12000"/>
+              </a:srgbClr>
+            </a:outerShdw>
+          </a:effectLst>
+        </p:spPr>
+      </p:sp>
+      <p:sp>
+        <p:nvSpPr>
+          <p:cNvPr id="20" name="Shape 18"/>
+          <p:cNvSpPr/>
+          <p:nvPr/>
+        </p:nvSpPr>
+        <p:spPr>
+          <a:xfrm>
+            <a:off x="457200" y="3657600"/>
+            <a:ext cx="45720" cy="521208"/>
+          </a:xfrm>
+          <a:prstGeom prst="rect">
+            <a:avLst/>
+          </a:prstGeom>
+          <a:solidFill>
+            <a:srgbClr val="1565C0"/>
+          </a:solidFill>
+          <a:ln/>
+        </p:spPr>
+      </p:sp>
+      <p:sp>
+        <p:nvSpPr>
+          <p:cNvPr id="21" name="Text 19"/>
+          <p:cNvSpPr/>
+          <p:nvPr/>
+        </p:nvSpPr>
+        <p:spPr>
+          <a:xfrm>
+            <a:off x="685800" y="3657600"/>
+            <a:ext cx="7818120" cy="521208"/>
+          </a:xfrm>
+          <a:prstGeom prst="rect">
+            <a:avLst/>
+          </a:prstGeom>
+          <a:noFill/>
+          <a:ln/>
+        </p:spPr>
+        <p:txBody>
+          <a:bodyPr wrap="square" lIns="0" tIns="0" rIns="0" bIns="0" rtlCol="0" anchor="ctr"/>
+          <a:lstStyle/>
+          <a:p>
+            <a:pPr indent="0" marL="0">
+              <a:buNone/>
+            </a:pPr>
+            <a:r>
+              <a:rPr lang="en-US" sz="1200" dirty="0">
+                <a:solidFill>
+                  <a:srgbClr val="1A1A2E"/>
+                </a:solidFill>
+                <a:latin typeface="Calibri" pitchFamily="34" charset="0"/>
+                <a:ea typeface="Calibri" pitchFamily="34" charset="-122"/>
+                <a:cs typeface="Calibri" pitchFamily="34" charset="-120"/>
+              </a:rPr>
+              <a:t>CA par artiste avec nom (JOIN + GROUP BY + SUM)</a:t>
+            </a:r>
+            <a:endParaRPr lang="en-US" sz="1200" dirty="0"/>
+          </a:p>
+        </p:txBody>
+      </p:sp>
+      <p:sp>
+        <p:nvSpPr>
+          <p:cNvPr id="22" name="Shape 20"/>
+          <p:cNvSpPr/>
+          <p:nvPr/>
+        </p:nvSpPr>
+        <p:spPr>
+          <a:xfrm>
+            <a:off x="457200" y="4206240"/>
+            <a:ext cx="8229600" cy="521208"/>
+          </a:xfrm>
+          <a:prstGeom prst="rect">
+            <a:avLst/>
+          </a:prstGeom>
+          <a:solidFill>
+            <a:srgbClr val="FFFFFF"/>
+          </a:solidFill>
+          <a:ln/>
+          <a:effectLst>
+            <a:outerShdw sx="100000" sy="100000" kx="0" ky="0" algn="bl" rotWithShape="0" blurRad="50800" dist="25400" dir="8100000">
+              <a:srgbClr val="000000">
+                <a:alpha val="12000"/>
+              </a:srgbClr>
+            </a:outerShdw>
+          </a:effectLst>
+        </p:spPr>
+      </p:sp>
+      <p:sp>
+        <p:nvSpPr>
+          <p:cNvPr id="23" name="Shape 21"/>
+          <p:cNvSpPr/>
+          <p:nvPr/>
+        </p:nvSpPr>
+        <p:spPr>
+          <a:xfrm>
+            <a:off x="457200" y="4206240"/>
+            <a:ext cx="45720" cy="521208"/>
+          </a:xfrm>
+          <a:prstGeom prst="rect">
+            <a:avLst/>
+          </a:prstGeom>
+          <a:solidFill>
+            <a:srgbClr val="1565C0"/>
+          </a:solidFill>
+          <a:ln/>
+        </p:spPr>
+      </p:sp>
+      <p:sp>
+        <p:nvSpPr>
+          <p:cNvPr id="24" name="Text 22"/>
+          <p:cNvSpPr/>
+          <p:nvPr/>
+        </p:nvSpPr>
+        <p:spPr>
+          <a:xfrm>
+            <a:off x="685800" y="4206240"/>
+            <a:ext cx="7818120" cy="521208"/>
+          </a:xfrm>
+          <a:prstGeom prst="rect">
+            <a:avLst/>
+          </a:prstGeom>
+          <a:noFill/>
+          <a:ln/>
+        </p:spPr>
+        <p:txBody>
+          <a:bodyPr wrap="square" lIns="0" tIns="0" rIns="0" bIns="0" rtlCol="0" anchor="ctr"/>
+          <a:lstStyle/>
+          <a:p>
+            <a:pPr indent="0" marL="0">
+              <a:buNone/>
+            </a:pPr>
+            <a:r>
+              <a:rPr lang="en-US" sz="1200" dirty="0">
+                <a:solidFill>
+                  <a:srgbClr val="1A1A2E"/>
+                </a:solidFill>
+                <a:latin typeface="Calibri" pitchFamily="34" charset="0"/>
+                <a:ea typeface="Calibri" pitchFamily="34" charset="-122"/>
+                <a:cs typeface="Calibri" pitchFamily="34" charset="-120"/>
+              </a:rPr>
+              <a:t>DÉFI : requête monstre joignant 5 tables avec agrégation + HAVING + ORDER BY</a:t>
+            </a:r>
+            <a:endParaRPr lang="en-US" sz="1200" dirty="0"/>
+          </a:p>
+        </p:txBody>
+      </p:sp>
+    </p:spTree>
+  </p:cSld>
+  <p:clrMapOvr>
+    <a:masterClrMapping/>
+  </p:clrMapOvr>
+</p:sld>
+</file>
+
+<file path=ppt/slides/slide8.xml><?xml version="1.0" encoding="utf-8"?>
+<p:sld xmlns:a="http://schemas.openxmlformats.org/drawingml/2006/main" xmlns:r="http://schemas.openxmlformats.org/officeDocument/2006/relationships" xmlns:p="http://schemas.openxmlformats.org/presentationml/2006/main">
+  <p:cSld name="Slide 8">
+    <p:bg>
+      <p:bgPr>
+        <a:solidFill>
+          <a:srgbClr val="0D47A1"/>
+        </a:solidFill>
+      </p:bgPr>
+    </p:bg>
+    <p:spTree>
+      <p:nvGrpSpPr>
+        <p:cNvPr id="1" name=""/>
+        <p:cNvGrpSpPr/>
+        <p:nvPr/>
+      </p:nvGrpSpPr>
+      <p:grpSpPr>
+        <a:xfrm>
+          <a:off x="0" y="0"/>
+          <a:ext cx="0" cy="0"/>
+          <a:chOff x="0" y="0"/>
+          <a:chExt cx="0" cy="0"/>
+        </a:xfrm>
+      </p:grpSpPr>
+      <p:sp>
+        <p:nvSpPr>
+          <p:cNvPr id="2" name="Text 0"/>
+          <p:cNvSpPr/>
+          <p:nvPr/>
+        </p:nvSpPr>
+        <p:spPr>
+          <a:xfrm>
+            <a:off x="3840480" y="457200"/>
+            <a:ext cx="1463040" cy="1097280"/>
+          </a:xfrm>
+          <a:prstGeom prst="rect">
+            <a:avLst/>
+          </a:prstGeom>
+          <a:noFill/>
+          <a:ln/>
+        </p:spPr>
+        <p:txBody>
+          <a:bodyPr wrap="square" lIns="0" tIns="0" rIns="0" bIns="0" rtlCol="0" anchor="ctr"/>
+          <a:lstStyle/>
+          <a:p>
+            <a:pPr algn="ctr" indent="0" marL="0">
+              <a:buNone/>
+            </a:pPr>
+            <a:r>
+              <a:rPr lang="en-US" sz="6000" dirty="0">
+                <a:solidFill>
+                  <a:srgbClr val="000000"/>
+                </a:solidFill>
+              </a:rPr>
+              <a:t>🎮</a:t>
+            </a:r>
+            <a:endParaRPr lang="en-US" sz="6000" dirty="0"/>
+          </a:p>
+        </p:txBody>
+      </p:sp>
+      <p:sp>
+        <p:nvSpPr>
+          <p:cNvPr id="3" name="Text 1"/>
+          <p:cNvSpPr/>
+          <p:nvPr/>
+        </p:nvSpPr>
+        <p:spPr>
+          <a:xfrm>
+            <a:off x="457200" y="1645920"/>
+            <a:ext cx="8229600" cy="548640"/>
+          </a:xfrm>
+          <a:prstGeom prst="rect">
+            <a:avLst/>
+          </a:prstGeom>
+          <a:noFill/>
+          <a:ln/>
+        </p:spPr>
+        <p:txBody>
+          <a:bodyPr wrap="square" lIns="0" tIns="0" rIns="0" bIns="0" rtlCol="0" anchor="ctr"/>
+          <a:lstStyle/>
+          <a:p>
+            <a:pPr algn="ctr" indent="0" marL="0">
+              <a:buNone/>
+            </a:pPr>
+            <a:r>
+              <a:rPr lang="en-US" sz="2600" b="1" dirty="0">
+                <a:solidFill>
+                  <a:srgbClr val="FFFFFF"/>
+                </a:solidFill>
+                <a:latin typeface="Trebuchet MS" pitchFamily="34" charset="0"/>
+                <a:ea typeface="Trebuchet MS" pitchFamily="34" charset="-122"/>
+                <a:cs typeface="Trebuchet MS" pitchFamily="34" charset="-120"/>
+              </a:rPr>
+              <a:t>Mini-jeu : Le Puzzle de Tables</a:t>
+            </a:r>
+            <a:endParaRPr lang="en-US" sz="2600" dirty="0"/>
+          </a:p>
+        </p:txBody>
+      </p:sp>
+      <p:sp>
+        <p:nvSpPr>
+          <p:cNvPr id="4" name="Text 2"/>
+          <p:cNvSpPr/>
+          <p:nvPr/>
+        </p:nvSpPr>
+        <p:spPr>
+          <a:xfrm>
+            <a:off x="1371600" y="2286000"/>
+            <a:ext cx="6400800" cy="731520"/>
+          </a:xfrm>
+          <a:prstGeom prst="rect">
+            <a:avLst/>
+          </a:prstGeom>
+          <a:noFill/>
+          <a:ln/>
+        </p:spPr>
+        <p:txBody>
+          <a:bodyPr wrap="square" lIns="0" tIns="0" rIns="0" bIns="0" rtlCol="0" anchor="ctr"/>
+          <a:lstStyle/>
+          <a:p>
+            <a:pPr algn="ctr" indent="0" marL="0">
+              <a:buNone/>
+            </a:pPr>
+            <a:r>
+              <a:rPr lang="en-US" sz="1400" dirty="0">
+                <a:solidFill>
+                  <a:srgbClr val="CCCCCC"/>
+                </a:solidFill>
+                <a:latin typeface="Calibri" pitchFamily="34" charset="0"/>
+                <a:ea typeface="Calibri" pitchFamily="34" charset="-122"/>
+                <a:cs typeface="Calibri" pitchFamily="34" charset="-120"/>
+              </a:rPr>
+              <a:t>Connectez les bonnes colonnes pour assembler le résultat !</a:t>
+            </a:r>
+            <a:endParaRPr lang="en-US" sz="1400" dirty="0"/>
+          </a:p>
+        </p:txBody>
+      </p:sp>
+      <p:sp>
+        <p:nvSpPr>
+          <p:cNvPr id="5" name="Shape 3"/>
+          <p:cNvSpPr/>
+          <p:nvPr/>
+        </p:nvSpPr>
+        <p:spPr>
+          <a:xfrm>
+            <a:off x="2286000" y="3291840"/>
+            <a:ext cx="4572000" cy="548640"/>
+          </a:xfrm>
+          <a:prstGeom prst="rect">
+            <a:avLst/>
+          </a:prstGeom>
+          <a:solidFill>
+            <a:srgbClr val="FF6F00"/>
+          </a:solidFill>
+          <a:ln/>
+        </p:spPr>
+      </p:sp>
+      <p:sp>
+        <p:nvSpPr>
+          <p:cNvPr id="6" name="Text 4"/>
+          <p:cNvSpPr/>
+          <p:nvPr/>
+        </p:nvSpPr>
+        <p:spPr>
+          <a:xfrm>
+            <a:off x="2286000" y="3291840"/>
+            <a:ext cx="4572000" cy="548640"/>
+          </a:xfrm>
+          <a:prstGeom prst="rect">
+            <a:avLst/>
+          </a:prstGeom>
+          <a:noFill/>
+          <a:ln/>
+        </p:spPr>
+        <p:txBody>
+          <a:bodyPr wrap="square" lIns="0" tIns="0" rIns="0" bIns="0" rtlCol="0" anchor="ctr"/>
+          <a:lstStyle/>
+          <a:p>
+            <a:pPr algn="ctr" indent="0" marL="0">
+              <a:buNone/>
+            </a:pPr>
+            <a:r>
+              <a:rPr lang="en-US" sz="1800" b="1" dirty="0">
+                <a:solidFill>
+                  <a:srgbClr val="FFFFFF"/>
+                </a:solidFill>
+                <a:latin typeface="Trebuchet MS" pitchFamily="34" charset="0"/>
+                <a:ea typeface="Trebuchet MS" pitchFamily="34" charset="-122"/>
+                <a:cs typeface="Trebuchet MS" pitchFamily="34" charset="-120"/>
+              </a:rPr>
+              <a:t>▶  Lancer le jeu</a:t>
+            </a:r>
+            <a:endParaRPr lang="en-US" sz="1800" dirty="0"/>
+          </a:p>
+        </p:txBody>
+      </p:sp>
+    </p:spTree>
+  </p:cSld>
+  <p:clrMapOvr>
+    <a:masterClrMapping/>
+  </p:clrMapOvr>
+</p:sld>
+</file>
+
+<file path=ppt/slides/slide9.xml><?xml version="1.0" encoding="utf-8"?>
+<p:sld xmlns:a="http://schemas.openxmlformats.org/drawingml/2006/main" xmlns:r="http://schemas.openxmlformats.org/officeDocument/2006/relationships" xmlns:p="http://schemas.openxmlformats.org/presentationml/2006/main">
+  <p:cSld name="Slide 9">
+    <p:bg>
+      <p:bgPr>
+        <a:solidFill>
+          <a:srgbClr val="F5F7FA"/>
+        </a:solidFill>
+      </p:bgPr>
+    </p:bg>
+    <p:spTree>
+      <p:nvGrpSpPr>
+        <p:cNvPr id="1" name=""/>
+        <p:cNvGrpSpPr/>
+        <p:nvPr/>
+      </p:nvGrpSpPr>
+      <p:grpSpPr>
+        <a:xfrm>
+          <a:off x="0" y="0"/>
+          <a:ext cx="0" cy="0"/>
+          <a:chOff x="0" y="0"/>
+          <a:chExt cx="0" cy="0"/>
+        </a:xfrm>
+      </p:grpSpPr>
+      <p:sp>
+        <p:nvSpPr>
+          <p:cNvPr id="2" name="Text 0"/>
+          <p:cNvSpPr/>
+          <p:nvPr/>
+        </p:nvSpPr>
+        <p:spPr>
+          <a:xfrm>
+            <a:off x="457200" y="137160"/>
+            <a:ext cx="5486400" cy="411480"/>
+          </a:xfrm>
+          <a:prstGeom prst="rect">
+            <a:avLst/>
+          </a:prstGeom>
+          <a:noFill/>
+          <a:ln/>
+        </p:spPr>
+        <p:txBody>
+          <a:bodyPr wrap="square" lIns="0" tIns="0" rIns="0" bIns="0" rtlCol="0" anchor="ctr"/>
+          <a:lstStyle/>
+          <a:p>
+            <a:pPr indent="0" marL="0">
+              <a:buNone/>
+            </a:pPr>
+            <a:r>
+              <a:rPr lang="en-US" sz="1800" b="1" dirty="0">
+                <a:solidFill>
+                  <a:srgbClr val="0D47A1"/>
+                </a:solidFill>
+                <a:latin typeface="Trebuchet MS" pitchFamily="34" charset="0"/>
+                <a:ea typeface="Trebuchet MS" pitchFamily="34" charset="-122"/>
+                <a:cs typeface="Trebuchet MS" pitchFamily="34" charset="-120"/>
+              </a:rPr>
+              <a:t>📋 Mémo Module 14</a:t>
+            </a:r>
+            <a:endParaRPr lang="en-US" sz="1800" dirty="0"/>
+          </a:p>
+        </p:txBody>
+      </p:sp>
+      <p:sp>
+        <p:nvSpPr>
+          <p:cNvPr id="3" name="Shape 1"/>
+          <p:cNvSpPr/>
+          <p:nvPr/>
+        </p:nvSpPr>
+        <p:spPr>
+          <a:xfrm>
+            <a:off x="457200" y="548640"/>
+            <a:ext cx="8229600" cy="274320"/>
+          </a:xfrm>
+          <a:prstGeom prst="rect">
+            <a:avLst/>
+          </a:prstGeom>
+          <a:solidFill>
+            <a:srgbClr val="FFF3E0"/>
+          </a:solidFill>
+          <a:ln/>
+        </p:spPr>
+      </p:sp>
+      <p:sp>
+        <p:nvSpPr>
+          <p:cNvPr id="4" name="Text 2"/>
+          <p:cNvSpPr/>
+          <p:nvPr/>
+        </p:nvSpPr>
+        <p:spPr>
+          <a:xfrm>
+            <a:off x="640080" y="548640"/>
+            <a:ext cx="7772400" cy="274320"/>
+          </a:xfrm>
+          <a:prstGeom prst="rect">
+            <a:avLst/>
+          </a:prstGeom>
+          <a:noFill/>
+          <a:ln/>
+        </p:spPr>
+        <p:txBody>
+          <a:bodyPr wrap="square" lIns="0" tIns="0" rIns="0" bIns="0" rtlCol="0" anchor="ctr"/>
+          <a:lstStyle/>
+          <a:p>
+            <a:pPr indent="0" marL="0">
+              <a:buNone/>
+            </a:pPr>
+            <a:r>
+              <a:rPr lang="en-US" sz="900" b="1" dirty="0">
                 <a:solidFill>
                   <a:srgbClr val="E65100"/>
                 </a:solidFill>
@@ -4291,9 +6274,9 @@
                 <a:ea typeface="Calibri" pitchFamily="34" charset="-122"/>
                 <a:cs typeface="Calibri" pitchFamily="34" charset="-120"/>
               </a:rPr>
-              <a:t>🔒 Ce mémo se débloque quand toutes les phases du module sont terminées !</a:t>
-            </a:r>
-            <a:endParaRPr lang="en-US" sz="1000" dirty="0"/>
+              <a:t>🔒 Déblocable après complétion</a:t>
+            </a:r>
+            <a:endParaRPr lang="en-US" sz="900" dirty="0"/>
           </a:p>
         </p:txBody>
       </p:sp>
@@ -4305,8 +6288,8 @@
         </p:nvSpPr>
         <p:spPr>
           <a:xfrm>
-            <a:off x="457200" y="1188720"/>
-            <a:ext cx="8229600" cy="713232"/>
+            <a:off x="457200" y="960120"/>
+            <a:ext cx="2286000" cy="475488"/>
           </a:xfrm>
           <a:prstGeom prst="rect">
             <a:avLst/>
@@ -4325,8 +6308,8 @@
         </p:nvSpPr>
         <p:spPr>
           <a:xfrm>
-            <a:off x="640080" y="1188720"/>
-            <a:ext cx="2560320" cy="713232"/>
+            <a:off x="548640" y="960120"/>
+            <a:ext cx="2103120" cy="475488"/>
           </a:xfrm>
           <a:prstGeom prst="rect">
             <a:avLst/>
@@ -4342,7 +6325,7 @@
               <a:buNone/>
             </a:pPr>
             <a:r>
-              <a:rPr lang="en-US" sz="1000" b="1" dirty="0">
+              <a:rPr lang="en-US" sz="900" b="1" dirty="0">
                 <a:solidFill>
                   <a:srgbClr val="0D47A1"/>
                 </a:solidFill>
@@ -4350,22 +6333,42 @@
                 <a:ea typeface="Trebuchet MS" pitchFamily="34" charset="-122"/>
                 <a:cs typeface="Trebuchet MS" pitchFamily="34" charset="-120"/>
               </a:rPr>
-              <a:t>INNER JOIN : intersection</a:t>
-            </a:r>
-            <a:endParaRPr lang="en-US" sz="1000" dirty="0"/>
-          </a:p>
-        </p:txBody>
-      </p:sp>
-      <p:sp>
-        <p:nvSpPr>
-          <p:cNvPr id="7" name="Text 5"/>
-          <p:cNvSpPr/>
-          <p:nvPr/>
-        </p:nvSpPr>
-        <p:spPr>
-          <a:xfrm>
-            <a:off x="3291840" y="1188720"/>
-            <a:ext cx="5212080" cy="713232"/>
+              <a:t>INNER JOIN</a:t>
+            </a:r>
+            <a:endParaRPr lang="en-US" sz="900" dirty="0"/>
+          </a:p>
+        </p:txBody>
+      </p:sp>
+      <p:sp>
+        <p:nvSpPr>
+          <p:cNvPr id="7" name="Shape 5"/>
+          <p:cNvSpPr/>
+          <p:nvPr/>
+        </p:nvSpPr>
+        <p:spPr>
+          <a:xfrm>
+            <a:off x="2743200" y="960120"/>
+            <a:ext cx="5943600" cy="475488"/>
+          </a:xfrm>
+          <a:prstGeom prst="rect">
+            <a:avLst/>
+          </a:prstGeom>
+          <a:solidFill>
+            <a:srgbClr val="E3F2FD"/>
+          </a:solidFill>
+          <a:ln/>
+        </p:spPr>
+      </p:sp>
+      <p:sp>
+        <p:nvSpPr>
+          <p:cNvPr id="8" name="Text 6"/>
+          <p:cNvSpPr/>
+          <p:nvPr/>
+        </p:nvSpPr>
+        <p:spPr>
+          <a:xfrm>
+            <a:off x="2834640" y="960120"/>
+            <a:ext cx="5760720" cy="475488"/>
           </a:xfrm>
           <a:prstGeom prst="rect">
             <a:avLst/>
@@ -4389,7 +6392,7 @@
                 <a:ea typeface="Calibri" pitchFamily="34" charset="-122"/>
                 <a:cs typeface="Calibri" pitchFamily="34" charset="-120"/>
               </a:rPr>
-              <a:t>SELECT a.nom, al.titre FROM artiste a | INNER JOIN album al ON a.id_artiste = al.id_artiste; | Retourne uniquement les l...</a:t>
+              <a:t>Intersection : lignes avec correspondance des 2 côtés</a:t>
             </a:r>
             <a:endParaRPr lang="en-US" sz="900" dirty="0"/>
           </a:p>
@@ -4397,34 +6400,34 @@
       </p:sp>
       <p:sp>
         <p:nvSpPr>
-          <p:cNvPr id="8" name="Shape 6"/>
-          <p:cNvSpPr/>
-          <p:nvPr/>
-        </p:nvSpPr>
-        <p:spPr>
-          <a:xfrm>
-            <a:off x="457200" y="1965960"/>
-            <a:ext cx="8229600" cy="713232"/>
-          </a:xfrm>
-          <a:prstGeom prst="rect">
-            <a:avLst/>
-          </a:prstGeom>
-          <a:solidFill>
-            <a:srgbClr val="FFFFFF"/>
-          </a:solidFill>
-          <a:ln/>
-        </p:spPr>
-      </p:sp>
-      <p:sp>
-        <p:nvSpPr>
-          <p:cNvPr id="9" name="Text 7"/>
-          <p:cNvSpPr/>
-          <p:nvPr/>
-        </p:nvSpPr>
-        <p:spPr>
-          <a:xfrm>
-            <a:off x="640080" y="1965960"/>
-            <a:ext cx="2560320" cy="713232"/>
+          <p:cNvPr id="9" name="Shape 7"/>
+          <p:cNvSpPr/>
+          <p:nvPr/>
+        </p:nvSpPr>
+        <p:spPr>
+          <a:xfrm>
+            <a:off x="457200" y="1463040"/>
+            <a:ext cx="2286000" cy="475488"/>
+          </a:xfrm>
+          <a:prstGeom prst="rect">
+            <a:avLst/>
+          </a:prstGeom>
+          <a:solidFill>
+            <a:srgbClr val="F0F0F0"/>
+          </a:solidFill>
+          <a:ln/>
+        </p:spPr>
+      </p:sp>
+      <p:sp>
+        <p:nvSpPr>
+          <p:cNvPr id="10" name="Text 8"/>
+          <p:cNvSpPr/>
+          <p:nvPr/>
+        </p:nvSpPr>
+        <p:spPr>
+          <a:xfrm>
+            <a:off x="548640" y="1463040"/>
+            <a:ext cx="2103120" cy="475488"/>
           </a:xfrm>
           <a:prstGeom prst="rect">
             <a:avLst/>
@@ -4440,7 +6443,7 @@
               <a:buNone/>
             </a:pPr>
             <a:r>
-              <a:rPr lang="en-US" sz="1000" b="1" dirty="0">
+              <a:rPr lang="en-US" sz="900" b="1" dirty="0">
                 <a:solidFill>
                   <a:srgbClr val="0D47A1"/>
                 </a:solidFill>
@@ -4448,22 +6451,42 @@
                 <a:ea typeface="Trebuchet MS" pitchFamily="34" charset="-122"/>
                 <a:cs typeface="Trebuchet MS" pitchFamily="34" charset="-120"/>
               </a:rPr>
-              <a:t>LEFT JOIN : tout à gauche</a:t>
-            </a:r>
-            <a:endParaRPr lang="en-US" sz="1000" dirty="0"/>
-          </a:p>
-        </p:txBody>
-      </p:sp>
-      <p:sp>
-        <p:nvSpPr>
-          <p:cNvPr id="10" name="Text 8"/>
-          <p:cNvSpPr/>
-          <p:nvPr/>
-        </p:nvSpPr>
-        <p:spPr>
-          <a:xfrm>
-            <a:off x="3291840" y="1965960"/>
-            <a:ext cx="5212080" cy="713232"/>
+              <a:t>LEFT JOIN</a:t>
+            </a:r>
+            <a:endParaRPr lang="en-US" sz="900" dirty="0"/>
+          </a:p>
+        </p:txBody>
+      </p:sp>
+      <p:sp>
+        <p:nvSpPr>
+          <p:cNvPr id="11" name="Shape 9"/>
+          <p:cNvSpPr/>
+          <p:nvPr/>
+        </p:nvSpPr>
+        <p:spPr>
+          <a:xfrm>
+            <a:off x="2743200" y="1463040"/>
+            <a:ext cx="5943600" cy="475488"/>
+          </a:xfrm>
+          <a:prstGeom prst="rect">
+            <a:avLst/>
+          </a:prstGeom>
+          <a:solidFill>
+            <a:srgbClr val="F0F0F0"/>
+          </a:solidFill>
+          <a:ln/>
+        </p:spPr>
+      </p:sp>
+      <p:sp>
+        <p:nvSpPr>
+          <p:cNvPr id="12" name="Text 10"/>
+          <p:cNvSpPr/>
+          <p:nvPr/>
+        </p:nvSpPr>
+        <p:spPr>
+          <a:xfrm>
+            <a:off x="2834640" y="1463040"/>
+            <a:ext cx="5760720" cy="475488"/>
           </a:xfrm>
           <a:prstGeom prst="rect">
             <a:avLst/>
@@ -4487,7 +6510,7 @@
                 <a:ea typeface="Calibri" pitchFamily="34" charset="-122"/>
                 <a:cs typeface="Calibri" pitchFamily="34" charset="-120"/>
               </a:rPr>
-              <a:t>SELECT a.nom, al.titre FROM artiste a | LEFT JOIN album al ON a.id_artiste = al.id_artiste; | Retourne TOUS les artistes...</a:t>
+              <a:t>Tout à gauche + correspondances à droite (NULL si absent)</a:t>
             </a:r>
             <a:endParaRPr lang="en-US" sz="900" dirty="0"/>
           </a:p>
@@ -4495,14 +6518,14 @@
       </p:sp>
       <p:sp>
         <p:nvSpPr>
-          <p:cNvPr id="11" name="Shape 9"/>
-          <p:cNvSpPr/>
-          <p:nvPr/>
-        </p:nvSpPr>
-        <p:spPr>
-          <a:xfrm>
-            <a:off x="457200" y="2743200"/>
-            <a:ext cx="8229600" cy="713232"/>
+          <p:cNvPr id="13" name="Shape 11"/>
+          <p:cNvSpPr/>
+          <p:nvPr/>
+        </p:nvSpPr>
+        <p:spPr>
+          <a:xfrm>
+            <a:off x="457200" y="1965960"/>
+            <a:ext cx="2286000" cy="475488"/>
           </a:xfrm>
           <a:prstGeom prst="rect">
             <a:avLst/>
@@ -4515,14 +6538,14 @@
       </p:sp>
       <p:sp>
         <p:nvSpPr>
-          <p:cNvPr id="12" name="Text 10"/>
-          <p:cNvSpPr/>
-          <p:nvPr/>
-        </p:nvSpPr>
-        <p:spPr>
-          <a:xfrm>
-            <a:off x="640080" y="2743200"/>
-            <a:ext cx="2560320" cy="713232"/>
+          <p:cNvPr id="14" name="Text 12"/>
+          <p:cNvSpPr/>
+          <p:nvPr/>
+        </p:nvSpPr>
+        <p:spPr>
+          <a:xfrm>
+            <a:off x="548640" y="1965960"/>
+            <a:ext cx="2103120" cy="475488"/>
           </a:xfrm>
           <a:prstGeom prst="rect">
             <a:avLst/>
@@ -4538,7 +6561,7 @@
               <a:buNone/>
             </a:pPr>
             <a:r>
-              <a:rPr lang="en-US" sz="1000" b="1" dirty="0">
+              <a:rPr lang="en-US" sz="900" b="1" dirty="0">
                 <a:solidFill>
                   <a:srgbClr val="0D47A1"/>
                 </a:solidFill>
@@ -4546,22 +6569,42 @@
                 <a:ea typeface="Trebuchet MS" pitchFamily="34" charset="-122"/>
                 <a:cs typeface="Trebuchet MS" pitchFamily="34" charset="-120"/>
               </a:rPr>
-              <a:t>Jointures 3+ tables</a:t>
-            </a:r>
-            <a:endParaRPr lang="en-US" sz="1000" dirty="0"/>
-          </a:p>
-        </p:txBody>
-      </p:sp>
-      <p:sp>
-        <p:nvSpPr>
-          <p:cNvPr id="13" name="Text 11"/>
-          <p:cNvSpPr/>
-          <p:nvPr/>
-        </p:nvSpPr>
-        <p:spPr>
-          <a:xfrm>
-            <a:off x="3291840" y="2743200"/>
-            <a:ext cx="5212080" cy="713232"/>
+              <a:t>LEFT + IS NULL</a:t>
+            </a:r>
+            <a:endParaRPr lang="en-US" sz="900" dirty="0"/>
+          </a:p>
+        </p:txBody>
+      </p:sp>
+      <p:sp>
+        <p:nvSpPr>
+          <p:cNvPr id="15" name="Shape 13"/>
+          <p:cNvSpPr/>
+          <p:nvPr/>
+        </p:nvSpPr>
+        <p:spPr>
+          <a:xfrm>
+            <a:off x="2743200" y="1965960"/>
+            <a:ext cx="5943600" cy="475488"/>
+          </a:xfrm>
+          <a:prstGeom prst="rect">
+            <a:avLst/>
+          </a:prstGeom>
+          <a:solidFill>
+            <a:srgbClr val="E3F2FD"/>
+          </a:solidFill>
+          <a:ln/>
+        </p:spPr>
+      </p:sp>
+      <p:sp>
+        <p:nvSpPr>
+          <p:cNvPr id="16" name="Text 14"/>
+          <p:cNvSpPr/>
+          <p:nvPr/>
+        </p:nvSpPr>
+        <p:spPr>
+          <a:xfrm>
+            <a:off x="2834640" y="1965960"/>
+            <a:ext cx="5760720" cy="475488"/>
           </a:xfrm>
           <a:prstGeom prst="rect">
             <a:avLst/>
@@ -4585,7 +6628,7 @@
                 <a:ea typeface="Calibri" pitchFamily="34" charset="-122"/>
                 <a:cs typeface="Calibri" pitchFamily="34" charset="-120"/>
               </a:rPr>
-              <a:t>SELECT se.date_session, a.nom, s.nom AS salle, i.nom AS ingenieur | FROM session_enregistrement se | JOIN artiste a ON s...</a:t>
+              <a:t>Trouver les 'orphelins' (artistes sans album)</a:t>
             </a:r>
             <a:endParaRPr lang="en-US" sz="900" dirty="0"/>
           </a:p>
@@ -4593,34 +6636,34 @@
       </p:sp>
       <p:sp>
         <p:nvSpPr>
-          <p:cNvPr id="14" name="Shape 12"/>
-          <p:cNvSpPr/>
-          <p:nvPr/>
-        </p:nvSpPr>
-        <p:spPr>
-          <a:xfrm>
-            <a:off x="457200" y="3520440"/>
-            <a:ext cx="8229600" cy="713232"/>
-          </a:xfrm>
-          <a:prstGeom prst="rect">
-            <a:avLst/>
-          </a:prstGeom>
-          <a:solidFill>
-            <a:srgbClr val="FFFFFF"/>
-          </a:solidFill>
-          <a:ln/>
-        </p:spPr>
-      </p:sp>
-      <p:sp>
-        <p:nvSpPr>
-          <p:cNvPr id="15" name="Text 13"/>
-          <p:cNvSpPr/>
-          <p:nvPr/>
-        </p:nvSpPr>
-        <p:spPr>
-          <a:xfrm>
-            <a:off x="640080" y="3520440"/>
-            <a:ext cx="2560320" cy="713232"/>
+          <p:cNvPr id="17" name="Shape 15"/>
+          <p:cNvSpPr/>
+          <p:nvPr/>
+        </p:nvSpPr>
+        <p:spPr>
+          <a:xfrm>
+            <a:off x="457200" y="2468880"/>
+            <a:ext cx="2286000" cy="475488"/>
+          </a:xfrm>
+          <a:prstGeom prst="rect">
+            <a:avLst/>
+          </a:prstGeom>
+          <a:solidFill>
+            <a:srgbClr val="F0F0F0"/>
+          </a:solidFill>
+          <a:ln/>
+        </p:spPr>
+      </p:sp>
+      <p:sp>
+        <p:nvSpPr>
+          <p:cNvPr id="18" name="Text 16"/>
+          <p:cNvSpPr/>
+          <p:nvPr/>
+        </p:nvSpPr>
+        <p:spPr>
+          <a:xfrm>
+            <a:off x="548640" y="2468880"/>
+            <a:ext cx="2103120" cy="475488"/>
           </a:xfrm>
           <a:prstGeom prst="rect">
             <a:avLst/>
@@ -4636,7 +6679,7 @@
               <a:buNone/>
             </a:pPr>
             <a:r>
-              <a:rPr lang="en-US" sz="1000" b="1" dirty="0">
+              <a:rPr lang="en-US" sz="900" b="1" dirty="0">
                 <a:solidFill>
                   <a:srgbClr val="0D47A1"/>
                 </a:solidFill>
@@ -4644,22 +6687,42 @@
                 <a:ea typeface="Trebuchet MS" pitchFamily="34" charset="-122"/>
                 <a:cs typeface="Trebuchet MS" pitchFamily="34" charset="-120"/>
               </a:rPr>
-              <a:t>Cas spéciaux</a:t>
-            </a:r>
-            <a:endParaRPr lang="en-US" sz="1000" dirty="0"/>
-          </a:p>
-        </p:txBody>
-      </p:sp>
-      <p:sp>
-        <p:nvSpPr>
-          <p:cNvPr id="16" name="Text 14"/>
-          <p:cNvSpPr/>
-          <p:nvPr/>
-        </p:nvSpPr>
-        <p:spPr>
-          <a:xfrm>
-            <a:off x="3291840" y="3520440"/>
-            <a:ext cx="5212080" cy="713232"/>
+              <a:t>3+ tables</a:t>
+            </a:r>
+            <a:endParaRPr lang="en-US" sz="900" dirty="0"/>
+          </a:p>
+        </p:txBody>
+      </p:sp>
+      <p:sp>
+        <p:nvSpPr>
+          <p:cNvPr id="19" name="Shape 17"/>
+          <p:cNvSpPr/>
+          <p:nvPr/>
+        </p:nvSpPr>
+        <p:spPr>
+          <a:xfrm>
+            <a:off x="2743200" y="2468880"/>
+            <a:ext cx="5943600" cy="475488"/>
+          </a:xfrm>
+          <a:prstGeom prst="rect">
+            <a:avLst/>
+          </a:prstGeom>
+          <a:solidFill>
+            <a:srgbClr val="F0F0F0"/>
+          </a:solidFill>
+          <a:ln/>
+        </p:spPr>
+      </p:sp>
+      <p:sp>
+        <p:nvSpPr>
+          <p:cNvPr id="20" name="Text 18"/>
+          <p:cNvSpPr/>
+          <p:nvPr/>
+        </p:nvSpPr>
+        <p:spPr>
+          <a:xfrm>
+            <a:off x="2834640" y="2468880"/>
+            <a:ext cx="5760720" cy="475488"/>
           </a:xfrm>
           <a:prstGeom prst="rect">
             <a:avLst/>
@@ -4683,7 +6746,361 @@
                 <a:ea typeface="Calibri" pitchFamily="34" charset="-122"/>
                 <a:cs typeface="Calibri" pitchFamily="34" charset="-120"/>
               </a:rPr>
-              <a:t>CROSS JOIN : produit cartésien (toutes les combinaisons) | RIGHT JOIN : tout à droite (inverse du LEFT) | Jointure réfle...</a:t>
+              <a:t>Enchaîner les JOIN : FROM a JOIN b ON ... JOIN c ON ...</a:t>
+            </a:r>
+            <a:endParaRPr lang="en-US" sz="900" dirty="0"/>
+          </a:p>
+        </p:txBody>
+      </p:sp>
+      <p:sp>
+        <p:nvSpPr>
+          <p:cNvPr id="21" name="Shape 19"/>
+          <p:cNvSpPr/>
+          <p:nvPr/>
+        </p:nvSpPr>
+        <p:spPr>
+          <a:xfrm>
+            <a:off x="457200" y="2971800"/>
+            <a:ext cx="2286000" cy="475488"/>
+          </a:xfrm>
+          <a:prstGeom prst="rect">
+            <a:avLst/>
+          </a:prstGeom>
+          <a:solidFill>
+            <a:srgbClr val="E3F2FD"/>
+          </a:solidFill>
+          <a:ln/>
+        </p:spPr>
+      </p:sp>
+      <p:sp>
+        <p:nvSpPr>
+          <p:cNvPr id="22" name="Text 20"/>
+          <p:cNvSpPr/>
+          <p:nvPr/>
+        </p:nvSpPr>
+        <p:spPr>
+          <a:xfrm>
+            <a:off x="548640" y="2971800"/>
+            <a:ext cx="2103120" cy="475488"/>
+          </a:xfrm>
+          <a:prstGeom prst="rect">
+            <a:avLst/>
+          </a:prstGeom>
+          <a:noFill/>
+          <a:ln/>
+        </p:spPr>
+        <p:txBody>
+          <a:bodyPr wrap="square" lIns="0" tIns="0" rIns="0" bIns="0" rtlCol="0" anchor="ctr"/>
+          <a:lstStyle/>
+          <a:p>
+            <a:pPr indent="0" marL="0">
+              <a:buNone/>
+            </a:pPr>
+            <a:r>
+              <a:rPr lang="en-US" sz="900" b="1" dirty="0">
+                <a:solidFill>
+                  <a:srgbClr val="0D47A1"/>
+                </a:solidFill>
+                <a:latin typeface="Trebuchet MS" pitchFamily="34" charset="0"/>
+                <a:ea typeface="Trebuchet MS" pitchFamily="34" charset="-122"/>
+                <a:cs typeface="Trebuchet MS" pitchFamily="34" charset="-120"/>
+              </a:rPr>
+              <a:t>Alias tables</a:t>
+            </a:r>
+            <a:endParaRPr lang="en-US" sz="900" dirty="0"/>
+          </a:p>
+        </p:txBody>
+      </p:sp>
+      <p:sp>
+        <p:nvSpPr>
+          <p:cNvPr id="23" name="Shape 21"/>
+          <p:cNvSpPr/>
+          <p:nvPr/>
+        </p:nvSpPr>
+        <p:spPr>
+          <a:xfrm>
+            <a:off x="2743200" y="2971800"/>
+            <a:ext cx="5943600" cy="475488"/>
+          </a:xfrm>
+          <a:prstGeom prst="rect">
+            <a:avLst/>
+          </a:prstGeom>
+          <a:solidFill>
+            <a:srgbClr val="E3F2FD"/>
+          </a:solidFill>
+          <a:ln/>
+        </p:spPr>
+      </p:sp>
+      <p:sp>
+        <p:nvSpPr>
+          <p:cNvPr id="24" name="Text 22"/>
+          <p:cNvSpPr/>
+          <p:nvPr/>
+        </p:nvSpPr>
+        <p:spPr>
+          <a:xfrm>
+            <a:off x="2834640" y="2971800"/>
+            <a:ext cx="5760720" cy="475488"/>
+          </a:xfrm>
+          <a:prstGeom prst="rect">
+            <a:avLst/>
+          </a:prstGeom>
+          <a:noFill/>
+          <a:ln/>
+        </p:spPr>
+        <p:txBody>
+          <a:bodyPr wrap="square" lIns="0" tIns="0" rIns="0" bIns="0" rtlCol="0" anchor="ctr"/>
+          <a:lstStyle/>
+          <a:p>
+            <a:pPr indent="0" marL="0">
+              <a:buNone/>
+            </a:pPr>
+            <a:r>
+              <a:rPr lang="en-US" sz="900" dirty="0">
+                <a:solidFill>
+                  <a:srgbClr val="333333"/>
+                </a:solidFill>
+                <a:latin typeface="Calibri" pitchFamily="34" charset="0"/>
+                <a:ea typeface="Calibri" pitchFamily="34" charset="-122"/>
+                <a:cs typeface="Calibri" pitchFamily="34" charset="-120"/>
+              </a:rPr>
+              <a:t>a pour artiste, al pour album — obligatoire en auto-jointure</a:t>
+            </a:r>
+            <a:endParaRPr lang="en-US" sz="900" dirty="0"/>
+          </a:p>
+        </p:txBody>
+      </p:sp>
+      <p:sp>
+        <p:nvSpPr>
+          <p:cNvPr id="25" name="Shape 23"/>
+          <p:cNvSpPr/>
+          <p:nvPr/>
+        </p:nvSpPr>
+        <p:spPr>
+          <a:xfrm>
+            <a:off x="457200" y="3474720"/>
+            <a:ext cx="2286000" cy="475488"/>
+          </a:xfrm>
+          <a:prstGeom prst="rect">
+            <a:avLst/>
+          </a:prstGeom>
+          <a:solidFill>
+            <a:srgbClr val="F0F0F0"/>
+          </a:solidFill>
+          <a:ln/>
+        </p:spPr>
+      </p:sp>
+      <p:sp>
+        <p:nvSpPr>
+          <p:cNvPr id="26" name="Text 24"/>
+          <p:cNvSpPr/>
+          <p:nvPr/>
+        </p:nvSpPr>
+        <p:spPr>
+          <a:xfrm>
+            <a:off x="548640" y="3474720"/>
+            <a:ext cx="2103120" cy="475488"/>
+          </a:xfrm>
+          <a:prstGeom prst="rect">
+            <a:avLst/>
+          </a:prstGeom>
+          <a:noFill/>
+          <a:ln/>
+        </p:spPr>
+        <p:txBody>
+          <a:bodyPr wrap="square" lIns="0" tIns="0" rIns="0" bIns="0" rtlCol="0" anchor="ctr"/>
+          <a:lstStyle/>
+          <a:p>
+            <a:pPr indent="0" marL="0">
+              <a:buNone/>
+            </a:pPr>
+            <a:r>
+              <a:rPr lang="en-US" sz="900" b="1" dirty="0">
+                <a:solidFill>
+                  <a:srgbClr val="0D47A1"/>
+                </a:solidFill>
+                <a:latin typeface="Trebuchet MS" pitchFamily="34" charset="0"/>
+                <a:ea typeface="Trebuchet MS" pitchFamily="34" charset="-122"/>
+                <a:cs typeface="Trebuchet MS" pitchFamily="34" charset="-120"/>
+              </a:rPr>
+              <a:t>CROSS JOIN</a:t>
+            </a:r>
+            <a:endParaRPr lang="en-US" sz="900" dirty="0"/>
+          </a:p>
+        </p:txBody>
+      </p:sp>
+      <p:sp>
+        <p:nvSpPr>
+          <p:cNvPr id="27" name="Shape 25"/>
+          <p:cNvSpPr/>
+          <p:nvPr/>
+        </p:nvSpPr>
+        <p:spPr>
+          <a:xfrm>
+            <a:off x="2743200" y="3474720"/>
+            <a:ext cx="5943600" cy="475488"/>
+          </a:xfrm>
+          <a:prstGeom prst="rect">
+            <a:avLst/>
+          </a:prstGeom>
+          <a:solidFill>
+            <a:srgbClr val="F0F0F0"/>
+          </a:solidFill>
+          <a:ln/>
+        </p:spPr>
+      </p:sp>
+      <p:sp>
+        <p:nvSpPr>
+          <p:cNvPr id="28" name="Text 26"/>
+          <p:cNvSpPr/>
+          <p:nvPr/>
+        </p:nvSpPr>
+        <p:spPr>
+          <a:xfrm>
+            <a:off x="2834640" y="3474720"/>
+            <a:ext cx="5760720" cy="475488"/>
+          </a:xfrm>
+          <a:prstGeom prst="rect">
+            <a:avLst/>
+          </a:prstGeom>
+          <a:noFill/>
+          <a:ln/>
+        </p:spPr>
+        <p:txBody>
+          <a:bodyPr wrap="square" lIns="0" tIns="0" rIns="0" bIns="0" rtlCol="0" anchor="ctr"/>
+          <a:lstStyle/>
+          <a:p>
+            <a:pPr indent="0" marL="0">
+              <a:buNone/>
+            </a:pPr>
+            <a:r>
+              <a:rPr lang="en-US" sz="900" dirty="0">
+                <a:solidFill>
+                  <a:srgbClr val="333333"/>
+                </a:solidFill>
+                <a:latin typeface="Calibri" pitchFamily="34" charset="0"/>
+                <a:ea typeface="Calibri" pitchFamily="34" charset="-122"/>
+                <a:cs typeface="Calibri" pitchFamily="34" charset="-120"/>
+              </a:rPr>
+              <a:t>Produit cartésien : toutes les combinaisons</a:t>
+            </a:r>
+            <a:endParaRPr lang="en-US" sz="900" dirty="0"/>
+          </a:p>
+        </p:txBody>
+      </p:sp>
+      <p:sp>
+        <p:nvSpPr>
+          <p:cNvPr id="29" name="Shape 27"/>
+          <p:cNvSpPr/>
+          <p:nvPr/>
+        </p:nvSpPr>
+        <p:spPr>
+          <a:xfrm>
+            <a:off x="457200" y="3977640"/>
+            <a:ext cx="2286000" cy="475488"/>
+          </a:xfrm>
+          <a:prstGeom prst="rect">
+            <a:avLst/>
+          </a:prstGeom>
+          <a:solidFill>
+            <a:srgbClr val="E3F2FD"/>
+          </a:solidFill>
+          <a:ln/>
+        </p:spPr>
+      </p:sp>
+      <p:sp>
+        <p:nvSpPr>
+          <p:cNvPr id="30" name="Text 28"/>
+          <p:cNvSpPr/>
+          <p:nvPr/>
+        </p:nvSpPr>
+        <p:spPr>
+          <a:xfrm>
+            <a:off x="548640" y="3977640"/>
+            <a:ext cx="2103120" cy="475488"/>
+          </a:xfrm>
+          <a:prstGeom prst="rect">
+            <a:avLst/>
+          </a:prstGeom>
+          <a:noFill/>
+          <a:ln/>
+        </p:spPr>
+        <p:txBody>
+          <a:bodyPr wrap="square" lIns="0" tIns="0" rIns="0" bIns="0" rtlCol="0" anchor="ctr"/>
+          <a:lstStyle/>
+          <a:p>
+            <a:pPr indent="0" marL="0">
+              <a:buNone/>
+            </a:pPr>
+            <a:r>
+              <a:rPr lang="en-US" sz="900" b="1" dirty="0">
+                <a:solidFill>
+                  <a:srgbClr val="0D47A1"/>
+                </a:solidFill>
+                <a:latin typeface="Trebuchet MS" pitchFamily="34" charset="0"/>
+                <a:ea typeface="Trebuchet MS" pitchFamily="34" charset="-122"/>
+                <a:cs typeface="Trebuchet MS" pitchFamily="34" charset="-120"/>
+              </a:rPr>
+              <a:t>GROUP_CONCAT</a:t>
+            </a:r>
+            <a:endParaRPr lang="en-US" sz="900" dirty="0"/>
+          </a:p>
+        </p:txBody>
+      </p:sp>
+      <p:sp>
+        <p:nvSpPr>
+          <p:cNvPr id="31" name="Shape 29"/>
+          <p:cNvSpPr/>
+          <p:nvPr/>
+        </p:nvSpPr>
+        <p:spPr>
+          <a:xfrm>
+            <a:off x="2743200" y="3977640"/>
+            <a:ext cx="5943600" cy="475488"/>
+          </a:xfrm>
+          <a:prstGeom prst="rect">
+            <a:avLst/>
+          </a:prstGeom>
+          <a:solidFill>
+            <a:srgbClr val="E3F2FD"/>
+          </a:solidFill>
+          <a:ln/>
+        </p:spPr>
+      </p:sp>
+      <p:sp>
+        <p:nvSpPr>
+          <p:cNvPr id="32" name="Text 30"/>
+          <p:cNvSpPr/>
+          <p:nvPr/>
+        </p:nvSpPr>
+        <p:spPr>
+          <a:xfrm>
+            <a:off x="2834640" y="3977640"/>
+            <a:ext cx="5760720" cy="475488"/>
+          </a:xfrm>
+          <a:prstGeom prst="rect">
+            <a:avLst/>
+          </a:prstGeom>
+          <a:noFill/>
+          <a:ln/>
+        </p:spPr>
+        <p:txBody>
+          <a:bodyPr wrap="square" lIns="0" tIns="0" rIns="0" bIns="0" rtlCol="0" anchor="ctr"/>
+          <a:lstStyle/>
+          <a:p>
+            <a:pPr indent="0" marL="0">
+              <a:buNone/>
+            </a:pPr>
+            <a:r>
+              <a:rPr lang="en-US" sz="900" dirty="0">
+                <a:solidFill>
+                  <a:srgbClr val="333333"/>
+                </a:solidFill>
+                <a:latin typeface="Calibri" pitchFamily="34" charset="0"/>
+                <a:ea typeface="Calibri" pitchFamily="34" charset="-122"/>
+                <a:cs typeface="Calibri" pitchFamily="34" charset="-120"/>
+              </a:rPr>
+              <a:t>Concaténer des valeurs groupées en une ligne (genres d'un artiste)</a:t>
             </a:r>
             <a:endParaRPr lang="en-US" sz="900" dirty="0"/>
           </a:p>

--- a/pptx/Module14_JOIN_multitables.pptx
+++ b/pptx/Module14_JOIN_multitables.pptx
@@ -774,7 +774,7 @@
           <a:p>
             <a:r>
               <a:rPr lang="en-US" dirty="0"/>
-              <a:t>LEFT JOIN est essentiel pour les rapports : 'tous les artistes avec leur nombre d'albums (y compris 0)'.</a:t>
+              <a:t>LEFT JOIN est essentiel pour les rapports.</a:t>
             </a:r>
             <a:endParaRPr lang="en-US" dirty="0"/>
           </a:p>
@@ -862,7 +862,7 @@
           <a:p>
             <a:r>
               <a:rPr lang="en-US" dirty="0"/>
-              <a:t>SwissSound est parfait pour les jointures 3+ tables grâce à la table session qui a 3 FK.</a:t>
+              <a:t>SwissSound est parfait pour les jointures 3+ tables grace a session avec 3 FK.</a:t>
             </a:r>
             <a:endParaRPr lang="en-US" dirty="0"/>
           </a:p>
@@ -950,7 +950,7 @@
           <a:p>
             <a:r>
               <a:rPr lang="en-US" dirty="0"/>
-              <a:t>Le CROSS JOIN peut servir pour générer des créneaux horaires (jours × heures × salles).</a:t>
+              <a:t>Le CROSS JOIN peut servir pour generer des creneaux horaires.</a:t>
             </a:r>
             <a:endParaRPr lang="en-US" dirty="0"/>
           </a:p>
@@ -1038,7 +1038,7 @@
           <a:p>
             <a:r>
               <a:rPr lang="en-US" dirty="0"/>
-              <a:t>Les jointures sont le sujet principal de P3/M3. Bien les pratiquer.</a:t>
+              <a:t>Les jointures sont le sujet principal de P3/M3.</a:t>
             </a:r>
             <a:endParaRPr lang="en-US" dirty="0"/>
           </a:p>
@@ -1695,7 +1695,7 @@
               <a:buNone/>
             </a:pPr>
             <a:r>
-              <a:rPr lang="en-US" sz="3200" b="1" dirty="0">
+              <a:rPr lang="en-US" sz="2800" b="1" dirty="0">
                 <a:solidFill>
                   <a:srgbClr val="FFFFFF"/>
                 </a:solidFill>
@@ -1705,7 +1705,7 @@
               </a:rPr>
               <a:t>JOIN multitables</a:t>
             </a:r>
-            <a:endParaRPr lang="en-US" sz="3200" dirty="0"/>
+            <a:endParaRPr lang="en-US" sz="2800" dirty="0"/>
           </a:p>
         </p:txBody>
       </p:sp>
@@ -1734,7 +1734,7 @@
               <a:buNone/>
             </a:pPr>
             <a:r>
-              <a:rPr lang="en-US" sz="1500" dirty="0">
+              <a:rPr lang="en-US" sz="1400" dirty="0">
                 <a:solidFill>
                   <a:srgbClr val="CCCCCC"/>
                 </a:solidFill>
@@ -1742,9 +1742,9 @@
                 <a:ea typeface="Calibri" pitchFamily="34" charset="-122"/>
                 <a:cs typeface="Calibri" pitchFamily="34" charset="-120"/>
               </a:rPr>
-              <a:t>INNER · LEFT · RIGHT · CROSS · Réflexive</a:t>
-            </a:r>
-            <a:endParaRPr lang="en-US" sz="1500" dirty="0"/>
+              <a:t>INNER, LEFT, RIGHT, CROSS, reflexive, 3+ tables, GROUP_CONCAT</a:t>
+            </a:r>
+            <a:endParaRPr lang="en-US" sz="1400" dirty="0"/>
           </a:p>
         </p:txBody>
       </p:sp>
@@ -1848,7 +1848,7 @@
         <p:spPr>
           <a:xfrm>
             <a:off x="457200" y="182880"/>
-            <a:ext cx="8229600" cy="594360"/>
+            <a:ext cx="8229600" cy="502920"/>
           </a:xfrm>
           <a:prstGeom prst="rect">
             <a:avLst/>
@@ -1864,7 +1864,7 @@
               <a:buNone/>
             </a:pPr>
             <a:r>
-              <a:rPr lang="en-US" sz="2400" b="1" dirty="0">
+              <a:rPr lang="en-US" sz="2100" b="1" dirty="0">
                 <a:solidFill>
                   <a:srgbClr val="0D47A1"/>
                 </a:solidFill>
@@ -1874,7 +1874,7 @@
               </a:rPr>
               <a:t>Pourquoi les JOIN ?</a:t>
             </a:r>
-            <a:endParaRPr lang="en-US" sz="2400" dirty="0"/>
+            <a:endParaRPr lang="en-US" sz="2100" dirty="0"/>
           </a:p>
         </p:txBody>
       </p:sp>
@@ -1886,8 +1886,8 @@
         </p:nvSpPr>
         <p:spPr>
           <a:xfrm>
-            <a:off x="457200" y="914400"/>
-            <a:ext cx="8229600" cy="521208"/>
+            <a:off x="457200" y="777240"/>
+            <a:ext cx="8229600" cy="448056"/>
           </a:xfrm>
           <a:prstGeom prst="rect">
             <a:avLst/>
@@ -1896,13 +1896,6 @@
             <a:srgbClr val="FFFFFF"/>
           </a:solidFill>
           <a:ln/>
-          <a:effectLst>
-            <a:outerShdw sx="100000" sy="100000" kx="0" ky="0" algn="bl" rotWithShape="0" blurRad="50800" dist="25400" dir="8100000">
-              <a:srgbClr val="000000">
-                <a:alpha val="12000"/>
-              </a:srgbClr>
-            </a:outerShdw>
-          </a:effectLst>
         </p:spPr>
       </p:sp>
       <p:sp>
@@ -1913,8 +1906,8 @@
         </p:nvSpPr>
         <p:spPr>
           <a:xfrm>
-            <a:off x="457200" y="914400"/>
-            <a:ext cx="45720" cy="521208"/>
+            <a:off x="457200" y="777240"/>
+            <a:ext cx="45720" cy="448056"/>
           </a:xfrm>
           <a:prstGeom prst="rect">
             <a:avLst/>
@@ -1933,8 +1926,8 @@
         </p:nvSpPr>
         <p:spPr>
           <a:xfrm>
-            <a:off x="685800" y="914400"/>
-            <a:ext cx="7818120" cy="521208"/>
+            <a:off x="640080" y="777240"/>
+            <a:ext cx="7863840" cy="448056"/>
           </a:xfrm>
           <a:prstGeom prst="rect">
             <a:avLst/>
@@ -1950,7 +1943,7 @@
               <a:buNone/>
             </a:pPr>
             <a:r>
-              <a:rPr lang="en-US" sz="1200" dirty="0">
+              <a:rPr lang="en-US" sz="1100" dirty="0">
                 <a:solidFill>
                   <a:srgbClr val="1A1A2E"/>
                 </a:solidFill>
@@ -1958,9 +1951,9 @@
                 <a:ea typeface="Calibri" pitchFamily="34" charset="-122"/>
                 <a:cs typeface="Calibri" pitchFamily="34" charset="-120"/>
               </a:rPr>
-              <a:t>Les données sont réparties dans PLUSIEURS tables (normalisation)</a:t>
-            </a:r>
-            <a:endParaRPr lang="en-US" sz="1200" dirty="0"/>
+              <a:t>Les donnees sont reparties dans PLUSIEURS tables (normalisation)</a:t>
+            </a:r>
+            <a:endParaRPr lang="en-US" sz="1100" dirty="0"/>
           </a:p>
         </p:txBody>
       </p:sp>
@@ -1972,8 +1965,8 @@
         </p:nvSpPr>
         <p:spPr>
           <a:xfrm>
-            <a:off x="457200" y="1463040"/>
-            <a:ext cx="8229600" cy="521208"/>
+            <a:off x="457200" y="1252728"/>
+            <a:ext cx="8229600" cy="448056"/>
           </a:xfrm>
           <a:prstGeom prst="rect">
             <a:avLst/>
@@ -1982,13 +1975,6 @@
             <a:srgbClr val="E3F2FD"/>
           </a:solidFill>
           <a:ln/>
-          <a:effectLst>
-            <a:outerShdw sx="100000" sy="100000" kx="0" ky="0" algn="bl" rotWithShape="0" blurRad="50800" dist="25400" dir="8100000">
-              <a:srgbClr val="000000">
-                <a:alpha val="12000"/>
-              </a:srgbClr>
-            </a:outerShdw>
-          </a:effectLst>
         </p:spPr>
       </p:sp>
       <p:sp>
@@ -1999,8 +1985,8 @@
         </p:nvSpPr>
         <p:spPr>
           <a:xfrm>
-            <a:off x="457200" y="1463040"/>
-            <a:ext cx="45720" cy="521208"/>
+            <a:off x="457200" y="1252728"/>
+            <a:ext cx="45720" cy="448056"/>
           </a:xfrm>
           <a:prstGeom prst="rect">
             <a:avLst/>
@@ -2019,8 +2005,8 @@
         </p:nvSpPr>
         <p:spPr>
           <a:xfrm>
-            <a:off x="685800" y="1463040"/>
-            <a:ext cx="7818120" cy="521208"/>
+            <a:off x="640080" y="1252728"/>
+            <a:ext cx="7863840" cy="448056"/>
           </a:xfrm>
           <a:prstGeom prst="rect">
             <a:avLst/>
@@ -2036,7 +2022,7 @@
               <a:buNone/>
             </a:pPr>
             <a:r>
-              <a:rPr lang="en-US" sz="1200" dirty="0">
+              <a:rPr lang="en-US" sz="1100" dirty="0">
                 <a:solidFill>
                   <a:srgbClr val="1A1A2E"/>
                 </a:solidFill>
@@ -2044,9 +2030,9 @@
                 <a:ea typeface="Calibri" pitchFamily="34" charset="-122"/>
                 <a:cs typeface="Calibri" pitchFamily="34" charset="-120"/>
               </a:rPr>
-              <a:t>Pour afficher 'nom artiste + titre album' → il faut JOINDRE artiste et album</a:t>
-            </a:r>
-            <a:endParaRPr lang="en-US" sz="1200" dirty="0"/>
+              <a:t>Pour afficher 'nom artiste + titre album' → JOINDRE artiste et album</a:t>
+            </a:r>
+            <a:endParaRPr lang="en-US" sz="1100" dirty="0"/>
           </a:p>
         </p:txBody>
       </p:sp>
@@ -2058,8 +2044,8 @@
         </p:nvSpPr>
         <p:spPr>
           <a:xfrm>
-            <a:off x="457200" y="2011680"/>
-            <a:ext cx="8229600" cy="521208"/>
+            <a:off x="457200" y="1728216"/>
+            <a:ext cx="8229600" cy="448056"/>
           </a:xfrm>
           <a:prstGeom prst="rect">
             <a:avLst/>
@@ -2068,13 +2054,6 @@
             <a:srgbClr val="FFFFFF"/>
           </a:solidFill>
           <a:ln/>
-          <a:effectLst>
-            <a:outerShdw sx="100000" sy="100000" kx="0" ky="0" algn="bl" rotWithShape="0" blurRad="50800" dist="25400" dir="8100000">
-              <a:srgbClr val="000000">
-                <a:alpha val="12000"/>
-              </a:srgbClr>
-            </a:outerShdw>
-          </a:effectLst>
         </p:spPr>
       </p:sp>
       <p:sp>
@@ -2085,8 +2064,8 @@
         </p:nvSpPr>
         <p:spPr>
           <a:xfrm>
-            <a:off x="457200" y="2011680"/>
-            <a:ext cx="45720" cy="521208"/>
+            <a:off x="457200" y="1728216"/>
+            <a:ext cx="45720" cy="448056"/>
           </a:xfrm>
           <a:prstGeom prst="rect">
             <a:avLst/>
@@ -2105,8 +2084,8 @@
         </p:nvSpPr>
         <p:spPr>
           <a:xfrm>
-            <a:off x="685800" y="2011680"/>
-            <a:ext cx="7818120" cy="521208"/>
+            <a:off x="640080" y="1728216"/>
+            <a:ext cx="7863840" cy="448056"/>
           </a:xfrm>
           <a:prstGeom prst="rect">
             <a:avLst/>
@@ -2130,7 +2109,7 @@
                 <a:ea typeface="JetBrains Mono" pitchFamily="34" charset="-122"/>
                 <a:cs typeface="JetBrains Mono" pitchFamily="34" charset="-120"/>
               </a:rPr>
-              <a:t>JOIN = combiner les lignes de 2+ tables sur une condition de correspondance</a:t>
+              <a:t>JOIN = combiner les lignes de 2+ tables sur une condition</a:t>
             </a:r>
             <a:endParaRPr lang="en-US" sz="1000" dirty="0"/>
           </a:p>
@@ -2144,8 +2123,8 @@
         </p:nvSpPr>
         <p:spPr>
           <a:xfrm>
-            <a:off x="457200" y="2560320"/>
-            <a:ext cx="8229600" cy="521208"/>
+            <a:off x="457200" y="2203704"/>
+            <a:ext cx="8229600" cy="448056"/>
           </a:xfrm>
           <a:prstGeom prst="rect">
             <a:avLst/>
@@ -2154,13 +2133,6 @@
             <a:srgbClr val="E3F2FD"/>
           </a:solidFill>
           <a:ln/>
-          <a:effectLst>
-            <a:outerShdw sx="100000" sy="100000" kx="0" ky="0" algn="bl" rotWithShape="0" blurRad="50800" dist="25400" dir="8100000">
-              <a:srgbClr val="000000">
-                <a:alpha val="12000"/>
-              </a:srgbClr>
-            </a:outerShdw>
-          </a:effectLst>
         </p:spPr>
       </p:sp>
       <p:sp>
@@ -2171,8 +2143,8 @@
         </p:nvSpPr>
         <p:spPr>
           <a:xfrm>
-            <a:off x="457200" y="2560320"/>
-            <a:ext cx="45720" cy="521208"/>
+            <a:off x="457200" y="2203704"/>
+            <a:ext cx="45720" cy="448056"/>
           </a:xfrm>
           <a:prstGeom prst="rect">
             <a:avLst/>
@@ -2191,8 +2163,8 @@
         </p:nvSpPr>
         <p:spPr>
           <a:xfrm>
-            <a:off x="685800" y="2560320"/>
-            <a:ext cx="7818120" cy="521208"/>
+            <a:off x="640080" y="2203704"/>
+            <a:ext cx="7863840" cy="448056"/>
           </a:xfrm>
           <a:prstGeom prst="rect">
             <a:avLst/>
@@ -2208,7 +2180,7 @@
               <a:buNone/>
             </a:pPr>
             <a:r>
-              <a:rPr lang="en-US" sz="1200" dirty="0">
+              <a:rPr lang="en-US" sz="1100" dirty="0">
                 <a:solidFill>
                   <a:srgbClr val="1A1A2E"/>
                 </a:solidFill>
@@ -2216,9 +2188,9 @@
                 <a:ea typeface="Calibri" pitchFamily="34" charset="-122"/>
                 <a:cs typeface="Calibri" pitchFamily="34" charset="-120"/>
               </a:rPr>
-              <a:t>Sans JOIN, on ne peut afficher que les données d'UNE table à la fois</a:t>
-            </a:r>
-            <a:endParaRPr lang="en-US" sz="1200" dirty="0"/>
+              <a:t>Sans JOIN : donnees d'UNE table a la fois</a:t>
+            </a:r>
+            <a:endParaRPr lang="en-US" sz="1100" dirty="0"/>
           </a:p>
         </p:txBody>
       </p:sp>
@@ -2230,8 +2202,8 @@
         </p:nvSpPr>
         <p:spPr>
           <a:xfrm>
-            <a:off x="457200" y="3108960"/>
-            <a:ext cx="8229600" cy="521208"/>
+            <a:off x="457200" y="2679192"/>
+            <a:ext cx="8229600" cy="448056"/>
           </a:xfrm>
           <a:prstGeom prst="rect">
             <a:avLst/>
@@ -2240,13 +2212,6 @@
             <a:srgbClr val="FFFFFF"/>
           </a:solidFill>
           <a:ln/>
-          <a:effectLst>
-            <a:outerShdw sx="100000" sy="100000" kx="0" ky="0" algn="bl" rotWithShape="0" blurRad="50800" dist="25400" dir="8100000">
-              <a:srgbClr val="000000">
-                <a:alpha val="12000"/>
-              </a:srgbClr>
-            </a:outerShdw>
-          </a:effectLst>
         </p:spPr>
       </p:sp>
       <p:sp>
@@ -2257,8 +2222,8 @@
         </p:nvSpPr>
         <p:spPr>
           <a:xfrm>
-            <a:off x="457200" y="3108960"/>
-            <a:ext cx="45720" cy="521208"/>
+            <a:off x="457200" y="2679192"/>
+            <a:ext cx="45720" cy="448056"/>
           </a:xfrm>
           <a:prstGeom prst="rect">
             <a:avLst/>
@@ -2277,8 +2242,8 @@
         </p:nvSpPr>
         <p:spPr>
           <a:xfrm>
-            <a:off x="685800" y="3108960"/>
-            <a:ext cx="7818120" cy="521208"/>
+            <a:off x="640080" y="2679192"/>
+            <a:ext cx="7863840" cy="448056"/>
           </a:xfrm>
           <a:prstGeom prst="rect">
             <a:avLst/>
@@ -2294,7 +2259,7 @@
               <a:buNone/>
             </a:pPr>
             <a:r>
-              <a:rPr lang="en-US" sz="1200" dirty="0">
+              <a:rPr lang="en-US" sz="1100" dirty="0">
                 <a:solidFill>
                   <a:srgbClr val="1A1A2E"/>
                 </a:solidFill>
@@ -2302,9 +2267,9 @@
                 <a:ea typeface="Calibri" pitchFamily="34" charset="-122"/>
                 <a:cs typeface="Calibri" pitchFamily="34" charset="-120"/>
               </a:rPr>
-              <a:t>SwissSound : session a id_artiste, id_salle, id_ingenieur → 3 JOIN nécessaires</a:t>
-            </a:r>
-            <a:endParaRPr lang="en-US" sz="1200" dirty="0"/>
+              <a:t>SwissSound : session a 3 FK → 3 JOIN necessaires</a:t>
+            </a:r>
+            <a:endParaRPr lang="en-US" sz="1100" dirty="0"/>
           </a:p>
         </p:txBody>
       </p:sp>
@@ -2316,8 +2281,8 @@
         </p:nvSpPr>
         <p:spPr>
           <a:xfrm>
-            <a:off x="457200" y="3657600"/>
-            <a:ext cx="8229600" cy="521208"/>
+            <a:off x="457200" y="3154680"/>
+            <a:ext cx="8229600" cy="448056"/>
           </a:xfrm>
           <a:prstGeom prst="rect">
             <a:avLst/>
@@ -2326,13 +2291,6 @@
             <a:srgbClr val="E3F2FD"/>
           </a:solidFill>
           <a:ln/>
-          <a:effectLst>
-            <a:outerShdw sx="100000" sy="100000" kx="0" ky="0" algn="bl" rotWithShape="0" blurRad="50800" dist="25400" dir="8100000">
-              <a:srgbClr val="000000">
-                <a:alpha val="12000"/>
-              </a:srgbClr>
-            </a:outerShdw>
-          </a:effectLst>
         </p:spPr>
       </p:sp>
       <p:sp>
@@ -2343,8 +2301,8 @@
         </p:nvSpPr>
         <p:spPr>
           <a:xfrm>
-            <a:off x="457200" y="3657600"/>
-            <a:ext cx="45720" cy="521208"/>
+            <a:off x="457200" y="3154680"/>
+            <a:ext cx="45720" cy="448056"/>
           </a:xfrm>
           <a:prstGeom prst="rect">
             <a:avLst/>
@@ -2363,8 +2321,8 @@
         </p:nvSpPr>
         <p:spPr>
           <a:xfrm>
-            <a:off x="685800" y="3657600"/>
-            <a:ext cx="7818120" cy="521208"/>
+            <a:off x="640080" y="3154680"/>
+            <a:ext cx="7863840" cy="448056"/>
           </a:xfrm>
           <a:prstGeom prst="rect">
             <a:avLst/>
@@ -2380,7 +2338,7 @@
               <a:buNone/>
             </a:pPr>
             <a:r>
-              <a:rPr lang="en-US" sz="1200" dirty="0">
+              <a:rPr lang="en-US" sz="1100" dirty="0">
                 <a:solidFill>
                   <a:srgbClr val="1A1A2E"/>
                 </a:solidFill>
@@ -2388,9 +2346,88 @@
                 <a:ea typeface="Calibri" pitchFamily="34" charset="-122"/>
                 <a:cs typeface="Calibri" pitchFamily="34" charset="-120"/>
               </a:rPr>
-              <a:t>Les JOIN sont la compétence SQL LA PLUS IMPORTANTE pour P2 et P3</a:t>
-            </a:r>
-            <a:endParaRPr lang="en-US" sz="1200" dirty="0"/>
+              <a:t>GESCOM : commande → client + lignecde → article → famille</a:t>
+            </a:r>
+            <a:endParaRPr lang="en-US" sz="1100" dirty="0"/>
+          </a:p>
+        </p:txBody>
+      </p:sp>
+      <p:sp>
+        <p:nvSpPr>
+          <p:cNvPr id="22" name="Shape 20"/>
+          <p:cNvSpPr/>
+          <p:nvPr/>
+        </p:nvSpPr>
+        <p:spPr>
+          <a:xfrm>
+            <a:off x="457200" y="3630168"/>
+            <a:ext cx="8229600" cy="448056"/>
+          </a:xfrm>
+          <a:prstGeom prst="rect">
+            <a:avLst/>
+          </a:prstGeom>
+          <a:solidFill>
+            <a:srgbClr val="FFFFFF"/>
+          </a:solidFill>
+          <a:ln/>
+        </p:spPr>
+      </p:sp>
+      <p:sp>
+        <p:nvSpPr>
+          <p:cNvPr id="23" name="Shape 21"/>
+          <p:cNvSpPr/>
+          <p:nvPr/>
+        </p:nvSpPr>
+        <p:spPr>
+          <a:xfrm>
+            <a:off x="457200" y="3630168"/>
+            <a:ext cx="45720" cy="448056"/>
+          </a:xfrm>
+          <a:prstGeom prst="rect">
+            <a:avLst/>
+          </a:prstGeom>
+          <a:solidFill>
+            <a:srgbClr val="1565C0"/>
+          </a:solidFill>
+          <a:ln/>
+        </p:spPr>
+      </p:sp>
+      <p:sp>
+        <p:nvSpPr>
+          <p:cNvPr id="24" name="Text 22"/>
+          <p:cNvSpPr/>
+          <p:nvPr/>
+        </p:nvSpPr>
+        <p:spPr>
+          <a:xfrm>
+            <a:off x="640080" y="3630168"/>
+            <a:ext cx="7863840" cy="448056"/>
+          </a:xfrm>
+          <a:prstGeom prst="rect">
+            <a:avLst/>
+          </a:prstGeom>
+          <a:noFill/>
+          <a:ln/>
+        </p:spPr>
+        <p:txBody>
+          <a:bodyPr wrap="square" lIns="0" tIns="0" rIns="0" bIns="0" rtlCol="0" anchor="ctr"/>
+          <a:lstStyle/>
+          <a:p>
+            <a:pPr indent="0" marL="0">
+              <a:buNone/>
+            </a:pPr>
+            <a:r>
+              <a:rPr lang="en-US" sz="1100" dirty="0">
+                <a:solidFill>
+                  <a:srgbClr val="1A1A2E"/>
+                </a:solidFill>
+                <a:latin typeface="Calibri" pitchFamily="34" charset="0"/>
+                <a:ea typeface="Calibri" pitchFamily="34" charset="-122"/>
+                <a:cs typeface="Calibri" pitchFamily="34" charset="-120"/>
+              </a:rPr>
+              <a:t>Les JOIN sont la competence SQL LA PLUS IMPORTANTE</a:t>
+            </a:r>
+            <a:endParaRPr lang="en-US" sz="1100" dirty="0"/>
           </a:p>
         </p:txBody>
       </p:sp>
@@ -2455,7 +2492,7 @@
         <p:spPr>
           <a:xfrm>
             <a:off x="457200" y="182880"/>
-            <a:ext cx="8229600" cy="594360"/>
+            <a:ext cx="8229600" cy="502920"/>
           </a:xfrm>
           <a:prstGeom prst="rect">
             <a:avLst/>
@@ -2471,7 +2508,7 @@
               <a:buNone/>
             </a:pPr>
             <a:r>
-              <a:rPr lang="en-US" sz="2400" b="1" dirty="0">
+              <a:rPr lang="en-US" sz="2100" b="1" dirty="0">
                 <a:solidFill>
                   <a:srgbClr val="0D47A1"/>
                 </a:solidFill>
@@ -2481,7 +2518,7 @@
               </a:rPr>
               <a:t>INNER JOIN : l'intersection</a:t>
             </a:r>
-            <a:endParaRPr lang="en-US" sz="2400" dirty="0"/>
+            <a:endParaRPr lang="en-US" sz="2100" dirty="0"/>
           </a:p>
         </p:txBody>
       </p:sp>
@@ -2493,8 +2530,8 @@
         </p:nvSpPr>
         <p:spPr>
           <a:xfrm>
-            <a:off x="457200" y="914400"/>
-            <a:ext cx="8229600" cy="521208"/>
+            <a:off x="457200" y="777240"/>
+            <a:ext cx="8229600" cy="448056"/>
           </a:xfrm>
           <a:prstGeom prst="rect">
             <a:avLst/>
@@ -2503,13 +2540,6 @@
             <a:srgbClr val="FFFFFF"/>
           </a:solidFill>
           <a:ln/>
-          <a:effectLst>
-            <a:outerShdw sx="100000" sy="100000" kx="0" ky="0" algn="bl" rotWithShape="0" blurRad="50800" dist="25400" dir="8100000">
-              <a:srgbClr val="000000">
-                <a:alpha val="12000"/>
-              </a:srgbClr>
-            </a:outerShdw>
-          </a:effectLst>
         </p:spPr>
       </p:sp>
       <p:sp>
@@ -2520,8 +2550,8 @@
         </p:nvSpPr>
         <p:spPr>
           <a:xfrm>
-            <a:off x="457200" y="914400"/>
-            <a:ext cx="45720" cy="521208"/>
+            <a:off x="457200" y="777240"/>
+            <a:ext cx="45720" cy="448056"/>
           </a:xfrm>
           <a:prstGeom prst="rect">
             <a:avLst/>
@@ -2540,8 +2570,8 @@
         </p:nvSpPr>
         <p:spPr>
           <a:xfrm>
-            <a:off x="685800" y="914400"/>
-            <a:ext cx="7818120" cy="521208"/>
+            <a:off x="640080" y="777240"/>
+            <a:ext cx="7863840" cy="448056"/>
           </a:xfrm>
           <a:prstGeom prst="rect">
             <a:avLst/>
@@ -2579,8 +2609,8 @@
         </p:nvSpPr>
         <p:spPr>
           <a:xfrm>
-            <a:off x="457200" y="1463040"/>
-            <a:ext cx="8229600" cy="521208"/>
+            <a:off x="457200" y="1252728"/>
+            <a:ext cx="8229600" cy="448056"/>
           </a:xfrm>
           <a:prstGeom prst="rect">
             <a:avLst/>
@@ -2589,13 +2619,6 @@
             <a:srgbClr val="E3F2FD"/>
           </a:solidFill>
           <a:ln/>
-          <a:effectLst>
-            <a:outerShdw sx="100000" sy="100000" kx="0" ky="0" algn="bl" rotWithShape="0" blurRad="50800" dist="25400" dir="8100000">
-              <a:srgbClr val="000000">
-                <a:alpha val="12000"/>
-              </a:srgbClr>
-            </a:outerShdw>
-          </a:effectLst>
         </p:spPr>
       </p:sp>
       <p:sp>
@@ -2606,8 +2629,8 @@
         </p:nvSpPr>
         <p:spPr>
           <a:xfrm>
-            <a:off x="457200" y="1463040"/>
-            <a:ext cx="45720" cy="521208"/>
+            <a:off x="457200" y="1252728"/>
+            <a:ext cx="45720" cy="448056"/>
           </a:xfrm>
           <a:prstGeom prst="rect">
             <a:avLst/>
@@ -2626,8 +2649,8 @@
         </p:nvSpPr>
         <p:spPr>
           <a:xfrm>
-            <a:off x="685800" y="1463040"/>
-            <a:ext cx="7818120" cy="521208"/>
+            <a:off x="640080" y="1252728"/>
+            <a:ext cx="7863840" cy="448056"/>
           </a:xfrm>
           <a:prstGeom prst="rect">
             <a:avLst/>
@@ -2643,7 +2666,86 @@
               <a:buNone/>
             </a:pPr>
             <a:r>
-              <a:rPr lang="en-US" sz="1200" dirty="0">
+              <a:rPr lang="en-US" sz="1000" dirty="0">
+                <a:solidFill>
+                  <a:srgbClr val="0D47A1"/>
+                </a:solidFill>
+                <a:latin typeface="JetBrains Mono" pitchFamily="34" charset="0"/>
+                <a:ea typeface="JetBrains Mono" pitchFamily="34" charset="-122"/>
+                <a:cs typeface="JetBrains Mono" pitchFamily="34" charset="-120"/>
+              </a:rPr>
+              <a:t>INNER JOIN album al ON a.id_artiste = al.id_artiste;</a:t>
+            </a:r>
+            <a:endParaRPr lang="en-US" sz="1000" dirty="0"/>
+          </a:p>
+        </p:txBody>
+      </p:sp>
+      <p:sp>
+        <p:nvSpPr>
+          <p:cNvPr id="10" name="Shape 8"/>
+          <p:cNvSpPr/>
+          <p:nvPr/>
+        </p:nvSpPr>
+        <p:spPr>
+          <a:xfrm>
+            <a:off x="457200" y="1728216"/>
+            <a:ext cx="8229600" cy="448056"/>
+          </a:xfrm>
+          <a:prstGeom prst="rect">
+            <a:avLst/>
+          </a:prstGeom>
+          <a:solidFill>
+            <a:srgbClr val="FFFFFF"/>
+          </a:solidFill>
+          <a:ln/>
+        </p:spPr>
+      </p:sp>
+      <p:sp>
+        <p:nvSpPr>
+          <p:cNvPr id="11" name="Shape 9"/>
+          <p:cNvSpPr/>
+          <p:nvPr/>
+        </p:nvSpPr>
+        <p:spPr>
+          <a:xfrm>
+            <a:off x="457200" y="1728216"/>
+            <a:ext cx="45720" cy="448056"/>
+          </a:xfrm>
+          <a:prstGeom prst="rect">
+            <a:avLst/>
+          </a:prstGeom>
+          <a:solidFill>
+            <a:srgbClr val="1565C0"/>
+          </a:solidFill>
+          <a:ln/>
+        </p:spPr>
+      </p:sp>
+      <p:sp>
+        <p:nvSpPr>
+          <p:cNvPr id="12" name="Text 10"/>
+          <p:cNvSpPr/>
+          <p:nvPr/>
+        </p:nvSpPr>
+        <p:spPr>
+          <a:xfrm>
+            <a:off x="640080" y="1728216"/>
+            <a:ext cx="7863840" cy="448056"/>
+          </a:xfrm>
+          <a:prstGeom prst="rect">
+            <a:avLst/>
+          </a:prstGeom>
+          <a:noFill/>
+          <a:ln/>
+        </p:spPr>
+        <p:txBody>
+          <a:bodyPr wrap="square" lIns="0" tIns="0" rIns="0" bIns="0" rtlCol="0" anchor="ctr"/>
+          <a:lstStyle/>
+          <a:p>
+            <a:pPr indent="0" marL="0">
+              <a:buNone/>
+            </a:pPr>
+            <a:r>
+              <a:rPr lang="en-US" sz="1100" dirty="0">
                 <a:solidFill>
                   <a:srgbClr val="1A1A2E"/>
                 </a:solidFill>
@@ -2651,49 +2753,42 @@
                 <a:ea typeface="Calibri" pitchFamily="34" charset="-122"/>
                 <a:cs typeface="Calibri" pitchFamily="34" charset="-120"/>
               </a:rPr>
-              <a:t>INNER JOIN album al ON a.id_artiste = al.id_artiste;</a:t>
-            </a:r>
-            <a:endParaRPr lang="en-US" sz="1200" dirty="0"/>
-          </a:p>
-        </p:txBody>
-      </p:sp>
-      <p:sp>
-        <p:nvSpPr>
-          <p:cNvPr id="10" name="Shape 8"/>
-          <p:cNvSpPr/>
-          <p:nvPr/>
-        </p:nvSpPr>
-        <p:spPr>
-          <a:xfrm>
-            <a:off x="457200" y="2011680"/>
-            <a:ext cx="8229600" cy="521208"/>
-          </a:xfrm>
-          <a:prstGeom prst="rect">
-            <a:avLst/>
-          </a:prstGeom>
-          <a:solidFill>
-            <a:srgbClr val="FFFFFF"/>
-          </a:solidFill>
-          <a:ln/>
-          <a:effectLst>
-            <a:outerShdw sx="100000" sy="100000" kx="0" ky="0" algn="bl" rotWithShape="0" blurRad="50800" dist="25400" dir="8100000">
-              <a:srgbClr val="000000">
-                <a:alpha val="12000"/>
-              </a:srgbClr>
-            </a:outerShdw>
-          </a:effectLst>
-        </p:spPr>
-      </p:sp>
-      <p:sp>
-        <p:nvSpPr>
-          <p:cNvPr id="11" name="Shape 9"/>
-          <p:cNvSpPr/>
-          <p:nvPr/>
-        </p:nvSpPr>
-        <p:spPr>
-          <a:xfrm>
-            <a:off x="457200" y="2011680"/>
-            <a:ext cx="45720" cy="521208"/>
+              <a:t>Retourne UNIQUEMENT les lignes avec correspondance</a:t>
+            </a:r>
+            <a:endParaRPr lang="en-US" sz="1100" dirty="0"/>
+          </a:p>
+        </p:txBody>
+      </p:sp>
+      <p:sp>
+        <p:nvSpPr>
+          <p:cNvPr id="13" name="Shape 11"/>
+          <p:cNvSpPr/>
+          <p:nvPr/>
+        </p:nvSpPr>
+        <p:spPr>
+          <a:xfrm>
+            <a:off x="457200" y="2203704"/>
+            <a:ext cx="8229600" cy="448056"/>
+          </a:xfrm>
+          <a:prstGeom prst="rect">
+            <a:avLst/>
+          </a:prstGeom>
+          <a:solidFill>
+            <a:srgbClr val="E3F2FD"/>
+          </a:solidFill>
+          <a:ln/>
+        </p:spPr>
+      </p:sp>
+      <p:sp>
+        <p:nvSpPr>
+          <p:cNvPr id="14" name="Shape 12"/>
+          <p:cNvSpPr/>
+          <p:nvPr/>
+        </p:nvSpPr>
+        <p:spPr>
+          <a:xfrm>
+            <a:off x="457200" y="2203704"/>
+            <a:ext cx="45720" cy="448056"/>
           </a:xfrm>
           <a:prstGeom prst="rect">
             <a:avLst/>
@@ -2706,14 +2801,14 @@
       </p:sp>
       <p:sp>
         <p:nvSpPr>
-          <p:cNvPr id="12" name="Text 10"/>
-          <p:cNvSpPr/>
-          <p:nvPr/>
-        </p:nvSpPr>
-        <p:spPr>
-          <a:xfrm>
-            <a:off x="685800" y="2011680"/>
-            <a:ext cx="7818120" cy="521208"/>
+          <p:cNvPr id="15" name="Text 13"/>
+          <p:cNvSpPr/>
+          <p:nvPr/>
+        </p:nvSpPr>
+        <p:spPr>
+          <a:xfrm>
+            <a:off x="640080" y="2203704"/>
+            <a:ext cx="7863840" cy="448056"/>
           </a:xfrm>
           <a:prstGeom prst="rect">
             <a:avLst/>
@@ -2729,7 +2824,7 @@
               <a:buNone/>
             </a:pPr>
             <a:r>
-              <a:rPr lang="en-US" sz="1200" dirty="0">
+              <a:rPr lang="en-US" sz="1100" dirty="0">
                 <a:solidFill>
                   <a:srgbClr val="1A1A2E"/>
                 </a:solidFill>
@@ -2737,49 +2832,42 @@
                 <a:ea typeface="Calibri" pitchFamily="34" charset="-122"/>
                 <a:cs typeface="Calibri" pitchFamily="34" charset="-120"/>
               </a:rPr>
-              <a:t>Retourne UNIQUEMENT les lignes avec correspondance dans les 2 tables</a:t>
-            </a:r>
-            <a:endParaRPr lang="en-US" sz="1200" dirty="0"/>
-          </a:p>
-        </p:txBody>
-      </p:sp>
-      <p:sp>
-        <p:nvSpPr>
-          <p:cNvPr id="13" name="Shape 11"/>
-          <p:cNvSpPr/>
-          <p:nvPr/>
-        </p:nvSpPr>
-        <p:spPr>
-          <a:xfrm>
-            <a:off x="457200" y="2560320"/>
-            <a:ext cx="8229600" cy="521208"/>
-          </a:xfrm>
-          <a:prstGeom prst="rect">
-            <a:avLst/>
-          </a:prstGeom>
-          <a:solidFill>
-            <a:srgbClr val="E3F2FD"/>
-          </a:solidFill>
-          <a:ln/>
-          <a:effectLst>
-            <a:outerShdw sx="100000" sy="100000" kx="0" ky="0" algn="bl" rotWithShape="0" blurRad="50800" dist="25400" dir="8100000">
-              <a:srgbClr val="000000">
-                <a:alpha val="12000"/>
-              </a:srgbClr>
-            </a:outerShdw>
-          </a:effectLst>
-        </p:spPr>
-      </p:sp>
-      <p:sp>
-        <p:nvSpPr>
-          <p:cNvPr id="14" name="Shape 12"/>
-          <p:cNvSpPr/>
-          <p:nvPr/>
-        </p:nvSpPr>
-        <p:spPr>
-          <a:xfrm>
-            <a:off x="457200" y="2560320"/>
-            <a:ext cx="45720" cy="521208"/>
+              <a:t>Artiste sans album → EXCLU du resultat</a:t>
+            </a:r>
+            <a:endParaRPr lang="en-US" sz="1100" dirty="0"/>
+          </a:p>
+        </p:txBody>
+      </p:sp>
+      <p:sp>
+        <p:nvSpPr>
+          <p:cNvPr id="16" name="Shape 14"/>
+          <p:cNvSpPr/>
+          <p:nvPr/>
+        </p:nvSpPr>
+        <p:spPr>
+          <a:xfrm>
+            <a:off x="457200" y="2679192"/>
+            <a:ext cx="8229600" cy="448056"/>
+          </a:xfrm>
+          <a:prstGeom prst="rect">
+            <a:avLst/>
+          </a:prstGeom>
+          <a:solidFill>
+            <a:srgbClr val="FFFFFF"/>
+          </a:solidFill>
+          <a:ln/>
+        </p:spPr>
+      </p:sp>
+      <p:sp>
+        <p:nvSpPr>
+          <p:cNvPr id="17" name="Shape 15"/>
+          <p:cNvSpPr/>
+          <p:nvPr/>
+        </p:nvSpPr>
+        <p:spPr>
+          <a:xfrm>
+            <a:off x="457200" y="2679192"/>
+            <a:ext cx="45720" cy="448056"/>
           </a:xfrm>
           <a:prstGeom prst="rect">
             <a:avLst/>
@@ -2792,14 +2880,14 @@
       </p:sp>
       <p:sp>
         <p:nvSpPr>
-          <p:cNvPr id="15" name="Text 13"/>
-          <p:cNvSpPr/>
-          <p:nvPr/>
-        </p:nvSpPr>
-        <p:spPr>
-          <a:xfrm>
-            <a:off x="685800" y="2560320"/>
-            <a:ext cx="7818120" cy="521208"/>
+          <p:cNvPr id="18" name="Text 16"/>
+          <p:cNvSpPr/>
+          <p:nvPr/>
+        </p:nvSpPr>
+        <p:spPr>
+          <a:xfrm>
+            <a:off x="640080" y="2679192"/>
+            <a:ext cx="7863840" cy="448056"/>
           </a:xfrm>
           <a:prstGeom prst="rect">
             <a:avLst/>
@@ -2815,7 +2903,7 @@
               <a:buNone/>
             </a:pPr>
             <a:r>
-              <a:rPr lang="en-US" sz="1200" dirty="0">
+              <a:rPr lang="en-US" sz="1100" dirty="0">
                 <a:solidFill>
                   <a:srgbClr val="1A1A2E"/>
                 </a:solidFill>
@@ -2823,49 +2911,42 @@
                 <a:ea typeface="Calibri" pitchFamily="34" charset="-122"/>
                 <a:cs typeface="Calibri" pitchFamily="34" charset="-120"/>
               </a:rPr>
-              <a:t>Artiste sans album → EXCLU du résultat</a:t>
-            </a:r>
-            <a:endParaRPr lang="en-US" sz="1200" dirty="0"/>
-          </a:p>
-        </p:txBody>
-      </p:sp>
-      <p:sp>
-        <p:nvSpPr>
-          <p:cNvPr id="16" name="Shape 14"/>
-          <p:cNvSpPr/>
-          <p:nvPr/>
-        </p:nvSpPr>
-        <p:spPr>
-          <a:xfrm>
-            <a:off x="457200" y="3108960"/>
-            <a:ext cx="8229600" cy="521208"/>
-          </a:xfrm>
-          <a:prstGeom prst="rect">
-            <a:avLst/>
-          </a:prstGeom>
-          <a:solidFill>
-            <a:srgbClr val="FFFFFF"/>
-          </a:solidFill>
-          <a:ln/>
-          <a:effectLst>
-            <a:outerShdw sx="100000" sy="100000" kx="0" ky="0" algn="bl" rotWithShape="0" blurRad="50800" dist="25400" dir="8100000">
-              <a:srgbClr val="000000">
-                <a:alpha val="12000"/>
-              </a:srgbClr>
-            </a:outerShdw>
-          </a:effectLst>
-        </p:spPr>
-      </p:sp>
-      <p:sp>
-        <p:nvSpPr>
-          <p:cNvPr id="17" name="Shape 15"/>
-          <p:cNvSpPr/>
-          <p:nvPr/>
-        </p:nvSpPr>
-        <p:spPr>
-          <a:xfrm>
-            <a:off x="457200" y="3108960"/>
-            <a:ext cx="45720" cy="521208"/>
+              <a:t>C'est le JOIN par defaut (JOIN = INNER JOIN)</a:t>
+            </a:r>
+            <a:endParaRPr lang="en-US" sz="1100" dirty="0"/>
+          </a:p>
+        </p:txBody>
+      </p:sp>
+      <p:sp>
+        <p:nvSpPr>
+          <p:cNvPr id="19" name="Shape 17"/>
+          <p:cNvSpPr/>
+          <p:nvPr/>
+        </p:nvSpPr>
+        <p:spPr>
+          <a:xfrm>
+            <a:off x="457200" y="3154680"/>
+            <a:ext cx="8229600" cy="448056"/>
+          </a:xfrm>
+          <a:prstGeom prst="rect">
+            <a:avLst/>
+          </a:prstGeom>
+          <a:solidFill>
+            <a:srgbClr val="E3F2FD"/>
+          </a:solidFill>
+          <a:ln/>
+        </p:spPr>
+      </p:sp>
+      <p:sp>
+        <p:nvSpPr>
+          <p:cNvPr id="20" name="Shape 18"/>
+          <p:cNvSpPr/>
+          <p:nvPr/>
+        </p:nvSpPr>
+        <p:spPr>
+          <a:xfrm>
+            <a:off x="457200" y="3154680"/>
+            <a:ext cx="45720" cy="448056"/>
           </a:xfrm>
           <a:prstGeom prst="rect">
             <a:avLst/>
@@ -2878,14 +2959,14 @@
       </p:sp>
       <p:sp>
         <p:nvSpPr>
-          <p:cNvPr id="18" name="Text 16"/>
-          <p:cNvSpPr/>
-          <p:nvPr/>
-        </p:nvSpPr>
-        <p:spPr>
-          <a:xfrm>
-            <a:off x="685800" y="3108960"/>
-            <a:ext cx="7818120" cy="521208"/>
+          <p:cNvPr id="21" name="Text 19"/>
+          <p:cNvSpPr/>
+          <p:nvPr/>
+        </p:nvSpPr>
+        <p:spPr>
+          <a:xfrm>
+            <a:off x="640080" y="3154680"/>
+            <a:ext cx="7863840" cy="448056"/>
           </a:xfrm>
           <a:prstGeom prst="rect">
             <a:avLst/>
@@ -2901,7 +2982,7 @@
               <a:buNone/>
             </a:pPr>
             <a:r>
-              <a:rPr lang="en-US" sz="1200" dirty="0">
+              <a:rPr lang="en-US" sz="1100" dirty="0">
                 <a:solidFill>
                   <a:srgbClr val="1A1A2E"/>
                 </a:solidFill>
@@ -2909,49 +2990,42 @@
                 <a:ea typeface="Calibri" pitchFamily="34" charset="-122"/>
                 <a:cs typeface="Calibri" pitchFamily="34" charset="-120"/>
               </a:rPr>
-              <a:t>Album sans artiste → EXCLU (impossible grâce à la FK NOT NULL)</a:t>
-            </a:r>
-            <a:endParaRPr lang="en-US" sz="1200" dirty="0"/>
-          </a:p>
-        </p:txBody>
-      </p:sp>
-      <p:sp>
-        <p:nvSpPr>
-          <p:cNvPr id="19" name="Shape 17"/>
-          <p:cNvSpPr/>
-          <p:nvPr/>
-        </p:nvSpPr>
-        <p:spPr>
-          <a:xfrm>
-            <a:off x="457200" y="3657600"/>
-            <a:ext cx="8229600" cy="521208"/>
-          </a:xfrm>
-          <a:prstGeom prst="rect">
-            <a:avLst/>
-          </a:prstGeom>
-          <a:solidFill>
-            <a:srgbClr val="E3F2FD"/>
-          </a:solidFill>
-          <a:ln/>
-          <a:effectLst>
-            <a:outerShdw sx="100000" sy="100000" kx="0" ky="0" algn="bl" rotWithShape="0" blurRad="50800" dist="25400" dir="8100000">
-              <a:srgbClr val="000000">
-                <a:alpha val="12000"/>
-              </a:srgbClr>
-            </a:outerShdw>
-          </a:effectLst>
-        </p:spPr>
-      </p:sp>
-      <p:sp>
-        <p:nvSpPr>
-          <p:cNvPr id="20" name="Shape 18"/>
-          <p:cNvSpPr/>
-          <p:nvPr/>
-        </p:nvSpPr>
-        <p:spPr>
-          <a:xfrm>
-            <a:off x="457200" y="3657600"/>
-            <a:ext cx="45720" cy="521208"/>
+              <a:t>Le plus utilise : ~80% des cas</a:t>
+            </a:r>
+            <a:endParaRPr lang="en-US" sz="1100" dirty="0"/>
+          </a:p>
+        </p:txBody>
+      </p:sp>
+      <p:sp>
+        <p:nvSpPr>
+          <p:cNvPr id="22" name="Shape 20"/>
+          <p:cNvSpPr/>
+          <p:nvPr/>
+        </p:nvSpPr>
+        <p:spPr>
+          <a:xfrm>
+            <a:off x="457200" y="3630168"/>
+            <a:ext cx="8229600" cy="448056"/>
+          </a:xfrm>
+          <a:prstGeom prst="rect">
+            <a:avLst/>
+          </a:prstGeom>
+          <a:solidFill>
+            <a:srgbClr val="FFFFFF"/>
+          </a:solidFill>
+          <a:ln/>
+        </p:spPr>
+      </p:sp>
+      <p:sp>
+        <p:nvSpPr>
+          <p:cNvPr id="23" name="Shape 21"/>
+          <p:cNvSpPr/>
+          <p:nvPr/>
+        </p:nvSpPr>
+        <p:spPr>
+          <a:xfrm>
+            <a:off x="457200" y="3630168"/>
+            <a:ext cx="45720" cy="448056"/>
           </a:xfrm>
           <a:prstGeom prst="rect">
             <a:avLst/>
@@ -2964,14 +3038,14 @@
       </p:sp>
       <p:sp>
         <p:nvSpPr>
-          <p:cNvPr id="21" name="Text 19"/>
-          <p:cNvSpPr/>
-          <p:nvPr/>
-        </p:nvSpPr>
-        <p:spPr>
-          <a:xfrm>
-            <a:off x="685800" y="3657600"/>
-            <a:ext cx="7818120" cy="521208"/>
+          <p:cNvPr id="24" name="Text 22"/>
+          <p:cNvSpPr/>
+          <p:nvPr/>
+        </p:nvSpPr>
+        <p:spPr>
+          <a:xfrm>
+            <a:off x="640080" y="3630168"/>
+            <a:ext cx="7863840" cy="448056"/>
           </a:xfrm>
           <a:prstGeom prst="rect">
             <a:avLst/>
@@ -2987,7 +3061,7 @@
               <a:buNone/>
             </a:pPr>
             <a:r>
-              <a:rPr lang="en-US" sz="1200" dirty="0">
+              <a:rPr lang="en-US" sz="1100" dirty="0">
                 <a:solidFill>
                   <a:srgbClr val="1A1A2E"/>
                 </a:solidFill>
@@ -2995,95 +3069,9 @@
                 <a:ea typeface="Calibri" pitchFamily="34" charset="-122"/>
                 <a:cs typeface="Calibri" pitchFamily="34" charset="-120"/>
               </a:rPr>
-              <a:t>C'est le JOIN par défaut (JOIN = INNER JOIN)</a:t>
-            </a:r>
-            <a:endParaRPr lang="en-US" sz="1200" dirty="0"/>
-          </a:p>
-        </p:txBody>
-      </p:sp>
-      <p:sp>
-        <p:nvSpPr>
-          <p:cNvPr id="22" name="Shape 20"/>
-          <p:cNvSpPr/>
-          <p:nvPr/>
-        </p:nvSpPr>
-        <p:spPr>
-          <a:xfrm>
-            <a:off x="457200" y="4206240"/>
-            <a:ext cx="8229600" cy="521208"/>
-          </a:xfrm>
-          <a:prstGeom prst="rect">
-            <a:avLst/>
-          </a:prstGeom>
-          <a:solidFill>
-            <a:srgbClr val="FFFFFF"/>
-          </a:solidFill>
-          <a:ln/>
-          <a:effectLst>
-            <a:outerShdw sx="100000" sy="100000" kx="0" ky="0" algn="bl" rotWithShape="0" blurRad="50800" dist="25400" dir="8100000">
-              <a:srgbClr val="000000">
-                <a:alpha val="12000"/>
-              </a:srgbClr>
-            </a:outerShdw>
-          </a:effectLst>
-        </p:spPr>
-      </p:sp>
-      <p:sp>
-        <p:nvSpPr>
-          <p:cNvPr id="23" name="Shape 21"/>
-          <p:cNvSpPr/>
-          <p:nvPr/>
-        </p:nvSpPr>
-        <p:spPr>
-          <a:xfrm>
-            <a:off x="457200" y="4206240"/>
-            <a:ext cx="45720" cy="521208"/>
-          </a:xfrm>
-          <a:prstGeom prst="rect">
-            <a:avLst/>
-          </a:prstGeom>
-          <a:solidFill>
-            <a:srgbClr val="1565C0"/>
-          </a:solidFill>
-          <a:ln/>
-        </p:spPr>
-      </p:sp>
-      <p:sp>
-        <p:nvSpPr>
-          <p:cNvPr id="24" name="Text 22"/>
-          <p:cNvSpPr/>
-          <p:nvPr/>
-        </p:nvSpPr>
-        <p:spPr>
-          <a:xfrm>
-            <a:off x="685800" y="4206240"/>
-            <a:ext cx="7818120" cy="521208"/>
-          </a:xfrm>
-          <a:prstGeom prst="rect">
-            <a:avLst/>
-          </a:prstGeom>
-          <a:noFill/>
-          <a:ln/>
-        </p:spPr>
-        <p:txBody>
-          <a:bodyPr wrap="square" lIns="0" tIns="0" rIns="0" bIns="0" rtlCol="0" anchor="ctr"/>
-          <a:lstStyle/>
-          <a:p>
-            <a:pPr indent="0" marL="0">
-              <a:buNone/>
-            </a:pPr>
-            <a:r>
-              <a:rPr lang="en-US" sz="1200" dirty="0">
-                <a:solidFill>
-                  <a:srgbClr val="1A1A2E"/>
-                </a:solidFill>
-                <a:latin typeface="Calibri" pitchFamily="34" charset="0"/>
-                <a:ea typeface="Calibri" pitchFamily="34" charset="-122"/>
-                <a:cs typeface="Calibri" pitchFamily="34" charset="-120"/>
-              </a:rPr>
-              <a:t>Le plus utilisé : ~80% des cas</a:t>
-            </a:r>
-            <a:endParaRPr lang="en-US" sz="1200" dirty="0"/>
+              <a:t>GESCOM : SELECT a.DESART, f.LIBFAM FROM article a JOIN famille f ON a.NOFAM = f.NOFAM;</a:t>
+            </a:r>
+            <a:endParaRPr lang="en-US" sz="1100" dirty="0"/>
           </a:p>
         </p:txBody>
       </p:sp>
@@ -3148,7 +3136,7 @@
         <p:spPr>
           <a:xfrm>
             <a:off x="457200" y="182880"/>
-            <a:ext cx="8229600" cy="594360"/>
+            <a:ext cx="8229600" cy="502920"/>
           </a:xfrm>
           <a:prstGeom prst="rect">
             <a:avLst/>
@@ -3164,7 +3152,7 @@
               <a:buNone/>
             </a:pPr>
             <a:r>
-              <a:rPr lang="en-US" sz="2400" b="1" dirty="0">
+              <a:rPr lang="en-US" sz="2100" b="1" dirty="0">
                 <a:solidFill>
                   <a:srgbClr val="0D47A1"/>
                 </a:solidFill>
@@ -3172,9 +3160,9 @@
                 <a:ea typeface="Trebuchet MS" pitchFamily="34" charset="-122"/>
                 <a:cs typeface="Trebuchet MS" pitchFamily="34" charset="-120"/>
               </a:rPr>
-              <a:t>LEFT JOIN : tout à gauche</a:t>
-            </a:r>
-            <a:endParaRPr lang="en-US" sz="2400" dirty="0"/>
+              <a:t>LEFT JOIN : tout a gauche</a:t>
+            </a:r>
+            <a:endParaRPr lang="en-US" sz="2100" dirty="0"/>
           </a:p>
         </p:txBody>
       </p:sp>
@@ -3186,8 +3174,8 @@
         </p:nvSpPr>
         <p:spPr>
           <a:xfrm>
-            <a:off x="457200" y="914400"/>
-            <a:ext cx="8229600" cy="521208"/>
+            <a:off x="457200" y="777240"/>
+            <a:ext cx="8229600" cy="409448"/>
           </a:xfrm>
           <a:prstGeom prst="rect">
             <a:avLst/>
@@ -3196,13 +3184,6 @@
             <a:srgbClr val="FFFFFF"/>
           </a:solidFill>
           <a:ln/>
-          <a:effectLst>
-            <a:outerShdw sx="100000" sy="100000" kx="0" ky="0" algn="bl" rotWithShape="0" blurRad="50800" dist="25400" dir="8100000">
-              <a:srgbClr val="000000">
-                <a:alpha val="12000"/>
-              </a:srgbClr>
-            </a:outerShdw>
-          </a:effectLst>
         </p:spPr>
       </p:sp>
       <p:sp>
@@ -3213,8 +3194,8 @@
         </p:nvSpPr>
         <p:spPr>
           <a:xfrm>
-            <a:off x="457200" y="914400"/>
-            <a:ext cx="45720" cy="521208"/>
+            <a:off x="457200" y="777240"/>
+            <a:ext cx="45720" cy="409448"/>
           </a:xfrm>
           <a:prstGeom prst="rect">
             <a:avLst/>
@@ -3233,8 +3214,8 @@
         </p:nvSpPr>
         <p:spPr>
           <a:xfrm>
-            <a:off x="685800" y="914400"/>
-            <a:ext cx="7818120" cy="521208"/>
+            <a:off x="640080" y="777240"/>
+            <a:ext cx="7863840" cy="409448"/>
           </a:xfrm>
           <a:prstGeom prst="rect">
             <a:avLst/>
@@ -3272,8 +3253,8 @@
         </p:nvSpPr>
         <p:spPr>
           <a:xfrm>
-            <a:off x="457200" y="1463040"/>
-            <a:ext cx="8229600" cy="521208"/>
+            <a:off x="457200" y="1214120"/>
+            <a:ext cx="8229600" cy="409448"/>
           </a:xfrm>
           <a:prstGeom prst="rect">
             <a:avLst/>
@@ -3282,13 +3263,6 @@
             <a:srgbClr val="E3F2FD"/>
           </a:solidFill>
           <a:ln/>
-          <a:effectLst>
-            <a:outerShdw sx="100000" sy="100000" kx="0" ky="0" algn="bl" rotWithShape="0" blurRad="50800" dist="25400" dir="8100000">
-              <a:srgbClr val="000000">
-                <a:alpha val="12000"/>
-              </a:srgbClr>
-            </a:outerShdw>
-          </a:effectLst>
         </p:spPr>
       </p:sp>
       <p:sp>
@@ -3299,8 +3273,8 @@
         </p:nvSpPr>
         <p:spPr>
           <a:xfrm>
-            <a:off x="457200" y="1463040"/>
-            <a:ext cx="45720" cy="521208"/>
+            <a:off x="457200" y="1214120"/>
+            <a:ext cx="45720" cy="409448"/>
           </a:xfrm>
           <a:prstGeom prst="rect">
             <a:avLst/>
@@ -3319,8 +3293,8 @@
         </p:nvSpPr>
         <p:spPr>
           <a:xfrm>
-            <a:off x="685800" y="1463040"/>
-            <a:ext cx="7818120" cy="521208"/>
+            <a:off x="640080" y="1214120"/>
+            <a:ext cx="7863840" cy="409448"/>
           </a:xfrm>
           <a:prstGeom prst="rect">
             <a:avLst/>
@@ -3336,7 +3310,86 @@
               <a:buNone/>
             </a:pPr>
             <a:r>
-              <a:rPr lang="en-US" sz="1200" dirty="0">
+              <a:rPr lang="en-US" sz="1000" dirty="0">
+                <a:solidFill>
+                  <a:srgbClr val="0D47A1"/>
+                </a:solidFill>
+                <a:latin typeface="JetBrains Mono" pitchFamily="34" charset="0"/>
+                <a:ea typeface="JetBrains Mono" pitchFamily="34" charset="-122"/>
+                <a:cs typeface="JetBrains Mono" pitchFamily="34" charset="-120"/>
+              </a:rPr>
+              <a:t>LEFT JOIN album al ON a.id_artiste = al.id_artiste;</a:t>
+            </a:r>
+            <a:endParaRPr lang="en-US" sz="1000" dirty="0"/>
+          </a:p>
+        </p:txBody>
+      </p:sp>
+      <p:sp>
+        <p:nvSpPr>
+          <p:cNvPr id="10" name="Shape 8"/>
+          <p:cNvSpPr/>
+          <p:nvPr/>
+        </p:nvSpPr>
+        <p:spPr>
+          <a:xfrm>
+            <a:off x="457200" y="1651000"/>
+            <a:ext cx="8229600" cy="409448"/>
+          </a:xfrm>
+          <a:prstGeom prst="rect">
+            <a:avLst/>
+          </a:prstGeom>
+          <a:solidFill>
+            <a:srgbClr val="FFFFFF"/>
+          </a:solidFill>
+          <a:ln/>
+        </p:spPr>
+      </p:sp>
+      <p:sp>
+        <p:nvSpPr>
+          <p:cNvPr id="11" name="Shape 9"/>
+          <p:cNvSpPr/>
+          <p:nvPr/>
+        </p:nvSpPr>
+        <p:spPr>
+          <a:xfrm>
+            <a:off x="457200" y="1651000"/>
+            <a:ext cx="45720" cy="409448"/>
+          </a:xfrm>
+          <a:prstGeom prst="rect">
+            <a:avLst/>
+          </a:prstGeom>
+          <a:solidFill>
+            <a:srgbClr val="1565C0"/>
+          </a:solidFill>
+          <a:ln/>
+        </p:spPr>
+      </p:sp>
+      <p:sp>
+        <p:nvSpPr>
+          <p:cNvPr id="12" name="Text 10"/>
+          <p:cNvSpPr/>
+          <p:nvPr/>
+        </p:nvSpPr>
+        <p:spPr>
+          <a:xfrm>
+            <a:off x="640080" y="1651000"/>
+            <a:ext cx="7863840" cy="409448"/>
+          </a:xfrm>
+          <a:prstGeom prst="rect">
+            <a:avLst/>
+          </a:prstGeom>
+          <a:noFill/>
+          <a:ln/>
+        </p:spPr>
+        <p:txBody>
+          <a:bodyPr wrap="square" lIns="0" tIns="0" rIns="0" bIns="0" rtlCol="0" anchor="ctr"/>
+          <a:lstStyle/>
+          <a:p>
+            <a:pPr indent="0" marL="0">
+              <a:buNone/>
+            </a:pPr>
+            <a:r>
+              <a:rPr lang="en-US" sz="1100" dirty="0">
                 <a:solidFill>
                   <a:srgbClr val="1A1A2E"/>
                 </a:solidFill>
@@ -3344,49 +3397,42 @@
                 <a:ea typeface="Calibri" pitchFamily="34" charset="-122"/>
                 <a:cs typeface="Calibri" pitchFamily="34" charset="-120"/>
               </a:rPr>
-              <a:t>LEFT JOIN album al ON a.id_artiste = al.id_artiste;</a:t>
-            </a:r>
-            <a:endParaRPr lang="en-US" sz="1200" dirty="0"/>
-          </a:p>
-        </p:txBody>
-      </p:sp>
-      <p:sp>
-        <p:nvSpPr>
-          <p:cNvPr id="10" name="Shape 8"/>
-          <p:cNvSpPr/>
-          <p:nvPr/>
-        </p:nvSpPr>
-        <p:spPr>
-          <a:xfrm>
-            <a:off x="457200" y="2011680"/>
-            <a:ext cx="8229600" cy="521208"/>
-          </a:xfrm>
-          <a:prstGeom prst="rect">
-            <a:avLst/>
-          </a:prstGeom>
-          <a:solidFill>
-            <a:srgbClr val="FFFFFF"/>
-          </a:solidFill>
-          <a:ln/>
-          <a:effectLst>
-            <a:outerShdw sx="100000" sy="100000" kx="0" ky="0" algn="bl" rotWithShape="0" blurRad="50800" dist="25400" dir="8100000">
-              <a:srgbClr val="000000">
-                <a:alpha val="12000"/>
-              </a:srgbClr>
-            </a:outerShdw>
-          </a:effectLst>
-        </p:spPr>
-      </p:sp>
-      <p:sp>
-        <p:nvSpPr>
-          <p:cNvPr id="11" name="Shape 9"/>
-          <p:cNvSpPr/>
-          <p:nvPr/>
-        </p:nvSpPr>
-        <p:spPr>
-          <a:xfrm>
-            <a:off x="457200" y="2011680"/>
-            <a:ext cx="45720" cy="521208"/>
+              <a:t>Retourne TOUS les artistes, meme sans album</a:t>
+            </a:r>
+            <a:endParaRPr lang="en-US" sz="1100" dirty="0"/>
+          </a:p>
+        </p:txBody>
+      </p:sp>
+      <p:sp>
+        <p:nvSpPr>
+          <p:cNvPr id="13" name="Shape 11"/>
+          <p:cNvSpPr/>
+          <p:nvPr/>
+        </p:nvSpPr>
+        <p:spPr>
+          <a:xfrm>
+            <a:off x="457200" y="2087880"/>
+            <a:ext cx="8229600" cy="409448"/>
+          </a:xfrm>
+          <a:prstGeom prst="rect">
+            <a:avLst/>
+          </a:prstGeom>
+          <a:solidFill>
+            <a:srgbClr val="E3F2FD"/>
+          </a:solidFill>
+          <a:ln/>
+        </p:spPr>
+      </p:sp>
+      <p:sp>
+        <p:nvSpPr>
+          <p:cNvPr id="14" name="Shape 12"/>
+          <p:cNvSpPr/>
+          <p:nvPr/>
+        </p:nvSpPr>
+        <p:spPr>
+          <a:xfrm>
+            <a:off x="457200" y="2087880"/>
+            <a:ext cx="45720" cy="409448"/>
           </a:xfrm>
           <a:prstGeom prst="rect">
             <a:avLst/>
@@ -3399,14 +3445,14 @@
       </p:sp>
       <p:sp>
         <p:nvSpPr>
-          <p:cNvPr id="12" name="Text 10"/>
-          <p:cNvSpPr/>
-          <p:nvPr/>
-        </p:nvSpPr>
-        <p:spPr>
-          <a:xfrm>
-            <a:off x="685800" y="2011680"/>
-            <a:ext cx="7818120" cy="521208"/>
+          <p:cNvPr id="15" name="Text 13"/>
+          <p:cNvSpPr/>
+          <p:nvPr/>
+        </p:nvSpPr>
+        <p:spPr>
+          <a:xfrm>
+            <a:off x="640080" y="2087880"/>
+            <a:ext cx="7863840" cy="409448"/>
           </a:xfrm>
           <a:prstGeom prst="rect">
             <a:avLst/>
@@ -3422,7 +3468,7 @@
               <a:buNone/>
             </a:pPr>
             <a:r>
-              <a:rPr lang="en-US" sz="1200" dirty="0">
+              <a:rPr lang="en-US" sz="1100" dirty="0">
                 <a:solidFill>
                   <a:srgbClr val="1A1A2E"/>
                 </a:solidFill>
@@ -3430,49 +3476,42 @@
                 <a:ea typeface="Calibri" pitchFamily="34" charset="-122"/>
                 <a:cs typeface="Calibri" pitchFamily="34" charset="-120"/>
               </a:rPr>
-              <a:t>Retourne TOUS les artistes, même ceux sans album</a:t>
-            </a:r>
-            <a:endParaRPr lang="en-US" sz="1200" dirty="0"/>
-          </a:p>
-        </p:txBody>
-      </p:sp>
-      <p:sp>
-        <p:nvSpPr>
-          <p:cNvPr id="13" name="Shape 11"/>
-          <p:cNvSpPr/>
-          <p:nvPr/>
-        </p:nvSpPr>
-        <p:spPr>
-          <a:xfrm>
-            <a:off x="457200" y="2560320"/>
-            <a:ext cx="8229600" cy="521208"/>
-          </a:xfrm>
-          <a:prstGeom prst="rect">
-            <a:avLst/>
-          </a:prstGeom>
-          <a:solidFill>
-            <a:srgbClr val="E3F2FD"/>
-          </a:solidFill>
-          <a:ln/>
-          <a:effectLst>
-            <a:outerShdw sx="100000" sy="100000" kx="0" ky="0" algn="bl" rotWithShape="0" blurRad="50800" dist="25400" dir="8100000">
-              <a:srgbClr val="000000">
-                <a:alpha val="12000"/>
-              </a:srgbClr>
-            </a:outerShdw>
-          </a:effectLst>
-        </p:spPr>
-      </p:sp>
-      <p:sp>
-        <p:nvSpPr>
-          <p:cNvPr id="14" name="Shape 12"/>
-          <p:cNvSpPr/>
-          <p:nvPr/>
-        </p:nvSpPr>
-        <p:spPr>
-          <a:xfrm>
-            <a:off x="457200" y="2560320"/>
-            <a:ext cx="45720" cy="521208"/>
+              <a:t>Colonnes album = NULL si pas de correspondance</a:t>
+            </a:r>
+            <a:endParaRPr lang="en-US" sz="1100" dirty="0"/>
+          </a:p>
+        </p:txBody>
+      </p:sp>
+      <p:sp>
+        <p:nvSpPr>
+          <p:cNvPr id="16" name="Shape 14"/>
+          <p:cNvSpPr/>
+          <p:nvPr/>
+        </p:nvSpPr>
+        <p:spPr>
+          <a:xfrm>
+            <a:off x="457200" y="2524760"/>
+            <a:ext cx="8229600" cy="409448"/>
+          </a:xfrm>
+          <a:prstGeom prst="rect">
+            <a:avLst/>
+          </a:prstGeom>
+          <a:solidFill>
+            <a:srgbClr val="FFFFFF"/>
+          </a:solidFill>
+          <a:ln/>
+        </p:spPr>
+      </p:sp>
+      <p:sp>
+        <p:nvSpPr>
+          <p:cNvPr id="17" name="Shape 15"/>
+          <p:cNvSpPr/>
+          <p:nvPr/>
+        </p:nvSpPr>
+        <p:spPr>
+          <a:xfrm>
+            <a:off x="457200" y="2524760"/>
+            <a:ext cx="45720" cy="409448"/>
           </a:xfrm>
           <a:prstGeom prst="rect">
             <a:avLst/>
@@ -3485,14 +3524,14 @@
       </p:sp>
       <p:sp>
         <p:nvSpPr>
-          <p:cNvPr id="15" name="Text 13"/>
-          <p:cNvSpPr/>
-          <p:nvPr/>
-        </p:nvSpPr>
-        <p:spPr>
-          <a:xfrm>
-            <a:off x="685800" y="2560320"/>
-            <a:ext cx="7818120" cy="521208"/>
+          <p:cNvPr id="18" name="Text 16"/>
+          <p:cNvSpPr/>
+          <p:nvPr/>
+        </p:nvSpPr>
+        <p:spPr>
+          <a:xfrm>
+            <a:off x="640080" y="2524760"/>
+            <a:ext cx="7863840" cy="409448"/>
           </a:xfrm>
           <a:prstGeom prst="rect">
             <a:avLst/>
@@ -3508,7 +3547,7 @@
               <a:buNone/>
             </a:pPr>
             <a:r>
-              <a:rPr lang="en-US" sz="1200" dirty="0">
+              <a:rPr lang="en-US" sz="1100" dirty="0">
                 <a:solidFill>
                   <a:srgbClr val="1A1A2E"/>
                 </a:solidFill>
@@ -3516,22 +3555,101 @@
                 <a:ea typeface="Calibri" pitchFamily="34" charset="-122"/>
                 <a:cs typeface="Calibri" pitchFamily="34" charset="-120"/>
               </a:rPr>
-              <a:t>Colonnes album = NULL si pas de correspondance</a:t>
-            </a:r>
-            <a:endParaRPr lang="en-US" sz="1200" dirty="0"/>
-          </a:p>
-        </p:txBody>
-      </p:sp>
-      <p:sp>
-        <p:nvSpPr>
-          <p:cNvPr id="16" name="Shape 14"/>
-          <p:cNvSpPr/>
-          <p:nvPr/>
-        </p:nvSpPr>
-        <p:spPr>
-          <a:xfrm>
-            <a:off x="457200" y="3108960"/>
-            <a:ext cx="8229600" cy="521208"/>
+              <a:t>Astuce pour trouver les 'orphelins' :</a:t>
+            </a:r>
+            <a:endParaRPr lang="en-US" sz="1100" dirty="0"/>
+          </a:p>
+        </p:txBody>
+      </p:sp>
+      <p:sp>
+        <p:nvSpPr>
+          <p:cNvPr id="19" name="Shape 17"/>
+          <p:cNvSpPr/>
+          <p:nvPr/>
+        </p:nvSpPr>
+        <p:spPr>
+          <a:xfrm>
+            <a:off x="457200" y="2961640"/>
+            <a:ext cx="8229600" cy="409448"/>
+          </a:xfrm>
+          <a:prstGeom prst="rect">
+            <a:avLst/>
+          </a:prstGeom>
+          <a:solidFill>
+            <a:srgbClr val="E3F2FD"/>
+          </a:solidFill>
+          <a:ln/>
+        </p:spPr>
+      </p:sp>
+      <p:sp>
+        <p:nvSpPr>
+          <p:cNvPr id="20" name="Shape 18"/>
+          <p:cNvSpPr/>
+          <p:nvPr/>
+        </p:nvSpPr>
+        <p:spPr>
+          <a:xfrm>
+            <a:off x="457200" y="2961640"/>
+            <a:ext cx="45720" cy="409448"/>
+          </a:xfrm>
+          <a:prstGeom prst="rect">
+            <a:avLst/>
+          </a:prstGeom>
+          <a:solidFill>
+            <a:srgbClr val="1565C0"/>
+          </a:solidFill>
+          <a:ln/>
+        </p:spPr>
+      </p:sp>
+      <p:sp>
+        <p:nvSpPr>
+          <p:cNvPr id="21" name="Text 19"/>
+          <p:cNvSpPr/>
+          <p:nvPr/>
+        </p:nvSpPr>
+        <p:spPr>
+          <a:xfrm>
+            <a:off x="640080" y="2961640"/>
+            <a:ext cx="7863840" cy="409448"/>
+          </a:xfrm>
+          <a:prstGeom prst="rect">
+            <a:avLst/>
+          </a:prstGeom>
+          <a:noFill/>
+          <a:ln/>
+        </p:spPr>
+        <p:txBody>
+          <a:bodyPr wrap="square" lIns="0" tIns="0" rIns="0" bIns="0" rtlCol="0" anchor="ctr"/>
+          <a:lstStyle/>
+          <a:p>
+            <a:pPr indent="0" marL="0">
+              <a:buNone/>
+            </a:pPr>
+            <a:r>
+              <a:rPr lang="en-US" sz="1000" dirty="0">
+                <a:solidFill>
+                  <a:srgbClr val="0D47A1"/>
+                </a:solidFill>
+                <a:latin typeface="JetBrains Mono" pitchFamily="34" charset="0"/>
+                <a:ea typeface="JetBrains Mono" pitchFamily="34" charset="-122"/>
+                <a:cs typeface="JetBrains Mono" pitchFamily="34" charset="-120"/>
+              </a:rPr>
+              <a:t>  SELECT a.nom FROM artiste a</a:t>
+            </a:r>
+            <a:endParaRPr lang="en-US" sz="1000" dirty="0"/>
+          </a:p>
+        </p:txBody>
+      </p:sp>
+      <p:sp>
+        <p:nvSpPr>
+          <p:cNvPr id="22" name="Shape 20"/>
+          <p:cNvSpPr/>
+          <p:nvPr/>
+        </p:nvSpPr>
+        <p:spPr>
+          <a:xfrm>
+            <a:off x="457200" y="3398520"/>
+            <a:ext cx="8229600" cy="409448"/>
           </a:xfrm>
           <a:prstGeom prst="rect">
             <a:avLst/>
@@ -3540,25 +3658,18 @@
             <a:srgbClr val="FFFFFF"/>
           </a:solidFill>
           <a:ln/>
-          <a:effectLst>
-            <a:outerShdw sx="100000" sy="100000" kx="0" ky="0" algn="bl" rotWithShape="0" blurRad="50800" dist="25400" dir="8100000">
-              <a:srgbClr val="000000">
-                <a:alpha val="12000"/>
-              </a:srgbClr>
-            </a:outerShdw>
-          </a:effectLst>
-        </p:spPr>
-      </p:sp>
-      <p:sp>
-        <p:nvSpPr>
-          <p:cNvPr id="17" name="Shape 15"/>
-          <p:cNvSpPr/>
-          <p:nvPr/>
-        </p:nvSpPr>
-        <p:spPr>
-          <a:xfrm>
-            <a:off x="457200" y="3108960"/>
-            <a:ext cx="45720" cy="521208"/>
+        </p:spPr>
+      </p:sp>
+      <p:sp>
+        <p:nvSpPr>
+          <p:cNvPr id="23" name="Shape 21"/>
+          <p:cNvSpPr/>
+          <p:nvPr/>
+        </p:nvSpPr>
+        <p:spPr>
+          <a:xfrm>
+            <a:off x="457200" y="3398520"/>
+            <a:ext cx="45720" cy="409448"/>
           </a:xfrm>
           <a:prstGeom prst="rect">
             <a:avLst/>
@@ -3571,14 +3682,14 @@
       </p:sp>
       <p:sp>
         <p:nvSpPr>
-          <p:cNvPr id="18" name="Text 16"/>
-          <p:cNvSpPr/>
-          <p:nvPr/>
-        </p:nvSpPr>
-        <p:spPr>
-          <a:xfrm>
-            <a:off x="685800" y="3108960"/>
-            <a:ext cx="7818120" cy="521208"/>
+          <p:cNvPr id="24" name="Text 22"/>
+          <p:cNvSpPr/>
+          <p:nvPr/>
+        </p:nvSpPr>
+        <p:spPr>
+          <a:xfrm>
+            <a:off x="640080" y="3398520"/>
+            <a:ext cx="7863840" cy="409448"/>
           </a:xfrm>
           <a:prstGeom prst="rect">
             <a:avLst/>
@@ -3594,7 +3705,86 @@
               <a:buNone/>
             </a:pPr>
             <a:r>
-              <a:rPr lang="en-US" sz="1200" dirty="0">
+              <a:rPr lang="en-US" sz="1000" dirty="0">
+                <a:solidFill>
+                  <a:srgbClr val="0D47A1"/>
+                </a:solidFill>
+                <a:latin typeface="JetBrains Mono" pitchFamily="34" charset="0"/>
+                <a:ea typeface="JetBrains Mono" pitchFamily="34" charset="-122"/>
+                <a:cs typeface="JetBrains Mono" pitchFamily="34" charset="-120"/>
+              </a:rPr>
+              <a:t>  LEFT JOIN album al ON ... WHERE al.id_album IS NULL;</a:t>
+            </a:r>
+            <a:endParaRPr lang="en-US" sz="1000" dirty="0"/>
+          </a:p>
+        </p:txBody>
+      </p:sp>
+      <p:sp>
+        <p:nvSpPr>
+          <p:cNvPr id="25" name="Shape 23"/>
+          <p:cNvSpPr/>
+          <p:nvPr/>
+        </p:nvSpPr>
+        <p:spPr>
+          <a:xfrm>
+            <a:off x="457200" y="3835400"/>
+            <a:ext cx="8229600" cy="409448"/>
+          </a:xfrm>
+          <a:prstGeom prst="rect">
+            <a:avLst/>
+          </a:prstGeom>
+          <a:solidFill>
+            <a:srgbClr val="E3F2FD"/>
+          </a:solidFill>
+          <a:ln/>
+        </p:spPr>
+      </p:sp>
+      <p:sp>
+        <p:nvSpPr>
+          <p:cNvPr id="26" name="Shape 24"/>
+          <p:cNvSpPr/>
+          <p:nvPr/>
+        </p:nvSpPr>
+        <p:spPr>
+          <a:xfrm>
+            <a:off x="457200" y="3835400"/>
+            <a:ext cx="45720" cy="409448"/>
+          </a:xfrm>
+          <a:prstGeom prst="rect">
+            <a:avLst/>
+          </a:prstGeom>
+          <a:solidFill>
+            <a:srgbClr val="1565C0"/>
+          </a:solidFill>
+          <a:ln/>
+        </p:spPr>
+      </p:sp>
+      <p:sp>
+        <p:nvSpPr>
+          <p:cNvPr id="27" name="Text 25"/>
+          <p:cNvSpPr/>
+          <p:nvPr/>
+        </p:nvSpPr>
+        <p:spPr>
+          <a:xfrm>
+            <a:off x="640080" y="3835400"/>
+            <a:ext cx="7863840" cy="409448"/>
+          </a:xfrm>
+          <a:prstGeom prst="rect">
+            <a:avLst/>
+          </a:prstGeom>
+          <a:noFill/>
+          <a:ln/>
+        </p:spPr>
+        <p:txBody>
+          <a:bodyPr wrap="square" lIns="0" tIns="0" rIns="0" bIns="0" rtlCol="0" anchor="ctr"/>
+          <a:lstStyle/>
+          <a:p>
+            <a:pPr indent="0" marL="0">
+              <a:buNone/>
+            </a:pPr>
+            <a:r>
+              <a:rPr lang="en-US" sz="1100" dirty="0">
                 <a:solidFill>
                   <a:srgbClr val="1A1A2E"/>
                 </a:solidFill>
@@ -3602,49 +3792,42 @@
                 <a:ea typeface="Calibri" pitchFamily="34" charset="-122"/>
                 <a:cs typeface="Calibri" pitchFamily="34" charset="-120"/>
               </a:rPr>
-              <a:t>Astuce pour trouver les 'orphelins' :</a:t>
-            </a:r>
-            <a:endParaRPr lang="en-US" sz="1200" dirty="0"/>
-          </a:p>
-        </p:txBody>
-      </p:sp>
-      <p:sp>
-        <p:nvSpPr>
-          <p:cNvPr id="19" name="Shape 17"/>
-          <p:cNvSpPr/>
-          <p:nvPr/>
-        </p:nvSpPr>
-        <p:spPr>
-          <a:xfrm>
-            <a:off x="457200" y="3657600"/>
-            <a:ext cx="8229600" cy="521208"/>
-          </a:xfrm>
-          <a:prstGeom prst="rect">
-            <a:avLst/>
-          </a:prstGeom>
-          <a:solidFill>
-            <a:srgbClr val="E3F2FD"/>
-          </a:solidFill>
-          <a:ln/>
-          <a:effectLst>
-            <a:outerShdw sx="100000" sy="100000" kx="0" ky="0" algn="bl" rotWithShape="0" blurRad="50800" dist="25400" dir="8100000">
-              <a:srgbClr val="000000">
-                <a:alpha val="12000"/>
-              </a:srgbClr>
-            </a:outerShdw>
-          </a:effectLst>
-        </p:spPr>
-      </p:sp>
-      <p:sp>
-        <p:nvSpPr>
-          <p:cNvPr id="20" name="Shape 18"/>
-          <p:cNvSpPr/>
-          <p:nvPr/>
-        </p:nvSpPr>
-        <p:spPr>
-          <a:xfrm>
-            <a:off x="457200" y="3657600"/>
-            <a:ext cx="45720" cy="521208"/>
+              <a:t>  → Artistes sans aucun album</a:t>
+            </a:r>
+            <a:endParaRPr lang="en-US" sz="1100" dirty="0"/>
+          </a:p>
+        </p:txBody>
+      </p:sp>
+      <p:sp>
+        <p:nvSpPr>
+          <p:cNvPr id="28" name="Shape 26"/>
+          <p:cNvSpPr/>
+          <p:nvPr/>
+        </p:nvSpPr>
+        <p:spPr>
+          <a:xfrm>
+            <a:off x="457200" y="4272280"/>
+            <a:ext cx="8229600" cy="409448"/>
+          </a:xfrm>
+          <a:prstGeom prst="rect">
+            <a:avLst/>
+          </a:prstGeom>
+          <a:solidFill>
+            <a:srgbClr val="FFFFFF"/>
+          </a:solidFill>
+          <a:ln/>
+        </p:spPr>
+      </p:sp>
+      <p:sp>
+        <p:nvSpPr>
+          <p:cNvPr id="29" name="Shape 27"/>
+          <p:cNvSpPr/>
+          <p:nvPr/>
+        </p:nvSpPr>
+        <p:spPr>
+          <a:xfrm>
+            <a:off x="457200" y="4272280"/>
+            <a:ext cx="45720" cy="409448"/>
           </a:xfrm>
           <a:prstGeom prst="rect">
             <a:avLst/>
@@ -3657,14 +3840,14 @@
       </p:sp>
       <p:sp>
         <p:nvSpPr>
-          <p:cNvPr id="21" name="Text 19"/>
-          <p:cNvSpPr/>
-          <p:nvPr/>
-        </p:nvSpPr>
-        <p:spPr>
-          <a:xfrm>
-            <a:off x="685800" y="3657600"/>
-            <a:ext cx="7818120" cy="521208"/>
+          <p:cNvPr id="30" name="Text 28"/>
+          <p:cNvSpPr/>
+          <p:nvPr/>
+        </p:nvSpPr>
+        <p:spPr>
+          <a:xfrm>
+            <a:off x="640080" y="4272280"/>
+            <a:ext cx="7863840" cy="409448"/>
           </a:xfrm>
           <a:prstGeom prst="rect">
             <a:avLst/>
@@ -3680,93 +3863,7 @@
               <a:buNone/>
             </a:pPr>
             <a:r>
-              <a:rPr lang="en-US" sz="1000" dirty="0">
-                <a:solidFill>
-                  <a:srgbClr val="0D47A1"/>
-                </a:solidFill>
-                <a:latin typeface="JetBrains Mono" pitchFamily="34" charset="0"/>
-                <a:ea typeface="JetBrains Mono" pitchFamily="34" charset="-122"/>
-                <a:cs typeface="JetBrains Mono" pitchFamily="34" charset="-120"/>
-              </a:rPr>
-              <a:t>SELECT a.nom FROM artiste a LEFT JOIN album al ON ... WHERE al.id_album IS NULL;</a:t>
-            </a:r>
-            <a:endParaRPr lang="en-US" sz="1000" dirty="0"/>
-          </a:p>
-        </p:txBody>
-      </p:sp>
-      <p:sp>
-        <p:nvSpPr>
-          <p:cNvPr id="22" name="Shape 20"/>
-          <p:cNvSpPr/>
-          <p:nvPr/>
-        </p:nvSpPr>
-        <p:spPr>
-          <a:xfrm>
-            <a:off x="457200" y="4206240"/>
-            <a:ext cx="8229600" cy="521208"/>
-          </a:xfrm>
-          <a:prstGeom prst="rect">
-            <a:avLst/>
-          </a:prstGeom>
-          <a:solidFill>
-            <a:srgbClr val="FFFFFF"/>
-          </a:solidFill>
-          <a:ln/>
-          <a:effectLst>
-            <a:outerShdw sx="100000" sy="100000" kx="0" ky="0" algn="bl" rotWithShape="0" blurRad="50800" dist="25400" dir="8100000">
-              <a:srgbClr val="000000">
-                <a:alpha val="12000"/>
-              </a:srgbClr>
-            </a:outerShdw>
-          </a:effectLst>
-        </p:spPr>
-      </p:sp>
-      <p:sp>
-        <p:nvSpPr>
-          <p:cNvPr id="23" name="Shape 21"/>
-          <p:cNvSpPr/>
-          <p:nvPr/>
-        </p:nvSpPr>
-        <p:spPr>
-          <a:xfrm>
-            <a:off x="457200" y="4206240"/>
-            <a:ext cx="45720" cy="521208"/>
-          </a:xfrm>
-          <a:prstGeom prst="rect">
-            <a:avLst/>
-          </a:prstGeom>
-          <a:solidFill>
-            <a:srgbClr val="1565C0"/>
-          </a:solidFill>
-          <a:ln/>
-        </p:spPr>
-      </p:sp>
-      <p:sp>
-        <p:nvSpPr>
-          <p:cNvPr id="24" name="Text 22"/>
-          <p:cNvSpPr/>
-          <p:nvPr/>
-        </p:nvSpPr>
-        <p:spPr>
-          <a:xfrm>
-            <a:off x="685800" y="4206240"/>
-            <a:ext cx="7818120" cy="521208"/>
-          </a:xfrm>
-          <a:prstGeom prst="rect">
-            <a:avLst/>
-          </a:prstGeom>
-          <a:noFill/>
-          <a:ln/>
-        </p:spPr>
-        <p:txBody>
-          <a:bodyPr wrap="square" lIns="0" tIns="0" rIns="0" bIns="0" rtlCol="0" anchor="ctr"/>
-          <a:lstStyle/>
-          <a:p>
-            <a:pPr indent="0" marL="0">
-              <a:buNone/>
-            </a:pPr>
-            <a:r>
-              <a:rPr lang="en-US" sz="1200" dirty="0">
+              <a:rPr lang="en-US" sz="1100" dirty="0">
                 <a:solidFill>
                   <a:srgbClr val="1A1A2E"/>
                 </a:solidFill>
@@ -3774,9 +3871,9 @@
                 <a:ea typeface="Calibri" pitchFamily="34" charset="-122"/>
                 <a:cs typeface="Calibri" pitchFamily="34" charset="-120"/>
               </a:rPr>
-              <a:t>→ Artistes sans aucun album</a:t>
-            </a:r>
-            <a:endParaRPr lang="en-US" sz="1200" dirty="0"/>
+              <a:t>GESCOM : articles jamais commandes (LEFT JOIN lignecde WHERE NOCDE IS NULL)</a:t>
+            </a:r>
+            <a:endParaRPr lang="en-US" sz="1100" dirty="0"/>
           </a:p>
         </p:txBody>
       </p:sp>
@@ -3841,7 +3938,7 @@
         <p:spPr>
           <a:xfrm>
             <a:off x="457200" y="182880"/>
-            <a:ext cx="8229600" cy="594360"/>
+            <a:ext cx="8229600" cy="502920"/>
           </a:xfrm>
           <a:prstGeom prst="rect">
             <a:avLst/>
@@ -3857,7 +3954,7 @@
               <a:buNone/>
             </a:pPr>
             <a:r>
-              <a:rPr lang="en-US" sz="2400" b="1" dirty="0">
+              <a:rPr lang="en-US" sz="2100" b="1" dirty="0">
                 <a:solidFill>
                   <a:srgbClr val="0D47A1"/>
                 </a:solidFill>
@@ -3867,7 +3964,7 @@
               </a:rPr>
               <a:t>Jointure sur 3+ tables</a:t>
             </a:r>
-            <a:endParaRPr lang="en-US" sz="2400" dirty="0"/>
+            <a:endParaRPr lang="en-US" sz="2100" dirty="0"/>
           </a:p>
         </p:txBody>
       </p:sp>
@@ -3879,8 +3976,8 @@
         </p:nvSpPr>
         <p:spPr>
           <a:xfrm>
-            <a:off x="457200" y="914400"/>
-            <a:ext cx="8229600" cy="464058"/>
+            <a:off x="457200" y="777240"/>
+            <a:ext cx="8229600" cy="409448"/>
           </a:xfrm>
           <a:prstGeom prst="rect">
             <a:avLst/>
@@ -3889,13 +3986,6 @@
             <a:srgbClr val="FFFFFF"/>
           </a:solidFill>
           <a:ln/>
-          <a:effectLst>
-            <a:outerShdw sx="100000" sy="100000" kx="0" ky="0" algn="bl" rotWithShape="0" blurRad="50800" dist="25400" dir="8100000">
-              <a:srgbClr val="000000">
-                <a:alpha val="12000"/>
-              </a:srgbClr>
-            </a:outerShdw>
-          </a:effectLst>
         </p:spPr>
       </p:sp>
       <p:sp>
@@ -3906,8 +3996,8 @@
         </p:nvSpPr>
         <p:spPr>
           <a:xfrm>
-            <a:off x="457200" y="914400"/>
-            <a:ext cx="45720" cy="464058"/>
+            <a:off x="457200" y="777240"/>
+            <a:ext cx="45720" cy="409448"/>
           </a:xfrm>
           <a:prstGeom prst="rect">
             <a:avLst/>
@@ -3926,8 +4016,8 @@
         </p:nvSpPr>
         <p:spPr>
           <a:xfrm>
-            <a:off x="685800" y="914400"/>
-            <a:ext cx="7818120" cy="464058"/>
+            <a:off x="640080" y="777240"/>
+            <a:ext cx="7863840" cy="409448"/>
           </a:xfrm>
           <a:prstGeom prst="rect">
             <a:avLst/>
@@ -3951,7 +4041,7 @@
                 <a:ea typeface="JetBrains Mono" pitchFamily="34" charset="-122"/>
                 <a:cs typeface="JetBrains Mono" pitchFamily="34" charset="-120"/>
               </a:rPr>
-              <a:t>SELECT se.date_session, a.nom AS artiste, s.nom AS salle,</a:t>
+              <a:t>SELECT se.date_session, a.nom AS artiste,</a:t>
             </a:r>
             <a:endParaRPr lang="en-US" sz="1000" dirty="0"/>
           </a:p>
@@ -3965,8 +4055,8 @@
         </p:nvSpPr>
         <p:spPr>
           <a:xfrm>
-            <a:off x="457200" y="1405890"/>
-            <a:ext cx="8229600" cy="464058"/>
+            <a:off x="457200" y="1214120"/>
+            <a:ext cx="8229600" cy="409448"/>
           </a:xfrm>
           <a:prstGeom prst="rect">
             <a:avLst/>
@@ -3975,13 +4065,6 @@
             <a:srgbClr val="E3F2FD"/>
           </a:solidFill>
           <a:ln/>
-          <a:effectLst>
-            <a:outerShdw sx="100000" sy="100000" kx="0" ky="0" algn="bl" rotWithShape="0" blurRad="50800" dist="25400" dir="8100000">
-              <a:srgbClr val="000000">
-                <a:alpha val="12000"/>
-              </a:srgbClr>
-            </a:outerShdw>
-          </a:effectLst>
         </p:spPr>
       </p:sp>
       <p:sp>
@@ -3992,8 +4075,8 @@
         </p:nvSpPr>
         <p:spPr>
           <a:xfrm>
-            <a:off x="457200" y="1405890"/>
-            <a:ext cx="45720" cy="464058"/>
+            <a:off x="457200" y="1214120"/>
+            <a:ext cx="45720" cy="409448"/>
           </a:xfrm>
           <a:prstGeom prst="rect">
             <a:avLst/>
@@ -4012,8 +4095,87 @@
         </p:nvSpPr>
         <p:spPr>
           <a:xfrm>
-            <a:off x="685800" y="1405890"/>
-            <a:ext cx="7818120" cy="464058"/>
+            <a:off x="640080" y="1214120"/>
+            <a:ext cx="7863840" cy="409448"/>
+          </a:xfrm>
+          <a:prstGeom prst="rect">
+            <a:avLst/>
+          </a:prstGeom>
+          <a:noFill/>
+          <a:ln/>
+        </p:spPr>
+        <p:txBody>
+          <a:bodyPr wrap="square" lIns="0" tIns="0" rIns="0" bIns="0" rtlCol="0" anchor="ctr"/>
+          <a:lstStyle/>
+          <a:p>
+            <a:pPr indent="0" marL="0">
+              <a:buNone/>
+            </a:pPr>
+            <a:r>
+              <a:rPr lang="en-US" sz="1100" dirty="0">
+                <a:solidFill>
+                  <a:srgbClr val="1A1A2E"/>
+                </a:solidFill>
+                <a:latin typeface="Calibri" pitchFamily="34" charset="0"/>
+                <a:ea typeface="Calibri" pitchFamily="34" charset="-122"/>
+                <a:cs typeface="Calibri" pitchFamily="34" charset="-120"/>
+              </a:rPr>
+              <a:t>       s.nom AS salle, CONCAT(i.prenom,' ',i.nom) AS ingenieur</a:t>
+            </a:r>
+            <a:endParaRPr lang="en-US" sz="1100" dirty="0"/>
+          </a:p>
+        </p:txBody>
+      </p:sp>
+      <p:sp>
+        <p:nvSpPr>
+          <p:cNvPr id="10" name="Shape 8"/>
+          <p:cNvSpPr/>
+          <p:nvPr/>
+        </p:nvSpPr>
+        <p:spPr>
+          <a:xfrm>
+            <a:off x="457200" y="1651000"/>
+            <a:ext cx="8229600" cy="409448"/>
+          </a:xfrm>
+          <a:prstGeom prst="rect">
+            <a:avLst/>
+          </a:prstGeom>
+          <a:solidFill>
+            <a:srgbClr val="FFFFFF"/>
+          </a:solidFill>
+          <a:ln/>
+        </p:spPr>
+      </p:sp>
+      <p:sp>
+        <p:nvSpPr>
+          <p:cNvPr id="11" name="Shape 9"/>
+          <p:cNvSpPr/>
+          <p:nvPr/>
+        </p:nvSpPr>
+        <p:spPr>
+          <a:xfrm>
+            <a:off x="457200" y="1651000"/>
+            <a:ext cx="45720" cy="409448"/>
+          </a:xfrm>
+          <a:prstGeom prst="rect">
+            <a:avLst/>
+          </a:prstGeom>
+          <a:solidFill>
+            <a:srgbClr val="1565C0"/>
+          </a:solidFill>
+          <a:ln/>
+        </p:spPr>
+      </p:sp>
+      <p:sp>
+        <p:nvSpPr>
+          <p:cNvPr id="12" name="Text 10"/>
+          <p:cNvSpPr/>
+          <p:nvPr/>
+        </p:nvSpPr>
+        <p:spPr>
+          <a:xfrm>
+            <a:off x="640080" y="1651000"/>
+            <a:ext cx="7863840" cy="409448"/>
           </a:xfrm>
           <a:prstGeom prst="rect">
             <a:avLst/>
@@ -4037,7 +4199,7 @@
                 <a:ea typeface="JetBrains Mono" pitchFamily="34" charset="-122"/>
                 <a:cs typeface="JetBrains Mono" pitchFamily="34" charset="-120"/>
               </a:rPr>
-              <a:t>       CONCAT(i.prenom, ' ', i.nom) AS ingenieur</a:t>
+              <a:t>FROM session_enregistrement se</a:t>
             </a:r>
             <a:endParaRPr lang="en-US" sz="1000" dirty="0"/>
           </a:p>
@@ -4045,41 +4207,34 @@
       </p:sp>
       <p:sp>
         <p:nvSpPr>
-          <p:cNvPr id="10" name="Shape 8"/>
-          <p:cNvSpPr/>
-          <p:nvPr/>
-        </p:nvSpPr>
-        <p:spPr>
-          <a:xfrm>
-            <a:off x="457200" y="1897380"/>
-            <a:ext cx="8229600" cy="464058"/>
-          </a:xfrm>
-          <a:prstGeom prst="rect">
-            <a:avLst/>
-          </a:prstGeom>
-          <a:solidFill>
-            <a:srgbClr val="FFFFFF"/>
-          </a:solidFill>
-          <a:ln/>
-          <a:effectLst>
-            <a:outerShdw sx="100000" sy="100000" kx="0" ky="0" algn="bl" rotWithShape="0" blurRad="50800" dist="25400" dir="8100000">
-              <a:srgbClr val="000000">
-                <a:alpha val="12000"/>
-              </a:srgbClr>
-            </a:outerShdw>
-          </a:effectLst>
-        </p:spPr>
-      </p:sp>
-      <p:sp>
-        <p:nvSpPr>
-          <p:cNvPr id="11" name="Shape 9"/>
-          <p:cNvSpPr/>
-          <p:nvPr/>
-        </p:nvSpPr>
-        <p:spPr>
-          <a:xfrm>
-            <a:off x="457200" y="1897380"/>
-            <a:ext cx="45720" cy="464058"/>
+          <p:cNvPr id="13" name="Shape 11"/>
+          <p:cNvSpPr/>
+          <p:nvPr/>
+        </p:nvSpPr>
+        <p:spPr>
+          <a:xfrm>
+            <a:off x="457200" y="2087880"/>
+            <a:ext cx="8229600" cy="409448"/>
+          </a:xfrm>
+          <a:prstGeom prst="rect">
+            <a:avLst/>
+          </a:prstGeom>
+          <a:solidFill>
+            <a:srgbClr val="E3F2FD"/>
+          </a:solidFill>
+          <a:ln/>
+        </p:spPr>
+      </p:sp>
+      <p:sp>
+        <p:nvSpPr>
+          <p:cNvPr id="14" name="Shape 12"/>
+          <p:cNvSpPr/>
+          <p:nvPr/>
+        </p:nvSpPr>
+        <p:spPr>
+          <a:xfrm>
+            <a:off x="457200" y="2087880"/>
+            <a:ext cx="45720" cy="409448"/>
           </a:xfrm>
           <a:prstGeom prst="rect">
             <a:avLst/>
@@ -4092,14 +4247,14 @@
       </p:sp>
       <p:sp>
         <p:nvSpPr>
-          <p:cNvPr id="12" name="Text 10"/>
-          <p:cNvSpPr/>
-          <p:nvPr/>
-        </p:nvSpPr>
-        <p:spPr>
-          <a:xfrm>
-            <a:off x="685800" y="1897380"/>
-            <a:ext cx="7818120" cy="464058"/>
+          <p:cNvPr id="15" name="Text 13"/>
+          <p:cNvSpPr/>
+          <p:nvPr/>
+        </p:nvSpPr>
+        <p:spPr>
+          <a:xfrm>
+            <a:off x="640080" y="2087880"/>
+            <a:ext cx="7863840" cy="409448"/>
           </a:xfrm>
           <a:prstGeom prst="rect">
             <a:avLst/>
@@ -4123,7 +4278,7 @@
                 <a:ea typeface="JetBrains Mono" pitchFamily="34" charset="-122"/>
                 <a:cs typeface="JetBrains Mono" pitchFamily="34" charset="-120"/>
               </a:rPr>
-              <a:t>FROM session_enregistrement se</a:t>
+              <a:t>JOIN artiste a ON se.id_artiste = a.id_artiste</a:t>
             </a:r>
             <a:endParaRPr lang="en-US" sz="1000" dirty="0"/>
           </a:p>
@@ -4131,41 +4286,34 @@
       </p:sp>
       <p:sp>
         <p:nvSpPr>
-          <p:cNvPr id="13" name="Shape 11"/>
-          <p:cNvSpPr/>
-          <p:nvPr/>
-        </p:nvSpPr>
-        <p:spPr>
-          <a:xfrm>
-            <a:off x="457200" y="2388870"/>
-            <a:ext cx="8229600" cy="464058"/>
-          </a:xfrm>
-          <a:prstGeom prst="rect">
-            <a:avLst/>
-          </a:prstGeom>
-          <a:solidFill>
-            <a:srgbClr val="E3F2FD"/>
-          </a:solidFill>
-          <a:ln/>
-          <a:effectLst>
-            <a:outerShdw sx="100000" sy="100000" kx="0" ky="0" algn="bl" rotWithShape="0" blurRad="50800" dist="25400" dir="8100000">
-              <a:srgbClr val="000000">
-                <a:alpha val="12000"/>
-              </a:srgbClr>
-            </a:outerShdw>
-          </a:effectLst>
-        </p:spPr>
-      </p:sp>
-      <p:sp>
-        <p:nvSpPr>
-          <p:cNvPr id="14" name="Shape 12"/>
-          <p:cNvSpPr/>
-          <p:nvPr/>
-        </p:nvSpPr>
-        <p:spPr>
-          <a:xfrm>
-            <a:off x="457200" y="2388870"/>
-            <a:ext cx="45720" cy="464058"/>
+          <p:cNvPr id="16" name="Shape 14"/>
+          <p:cNvSpPr/>
+          <p:nvPr/>
+        </p:nvSpPr>
+        <p:spPr>
+          <a:xfrm>
+            <a:off x="457200" y="2524760"/>
+            <a:ext cx="8229600" cy="409448"/>
+          </a:xfrm>
+          <a:prstGeom prst="rect">
+            <a:avLst/>
+          </a:prstGeom>
+          <a:solidFill>
+            <a:srgbClr val="FFFFFF"/>
+          </a:solidFill>
+          <a:ln/>
+        </p:spPr>
+      </p:sp>
+      <p:sp>
+        <p:nvSpPr>
+          <p:cNvPr id="17" name="Shape 15"/>
+          <p:cNvSpPr/>
+          <p:nvPr/>
+        </p:nvSpPr>
+        <p:spPr>
+          <a:xfrm>
+            <a:off x="457200" y="2524760"/>
+            <a:ext cx="45720" cy="409448"/>
           </a:xfrm>
           <a:prstGeom prst="rect">
             <a:avLst/>
@@ -4178,14 +4326,14 @@
       </p:sp>
       <p:sp>
         <p:nvSpPr>
-          <p:cNvPr id="15" name="Text 13"/>
-          <p:cNvSpPr/>
-          <p:nvPr/>
-        </p:nvSpPr>
-        <p:spPr>
-          <a:xfrm>
-            <a:off x="685800" y="2388870"/>
-            <a:ext cx="7818120" cy="464058"/>
+          <p:cNvPr id="18" name="Text 16"/>
+          <p:cNvSpPr/>
+          <p:nvPr/>
+        </p:nvSpPr>
+        <p:spPr>
+          <a:xfrm>
+            <a:off x="640080" y="2524760"/>
+            <a:ext cx="7863840" cy="409448"/>
           </a:xfrm>
           <a:prstGeom prst="rect">
             <a:avLst/>
@@ -4209,7 +4357,7 @@
                 <a:ea typeface="JetBrains Mono" pitchFamily="34" charset="-122"/>
                 <a:cs typeface="JetBrains Mono" pitchFamily="34" charset="-120"/>
               </a:rPr>
-              <a:t>JOIN artiste a ON se.id_artiste = a.id_artiste</a:t>
+              <a:t>JOIN salle s ON se.id_salle = s.id_salle</a:t>
             </a:r>
             <a:endParaRPr lang="en-US" sz="1000" dirty="0"/>
           </a:p>
@@ -4217,41 +4365,34 @@
       </p:sp>
       <p:sp>
         <p:nvSpPr>
-          <p:cNvPr id="16" name="Shape 14"/>
-          <p:cNvSpPr/>
-          <p:nvPr/>
-        </p:nvSpPr>
-        <p:spPr>
-          <a:xfrm>
-            <a:off x="457200" y="2880360"/>
-            <a:ext cx="8229600" cy="464058"/>
-          </a:xfrm>
-          <a:prstGeom prst="rect">
-            <a:avLst/>
-          </a:prstGeom>
-          <a:solidFill>
-            <a:srgbClr val="FFFFFF"/>
-          </a:solidFill>
-          <a:ln/>
-          <a:effectLst>
-            <a:outerShdw sx="100000" sy="100000" kx="0" ky="0" algn="bl" rotWithShape="0" blurRad="50800" dist="25400" dir="8100000">
-              <a:srgbClr val="000000">
-                <a:alpha val="12000"/>
-              </a:srgbClr>
-            </a:outerShdw>
-          </a:effectLst>
-        </p:spPr>
-      </p:sp>
-      <p:sp>
-        <p:nvSpPr>
-          <p:cNvPr id="17" name="Shape 15"/>
-          <p:cNvSpPr/>
-          <p:nvPr/>
-        </p:nvSpPr>
-        <p:spPr>
-          <a:xfrm>
-            <a:off x="457200" y="2880360"/>
-            <a:ext cx="45720" cy="464058"/>
+          <p:cNvPr id="19" name="Shape 17"/>
+          <p:cNvSpPr/>
+          <p:nvPr/>
+        </p:nvSpPr>
+        <p:spPr>
+          <a:xfrm>
+            <a:off x="457200" y="2961640"/>
+            <a:ext cx="8229600" cy="409448"/>
+          </a:xfrm>
+          <a:prstGeom prst="rect">
+            <a:avLst/>
+          </a:prstGeom>
+          <a:solidFill>
+            <a:srgbClr val="E3F2FD"/>
+          </a:solidFill>
+          <a:ln/>
+        </p:spPr>
+      </p:sp>
+      <p:sp>
+        <p:nvSpPr>
+          <p:cNvPr id="20" name="Shape 18"/>
+          <p:cNvSpPr/>
+          <p:nvPr/>
+        </p:nvSpPr>
+        <p:spPr>
+          <a:xfrm>
+            <a:off x="457200" y="2961640"/>
+            <a:ext cx="45720" cy="409448"/>
           </a:xfrm>
           <a:prstGeom prst="rect">
             <a:avLst/>
@@ -4264,14 +4405,14 @@
       </p:sp>
       <p:sp>
         <p:nvSpPr>
-          <p:cNvPr id="18" name="Text 16"/>
-          <p:cNvSpPr/>
-          <p:nvPr/>
-        </p:nvSpPr>
-        <p:spPr>
-          <a:xfrm>
-            <a:off x="685800" y="2880360"/>
-            <a:ext cx="7818120" cy="464058"/>
+          <p:cNvPr id="21" name="Text 19"/>
+          <p:cNvSpPr/>
+          <p:nvPr/>
+        </p:nvSpPr>
+        <p:spPr>
+          <a:xfrm>
+            <a:off x="640080" y="2961640"/>
+            <a:ext cx="7863840" cy="409448"/>
           </a:xfrm>
           <a:prstGeom prst="rect">
             <a:avLst/>
@@ -4295,7 +4436,7 @@
                 <a:ea typeface="JetBrains Mono" pitchFamily="34" charset="-122"/>
                 <a:cs typeface="JetBrains Mono" pitchFamily="34" charset="-120"/>
               </a:rPr>
-              <a:t>JOIN salle s ON se.id_salle = s.id_salle</a:t>
+              <a:t>JOIN ingenieur i ON se.id_ingenieur = i.id_ingenieur;</a:t>
             </a:r>
             <a:endParaRPr lang="en-US" sz="1000" dirty="0"/>
           </a:p>
@@ -4303,41 +4444,34 @@
       </p:sp>
       <p:sp>
         <p:nvSpPr>
-          <p:cNvPr id="19" name="Shape 17"/>
-          <p:cNvSpPr/>
-          <p:nvPr/>
-        </p:nvSpPr>
-        <p:spPr>
-          <a:xfrm>
-            <a:off x="457200" y="3371850"/>
-            <a:ext cx="8229600" cy="464058"/>
-          </a:xfrm>
-          <a:prstGeom prst="rect">
-            <a:avLst/>
-          </a:prstGeom>
-          <a:solidFill>
-            <a:srgbClr val="E3F2FD"/>
-          </a:solidFill>
-          <a:ln/>
-          <a:effectLst>
-            <a:outerShdw sx="100000" sy="100000" kx="0" ky="0" algn="bl" rotWithShape="0" blurRad="50800" dist="25400" dir="8100000">
-              <a:srgbClr val="000000">
-                <a:alpha val="12000"/>
-              </a:srgbClr>
-            </a:outerShdw>
-          </a:effectLst>
-        </p:spPr>
-      </p:sp>
-      <p:sp>
-        <p:nvSpPr>
-          <p:cNvPr id="20" name="Shape 18"/>
-          <p:cNvSpPr/>
-          <p:nvPr/>
-        </p:nvSpPr>
-        <p:spPr>
-          <a:xfrm>
-            <a:off x="457200" y="3371850"/>
-            <a:ext cx="45720" cy="464058"/>
+          <p:cNvPr id="22" name="Shape 20"/>
+          <p:cNvSpPr/>
+          <p:nvPr/>
+        </p:nvSpPr>
+        <p:spPr>
+          <a:xfrm>
+            <a:off x="457200" y="3398520"/>
+            <a:ext cx="8229600" cy="409448"/>
+          </a:xfrm>
+          <a:prstGeom prst="rect">
+            <a:avLst/>
+          </a:prstGeom>
+          <a:solidFill>
+            <a:srgbClr val="FFFFFF"/>
+          </a:solidFill>
+          <a:ln/>
+        </p:spPr>
+      </p:sp>
+      <p:sp>
+        <p:nvSpPr>
+          <p:cNvPr id="23" name="Shape 21"/>
+          <p:cNvSpPr/>
+          <p:nvPr/>
+        </p:nvSpPr>
+        <p:spPr>
+          <a:xfrm>
+            <a:off x="457200" y="3398520"/>
+            <a:ext cx="45720" cy="409448"/>
           </a:xfrm>
           <a:prstGeom prst="rect">
             <a:avLst/>
@@ -4350,14 +4484,14 @@
       </p:sp>
       <p:sp>
         <p:nvSpPr>
-          <p:cNvPr id="21" name="Text 19"/>
-          <p:cNvSpPr/>
-          <p:nvPr/>
-        </p:nvSpPr>
-        <p:spPr>
-          <a:xfrm>
-            <a:off x="685800" y="3371850"/>
-            <a:ext cx="7818120" cy="464058"/>
+          <p:cNvPr id="24" name="Text 22"/>
+          <p:cNvSpPr/>
+          <p:nvPr/>
+        </p:nvSpPr>
+        <p:spPr>
+          <a:xfrm>
+            <a:off x="640080" y="3398520"/>
+            <a:ext cx="7863840" cy="409448"/>
           </a:xfrm>
           <a:prstGeom prst="rect">
             <a:avLst/>
@@ -4373,93 +4507,7 @@
               <a:buNone/>
             </a:pPr>
             <a:r>
-              <a:rPr lang="en-US" sz="1000" dirty="0">
-                <a:solidFill>
-                  <a:srgbClr val="0D47A1"/>
-                </a:solidFill>
-                <a:latin typeface="JetBrains Mono" pitchFamily="34" charset="0"/>
-                <a:ea typeface="JetBrains Mono" pitchFamily="34" charset="-122"/>
-                <a:cs typeface="JetBrains Mono" pitchFamily="34" charset="-120"/>
-              </a:rPr>
-              <a:t>JOIN ingenieur i ON se.id_ingenieur = i.id_ingenieur;</a:t>
-            </a:r>
-            <a:endParaRPr lang="en-US" sz="1000" dirty="0"/>
-          </a:p>
-        </p:txBody>
-      </p:sp>
-      <p:sp>
-        <p:nvSpPr>
-          <p:cNvPr id="22" name="Shape 20"/>
-          <p:cNvSpPr/>
-          <p:nvPr/>
-        </p:nvSpPr>
-        <p:spPr>
-          <a:xfrm>
-            <a:off x="457200" y="3863340"/>
-            <a:ext cx="8229600" cy="464058"/>
-          </a:xfrm>
-          <a:prstGeom prst="rect">
-            <a:avLst/>
-          </a:prstGeom>
-          <a:solidFill>
-            <a:srgbClr val="FFFFFF"/>
-          </a:solidFill>
-          <a:ln/>
-          <a:effectLst>
-            <a:outerShdw sx="100000" sy="100000" kx="0" ky="0" algn="bl" rotWithShape="0" blurRad="50800" dist="25400" dir="8100000">
-              <a:srgbClr val="000000">
-                <a:alpha val="12000"/>
-              </a:srgbClr>
-            </a:outerShdw>
-          </a:effectLst>
-        </p:spPr>
-      </p:sp>
-      <p:sp>
-        <p:nvSpPr>
-          <p:cNvPr id="23" name="Shape 21"/>
-          <p:cNvSpPr/>
-          <p:nvPr/>
-        </p:nvSpPr>
-        <p:spPr>
-          <a:xfrm>
-            <a:off x="457200" y="3863340"/>
-            <a:ext cx="45720" cy="464058"/>
-          </a:xfrm>
-          <a:prstGeom prst="rect">
-            <a:avLst/>
-          </a:prstGeom>
-          <a:solidFill>
-            <a:srgbClr val="1565C0"/>
-          </a:solidFill>
-          <a:ln/>
-        </p:spPr>
-      </p:sp>
-      <p:sp>
-        <p:nvSpPr>
-          <p:cNvPr id="24" name="Text 22"/>
-          <p:cNvSpPr/>
-          <p:nvPr/>
-        </p:nvSpPr>
-        <p:spPr>
-          <a:xfrm>
-            <a:off x="685800" y="3863340"/>
-            <a:ext cx="7818120" cy="464058"/>
-          </a:xfrm>
-          <a:prstGeom prst="rect">
-            <a:avLst/>
-          </a:prstGeom>
-          <a:noFill/>
-          <a:ln/>
-        </p:spPr>
-        <p:txBody>
-          <a:bodyPr wrap="square" lIns="0" tIns="0" rIns="0" bIns="0" rtlCol="0" anchor="ctr"/>
-          <a:lstStyle/>
-          <a:p>
-            <a:pPr indent="0" marL="0">
-              <a:buNone/>
-            </a:pPr>
-            <a:r>
-              <a:rPr lang="en-US" sz="1200" dirty="0">
+              <a:rPr lang="en-US" sz="1100" dirty="0">
                 <a:solidFill>
                   <a:srgbClr val="1A1A2E"/>
                 </a:solidFill>
@@ -4467,9 +4515,9 @@
                 <a:ea typeface="Calibri" pitchFamily="34" charset="-122"/>
                 <a:cs typeface="Calibri" pitchFamily="34" charset="-120"/>
               </a:rPr>
-              <a:t>On enchaîne les JOIN — chaque JOIN ajoute une table</a:t>
-            </a:r>
-            <a:endParaRPr lang="en-US" sz="1200" dirty="0"/>
+              <a:t>On enchaine les JOIN — chaque JOIN ajoute une table</a:t>
+            </a:r>
+            <a:endParaRPr lang="en-US" sz="1100" dirty="0"/>
           </a:p>
         </p:txBody>
       </p:sp>
@@ -4481,8 +4529,8 @@
         </p:nvSpPr>
         <p:spPr>
           <a:xfrm>
-            <a:off x="457200" y="4354830"/>
-            <a:ext cx="8229600" cy="464058"/>
+            <a:off x="457200" y="3835400"/>
+            <a:ext cx="8229600" cy="409448"/>
           </a:xfrm>
           <a:prstGeom prst="rect">
             <a:avLst/>
@@ -4491,13 +4539,6 @@
             <a:srgbClr val="E3F2FD"/>
           </a:solidFill>
           <a:ln/>
-          <a:effectLst>
-            <a:outerShdw sx="100000" sy="100000" kx="0" ky="0" algn="bl" rotWithShape="0" blurRad="50800" dist="25400" dir="8100000">
-              <a:srgbClr val="000000">
-                <a:alpha val="12000"/>
-              </a:srgbClr>
-            </a:outerShdw>
-          </a:effectLst>
         </p:spPr>
       </p:sp>
       <p:sp>
@@ -4508,8 +4549,8 @@
         </p:nvSpPr>
         <p:spPr>
           <a:xfrm>
-            <a:off x="457200" y="4354830"/>
-            <a:ext cx="45720" cy="464058"/>
+            <a:off x="457200" y="3835400"/>
+            <a:ext cx="45720" cy="409448"/>
           </a:xfrm>
           <a:prstGeom prst="rect">
             <a:avLst/>
@@ -4528,8 +4569,8 @@
         </p:nvSpPr>
         <p:spPr>
           <a:xfrm>
-            <a:off x="685800" y="4354830"/>
-            <a:ext cx="7818120" cy="464058"/>
+            <a:off x="640080" y="3835400"/>
+            <a:ext cx="7863840" cy="409448"/>
           </a:xfrm>
           <a:prstGeom prst="rect">
             <a:avLst/>
@@ -4545,7 +4586,7 @@
               <a:buNone/>
             </a:pPr>
             <a:r>
-              <a:rPr lang="en-US" sz="1200" dirty="0">
+              <a:rPr lang="en-US" sz="1100" dirty="0">
                 <a:solidFill>
                   <a:srgbClr val="1A1A2E"/>
                 </a:solidFill>
@@ -4553,9 +4594,88 @@
                 <a:ea typeface="Calibri" pitchFamily="34" charset="-122"/>
                 <a:cs typeface="Calibri" pitchFamily="34" charset="-120"/>
               </a:rPr>
-              <a:t>Avec alias : se, a, s, i pour raccourcir les noms</a:t>
-            </a:r>
-            <a:endParaRPr lang="en-US" sz="1200" dirty="0"/>
+              <a:t>GESCOM : commande → client + lignecde → article (4 tables)</a:t>
+            </a:r>
+            <a:endParaRPr lang="en-US" sz="1100" dirty="0"/>
+          </a:p>
+        </p:txBody>
+      </p:sp>
+      <p:sp>
+        <p:nvSpPr>
+          <p:cNvPr id="28" name="Shape 26"/>
+          <p:cNvSpPr/>
+          <p:nvPr/>
+        </p:nvSpPr>
+        <p:spPr>
+          <a:xfrm>
+            <a:off x="457200" y="4272280"/>
+            <a:ext cx="8229600" cy="409448"/>
+          </a:xfrm>
+          <a:prstGeom prst="rect">
+            <a:avLst/>
+          </a:prstGeom>
+          <a:solidFill>
+            <a:srgbClr val="FFFFFF"/>
+          </a:solidFill>
+          <a:ln/>
+        </p:spPr>
+      </p:sp>
+      <p:sp>
+        <p:nvSpPr>
+          <p:cNvPr id="29" name="Shape 27"/>
+          <p:cNvSpPr/>
+          <p:nvPr/>
+        </p:nvSpPr>
+        <p:spPr>
+          <a:xfrm>
+            <a:off x="457200" y="4272280"/>
+            <a:ext cx="45720" cy="409448"/>
+          </a:xfrm>
+          <a:prstGeom prst="rect">
+            <a:avLst/>
+          </a:prstGeom>
+          <a:solidFill>
+            <a:srgbClr val="1565C0"/>
+          </a:solidFill>
+          <a:ln/>
+        </p:spPr>
+      </p:sp>
+      <p:sp>
+        <p:nvSpPr>
+          <p:cNvPr id="30" name="Text 28"/>
+          <p:cNvSpPr/>
+          <p:nvPr/>
+        </p:nvSpPr>
+        <p:spPr>
+          <a:xfrm>
+            <a:off x="640080" y="4272280"/>
+            <a:ext cx="7863840" cy="409448"/>
+          </a:xfrm>
+          <a:prstGeom prst="rect">
+            <a:avLst/>
+          </a:prstGeom>
+          <a:noFill/>
+          <a:ln/>
+        </p:spPr>
+        <p:txBody>
+          <a:bodyPr wrap="square" lIns="0" tIns="0" rIns="0" bIns="0" rtlCol="0" anchor="ctr"/>
+          <a:lstStyle/>
+          <a:p>
+            <a:pPr indent="0" marL="0">
+              <a:buNone/>
+            </a:pPr>
+            <a:r>
+              <a:rPr lang="en-US" sz="1100" dirty="0">
+                <a:solidFill>
+                  <a:srgbClr val="1A1A2E"/>
+                </a:solidFill>
+                <a:latin typeface="Calibri" pitchFamily="34" charset="0"/>
+                <a:ea typeface="Calibri" pitchFamily="34" charset="-122"/>
+                <a:cs typeface="Calibri" pitchFamily="34" charset="-120"/>
+              </a:rPr>
+              <a:t>Alias obligatoires : se, a, s, i pour raccourcir</a:t>
+            </a:r>
+            <a:endParaRPr lang="en-US" sz="1100" dirty="0"/>
           </a:p>
         </p:txBody>
       </p:sp>
@@ -4620,7 +4740,7 @@
         <p:spPr>
           <a:xfrm>
             <a:off x="457200" y="182880"/>
-            <a:ext cx="8229600" cy="594360"/>
+            <a:ext cx="8229600" cy="502920"/>
           </a:xfrm>
           <a:prstGeom prst="rect">
             <a:avLst/>
@@ -4636,7 +4756,7 @@
               <a:buNone/>
             </a:pPr>
             <a:r>
-              <a:rPr lang="en-US" sz="2400" b="1" dirty="0">
+              <a:rPr lang="en-US" sz="2100" b="1" dirty="0">
                 <a:solidFill>
                   <a:srgbClr val="0D47A1"/>
                 </a:solidFill>
@@ -4644,9 +4764,9 @@
                 <a:ea typeface="Trebuchet MS" pitchFamily="34" charset="-122"/>
                 <a:cs typeface="Trebuchet MS" pitchFamily="34" charset="-120"/>
               </a:rPr>
-              <a:t>Cas spéciaux : CROSS JOIN et réflexive</a:t>
-            </a:r>
-            <a:endParaRPr lang="en-US" sz="2400" dirty="0"/>
+              <a:t>CROSS JOIN et jointure reflexive</a:t>
+            </a:r>
+            <a:endParaRPr lang="en-US" sz="2100" dirty="0"/>
           </a:p>
         </p:txBody>
       </p:sp>
@@ -4658,8 +4778,8 @@
         </p:nvSpPr>
         <p:spPr>
           <a:xfrm>
-            <a:off x="457200" y="914400"/>
-            <a:ext cx="8229600" cy="521208"/>
+            <a:off x="457200" y="777240"/>
+            <a:ext cx="8229600" cy="448056"/>
           </a:xfrm>
           <a:prstGeom prst="rect">
             <a:avLst/>
@@ -4668,13 +4788,6 @@
             <a:srgbClr val="FFFFFF"/>
           </a:solidFill>
           <a:ln/>
-          <a:effectLst>
-            <a:outerShdw sx="100000" sy="100000" kx="0" ky="0" algn="bl" rotWithShape="0" blurRad="50800" dist="25400" dir="8100000">
-              <a:srgbClr val="000000">
-                <a:alpha val="12000"/>
-              </a:srgbClr>
-            </a:outerShdw>
-          </a:effectLst>
         </p:spPr>
       </p:sp>
       <p:sp>
@@ -4685,8 +4798,8 @@
         </p:nvSpPr>
         <p:spPr>
           <a:xfrm>
-            <a:off x="457200" y="914400"/>
-            <a:ext cx="45720" cy="521208"/>
+            <a:off x="457200" y="777240"/>
+            <a:ext cx="45720" cy="448056"/>
           </a:xfrm>
           <a:prstGeom prst="rect">
             <a:avLst/>
@@ -4705,8 +4818,8 @@
         </p:nvSpPr>
         <p:spPr>
           <a:xfrm>
-            <a:off x="685800" y="914400"/>
-            <a:ext cx="7818120" cy="521208"/>
+            <a:off x="640080" y="777240"/>
+            <a:ext cx="7863840" cy="448056"/>
           </a:xfrm>
           <a:prstGeom prst="rect">
             <a:avLst/>
@@ -4722,7 +4835,165 @@
               <a:buNone/>
             </a:pPr>
             <a:r>
-              <a:rPr lang="en-US" sz="1200" dirty="0">
+              <a:rPr lang="en-US" sz="1000" dirty="0">
+                <a:solidFill>
+                  <a:srgbClr val="0D47A1"/>
+                </a:solidFill>
+                <a:latin typeface="JetBrains Mono" pitchFamily="34" charset="0"/>
+                <a:ea typeface="JetBrains Mono" pitchFamily="34" charset="-122"/>
+                <a:cs typeface="JetBrains Mono" pitchFamily="34" charset="-120"/>
+              </a:rPr>
+              <a:t>CROSS JOIN : produit cartesien (TOUTES les combinaisons)</a:t>
+            </a:r>
+            <a:endParaRPr lang="en-US" sz="1000" dirty="0"/>
+          </a:p>
+        </p:txBody>
+      </p:sp>
+      <p:sp>
+        <p:nvSpPr>
+          <p:cNvPr id="7" name="Shape 5"/>
+          <p:cNvSpPr/>
+          <p:nvPr/>
+        </p:nvSpPr>
+        <p:spPr>
+          <a:xfrm>
+            <a:off x="457200" y="1252728"/>
+            <a:ext cx="8229600" cy="448056"/>
+          </a:xfrm>
+          <a:prstGeom prst="rect">
+            <a:avLst/>
+          </a:prstGeom>
+          <a:solidFill>
+            <a:srgbClr val="E3F2FD"/>
+          </a:solidFill>
+          <a:ln/>
+        </p:spPr>
+      </p:sp>
+      <p:sp>
+        <p:nvSpPr>
+          <p:cNvPr id="8" name="Shape 6"/>
+          <p:cNvSpPr/>
+          <p:nvPr/>
+        </p:nvSpPr>
+        <p:spPr>
+          <a:xfrm>
+            <a:off x="457200" y="1252728"/>
+            <a:ext cx="45720" cy="448056"/>
+          </a:xfrm>
+          <a:prstGeom prst="rect">
+            <a:avLst/>
+          </a:prstGeom>
+          <a:solidFill>
+            <a:srgbClr val="1565C0"/>
+          </a:solidFill>
+          <a:ln/>
+        </p:spPr>
+      </p:sp>
+      <p:sp>
+        <p:nvSpPr>
+          <p:cNvPr id="9" name="Text 7"/>
+          <p:cNvSpPr/>
+          <p:nvPr/>
+        </p:nvSpPr>
+        <p:spPr>
+          <a:xfrm>
+            <a:off x="640080" y="1252728"/>
+            <a:ext cx="7863840" cy="448056"/>
+          </a:xfrm>
+          <a:prstGeom prst="rect">
+            <a:avLst/>
+          </a:prstGeom>
+          <a:noFill/>
+          <a:ln/>
+        </p:spPr>
+        <p:txBody>
+          <a:bodyPr wrap="square" lIns="0" tIns="0" rIns="0" bIns="0" rtlCol="0" anchor="ctr"/>
+          <a:lstStyle/>
+          <a:p>
+            <a:pPr indent="0" marL="0">
+              <a:buNone/>
+            </a:pPr>
+            <a:r>
+              <a:rPr lang="en-US" sz="1000" dirty="0">
+                <a:solidFill>
+                  <a:srgbClr val="0D47A1"/>
+                </a:solidFill>
+                <a:latin typeface="JetBrains Mono" pitchFamily="34" charset="0"/>
+                <a:ea typeface="JetBrains Mono" pitchFamily="34" charset="-122"/>
+                <a:cs typeface="JetBrains Mono" pitchFamily="34" charset="-120"/>
+              </a:rPr>
+              <a:t>SELECT * FROM salle CROSS JOIN ingenieur; → 5×6 = 30 lignes</a:t>
+            </a:r>
+            <a:endParaRPr lang="en-US" sz="1000" dirty="0"/>
+          </a:p>
+        </p:txBody>
+      </p:sp>
+      <p:sp>
+        <p:nvSpPr>
+          <p:cNvPr id="10" name="Shape 8"/>
+          <p:cNvSpPr/>
+          <p:nvPr/>
+        </p:nvSpPr>
+        <p:spPr>
+          <a:xfrm>
+            <a:off x="457200" y="1728216"/>
+            <a:ext cx="8229600" cy="448056"/>
+          </a:xfrm>
+          <a:prstGeom prst="rect">
+            <a:avLst/>
+          </a:prstGeom>
+          <a:solidFill>
+            <a:srgbClr val="FFFFFF"/>
+          </a:solidFill>
+          <a:ln/>
+        </p:spPr>
+      </p:sp>
+      <p:sp>
+        <p:nvSpPr>
+          <p:cNvPr id="11" name="Shape 9"/>
+          <p:cNvSpPr/>
+          <p:nvPr/>
+        </p:nvSpPr>
+        <p:spPr>
+          <a:xfrm>
+            <a:off x="457200" y="1728216"/>
+            <a:ext cx="45720" cy="448056"/>
+          </a:xfrm>
+          <a:prstGeom prst="rect">
+            <a:avLst/>
+          </a:prstGeom>
+          <a:solidFill>
+            <a:srgbClr val="1565C0"/>
+          </a:solidFill>
+          <a:ln/>
+        </p:spPr>
+      </p:sp>
+      <p:sp>
+        <p:nvSpPr>
+          <p:cNvPr id="12" name="Text 10"/>
+          <p:cNvSpPr/>
+          <p:nvPr/>
+        </p:nvSpPr>
+        <p:spPr>
+          <a:xfrm>
+            <a:off x="640080" y="1728216"/>
+            <a:ext cx="7863840" cy="448056"/>
+          </a:xfrm>
+          <a:prstGeom prst="rect">
+            <a:avLst/>
+          </a:prstGeom>
+          <a:noFill/>
+          <a:ln/>
+        </p:spPr>
+        <p:txBody>
+          <a:bodyPr wrap="square" lIns="0" tIns="0" rIns="0" bIns="0" rtlCol="0" anchor="ctr"/>
+          <a:lstStyle/>
+          <a:p>
+            <a:pPr indent="0" marL="0">
+              <a:buNone/>
+            </a:pPr>
+            <a:r>
+              <a:rPr lang="en-US" sz="1100" dirty="0">
                 <a:solidFill>
                   <a:srgbClr val="1A1A2E"/>
                 </a:solidFill>
@@ -4730,22 +5001,22 @@
                 <a:ea typeface="Calibri" pitchFamily="34" charset="-122"/>
                 <a:cs typeface="Calibri" pitchFamily="34" charset="-120"/>
               </a:rPr>
-              <a:t>CROSS JOIN : produit cartésien (TOUTES les combinaisons)</a:t>
-            </a:r>
-            <a:endParaRPr lang="en-US" sz="1200" dirty="0"/>
-          </a:p>
-        </p:txBody>
-      </p:sp>
-      <p:sp>
-        <p:nvSpPr>
-          <p:cNvPr id="7" name="Shape 5"/>
-          <p:cNvSpPr/>
-          <p:nvPr/>
-        </p:nvSpPr>
-        <p:spPr>
-          <a:xfrm>
-            <a:off x="457200" y="1463040"/>
-            <a:ext cx="8229600" cy="521208"/>
+              <a:t>Utile pour : grilles horaires (jours × creneaux × salles)</a:t>
+            </a:r>
+            <a:endParaRPr lang="en-US" sz="1100" dirty="0"/>
+          </a:p>
+        </p:txBody>
+      </p:sp>
+      <p:sp>
+        <p:nvSpPr>
+          <p:cNvPr id="13" name="Shape 11"/>
+          <p:cNvSpPr/>
+          <p:nvPr/>
+        </p:nvSpPr>
+        <p:spPr>
+          <a:xfrm>
+            <a:off x="457200" y="2203704"/>
+            <a:ext cx="8229600" cy="448056"/>
           </a:xfrm>
           <a:prstGeom prst="rect">
             <a:avLst/>
@@ -4754,25 +5025,18 @@
             <a:srgbClr val="E3F2FD"/>
           </a:solidFill>
           <a:ln/>
-          <a:effectLst>
-            <a:outerShdw sx="100000" sy="100000" kx="0" ky="0" algn="bl" rotWithShape="0" blurRad="50800" dist="25400" dir="8100000">
-              <a:srgbClr val="000000">
-                <a:alpha val="12000"/>
-              </a:srgbClr>
-            </a:outerShdw>
-          </a:effectLst>
-        </p:spPr>
-      </p:sp>
-      <p:sp>
-        <p:nvSpPr>
-          <p:cNvPr id="8" name="Shape 6"/>
-          <p:cNvSpPr/>
-          <p:nvPr/>
-        </p:nvSpPr>
-        <p:spPr>
-          <a:xfrm>
-            <a:off x="457200" y="1463040"/>
-            <a:ext cx="45720" cy="521208"/>
+        </p:spPr>
+      </p:sp>
+      <p:sp>
+        <p:nvSpPr>
+          <p:cNvPr id="14" name="Shape 12"/>
+          <p:cNvSpPr/>
+          <p:nvPr/>
+        </p:nvSpPr>
+        <p:spPr>
+          <a:xfrm>
+            <a:off x="457200" y="2203704"/>
+            <a:ext cx="45720" cy="448056"/>
           </a:xfrm>
           <a:prstGeom prst="rect">
             <a:avLst/>
@@ -4785,14 +5049,14 @@
       </p:sp>
       <p:sp>
         <p:nvSpPr>
-          <p:cNvPr id="9" name="Text 7"/>
-          <p:cNvSpPr/>
-          <p:nvPr/>
-        </p:nvSpPr>
-        <p:spPr>
-          <a:xfrm>
-            <a:off x="685800" y="1463040"/>
-            <a:ext cx="7818120" cy="521208"/>
+          <p:cNvPr id="15" name="Text 13"/>
+          <p:cNvSpPr/>
+          <p:nvPr/>
+        </p:nvSpPr>
+        <p:spPr>
+          <a:xfrm>
+            <a:off x="640080" y="2203704"/>
+            <a:ext cx="7863840" cy="448056"/>
           </a:xfrm>
           <a:prstGeom prst="rect">
             <a:avLst/>
@@ -4816,7 +5080,7 @@
                 <a:ea typeface="JetBrains Mono" pitchFamily="34" charset="-122"/>
                 <a:cs typeface="JetBrains Mono" pitchFamily="34" charset="-120"/>
               </a:rPr>
-              <a:t>SELECT * FROM salle CROSS JOIN ingenieur; → 5×6 = 30 lignes</a:t>
+              <a:t>JOIN REFLEXIVE : une table avec ELLE-MEME</a:t>
             </a:r>
             <a:endParaRPr lang="en-US" sz="1000" dirty="0"/>
           </a:p>
@@ -4824,14 +5088,14 @@
       </p:sp>
       <p:sp>
         <p:nvSpPr>
-          <p:cNvPr id="10" name="Shape 8"/>
-          <p:cNvSpPr/>
-          <p:nvPr/>
-        </p:nvSpPr>
-        <p:spPr>
-          <a:xfrm>
-            <a:off x="457200" y="2011680"/>
-            <a:ext cx="8229600" cy="521208"/>
+          <p:cNvPr id="16" name="Shape 14"/>
+          <p:cNvSpPr/>
+          <p:nvPr/>
+        </p:nvSpPr>
+        <p:spPr>
+          <a:xfrm>
+            <a:off x="457200" y="2679192"/>
+            <a:ext cx="8229600" cy="448056"/>
           </a:xfrm>
           <a:prstGeom prst="rect">
             <a:avLst/>
@@ -4840,25 +5104,18 @@
             <a:srgbClr val="FFFFFF"/>
           </a:solidFill>
           <a:ln/>
-          <a:effectLst>
-            <a:outerShdw sx="100000" sy="100000" kx="0" ky="0" algn="bl" rotWithShape="0" blurRad="50800" dist="25400" dir="8100000">
-              <a:srgbClr val="000000">
-                <a:alpha val="12000"/>
-              </a:srgbClr>
-            </a:outerShdw>
-          </a:effectLst>
-        </p:spPr>
-      </p:sp>
-      <p:sp>
-        <p:nvSpPr>
-          <p:cNvPr id="11" name="Shape 9"/>
-          <p:cNvSpPr/>
-          <p:nvPr/>
-        </p:nvSpPr>
-        <p:spPr>
-          <a:xfrm>
-            <a:off x="457200" y="2011680"/>
-            <a:ext cx="45720" cy="521208"/>
+        </p:spPr>
+      </p:sp>
+      <p:sp>
+        <p:nvSpPr>
+          <p:cNvPr id="17" name="Shape 15"/>
+          <p:cNvSpPr/>
+          <p:nvPr/>
+        </p:nvSpPr>
+        <p:spPr>
+          <a:xfrm>
+            <a:off x="457200" y="2679192"/>
+            <a:ext cx="45720" cy="448056"/>
           </a:xfrm>
           <a:prstGeom prst="rect">
             <a:avLst/>
@@ -4871,14 +5128,14 @@
       </p:sp>
       <p:sp>
         <p:nvSpPr>
-          <p:cNvPr id="12" name="Text 10"/>
-          <p:cNvSpPr/>
-          <p:nvPr/>
-        </p:nvSpPr>
-        <p:spPr>
-          <a:xfrm>
-            <a:off x="685800" y="2011680"/>
-            <a:ext cx="7818120" cy="521208"/>
+          <p:cNvPr id="18" name="Text 16"/>
+          <p:cNvSpPr/>
+          <p:nvPr/>
+        </p:nvSpPr>
+        <p:spPr>
+          <a:xfrm>
+            <a:off x="640080" y="2679192"/>
+            <a:ext cx="7863840" cy="448056"/>
           </a:xfrm>
           <a:prstGeom prst="rect">
             <a:avLst/>
@@ -4894,7 +5151,165 @@
               <a:buNone/>
             </a:pPr>
             <a:r>
-              <a:rPr lang="en-US" sz="1200" dirty="0">
+              <a:rPr lang="en-US" sz="1000" dirty="0">
+                <a:solidFill>
+                  <a:srgbClr val="0D47A1"/>
+                </a:solidFill>
+                <a:latin typeface="JetBrains Mono" pitchFamily="34" charset="0"/>
+                <a:ea typeface="JetBrains Mono" pitchFamily="34" charset="-122"/>
+                <a:cs typeface="JetBrains Mono" pitchFamily="34" charset="-120"/>
+              </a:rPr>
+              <a:t>  SELECT e1.nom AS employe, e2.nom AS manager</a:t>
+            </a:r>
+            <a:endParaRPr lang="en-US" sz="1000" dirty="0"/>
+          </a:p>
+        </p:txBody>
+      </p:sp>
+      <p:sp>
+        <p:nvSpPr>
+          <p:cNvPr id="19" name="Shape 17"/>
+          <p:cNvSpPr/>
+          <p:nvPr/>
+        </p:nvSpPr>
+        <p:spPr>
+          <a:xfrm>
+            <a:off x="457200" y="3154680"/>
+            <a:ext cx="8229600" cy="448056"/>
+          </a:xfrm>
+          <a:prstGeom prst="rect">
+            <a:avLst/>
+          </a:prstGeom>
+          <a:solidFill>
+            <a:srgbClr val="E3F2FD"/>
+          </a:solidFill>
+          <a:ln/>
+        </p:spPr>
+      </p:sp>
+      <p:sp>
+        <p:nvSpPr>
+          <p:cNvPr id="20" name="Shape 18"/>
+          <p:cNvSpPr/>
+          <p:nvPr/>
+        </p:nvSpPr>
+        <p:spPr>
+          <a:xfrm>
+            <a:off x="457200" y="3154680"/>
+            <a:ext cx="45720" cy="448056"/>
+          </a:xfrm>
+          <a:prstGeom prst="rect">
+            <a:avLst/>
+          </a:prstGeom>
+          <a:solidFill>
+            <a:srgbClr val="1565C0"/>
+          </a:solidFill>
+          <a:ln/>
+        </p:spPr>
+      </p:sp>
+      <p:sp>
+        <p:nvSpPr>
+          <p:cNvPr id="21" name="Text 19"/>
+          <p:cNvSpPr/>
+          <p:nvPr/>
+        </p:nvSpPr>
+        <p:spPr>
+          <a:xfrm>
+            <a:off x="640080" y="3154680"/>
+            <a:ext cx="7863840" cy="448056"/>
+          </a:xfrm>
+          <a:prstGeom prst="rect">
+            <a:avLst/>
+          </a:prstGeom>
+          <a:noFill/>
+          <a:ln/>
+        </p:spPr>
+        <p:txBody>
+          <a:bodyPr wrap="square" lIns="0" tIns="0" rIns="0" bIns="0" rtlCol="0" anchor="ctr"/>
+          <a:lstStyle/>
+          <a:p>
+            <a:pPr indent="0" marL="0">
+              <a:buNone/>
+            </a:pPr>
+            <a:r>
+              <a:rPr lang="en-US" sz="1000" dirty="0">
+                <a:solidFill>
+                  <a:srgbClr val="0D47A1"/>
+                </a:solidFill>
+                <a:latin typeface="JetBrains Mono" pitchFamily="34" charset="0"/>
+                <a:ea typeface="JetBrains Mono" pitchFamily="34" charset="-122"/>
+                <a:cs typeface="JetBrains Mono" pitchFamily="34" charset="-120"/>
+              </a:rPr>
+              <a:t>  FROM employe e1 JOIN employe e2 ON e1.manager_id = e2.id</a:t>
+            </a:r>
+            <a:endParaRPr lang="en-US" sz="1000" dirty="0"/>
+          </a:p>
+        </p:txBody>
+      </p:sp>
+      <p:sp>
+        <p:nvSpPr>
+          <p:cNvPr id="22" name="Shape 20"/>
+          <p:cNvSpPr/>
+          <p:nvPr/>
+        </p:nvSpPr>
+        <p:spPr>
+          <a:xfrm>
+            <a:off x="457200" y="3630168"/>
+            <a:ext cx="8229600" cy="448056"/>
+          </a:xfrm>
+          <a:prstGeom prst="rect">
+            <a:avLst/>
+          </a:prstGeom>
+          <a:solidFill>
+            <a:srgbClr val="FFFFFF"/>
+          </a:solidFill>
+          <a:ln/>
+        </p:spPr>
+      </p:sp>
+      <p:sp>
+        <p:nvSpPr>
+          <p:cNvPr id="23" name="Shape 21"/>
+          <p:cNvSpPr/>
+          <p:nvPr/>
+        </p:nvSpPr>
+        <p:spPr>
+          <a:xfrm>
+            <a:off x="457200" y="3630168"/>
+            <a:ext cx="45720" cy="448056"/>
+          </a:xfrm>
+          <a:prstGeom prst="rect">
+            <a:avLst/>
+          </a:prstGeom>
+          <a:solidFill>
+            <a:srgbClr val="1565C0"/>
+          </a:solidFill>
+          <a:ln/>
+        </p:spPr>
+      </p:sp>
+      <p:sp>
+        <p:nvSpPr>
+          <p:cNvPr id="24" name="Text 22"/>
+          <p:cNvSpPr/>
+          <p:nvPr/>
+        </p:nvSpPr>
+        <p:spPr>
+          <a:xfrm>
+            <a:off x="640080" y="3630168"/>
+            <a:ext cx="7863840" cy="448056"/>
+          </a:xfrm>
+          <a:prstGeom prst="rect">
+            <a:avLst/>
+          </a:prstGeom>
+          <a:noFill/>
+          <a:ln/>
+        </p:spPr>
+        <p:txBody>
+          <a:bodyPr wrap="square" lIns="0" tIns="0" rIns="0" bIns="0" rtlCol="0" anchor="ctr"/>
+          <a:lstStyle/>
+          <a:p>
+            <a:pPr indent="0" marL="0">
+              <a:buNone/>
+            </a:pPr>
+            <a:r>
+              <a:rPr lang="en-US" sz="1100" dirty="0">
                 <a:solidFill>
                   <a:srgbClr val="1A1A2E"/>
                 </a:solidFill>
@@ -4902,22 +5317,22 @@
                 <a:ea typeface="Calibri" pitchFamily="34" charset="-122"/>
                 <a:cs typeface="Calibri" pitchFamily="34" charset="-120"/>
               </a:rPr>
-              <a:t>Rarement utile, mais bon à connaître (ex: grille horaire)</a:t>
-            </a:r>
-            <a:endParaRPr lang="en-US" sz="1200" dirty="0"/>
-          </a:p>
-        </p:txBody>
-      </p:sp>
-      <p:sp>
-        <p:nvSpPr>
-          <p:cNvPr id="13" name="Shape 11"/>
-          <p:cNvSpPr/>
-          <p:nvPr/>
-        </p:nvSpPr>
-        <p:spPr>
-          <a:xfrm>
-            <a:off x="457200" y="2560320"/>
-            <a:ext cx="8229600" cy="521208"/>
+              <a:t>SwissSound : Artiste collabore_avec Artiste (via table COLLABORATION)</a:t>
+            </a:r>
+            <a:endParaRPr lang="en-US" sz="1100" dirty="0"/>
+          </a:p>
+        </p:txBody>
+      </p:sp>
+      <p:sp>
+        <p:nvSpPr>
+          <p:cNvPr id="25" name="Shape 23"/>
+          <p:cNvSpPr/>
+          <p:nvPr/>
+        </p:nvSpPr>
+        <p:spPr>
+          <a:xfrm>
+            <a:off x="457200" y="4105656"/>
+            <a:ext cx="8229600" cy="448056"/>
           </a:xfrm>
           <a:prstGeom prst="rect">
             <a:avLst/>
@@ -4926,25 +5341,18 @@
             <a:srgbClr val="E3F2FD"/>
           </a:solidFill>
           <a:ln/>
-          <a:effectLst>
-            <a:outerShdw sx="100000" sy="100000" kx="0" ky="0" algn="bl" rotWithShape="0" blurRad="50800" dist="25400" dir="8100000">
-              <a:srgbClr val="000000">
-                <a:alpha val="12000"/>
-              </a:srgbClr>
-            </a:outerShdw>
-          </a:effectLst>
-        </p:spPr>
-      </p:sp>
-      <p:sp>
-        <p:nvSpPr>
-          <p:cNvPr id="14" name="Shape 12"/>
-          <p:cNvSpPr/>
-          <p:nvPr/>
-        </p:nvSpPr>
-        <p:spPr>
-          <a:xfrm>
-            <a:off x="457200" y="2560320"/>
-            <a:ext cx="45720" cy="521208"/>
+        </p:spPr>
+      </p:sp>
+      <p:sp>
+        <p:nvSpPr>
+          <p:cNvPr id="26" name="Shape 24"/>
+          <p:cNvSpPr/>
+          <p:nvPr/>
+        </p:nvSpPr>
+        <p:spPr>
+          <a:xfrm>
+            <a:off x="457200" y="4105656"/>
+            <a:ext cx="45720" cy="448056"/>
           </a:xfrm>
           <a:prstGeom prst="rect">
             <a:avLst/>
@@ -4957,14 +5365,14 @@
       </p:sp>
       <p:sp>
         <p:nvSpPr>
-          <p:cNvPr id="15" name="Text 13"/>
-          <p:cNvSpPr/>
-          <p:nvPr/>
-        </p:nvSpPr>
-        <p:spPr>
-          <a:xfrm>
-            <a:off x="685800" y="2560320"/>
-            <a:ext cx="7818120" cy="521208"/>
+          <p:cNvPr id="27" name="Text 25"/>
+          <p:cNvSpPr/>
+          <p:nvPr/>
+        </p:nvSpPr>
+        <p:spPr>
+          <a:xfrm>
+            <a:off x="640080" y="4105656"/>
+            <a:ext cx="7863840" cy="448056"/>
           </a:xfrm>
           <a:prstGeom prst="rect">
             <a:avLst/>
@@ -4988,265 +5396,7 @@
                 <a:ea typeface="JetBrains Mono" pitchFamily="34" charset="-122"/>
                 <a:cs typeface="JetBrains Mono" pitchFamily="34" charset="-120"/>
               </a:rPr>
-              <a:t>JOIN réflexive : une table avec ELLE-MÊME</a:t>
-            </a:r>
-            <a:endParaRPr lang="en-US" sz="1000" dirty="0"/>
-          </a:p>
-        </p:txBody>
-      </p:sp>
-      <p:sp>
-        <p:nvSpPr>
-          <p:cNvPr id="16" name="Shape 14"/>
-          <p:cNvSpPr/>
-          <p:nvPr/>
-        </p:nvSpPr>
-        <p:spPr>
-          <a:xfrm>
-            <a:off x="457200" y="3108960"/>
-            <a:ext cx="8229600" cy="521208"/>
-          </a:xfrm>
-          <a:prstGeom prst="rect">
-            <a:avLst/>
-          </a:prstGeom>
-          <a:solidFill>
-            <a:srgbClr val="FFFFFF"/>
-          </a:solidFill>
-          <a:ln/>
-          <a:effectLst>
-            <a:outerShdw sx="100000" sy="100000" kx="0" ky="0" algn="bl" rotWithShape="0" blurRad="50800" dist="25400" dir="8100000">
-              <a:srgbClr val="000000">
-                <a:alpha val="12000"/>
-              </a:srgbClr>
-            </a:outerShdw>
-          </a:effectLst>
-        </p:spPr>
-      </p:sp>
-      <p:sp>
-        <p:nvSpPr>
-          <p:cNvPr id="17" name="Shape 15"/>
-          <p:cNvSpPr/>
-          <p:nvPr/>
-        </p:nvSpPr>
-        <p:spPr>
-          <a:xfrm>
-            <a:off x="457200" y="3108960"/>
-            <a:ext cx="45720" cy="521208"/>
-          </a:xfrm>
-          <a:prstGeom prst="rect">
-            <a:avLst/>
-          </a:prstGeom>
-          <a:solidFill>
-            <a:srgbClr val="1565C0"/>
-          </a:solidFill>
-          <a:ln/>
-        </p:spPr>
-      </p:sp>
-      <p:sp>
-        <p:nvSpPr>
-          <p:cNvPr id="18" name="Text 16"/>
-          <p:cNvSpPr/>
-          <p:nvPr/>
-        </p:nvSpPr>
-        <p:spPr>
-          <a:xfrm>
-            <a:off x="685800" y="3108960"/>
-            <a:ext cx="7818120" cy="521208"/>
-          </a:xfrm>
-          <a:prstGeom prst="rect">
-            <a:avLst/>
-          </a:prstGeom>
-          <a:noFill/>
-          <a:ln/>
-        </p:spPr>
-        <p:txBody>
-          <a:bodyPr wrap="square" lIns="0" tIns="0" rIns="0" bIns="0" rtlCol="0" anchor="ctr"/>
-          <a:lstStyle/>
-          <a:p>
-            <a:pPr indent="0" marL="0">
-              <a:buNone/>
-            </a:pPr>
-            <a:r>
-              <a:rPr lang="en-US" sz="1200" dirty="0">
-                <a:solidFill>
-                  <a:srgbClr val="1A1A2E"/>
-                </a:solidFill>
-                <a:latin typeface="Calibri" pitchFamily="34" charset="0"/>
-                <a:ea typeface="Calibri" pitchFamily="34" charset="-122"/>
-                <a:cs typeface="Calibri" pitchFamily="34" charset="-120"/>
-              </a:rPr>
-              <a:t>Ex: employé JOIN employé ON e.manager_id = m.id_employe</a:t>
-            </a:r>
-            <a:endParaRPr lang="en-US" sz="1200" dirty="0"/>
-          </a:p>
-        </p:txBody>
-      </p:sp>
-      <p:sp>
-        <p:nvSpPr>
-          <p:cNvPr id="19" name="Shape 17"/>
-          <p:cNvSpPr/>
-          <p:nvPr/>
-        </p:nvSpPr>
-        <p:spPr>
-          <a:xfrm>
-            <a:off x="457200" y="3657600"/>
-            <a:ext cx="8229600" cy="521208"/>
-          </a:xfrm>
-          <a:prstGeom prst="rect">
-            <a:avLst/>
-          </a:prstGeom>
-          <a:solidFill>
-            <a:srgbClr val="E3F2FD"/>
-          </a:solidFill>
-          <a:ln/>
-          <a:effectLst>
-            <a:outerShdw sx="100000" sy="100000" kx="0" ky="0" algn="bl" rotWithShape="0" blurRad="50800" dist="25400" dir="8100000">
-              <a:srgbClr val="000000">
-                <a:alpha val="12000"/>
-              </a:srgbClr>
-            </a:outerShdw>
-          </a:effectLst>
-        </p:spPr>
-      </p:sp>
-      <p:sp>
-        <p:nvSpPr>
-          <p:cNvPr id="20" name="Shape 18"/>
-          <p:cNvSpPr/>
-          <p:nvPr/>
-        </p:nvSpPr>
-        <p:spPr>
-          <a:xfrm>
-            <a:off x="457200" y="3657600"/>
-            <a:ext cx="45720" cy="521208"/>
-          </a:xfrm>
-          <a:prstGeom prst="rect">
-            <a:avLst/>
-          </a:prstGeom>
-          <a:solidFill>
-            <a:srgbClr val="1565C0"/>
-          </a:solidFill>
-          <a:ln/>
-        </p:spPr>
-      </p:sp>
-      <p:sp>
-        <p:nvSpPr>
-          <p:cNvPr id="21" name="Text 19"/>
-          <p:cNvSpPr/>
-          <p:nvPr/>
-        </p:nvSpPr>
-        <p:spPr>
-          <a:xfrm>
-            <a:off x="685800" y="3657600"/>
-            <a:ext cx="7818120" cy="521208"/>
-          </a:xfrm>
-          <a:prstGeom prst="rect">
-            <a:avLst/>
-          </a:prstGeom>
-          <a:noFill/>
-          <a:ln/>
-        </p:spPr>
-        <p:txBody>
-          <a:bodyPr wrap="square" lIns="0" tIns="0" rIns="0" bIns="0" rtlCol="0" anchor="ctr"/>
-          <a:lstStyle/>
-          <a:p>
-            <a:pPr indent="0" marL="0">
-              <a:buNone/>
-            </a:pPr>
-            <a:r>
-              <a:rPr lang="en-US" sz="1200" dirty="0">
-                <a:solidFill>
-                  <a:srgbClr val="1A1A2E"/>
-                </a:solidFill>
-                <a:latin typeface="Calibri" pitchFamily="34" charset="0"/>
-                <a:ea typeface="Calibri" pitchFamily="34" charset="-122"/>
-                <a:cs typeface="Calibri" pitchFamily="34" charset="-120"/>
-              </a:rPr>
-              <a:t>SwissSound : Artiste collabore_avec Artiste (via table COLLABORATION)</a:t>
-            </a:r>
-            <a:endParaRPr lang="en-US" sz="1200" dirty="0"/>
-          </a:p>
-        </p:txBody>
-      </p:sp>
-      <p:sp>
-        <p:nvSpPr>
-          <p:cNvPr id="22" name="Shape 20"/>
-          <p:cNvSpPr/>
-          <p:nvPr/>
-        </p:nvSpPr>
-        <p:spPr>
-          <a:xfrm>
-            <a:off x="457200" y="4206240"/>
-            <a:ext cx="8229600" cy="521208"/>
-          </a:xfrm>
-          <a:prstGeom prst="rect">
-            <a:avLst/>
-          </a:prstGeom>
-          <a:solidFill>
-            <a:srgbClr val="FFFFFF"/>
-          </a:solidFill>
-          <a:ln/>
-          <a:effectLst>
-            <a:outerShdw sx="100000" sy="100000" kx="0" ky="0" algn="bl" rotWithShape="0" blurRad="50800" dist="25400" dir="8100000">
-              <a:srgbClr val="000000">
-                <a:alpha val="12000"/>
-              </a:srgbClr>
-            </a:outerShdw>
-          </a:effectLst>
-        </p:spPr>
-      </p:sp>
-      <p:sp>
-        <p:nvSpPr>
-          <p:cNvPr id="23" name="Shape 21"/>
-          <p:cNvSpPr/>
-          <p:nvPr/>
-        </p:nvSpPr>
-        <p:spPr>
-          <a:xfrm>
-            <a:off x="457200" y="4206240"/>
-            <a:ext cx="45720" cy="521208"/>
-          </a:xfrm>
-          <a:prstGeom prst="rect">
-            <a:avLst/>
-          </a:prstGeom>
-          <a:solidFill>
-            <a:srgbClr val="1565C0"/>
-          </a:solidFill>
-          <a:ln/>
-        </p:spPr>
-      </p:sp>
-      <p:sp>
-        <p:nvSpPr>
-          <p:cNvPr id="24" name="Text 22"/>
-          <p:cNvSpPr/>
-          <p:nvPr/>
-        </p:nvSpPr>
-        <p:spPr>
-          <a:xfrm>
-            <a:off x="685800" y="4206240"/>
-            <a:ext cx="7818120" cy="521208"/>
-          </a:xfrm>
-          <a:prstGeom prst="rect">
-            <a:avLst/>
-          </a:prstGeom>
-          <a:noFill/>
-          <a:ln/>
-        </p:spPr>
-        <p:txBody>
-          <a:bodyPr wrap="square" lIns="0" tIns="0" rIns="0" bIns="0" rtlCol="0" anchor="ctr"/>
-          <a:lstStyle/>
-          <a:p>
-            <a:pPr indent="0" marL="0">
-              <a:buNone/>
-            </a:pPr>
-            <a:r>
-              <a:rPr lang="en-US" sz="1000" dirty="0">
-                <a:solidFill>
-                  <a:srgbClr val="0D47A1"/>
-                </a:solidFill>
-                <a:latin typeface="JetBrains Mono" pitchFamily="34" charset="0"/>
-                <a:ea typeface="JetBrains Mono" pitchFamily="34" charset="-122"/>
-                <a:cs typeface="JetBrains Mono" pitchFamily="34" charset="-120"/>
-              </a:rPr>
-              <a:t>GROUP_CONCAT avec JOIN : lister les genres d'un artiste en une ligne</a:t>
+              <a:t>GROUP_CONCAT : lister les genres d'un artiste en une ligne</a:t>
             </a:r>
             <a:endParaRPr lang="en-US" sz="1000" dirty="0"/>
           </a:p>
@@ -5313,7 +5463,7 @@
         <p:spPr>
           <a:xfrm>
             <a:off x="457200" y="182880"/>
-            <a:ext cx="8229600" cy="594360"/>
+            <a:ext cx="8229600" cy="502920"/>
           </a:xfrm>
           <a:prstGeom prst="rect">
             <a:avLst/>
@@ -5329,7 +5479,7 @@
               <a:buNone/>
             </a:pPr>
             <a:r>
-              <a:rPr lang="en-US" sz="2400" b="1" dirty="0">
+              <a:rPr lang="en-US" sz="2100" b="1" dirty="0">
                 <a:solidFill>
                   <a:srgbClr val="0D47A1"/>
                 </a:solidFill>
@@ -5337,9 +5487,9 @@
                 <a:ea typeface="Trebuchet MS" pitchFamily="34" charset="-122"/>
                 <a:cs typeface="Trebuchet MS" pitchFamily="34" charset="-120"/>
               </a:rPr>
-              <a:t>Exercice Module 14</a:t>
-            </a:r>
-            <a:endParaRPr lang="en-US" sz="2400" dirty="0"/>
+              <a:t>Exercices GESCOM + SwissSound</a:t>
+            </a:r>
+            <a:endParaRPr lang="en-US" sz="2100" dirty="0"/>
           </a:p>
         </p:txBody>
       </p:sp>
@@ -5351,8 +5501,8 @@
         </p:nvSpPr>
         <p:spPr>
           <a:xfrm>
-            <a:off x="457200" y="914400"/>
-            <a:ext cx="8229600" cy="521208"/>
+            <a:off x="457200" y="777240"/>
+            <a:ext cx="8229600" cy="330015"/>
           </a:xfrm>
           <a:prstGeom prst="rect">
             <a:avLst/>
@@ -5361,13 +5511,6 @@
             <a:srgbClr val="FFFFFF"/>
           </a:solidFill>
           <a:ln/>
-          <a:effectLst>
-            <a:outerShdw sx="100000" sy="100000" kx="0" ky="0" algn="bl" rotWithShape="0" blurRad="50800" dist="25400" dir="8100000">
-              <a:srgbClr val="000000">
-                <a:alpha val="12000"/>
-              </a:srgbClr>
-            </a:outerShdw>
-          </a:effectLst>
         </p:spPr>
       </p:sp>
       <p:sp>
@@ -5378,8 +5521,8 @@
         </p:nvSpPr>
         <p:spPr>
           <a:xfrm>
-            <a:off x="457200" y="914400"/>
-            <a:ext cx="45720" cy="521208"/>
+            <a:off x="457200" y="777240"/>
+            <a:ext cx="45720" cy="330015"/>
           </a:xfrm>
           <a:prstGeom prst="rect">
             <a:avLst/>
@@ -5398,8 +5541,8 @@
         </p:nvSpPr>
         <p:spPr>
           <a:xfrm>
-            <a:off x="685800" y="914400"/>
-            <a:ext cx="7818120" cy="521208"/>
+            <a:off x="640080" y="777240"/>
+            <a:ext cx="7863840" cy="330015"/>
           </a:xfrm>
           <a:prstGeom prst="rect">
             <a:avLst/>
@@ -5415,7 +5558,7 @@
               <a:buNone/>
             </a:pPr>
             <a:r>
-              <a:rPr lang="en-US" sz="1200" dirty="0">
+              <a:rPr lang="en-US" sz="1100" dirty="0">
                 <a:solidFill>
                   <a:srgbClr val="1A1A2E"/>
                 </a:solidFill>
@@ -5423,9 +5566,9 @@
                 <a:ea typeface="Calibri" pitchFamily="34" charset="-122"/>
                 <a:cs typeface="Calibri" pitchFamily="34" charset="-120"/>
               </a:rPr>
-              <a:t>Écrire 10 requêtes multi-tables (voir sql/02_queries.sql, requêtes 21-30)</a:t>
-            </a:r>
-            <a:endParaRPr lang="en-US" sz="1200" dirty="0"/>
+              <a:t>GESCOM (bac a sable, exercices 6-13 avances) :</a:t>
+            </a:r>
+            <a:endParaRPr lang="en-US" sz="1100" dirty="0"/>
           </a:p>
         </p:txBody>
       </p:sp>
@@ -5437,8 +5580,8 @@
         </p:nvSpPr>
         <p:spPr>
           <a:xfrm>
-            <a:off x="457200" y="1463040"/>
-            <a:ext cx="8229600" cy="521208"/>
+            <a:off x="457200" y="1134687"/>
+            <a:ext cx="8229600" cy="330015"/>
           </a:xfrm>
           <a:prstGeom prst="rect">
             <a:avLst/>
@@ -5447,13 +5590,6 @@
             <a:srgbClr val="E3F2FD"/>
           </a:solidFill>
           <a:ln/>
-          <a:effectLst>
-            <a:outerShdw sx="100000" sy="100000" kx="0" ky="0" algn="bl" rotWithShape="0" blurRad="50800" dist="25400" dir="8100000">
-              <a:srgbClr val="000000">
-                <a:alpha val="12000"/>
-              </a:srgbClr>
-            </a:outerShdw>
-          </a:effectLst>
         </p:spPr>
       </p:sp>
       <p:sp>
@@ -5464,8 +5600,8 @@
         </p:nvSpPr>
         <p:spPr>
           <a:xfrm>
-            <a:off x="457200" y="1463040"/>
-            <a:ext cx="45720" cy="521208"/>
+            <a:off x="457200" y="1134687"/>
+            <a:ext cx="45720" cy="330015"/>
           </a:xfrm>
           <a:prstGeom prst="rect">
             <a:avLst/>
@@ -5484,8 +5620,8 @@
         </p:nvSpPr>
         <p:spPr>
           <a:xfrm>
-            <a:off x="685800" y="1463040"/>
-            <a:ext cx="7818120" cy="521208"/>
+            <a:off x="640080" y="1134687"/>
+            <a:ext cx="7863840" cy="330015"/>
           </a:xfrm>
           <a:prstGeom prst="rect">
             <a:avLst/>
@@ -5501,7 +5637,7 @@
               <a:buNone/>
             </a:pPr>
             <a:r>
-              <a:rPr lang="en-US" sz="1200" dirty="0">
+              <a:rPr lang="en-US" sz="1100" dirty="0">
                 <a:solidFill>
                   <a:srgbClr val="1A1A2E"/>
                 </a:solidFill>
@@ -5509,9 +5645,9 @@
                 <a:ea typeface="Calibri" pitchFamily="34" charset="-122"/>
                 <a:cs typeface="Calibri" pitchFamily="34" charset="-120"/>
               </a:rPr>
-              <a:t>Au moins 1 INNER JOIN, 1 LEFT JOIN, 1 jointure 3+ tables</a:t>
-            </a:r>
-            <a:endParaRPr lang="en-US" sz="1200" dirty="0"/>
+              <a:t>  Articles + famille + fournisseur (3 tables)</a:t>
+            </a:r>
+            <a:endParaRPr lang="en-US" sz="1100" dirty="0"/>
           </a:p>
         </p:txBody>
       </p:sp>
@@ -5523,8 +5659,8 @@
         </p:nvSpPr>
         <p:spPr>
           <a:xfrm>
-            <a:off x="457200" y="2011680"/>
-            <a:ext cx="8229600" cy="521208"/>
+            <a:off x="457200" y="1492135"/>
+            <a:ext cx="8229600" cy="330015"/>
           </a:xfrm>
           <a:prstGeom prst="rect">
             <a:avLst/>
@@ -5533,13 +5669,6 @@
             <a:srgbClr val="FFFFFF"/>
           </a:solidFill>
           <a:ln/>
-          <a:effectLst>
-            <a:outerShdw sx="100000" sy="100000" kx="0" ky="0" algn="bl" rotWithShape="0" blurRad="50800" dist="25400" dir="8100000">
-              <a:srgbClr val="000000">
-                <a:alpha val="12000"/>
-              </a:srgbClr>
-            </a:outerShdw>
-          </a:effectLst>
         </p:spPr>
       </p:sp>
       <p:sp>
@@ -5550,8 +5679,8 @@
         </p:nvSpPr>
         <p:spPr>
           <a:xfrm>
-            <a:off x="457200" y="2011680"/>
-            <a:ext cx="45720" cy="521208"/>
+            <a:off x="457200" y="1492135"/>
+            <a:ext cx="45720" cy="330015"/>
           </a:xfrm>
           <a:prstGeom prst="rect">
             <a:avLst/>
@@ -5570,8 +5699,8 @@
         </p:nvSpPr>
         <p:spPr>
           <a:xfrm>
-            <a:off x="685800" y="2011680"/>
-            <a:ext cx="7818120" cy="521208"/>
+            <a:off x="640080" y="1492135"/>
+            <a:ext cx="7863840" cy="330015"/>
           </a:xfrm>
           <a:prstGeom prst="rect">
             <a:avLst/>
@@ -5587,7 +5716,7 @@
               <a:buNone/>
             </a:pPr>
             <a:r>
-              <a:rPr lang="en-US" sz="1200" dirty="0">
+              <a:rPr lang="en-US" sz="1100" dirty="0">
                 <a:solidFill>
                   <a:srgbClr val="1A1A2E"/>
                 </a:solidFill>
@@ -5595,9 +5724,9 @@
                 <a:ea typeface="Calibri" pitchFamily="34" charset="-122"/>
                 <a:cs typeface="Calibri" pitchFamily="34" charset="-120"/>
               </a:rPr>
-              <a:t>Trouver les artistes SANS album (LEFT JOIN + IS NULL)</a:t>
-            </a:r>
-            <a:endParaRPr lang="en-US" sz="1200" dirty="0"/>
+              <a:t>  Commandes + client + representant (LEFT JOIN pour rep NULL)</a:t>
+            </a:r>
+            <a:endParaRPr lang="en-US" sz="1100" dirty="0"/>
           </a:p>
         </p:txBody>
       </p:sp>
@@ -5609,8 +5738,8 @@
         </p:nvSpPr>
         <p:spPr>
           <a:xfrm>
-            <a:off x="457200" y="2560320"/>
-            <a:ext cx="8229600" cy="521208"/>
+            <a:off x="457200" y="1849582"/>
+            <a:ext cx="8229600" cy="330015"/>
           </a:xfrm>
           <a:prstGeom prst="rect">
             <a:avLst/>
@@ -5619,13 +5748,6 @@
             <a:srgbClr val="E3F2FD"/>
           </a:solidFill>
           <a:ln/>
-          <a:effectLst>
-            <a:outerShdw sx="100000" sy="100000" kx="0" ky="0" algn="bl" rotWithShape="0" blurRad="50800" dist="25400" dir="8100000">
-              <a:srgbClr val="000000">
-                <a:alpha val="12000"/>
-              </a:srgbClr>
-            </a:outerShdw>
-          </a:effectLst>
         </p:spPr>
       </p:sp>
       <p:sp>
@@ -5636,8 +5758,8 @@
         </p:nvSpPr>
         <p:spPr>
           <a:xfrm>
-            <a:off x="457200" y="2560320"/>
-            <a:ext cx="45720" cy="521208"/>
+            <a:off x="457200" y="1849582"/>
+            <a:ext cx="45720" cy="330015"/>
           </a:xfrm>
           <a:prstGeom prst="rect">
             <a:avLst/>
@@ -5656,8 +5778,8 @@
         </p:nvSpPr>
         <p:spPr>
           <a:xfrm>
-            <a:off x="685800" y="2560320"/>
-            <a:ext cx="7818120" cy="521208"/>
+            <a:off x="640080" y="1849582"/>
+            <a:ext cx="7863840" cy="330015"/>
           </a:xfrm>
           <a:prstGeom prst="rect">
             <a:avLst/>
@@ -5673,7 +5795,7 @@
               <a:buNone/>
             </a:pPr>
             <a:r>
-              <a:rPr lang="en-US" sz="1200" dirty="0">
+              <a:rPr lang="en-US" sz="1100" dirty="0">
                 <a:solidFill>
                   <a:srgbClr val="1A1A2E"/>
                 </a:solidFill>
@@ -5681,9 +5803,9 @@
                 <a:ea typeface="Calibri" pitchFamily="34" charset="-122"/>
                 <a:cs typeface="Calibri" pitchFamily="34" charset="-120"/>
               </a:rPr>
-              <a:t>Afficher sessions complètes (artiste + salle + ingénieur)</a:t>
-            </a:r>
-            <a:endParaRPr lang="en-US" sz="1200" dirty="0"/>
+              <a:t>  Detail commandes : 4 tables jointes</a:t>
+            </a:r>
+            <a:endParaRPr lang="en-US" sz="1100" dirty="0"/>
           </a:p>
         </p:txBody>
       </p:sp>
@@ -5695,8 +5817,8 @@
         </p:nvSpPr>
         <p:spPr>
           <a:xfrm>
-            <a:off x="457200" y="3108960"/>
-            <a:ext cx="8229600" cy="521208"/>
+            <a:off x="457200" y="2207029"/>
+            <a:ext cx="8229600" cy="330015"/>
           </a:xfrm>
           <a:prstGeom prst="rect">
             <a:avLst/>
@@ -5705,13 +5827,6 @@
             <a:srgbClr val="FFFFFF"/>
           </a:solidFill>
           <a:ln/>
-          <a:effectLst>
-            <a:outerShdw sx="100000" sy="100000" kx="0" ky="0" algn="bl" rotWithShape="0" blurRad="50800" dist="25400" dir="8100000">
-              <a:srgbClr val="000000">
-                <a:alpha val="12000"/>
-              </a:srgbClr>
-            </a:outerShdw>
-          </a:effectLst>
         </p:spPr>
       </p:sp>
       <p:sp>
@@ -5722,8 +5837,8 @@
         </p:nvSpPr>
         <p:spPr>
           <a:xfrm>
-            <a:off x="457200" y="3108960"/>
-            <a:ext cx="45720" cy="521208"/>
+            <a:off x="457200" y="2207029"/>
+            <a:ext cx="45720" cy="330015"/>
           </a:xfrm>
           <a:prstGeom prst="rect">
             <a:avLst/>
@@ -5742,8 +5857,8 @@
         </p:nvSpPr>
         <p:spPr>
           <a:xfrm>
-            <a:off x="685800" y="3108960"/>
-            <a:ext cx="7818120" cy="521208"/>
+            <a:off x="640080" y="2207029"/>
+            <a:ext cx="7863840" cy="330015"/>
           </a:xfrm>
           <a:prstGeom prst="rect">
             <a:avLst/>
@@ -5759,7 +5874,7 @@
               <a:buNone/>
             </a:pPr>
             <a:r>
-              <a:rPr lang="en-US" sz="1200" dirty="0">
+              <a:rPr lang="en-US" sz="1100" dirty="0">
                 <a:solidFill>
                   <a:srgbClr val="1A1A2E"/>
                 </a:solidFill>
@@ -5767,9 +5882,9 @@
                 <a:ea typeface="Calibri" pitchFamily="34" charset="-122"/>
                 <a:cs typeface="Calibri" pitchFamily="34" charset="-120"/>
               </a:rPr>
-              <a:t>Factures impayées avec nom d'artiste (JOIN + WHERE)</a:t>
-            </a:r>
-            <a:endParaRPr lang="en-US" sz="1200" dirty="0"/>
+              <a:t>  CA par fournisseur (JOIN + GROUP BY + SUM)</a:t>
+            </a:r>
+            <a:endParaRPr lang="en-US" sz="1100" dirty="0"/>
           </a:p>
         </p:txBody>
       </p:sp>
@@ -5781,8 +5896,8 @@
         </p:nvSpPr>
         <p:spPr>
           <a:xfrm>
-            <a:off x="457200" y="3657600"/>
-            <a:ext cx="8229600" cy="521208"/>
+            <a:off x="457200" y="2564476"/>
+            <a:ext cx="8229600" cy="330015"/>
           </a:xfrm>
           <a:prstGeom prst="rect">
             <a:avLst/>
@@ -5791,13 +5906,6 @@
             <a:srgbClr val="E3F2FD"/>
           </a:solidFill>
           <a:ln/>
-          <a:effectLst>
-            <a:outerShdw sx="100000" sy="100000" kx="0" ky="0" algn="bl" rotWithShape="0" blurRad="50800" dist="25400" dir="8100000">
-              <a:srgbClr val="000000">
-                <a:alpha val="12000"/>
-              </a:srgbClr>
-            </a:outerShdw>
-          </a:effectLst>
         </p:spPr>
       </p:sp>
       <p:sp>
@@ -5808,8 +5916,8 @@
         </p:nvSpPr>
         <p:spPr>
           <a:xfrm>
-            <a:off x="457200" y="3657600"/>
-            <a:ext cx="45720" cy="521208"/>
+            <a:off x="457200" y="2564476"/>
+            <a:ext cx="45720" cy="330015"/>
           </a:xfrm>
           <a:prstGeom prst="rect">
             <a:avLst/>
@@ -5828,8 +5936,8 @@
         </p:nvSpPr>
         <p:spPr>
           <a:xfrm>
-            <a:off x="685800" y="3657600"/>
-            <a:ext cx="7818120" cy="521208"/>
+            <a:off x="640080" y="2564476"/>
+            <a:ext cx="7863840" cy="330015"/>
           </a:xfrm>
           <a:prstGeom prst="rect">
             <a:avLst/>
@@ -5845,7 +5953,7 @@
               <a:buNone/>
             </a:pPr>
             <a:r>
-              <a:rPr lang="en-US" sz="1200" dirty="0">
+              <a:rPr lang="en-US" sz="1100" dirty="0">
                 <a:solidFill>
                   <a:srgbClr val="1A1A2E"/>
                 </a:solidFill>
@@ -5853,9 +5961,9 @@
                 <a:ea typeface="Calibri" pitchFamily="34" charset="-122"/>
                 <a:cs typeface="Calibri" pitchFamily="34" charset="-120"/>
               </a:rPr>
-              <a:t>CA par artiste avec nom (JOIN + GROUP BY + SUM)</a:t>
-            </a:r>
-            <a:endParaRPr lang="en-US" sz="1200" dirty="0"/>
+              <a:t>SwissSound :</a:t>
+            </a:r>
+            <a:endParaRPr lang="en-US" sz="1100" dirty="0"/>
           </a:p>
         </p:txBody>
       </p:sp>
@@ -5867,8 +5975,8 @@
         </p:nvSpPr>
         <p:spPr>
           <a:xfrm>
-            <a:off x="457200" y="4206240"/>
-            <a:ext cx="8229600" cy="521208"/>
+            <a:off x="457200" y="2921924"/>
+            <a:ext cx="8229600" cy="330015"/>
           </a:xfrm>
           <a:prstGeom prst="rect">
             <a:avLst/>
@@ -5877,13 +5985,6 @@
             <a:srgbClr val="FFFFFF"/>
           </a:solidFill>
           <a:ln/>
-          <a:effectLst>
-            <a:outerShdw sx="100000" sy="100000" kx="0" ky="0" algn="bl" rotWithShape="0" blurRad="50800" dist="25400" dir="8100000">
-              <a:srgbClr val="000000">
-                <a:alpha val="12000"/>
-              </a:srgbClr>
-            </a:outerShdw>
-          </a:effectLst>
         </p:spPr>
       </p:sp>
       <p:sp>
@@ -5894,8 +5995,8 @@
         </p:nvSpPr>
         <p:spPr>
           <a:xfrm>
-            <a:off x="457200" y="4206240"/>
-            <a:ext cx="45720" cy="521208"/>
+            <a:off x="457200" y="2921924"/>
+            <a:ext cx="45720" cy="330015"/>
           </a:xfrm>
           <a:prstGeom prst="rect">
             <a:avLst/>
@@ -5914,8 +6015,8 @@
         </p:nvSpPr>
         <p:spPr>
           <a:xfrm>
-            <a:off x="685800" y="4206240"/>
-            <a:ext cx="7818120" cy="521208"/>
+            <a:off x="640080" y="2921924"/>
+            <a:ext cx="7863840" cy="330015"/>
           </a:xfrm>
           <a:prstGeom prst="rect">
             <a:avLst/>
@@ -5931,7 +6032,7 @@
               <a:buNone/>
             </a:pPr>
             <a:r>
-              <a:rPr lang="en-US" sz="1200" dirty="0">
+              <a:rPr lang="en-US" sz="1100" dirty="0">
                 <a:solidFill>
                   <a:srgbClr val="1A1A2E"/>
                 </a:solidFill>
@@ -5939,9 +6040,325 @@
                 <a:ea typeface="Calibri" pitchFamily="34" charset="-122"/>
                 <a:cs typeface="Calibri" pitchFamily="34" charset="-120"/>
               </a:rPr>
-              <a:t>DÉFI : requête monstre joignant 5 tables avec agrégation + HAVING + ORDER BY</a:t>
-            </a:r>
-            <a:endParaRPr lang="en-US" sz="1200" dirty="0"/>
+              <a:t>  1. Albums avec nom artiste (INNER JOIN)</a:t>
+            </a:r>
+            <a:endParaRPr lang="en-US" sz="1100" dirty="0"/>
+          </a:p>
+        </p:txBody>
+      </p:sp>
+      <p:sp>
+        <p:nvSpPr>
+          <p:cNvPr id="25" name="Shape 23"/>
+          <p:cNvSpPr/>
+          <p:nvPr/>
+        </p:nvSpPr>
+        <p:spPr>
+          <a:xfrm>
+            <a:off x="457200" y="3279371"/>
+            <a:ext cx="8229600" cy="330015"/>
+          </a:xfrm>
+          <a:prstGeom prst="rect">
+            <a:avLst/>
+          </a:prstGeom>
+          <a:solidFill>
+            <a:srgbClr val="E3F2FD"/>
+          </a:solidFill>
+          <a:ln/>
+        </p:spPr>
+      </p:sp>
+      <p:sp>
+        <p:nvSpPr>
+          <p:cNvPr id="26" name="Shape 24"/>
+          <p:cNvSpPr/>
+          <p:nvPr/>
+        </p:nvSpPr>
+        <p:spPr>
+          <a:xfrm>
+            <a:off x="457200" y="3279371"/>
+            <a:ext cx="45720" cy="330015"/>
+          </a:xfrm>
+          <a:prstGeom prst="rect">
+            <a:avLst/>
+          </a:prstGeom>
+          <a:solidFill>
+            <a:srgbClr val="1565C0"/>
+          </a:solidFill>
+          <a:ln/>
+        </p:spPr>
+      </p:sp>
+      <p:sp>
+        <p:nvSpPr>
+          <p:cNvPr id="27" name="Text 25"/>
+          <p:cNvSpPr/>
+          <p:nvPr/>
+        </p:nvSpPr>
+        <p:spPr>
+          <a:xfrm>
+            <a:off x="640080" y="3279371"/>
+            <a:ext cx="7863840" cy="330015"/>
+          </a:xfrm>
+          <a:prstGeom prst="rect">
+            <a:avLst/>
+          </a:prstGeom>
+          <a:noFill/>
+          <a:ln/>
+        </p:spPr>
+        <p:txBody>
+          <a:bodyPr wrap="square" lIns="0" tIns="0" rIns="0" bIns="0" rtlCol="0" anchor="ctr"/>
+          <a:lstStyle/>
+          <a:p>
+            <a:pPr indent="0" marL="0">
+              <a:buNone/>
+            </a:pPr>
+            <a:r>
+              <a:rPr lang="en-US" sz="1100" dirty="0">
+                <a:solidFill>
+                  <a:srgbClr val="1A1A2E"/>
+                </a:solidFill>
+                <a:latin typeface="Calibri" pitchFamily="34" charset="0"/>
+                <a:ea typeface="Calibri" pitchFamily="34" charset="-122"/>
+                <a:cs typeface="Calibri" pitchFamily="34" charset="-120"/>
+              </a:rPr>
+              <a:t>  2. Artistes SANS album (LEFT JOIN + IS NULL)</a:t>
+            </a:r>
+            <a:endParaRPr lang="en-US" sz="1100" dirty="0"/>
+          </a:p>
+        </p:txBody>
+      </p:sp>
+      <p:sp>
+        <p:nvSpPr>
+          <p:cNvPr id="28" name="Shape 26"/>
+          <p:cNvSpPr/>
+          <p:nvPr/>
+        </p:nvSpPr>
+        <p:spPr>
+          <a:xfrm>
+            <a:off x="457200" y="3636818"/>
+            <a:ext cx="8229600" cy="330015"/>
+          </a:xfrm>
+          <a:prstGeom prst="rect">
+            <a:avLst/>
+          </a:prstGeom>
+          <a:solidFill>
+            <a:srgbClr val="FFFFFF"/>
+          </a:solidFill>
+          <a:ln/>
+        </p:spPr>
+      </p:sp>
+      <p:sp>
+        <p:nvSpPr>
+          <p:cNvPr id="29" name="Shape 27"/>
+          <p:cNvSpPr/>
+          <p:nvPr/>
+        </p:nvSpPr>
+        <p:spPr>
+          <a:xfrm>
+            <a:off x="457200" y="3636818"/>
+            <a:ext cx="45720" cy="330015"/>
+          </a:xfrm>
+          <a:prstGeom prst="rect">
+            <a:avLst/>
+          </a:prstGeom>
+          <a:solidFill>
+            <a:srgbClr val="1565C0"/>
+          </a:solidFill>
+          <a:ln/>
+        </p:spPr>
+      </p:sp>
+      <p:sp>
+        <p:nvSpPr>
+          <p:cNvPr id="30" name="Text 28"/>
+          <p:cNvSpPr/>
+          <p:nvPr/>
+        </p:nvSpPr>
+        <p:spPr>
+          <a:xfrm>
+            <a:off x="640080" y="3636818"/>
+            <a:ext cx="7863840" cy="330015"/>
+          </a:xfrm>
+          <a:prstGeom prst="rect">
+            <a:avLst/>
+          </a:prstGeom>
+          <a:noFill/>
+          <a:ln/>
+        </p:spPr>
+        <p:txBody>
+          <a:bodyPr wrap="square" lIns="0" tIns="0" rIns="0" bIns="0" rtlCol="0" anchor="ctr"/>
+          <a:lstStyle/>
+          <a:p>
+            <a:pPr indent="0" marL="0">
+              <a:buNone/>
+            </a:pPr>
+            <a:r>
+              <a:rPr lang="en-US" sz="1100" dirty="0">
+                <a:solidFill>
+                  <a:srgbClr val="1A1A2E"/>
+                </a:solidFill>
+                <a:latin typeface="Calibri" pitchFamily="34" charset="0"/>
+                <a:ea typeface="Calibri" pitchFamily="34" charset="-122"/>
+                <a:cs typeface="Calibri" pitchFamily="34" charset="-120"/>
+              </a:rPr>
+              <a:t>  3. Sessions completes (3 JOIN)</a:t>
+            </a:r>
+            <a:endParaRPr lang="en-US" sz="1100" dirty="0"/>
+          </a:p>
+        </p:txBody>
+      </p:sp>
+      <p:sp>
+        <p:nvSpPr>
+          <p:cNvPr id="31" name="Shape 29"/>
+          <p:cNvSpPr/>
+          <p:nvPr/>
+        </p:nvSpPr>
+        <p:spPr>
+          <a:xfrm>
+            <a:off x="457200" y="3994265"/>
+            <a:ext cx="8229600" cy="330015"/>
+          </a:xfrm>
+          <a:prstGeom prst="rect">
+            <a:avLst/>
+          </a:prstGeom>
+          <a:solidFill>
+            <a:srgbClr val="E3F2FD"/>
+          </a:solidFill>
+          <a:ln/>
+        </p:spPr>
+      </p:sp>
+      <p:sp>
+        <p:nvSpPr>
+          <p:cNvPr id="32" name="Shape 30"/>
+          <p:cNvSpPr/>
+          <p:nvPr/>
+        </p:nvSpPr>
+        <p:spPr>
+          <a:xfrm>
+            <a:off x="457200" y="3994265"/>
+            <a:ext cx="45720" cy="330015"/>
+          </a:xfrm>
+          <a:prstGeom prst="rect">
+            <a:avLst/>
+          </a:prstGeom>
+          <a:solidFill>
+            <a:srgbClr val="1565C0"/>
+          </a:solidFill>
+          <a:ln/>
+        </p:spPr>
+      </p:sp>
+      <p:sp>
+        <p:nvSpPr>
+          <p:cNvPr id="33" name="Text 31"/>
+          <p:cNvSpPr/>
+          <p:nvPr/>
+        </p:nvSpPr>
+        <p:spPr>
+          <a:xfrm>
+            <a:off x="640080" y="3994265"/>
+            <a:ext cx="7863840" cy="330015"/>
+          </a:xfrm>
+          <a:prstGeom prst="rect">
+            <a:avLst/>
+          </a:prstGeom>
+          <a:noFill/>
+          <a:ln/>
+        </p:spPr>
+        <p:txBody>
+          <a:bodyPr wrap="square" lIns="0" tIns="0" rIns="0" bIns="0" rtlCol="0" anchor="ctr"/>
+          <a:lstStyle/>
+          <a:p>
+            <a:pPr indent="0" marL="0">
+              <a:buNone/>
+            </a:pPr>
+            <a:r>
+              <a:rPr lang="en-US" sz="1100" dirty="0">
+                <a:solidFill>
+                  <a:srgbClr val="1A1A2E"/>
+                </a:solidFill>
+                <a:latin typeface="Calibri" pitchFamily="34" charset="0"/>
+                <a:ea typeface="Calibri" pitchFamily="34" charset="-122"/>
+                <a:cs typeface="Calibri" pitchFamily="34" charset="-120"/>
+              </a:rPr>
+              <a:t>  4. CA par artiste (JOIN + GROUP BY + SUM)</a:t>
+            </a:r>
+            <a:endParaRPr lang="en-US" sz="1100" dirty="0"/>
+          </a:p>
+        </p:txBody>
+      </p:sp>
+      <p:sp>
+        <p:nvSpPr>
+          <p:cNvPr id="34" name="Shape 32"/>
+          <p:cNvSpPr/>
+          <p:nvPr/>
+        </p:nvSpPr>
+        <p:spPr>
+          <a:xfrm>
+            <a:off x="457200" y="4351713"/>
+            <a:ext cx="8229600" cy="330015"/>
+          </a:xfrm>
+          <a:prstGeom prst="rect">
+            <a:avLst/>
+          </a:prstGeom>
+          <a:solidFill>
+            <a:srgbClr val="FFFFFF"/>
+          </a:solidFill>
+          <a:ln/>
+        </p:spPr>
+      </p:sp>
+      <p:sp>
+        <p:nvSpPr>
+          <p:cNvPr id="35" name="Shape 33"/>
+          <p:cNvSpPr/>
+          <p:nvPr/>
+        </p:nvSpPr>
+        <p:spPr>
+          <a:xfrm>
+            <a:off x="457200" y="4351713"/>
+            <a:ext cx="45720" cy="330015"/>
+          </a:xfrm>
+          <a:prstGeom prst="rect">
+            <a:avLst/>
+          </a:prstGeom>
+          <a:solidFill>
+            <a:srgbClr val="1565C0"/>
+          </a:solidFill>
+          <a:ln/>
+        </p:spPr>
+      </p:sp>
+      <p:sp>
+        <p:nvSpPr>
+          <p:cNvPr id="36" name="Text 34"/>
+          <p:cNvSpPr/>
+          <p:nvPr/>
+        </p:nvSpPr>
+        <p:spPr>
+          <a:xfrm>
+            <a:off x="640080" y="4351713"/>
+            <a:ext cx="7863840" cy="330015"/>
+          </a:xfrm>
+          <a:prstGeom prst="rect">
+            <a:avLst/>
+          </a:prstGeom>
+          <a:noFill/>
+          <a:ln/>
+        </p:spPr>
+        <p:txBody>
+          <a:bodyPr wrap="square" lIns="0" tIns="0" rIns="0" bIns="0" rtlCol="0" anchor="ctr"/>
+          <a:lstStyle/>
+          <a:p>
+            <a:pPr indent="0" marL="0">
+              <a:buNone/>
+            </a:pPr>
+            <a:r>
+              <a:rPr lang="en-US" sz="1100" dirty="0">
+                <a:solidFill>
+                  <a:srgbClr val="1A1A2E"/>
+                </a:solidFill>
+                <a:latin typeface="Calibri" pitchFamily="34" charset="0"/>
+                <a:ea typeface="Calibri" pitchFamily="34" charset="-122"/>
+                <a:cs typeface="Calibri" pitchFamily="34" charset="-120"/>
+              </a:rPr>
+              <a:t>DEFI : requete 5 tables avec agregation + HAVING + ORDER BY</a:t>
+            </a:r>
+            <a:endParaRPr lang="en-US" sz="1100" dirty="0"/>
           </a:p>
         </p:txBody>
       </p:sp>
@@ -5985,8 +6402,8 @@
         </p:nvSpPr>
         <p:spPr>
           <a:xfrm>
-            <a:off x="3840480" y="457200"/>
-            <a:ext cx="1463040" cy="1097280"/>
+            <a:off x="457200" y="1828800"/>
+            <a:ext cx="8229600" cy="548640"/>
           </a:xfrm>
           <a:prstGeom prst="rect">
             <a:avLst/>
@@ -6002,43 +6419,7 @@
               <a:buNone/>
             </a:pPr>
             <a:r>
-              <a:rPr lang="en-US" sz="6000" dirty="0">
-                <a:solidFill>
-                  <a:srgbClr val="000000"/>
-                </a:solidFill>
-              </a:rPr>
-              <a:t>🎮</a:t>
-            </a:r>
-            <a:endParaRPr lang="en-US" sz="6000" dirty="0"/>
-          </a:p>
-        </p:txBody>
-      </p:sp>
-      <p:sp>
-        <p:nvSpPr>
-          <p:cNvPr id="3" name="Text 1"/>
-          <p:cNvSpPr/>
-          <p:nvPr/>
-        </p:nvSpPr>
-        <p:spPr>
-          <a:xfrm>
-            <a:off x="457200" y="1645920"/>
-            <a:ext cx="8229600" cy="548640"/>
-          </a:xfrm>
-          <a:prstGeom prst="rect">
-            <a:avLst/>
-          </a:prstGeom>
-          <a:noFill/>
-          <a:ln/>
-        </p:spPr>
-        <p:txBody>
-          <a:bodyPr wrap="square" lIns="0" tIns="0" rIns="0" bIns="0" rtlCol="0" anchor="ctr"/>
-          <a:lstStyle/>
-          <a:p>
-            <a:pPr algn="ctr" indent="0" marL="0">
-              <a:buNone/>
-            </a:pPr>
-            <a:r>
-              <a:rPr lang="en-US" sz="2600" b="1" dirty="0">
+              <a:rPr lang="en-US" sz="2200" b="1" dirty="0">
                 <a:solidFill>
                   <a:srgbClr val="FFFFFF"/>
                 </a:solidFill>
@@ -6048,20 +6429,20 @@
               </a:rPr>
               <a:t>Mini-jeu : Le Puzzle de Tables</a:t>
             </a:r>
-            <a:endParaRPr lang="en-US" sz="2600" dirty="0"/>
-          </a:p>
-        </p:txBody>
-      </p:sp>
-      <p:sp>
-        <p:nvSpPr>
-          <p:cNvPr id="4" name="Text 2"/>
-          <p:cNvSpPr/>
-          <p:nvPr/>
-        </p:nvSpPr>
-        <p:spPr>
-          <a:xfrm>
-            <a:off x="1371600" y="2286000"/>
-            <a:ext cx="6400800" cy="731520"/>
+            <a:endParaRPr lang="en-US" sz="2200" dirty="0"/>
+          </a:p>
+        </p:txBody>
+      </p:sp>
+      <p:sp>
+        <p:nvSpPr>
+          <p:cNvPr id="3" name="Text 1"/>
+          <p:cNvSpPr/>
+          <p:nvPr/>
+        </p:nvSpPr>
+        <p:spPr>
+          <a:xfrm>
+            <a:off x="1371600" y="2468880"/>
+            <a:ext cx="6400800" cy="457200"/>
           </a:xfrm>
           <a:prstGeom prst="rect">
             <a:avLst/>
@@ -6077,7 +6458,7 @@
               <a:buNone/>
             </a:pPr>
             <a:r>
-              <a:rPr lang="en-US" sz="1400" dirty="0">
+              <a:rPr lang="en-US" sz="1300" dirty="0">
                 <a:solidFill>
                   <a:srgbClr val="CCCCCC"/>
                 </a:solidFill>
@@ -6085,68 +6466,9 @@
                 <a:ea typeface="Calibri" pitchFamily="34" charset="-122"/>
                 <a:cs typeface="Calibri" pitchFamily="34" charset="-120"/>
               </a:rPr>
-              <a:t>Connectez les bonnes colonnes pour assembler le résultat !</a:t>
-            </a:r>
-            <a:endParaRPr lang="en-US" sz="1400" dirty="0"/>
-          </a:p>
-        </p:txBody>
-      </p:sp>
-      <p:sp>
-        <p:nvSpPr>
-          <p:cNvPr id="5" name="Shape 3"/>
-          <p:cNvSpPr/>
-          <p:nvPr/>
-        </p:nvSpPr>
-        <p:spPr>
-          <a:xfrm>
-            <a:off x="2286000" y="3291840"/>
-            <a:ext cx="4572000" cy="548640"/>
-          </a:xfrm>
-          <a:prstGeom prst="rect">
-            <a:avLst/>
-          </a:prstGeom>
-          <a:solidFill>
-            <a:srgbClr val="FF6F00"/>
-          </a:solidFill>
-          <a:ln/>
-        </p:spPr>
-      </p:sp>
-      <p:sp>
-        <p:nvSpPr>
-          <p:cNvPr id="6" name="Text 4"/>
-          <p:cNvSpPr/>
-          <p:nvPr/>
-        </p:nvSpPr>
-        <p:spPr>
-          <a:xfrm>
-            <a:off x="2286000" y="3291840"/>
-            <a:ext cx="4572000" cy="548640"/>
-          </a:xfrm>
-          <a:prstGeom prst="rect">
-            <a:avLst/>
-          </a:prstGeom>
-          <a:noFill/>
-          <a:ln/>
-        </p:spPr>
-        <p:txBody>
-          <a:bodyPr wrap="square" lIns="0" tIns="0" rIns="0" bIns="0" rtlCol="0" anchor="ctr"/>
-          <a:lstStyle/>
-          <a:p>
-            <a:pPr algn="ctr" indent="0" marL="0">
-              <a:buNone/>
-            </a:pPr>
-            <a:r>
-              <a:rPr lang="en-US" sz="1800" b="1" dirty="0">
-                <a:solidFill>
-                  <a:srgbClr val="FFFFFF"/>
-                </a:solidFill>
-                <a:latin typeface="Trebuchet MS" pitchFamily="34" charset="0"/>
-                <a:ea typeface="Trebuchet MS" pitchFamily="34" charset="-122"/>
-                <a:cs typeface="Trebuchet MS" pitchFamily="34" charset="-120"/>
-              </a:rPr>
-              <a:t>▶  Lancer le jeu</a:t>
-            </a:r>
-            <a:endParaRPr lang="en-US" sz="1800" dirty="0"/>
+              <a:t>Connectez les bonnes colonnes !</a:t>
+            </a:r>
+            <a:endParaRPr lang="en-US" sz="1300" dirty="0"/>
           </a:p>
         </p:txBody>
       </p:sp>
@@ -6191,7 +6513,7 @@
         <p:spPr>
           <a:xfrm>
             <a:off x="457200" y="137160"/>
-            <a:ext cx="5486400" cy="411480"/>
+            <a:ext cx="5486400" cy="365760"/>
           </a:xfrm>
           <a:prstGeom prst="rect">
             <a:avLst/>
@@ -6207,7 +6529,7 @@
               <a:buNone/>
             </a:pPr>
             <a:r>
-              <a:rPr lang="en-US" sz="1800" b="1" dirty="0">
+              <a:rPr lang="en-US" sz="1600" b="1" dirty="0">
                 <a:solidFill>
                   <a:srgbClr val="0D47A1"/>
                 </a:solidFill>
@@ -6215,9 +6537,9 @@
                 <a:ea typeface="Trebuchet MS" pitchFamily="34" charset="-122"/>
                 <a:cs typeface="Trebuchet MS" pitchFamily="34" charset="-120"/>
               </a:rPr>
-              <a:t>📋 Mémo Module 14</a:t>
-            </a:r>
-            <a:endParaRPr lang="en-US" sz="1800" dirty="0"/>
+              <a:t>Memo Module 14</a:t>
+            </a:r>
+            <a:endParaRPr lang="en-US" sz="1600" dirty="0"/>
           </a:p>
         </p:txBody>
       </p:sp>
@@ -6229,14 +6551,14 @@
         </p:nvSpPr>
         <p:spPr>
           <a:xfrm>
-            <a:off x="457200" y="548640"/>
-            <a:ext cx="8229600" cy="274320"/>
-          </a:xfrm>
-          <a:prstGeom prst="rect">
-            <a:avLst/>
-          </a:prstGeom>
-          <a:solidFill>
-            <a:srgbClr val="FFF3E0"/>
+            <a:off x="457200" y="594360"/>
+            <a:ext cx="2286000" cy="411480"/>
+          </a:xfrm>
+          <a:prstGeom prst="rect">
+            <a:avLst/>
+          </a:prstGeom>
+          <a:solidFill>
+            <a:srgbClr val="E3F2FD"/>
           </a:solidFill>
           <a:ln/>
         </p:spPr>
@@ -6249,8 +6571,8 @@
         </p:nvSpPr>
         <p:spPr>
           <a:xfrm>
-            <a:off x="640080" y="548640"/>
-            <a:ext cx="7772400" cy="274320"/>
+            <a:off x="548640" y="594360"/>
+            <a:ext cx="2103120" cy="411480"/>
           </a:xfrm>
           <a:prstGeom prst="rect">
             <a:avLst/>
@@ -6268,13 +6590,72 @@
             <a:r>
               <a:rPr lang="en-US" sz="900" b="1" dirty="0">
                 <a:solidFill>
-                  <a:srgbClr val="E65100"/>
+                  <a:srgbClr val="0D47A1"/>
+                </a:solidFill>
+                <a:latin typeface="Trebuchet MS" pitchFamily="34" charset="0"/>
+                <a:ea typeface="Trebuchet MS" pitchFamily="34" charset="-122"/>
+                <a:cs typeface="Trebuchet MS" pitchFamily="34" charset="-120"/>
+              </a:rPr>
+              <a:t>INNER JOIN</a:t>
+            </a:r>
+            <a:endParaRPr lang="en-US" sz="900" dirty="0"/>
+          </a:p>
+        </p:txBody>
+      </p:sp>
+      <p:sp>
+        <p:nvSpPr>
+          <p:cNvPr id="5" name="Shape 3"/>
+          <p:cNvSpPr/>
+          <p:nvPr/>
+        </p:nvSpPr>
+        <p:spPr>
+          <a:xfrm>
+            <a:off x="2743200" y="594360"/>
+            <a:ext cx="5943600" cy="411480"/>
+          </a:xfrm>
+          <a:prstGeom prst="rect">
+            <a:avLst/>
+          </a:prstGeom>
+          <a:solidFill>
+            <a:srgbClr val="E3F2FD"/>
+          </a:solidFill>
+          <a:ln/>
+        </p:spPr>
+      </p:sp>
+      <p:sp>
+        <p:nvSpPr>
+          <p:cNvPr id="6" name="Text 4"/>
+          <p:cNvSpPr/>
+          <p:nvPr/>
+        </p:nvSpPr>
+        <p:spPr>
+          <a:xfrm>
+            <a:off x="2834640" y="594360"/>
+            <a:ext cx="5760720" cy="411480"/>
+          </a:xfrm>
+          <a:prstGeom prst="rect">
+            <a:avLst/>
+          </a:prstGeom>
+          <a:noFill/>
+          <a:ln/>
+        </p:spPr>
+        <p:txBody>
+          <a:bodyPr wrap="square" lIns="0" tIns="0" rIns="0" bIns="0" rtlCol="0" anchor="ctr"/>
+          <a:lstStyle/>
+          <a:p>
+            <a:pPr indent="0" marL="0">
+              <a:buNone/>
+            </a:pPr>
+            <a:r>
+              <a:rPr lang="en-US" sz="900" dirty="0">
+                <a:solidFill>
+                  <a:srgbClr val="333333"/>
                 </a:solidFill>
                 <a:latin typeface="Calibri" pitchFamily="34" charset="0"/>
                 <a:ea typeface="Calibri" pitchFamily="34" charset="-122"/>
                 <a:cs typeface="Calibri" pitchFamily="34" charset="-120"/>
               </a:rPr>
-              <a:t>🔒 Déblocable après complétion</a:t>
+              <a:t>Intersection : correspondance des 2 cotes</a:t>
             </a:r>
             <a:endParaRPr lang="en-US" sz="900" dirty="0"/>
           </a:p>
@@ -6282,34 +6663,34 @@
       </p:sp>
       <p:sp>
         <p:nvSpPr>
-          <p:cNvPr id="5" name="Shape 3"/>
-          <p:cNvSpPr/>
-          <p:nvPr/>
-        </p:nvSpPr>
-        <p:spPr>
-          <a:xfrm>
-            <a:off x="457200" y="960120"/>
-            <a:ext cx="2286000" cy="475488"/>
-          </a:xfrm>
-          <a:prstGeom prst="rect">
-            <a:avLst/>
-          </a:prstGeom>
-          <a:solidFill>
-            <a:srgbClr val="E3F2FD"/>
-          </a:solidFill>
-          <a:ln/>
-        </p:spPr>
-      </p:sp>
-      <p:sp>
-        <p:nvSpPr>
-          <p:cNvPr id="6" name="Text 4"/>
-          <p:cNvSpPr/>
-          <p:nvPr/>
-        </p:nvSpPr>
-        <p:spPr>
-          <a:xfrm>
-            <a:off x="548640" y="960120"/>
-            <a:ext cx="2103120" cy="475488"/>
+          <p:cNvPr id="7" name="Shape 5"/>
+          <p:cNvSpPr/>
+          <p:nvPr/>
+        </p:nvSpPr>
+        <p:spPr>
+          <a:xfrm>
+            <a:off x="457200" y="1033272"/>
+            <a:ext cx="2286000" cy="411480"/>
+          </a:xfrm>
+          <a:prstGeom prst="rect">
+            <a:avLst/>
+          </a:prstGeom>
+          <a:solidFill>
+            <a:srgbClr val="F0F0F0"/>
+          </a:solidFill>
+          <a:ln/>
+        </p:spPr>
+      </p:sp>
+      <p:sp>
+        <p:nvSpPr>
+          <p:cNvPr id="8" name="Text 6"/>
+          <p:cNvSpPr/>
+          <p:nvPr/>
+        </p:nvSpPr>
+        <p:spPr>
+          <a:xfrm>
+            <a:off x="548640" y="1033272"/>
+            <a:ext cx="2103120" cy="411480"/>
           </a:xfrm>
           <a:prstGeom prst="rect">
             <a:avLst/>
@@ -6333,7 +6714,7 @@
                 <a:ea typeface="Trebuchet MS" pitchFamily="34" charset="-122"/>
                 <a:cs typeface="Trebuchet MS" pitchFamily="34" charset="-120"/>
               </a:rPr>
-              <a:t>INNER JOIN</a:t>
+              <a:t>LEFT JOIN</a:t>
             </a:r>
             <a:endParaRPr lang="en-US" sz="900" dirty="0"/>
           </a:p>
@@ -6341,34 +6722,34 @@
       </p:sp>
       <p:sp>
         <p:nvSpPr>
-          <p:cNvPr id="7" name="Shape 5"/>
-          <p:cNvSpPr/>
-          <p:nvPr/>
-        </p:nvSpPr>
-        <p:spPr>
-          <a:xfrm>
-            <a:off x="2743200" y="960120"/>
-            <a:ext cx="5943600" cy="475488"/>
-          </a:xfrm>
-          <a:prstGeom prst="rect">
-            <a:avLst/>
-          </a:prstGeom>
-          <a:solidFill>
-            <a:srgbClr val="E3F2FD"/>
-          </a:solidFill>
-          <a:ln/>
-        </p:spPr>
-      </p:sp>
-      <p:sp>
-        <p:nvSpPr>
-          <p:cNvPr id="8" name="Text 6"/>
-          <p:cNvSpPr/>
-          <p:nvPr/>
-        </p:nvSpPr>
-        <p:spPr>
-          <a:xfrm>
-            <a:off x="2834640" y="960120"/>
-            <a:ext cx="5760720" cy="475488"/>
+          <p:cNvPr id="9" name="Shape 7"/>
+          <p:cNvSpPr/>
+          <p:nvPr/>
+        </p:nvSpPr>
+        <p:spPr>
+          <a:xfrm>
+            <a:off x="2743200" y="1033272"/>
+            <a:ext cx="5943600" cy="411480"/>
+          </a:xfrm>
+          <a:prstGeom prst="rect">
+            <a:avLst/>
+          </a:prstGeom>
+          <a:solidFill>
+            <a:srgbClr val="F0F0F0"/>
+          </a:solidFill>
+          <a:ln/>
+        </p:spPr>
+      </p:sp>
+      <p:sp>
+        <p:nvSpPr>
+          <p:cNvPr id="10" name="Text 8"/>
+          <p:cNvSpPr/>
+          <p:nvPr/>
+        </p:nvSpPr>
+        <p:spPr>
+          <a:xfrm>
+            <a:off x="2834640" y="1033272"/>
+            <a:ext cx="5760720" cy="411480"/>
           </a:xfrm>
           <a:prstGeom prst="rect">
             <a:avLst/>
@@ -6392,7 +6773,7 @@
                 <a:ea typeface="Calibri" pitchFamily="34" charset="-122"/>
                 <a:cs typeface="Calibri" pitchFamily="34" charset="-120"/>
               </a:rPr>
-              <a:t>Intersection : lignes avec correspondance des 2 côtés</a:t>
+              <a:t>Tout a gauche + NULL si absent a droite</a:t>
             </a:r>
             <a:endParaRPr lang="en-US" sz="900" dirty="0"/>
           </a:p>
@@ -6400,34 +6781,34 @@
       </p:sp>
       <p:sp>
         <p:nvSpPr>
-          <p:cNvPr id="9" name="Shape 7"/>
-          <p:cNvSpPr/>
-          <p:nvPr/>
-        </p:nvSpPr>
-        <p:spPr>
-          <a:xfrm>
-            <a:off x="457200" y="1463040"/>
-            <a:ext cx="2286000" cy="475488"/>
-          </a:xfrm>
-          <a:prstGeom prst="rect">
-            <a:avLst/>
-          </a:prstGeom>
-          <a:solidFill>
-            <a:srgbClr val="F0F0F0"/>
-          </a:solidFill>
-          <a:ln/>
-        </p:spPr>
-      </p:sp>
-      <p:sp>
-        <p:nvSpPr>
-          <p:cNvPr id="10" name="Text 8"/>
-          <p:cNvSpPr/>
-          <p:nvPr/>
-        </p:nvSpPr>
-        <p:spPr>
-          <a:xfrm>
-            <a:off x="548640" y="1463040"/>
-            <a:ext cx="2103120" cy="475488"/>
+          <p:cNvPr id="11" name="Shape 9"/>
+          <p:cNvSpPr/>
+          <p:nvPr/>
+        </p:nvSpPr>
+        <p:spPr>
+          <a:xfrm>
+            <a:off x="457200" y="1472184"/>
+            <a:ext cx="2286000" cy="411480"/>
+          </a:xfrm>
+          <a:prstGeom prst="rect">
+            <a:avLst/>
+          </a:prstGeom>
+          <a:solidFill>
+            <a:srgbClr val="E3F2FD"/>
+          </a:solidFill>
+          <a:ln/>
+        </p:spPr>
+      </p:sp>
+      <p:sp>
+        <p:nvSpPr>
+          <p:cNvPr id="12" name="Text 10"/>
+          <p:cNvSpPr/>
+          <p:nvPr/>
+        </p:nvSpPr>
+        <p:spPr>
+          <a:xfrm>
+            <a:off x="548640" y="1472184"/>
+            <a:ext cx="2103120" cy="411480"/>
           </a:xfrm>
           <a:prstGeom prst="rect">
             <a:avLst/>
@@ -6451,7 +6832,7 @@
                 <a:ea typeface="Trebuchet MS" pitchFamily="34" charset="-122"/>
                 <a:cs typeface="Trebuchet MS" pitchFamily="34" charset="-120"/>
               </a:rPr>
-              <a:t>LEFT JOIN</a:t>
+              <a:t>LEFT+IS NULL</a:t>
             </a:r>
             <a:endParaRPr lang="en-US" sz="900" dirty="0"/>
           </a:p>
@@ -6459,34 +6840,34 @@
       </p:sp>
       <p:sp>
         <p:nvSpPr>
-          <p:cNvPr id="11" name="Shape 9"/>
-          <p:cNvSpPr/>
-          <p:nvPr/>
-        </p:nvSpPr>
-        <p:spPr>
-          <a:xfrm>
-            <a:off x="2743200" y="1463040"/>
-            <a:ext cx="5943600" cy="475488"/>
-          </a:xfrm>
-          <a:prstGeom prst="rect">
-            <a:avLst/>
-          </a:prstGeom>
-          <a:solidFill>
-            <a:srgbClr val="F0F0F0"/>
-          </a:solidFill>
-          <a:ln/>
-        </p:spPr>
-      </p:sp>
-      <p:sp>
-        <p:nvSpPr>
-          <p:cNvPr id="12" name="Text 10"/>
-          <p:cNvSpPr/>
-          <p:nvPr/>
-        </p:nvSpPr>
-        <p:spPr>
-          <a:xfrm>
-            <a:off x="2834640" y="1463040"/>
-            <a:ext cx="5760720" cy="475488"/>
+          <p:cNvPr id="13" name="Shape 11"/>
+          <p:cNvSpPr/>
+          <p:nvPr/>
+        </p:nvSpPr>
+        <p:spPr>
+          <a:xfrm>
+            <a:off x="2743200" y="1472184"/>
+            <a:ext cx="5943600" cy="411480"/>
+          </a:xfrm>
+          <a:prstGeom prst="rect">
+            <a:avLst/>
+          </a:prstGeom>
+          <a:solidFill>
+            <a:srgbClr val="E3F2FD"/>
+          </a:solidFill>
+          <a:ln/>
+        </p:spPr>
+      </p:sp>
+      <p:sp>
+        <p:nvSpPr>
+          <p:cNvPr id="14" name="Text 12"/>
+          <p:cNvSpPr/>
+          <p:nvPr/>
+        </p:nvSpPr>
+        <p:spPr>
+          <a:xfrm>
+            <a:off x="2834640" y="1472184"/>
+            <a:ext cx="5760720" cy="411480"/>
           </a:xfrm>
           <a:prstGeom prst="rect">
             <a:avLst/>
@@ -6510,7 +6891,7 @@
                 <a:ea typeface="Calibri" pitchFamily="34" charset="-122"/>
                 <a:cs typeface="Calibri" pitchFamily="34" charset="-120"/>
               </a:rPr>
-              <a:t>Tout à gauche + correspondances à droite (NULL si absent)</a:t>
+              <a:t>Trouver les orphelins</a:t>
             </a:r>
             <a:endParaRPr lang="en-US" sz="900" dirty="0"/>
           </a:p>
@@ -6518,34 +6899,34 @@
       </p:sp>
       <p:sp>
         <p:nvSpPr>
-          <p:cNvPr id="13" name="Shape 11"/>
-          <p:cNvSpPr/>
-          <p:nvPr/>
-        </p:nvSpPr>
-        <p:spPr>
-          <a:xfrm>
-            <a:off x="457200" y="1965960"/>
-            <a:ext cx="2286000" cy="475488"/>
-          </a:xfrm>
-          <a:prstGeom prst="rect">
-            <a:avLst/>
-          </a:prstGeom>
-          <a:solidFill>
-            <a:srgbClr val="E3F2FD"/>
-          </a:solidFill>
-          <a:ln/>
-        </p:spPr>
-      </p:sp>
-      <p:sp>
-        <p:nvSpPr>
-          <p:cNvPr id="14" name="Text 12"/>
-          <p:cNvSpPr/>
-          <p:nvPr/>
-        </p:nvSpPr>
-        <p:spPr>
-          <a:xfrm>
-            <a:off x="548640" y="1965960"/>
-            <a:ext cx="2103120" cy="475488"/>
+          <p:cNvPr id="15" name="Shape 13"/>
+          <p:cNvSpPr/>
+          <p:nvPr/>
+        </p:nvSpPr>
+        <p:spPr>
+          <a:xfrm>
+            <a:off x="457200" y="1911096"/>
+            <a:ext cx="2286000" cy="411480"/>
+          </a:xfrm>
+          <a:prstGeom prst="rect">
+            <a:avLst/>
+          </a:prstGeom>
+          <a:solidFill>
+            <a:srgbClr val="F0F0F0"/>
+          </a:solidFill>
+          <a:ln/>
+        </p:spPr>
+      </p:sp>
+      <p:sp>
+        <p:nvSpPr>
+          <p:cNvPr id="16" name="Text 14"/>
+          <p:cNvSpPr/>
+          <p:nvPr/>
+        </p:nvSpPr>
+        <p:spPr>
+          <a:xfrm>
+            <a:off x="548640" y="1911096"/>
+            <a:ext cx="2103120" cy="411480"/>
           </a:xfrm>
           <a:prstGeom prst="rect">
             <a:avLst/>
@@ -6569,7 +6950,7 @@
                 <a:ea typeface="Trebuchet MS" pitchFamily="34" charset="-122"/>
                 <a:cs typeface="Trebuchet MS" pitchFamily="34" charset="-120"/>
               </a:rPr>
-              <a:t>LEFT + IS NULL</a:t>
+              <a:t>3+ tables</a:t>
             </a:r>
             <a:endParaRPr lang="en-US" sz="900" dirty="0"/>
           </a:p>
@@ -6577,34 +6958,34 @@
       </p:sp>
       <p:sp>
         <p:nvSpPr>
-          <p:cNvPr id="15" name="Shape 13"/>
-          <p:cNvSpPr/>
-          <p:nvPr/>
-        </p:nvSpPr>
-        <p:spPr>
-          <a:xfrm>
-            <a:off x="2743200" y="1965960"/>
-            <a:ext cx="5943600" cy="475488"/>
-          </a:xfrm>
-          <a:prstGeom prst="rect">
-            <a:avLst/>
-          </a:prstGeom>
-          <a:solidFill>
-            <a:srgbClr val="E3F2FD"/>
-          </a:solidFill>
-          <a:ln/>
-        </p:spPr>
-      </p:sp>
-      <p:sp>
-        <p:nvSpPr>
-          <p:cNvPr id="16" name="Text 14"/>
-          <p:cNvSpPr/>
-          <p:nvPr/>
-        </p:nvSpPr>
-        <p:spPr>
-          <a:xfrm>
-            <a:off x="2834640" y="1965960"/>
-            <a:ext cx="5760720" cy="475488"/>
+          <p:cNvPr id="17" name="Shape 15"/>
+          <p:cNvSpPr/>
+          <p:nvPr/>
+        </p:nvSpPr>
+        <p:spPr>
+          <a:xfrm>
+            <a:off x="2743200" y="1911096"/>
+            <a:ext cx="5943600" cy="411480"/>
+          </a:xfrm>
+          <a:prstGeom prst="rect">
+            <a:avLst/>
+          </a:prstGeom>
+          <a:solidFill>
+            <a:srgbClr val="F0F0F0"/>
+          </a:solidFill>
+          <a:ln/>
+        </p:spPr>
+      </p:sp>
+      <p:sp>
+        <p:nvSpPr>
+          <p:cNvPr id="18" name="Text 16"/>
+          <p:cNvSpPr/>
+          <p:nvPr/>
+        </p:nvSpPr>
+        <p:spPr>
+          <a:xfrm>
+            <a:off x="2834640" y="1911096"/>
+            <a:ext cx="5760720" cy="411480"/>
           </a:xfrm>
           <a:prstGeom prst="rect">
             <a:avLst/>
@@ -6628,7 +7009,7 @@
                 <a:ea typeface="Calibri" pitchFamily="34" charset="-122"/>
                 <a:cs typeface="Calibri" pitchFamily="34" charset="-120"/>
               </a:rPr>
-              <a:t>Trouver les 'orphelins' (artistes sans album)</a:t>
+              <a:t>Enchainer : FROM a JOIN b ON ... JOIN c ON ...</a:t>
             </a:r>
             <a:endParaRPr lang="en-US" sz="900" dirty="0"/>
           </a:p>
@@ -6636,34 +7017,34 @@
       </p:sp>
       <p:sp>
         <p:nvSpPr>
-          <p:cNvPr id="17" name="Shape 15"/>
-          <p:cNvSpPr/>
-          <p:nvPr/>
-        </p:nvSpPr>
-        <p:spPr>
-          <a:xfrm>
-            <a:off x="457200" y="2468880"/>
-            <a:ext cx="2286000" cy="475488"/>
-          </a:xfrm>
-          <a:prstGeom prst="rect">
-            <a:avLst/>
-          </a:prstGeom>
-          <a:solidFill>
-            <a:srgbClr val="F0F0F0"/>
-          </a:solidFill>
-          <a:ln/>
-        </p:spPr>
-      </p:sp>
-      <p:sp>
-        <p:nvSpPr>
-          <p:cNvPr id="18" name="Text 16"/>
-          <p:cNvSpPr/>
-          <p:nvPr/>
-        </p:nvSpPr>
-        <p:spPr>
-          <a:xfrm>
-            <a:off x="548640" y="2468880"/>
-            <a:ext cx="2103120" cy="475488"/>
+          <p:cNvPr id="19" name="Shape 17"/>
+          <p:cNvSpPr/>
+          <p:nvPr/>
+        </p:nvSpPr>
+        <p:spPr>
+          <a:xfrm>
+            <a:off x="457200" y="2350008"/>
+            <a:ext cx="2286000" cy="411480"/>
+          </a:xfrm>
+          <a:prstGeom prst="rect">
+            <a:avLst/>
+          </a:prstGeom>
+          <a:solidFill>
+            <a:srgbClr val="E3F2FD"/>
+          </a:solidFill>
+          <a:ln/>
+        </p:spPr>
+      </p:sp>
+      <p:sp>
+        <p:nvSpPr>
+          <p:cNvPr id="20" name="Text 18"/>
+          <p:cNvSpPr/>
+          <p:nvPr/>
+        </p:nvSpPr>
+        <p:spPr>
+          <a:xfrm>
+            <a:off x="548640" y="2350008"/>
+            <a:ext cx="2103120" cy="411480"/>
           </a:xfrm>
           <a:prstGeom prst="rect">
             <a:avLst/>
@@ -6687,7 +7068,7 @@
                 <a:ea typeface="Trebuchet MS" pitchFamily="34" charset="-122"/>
                 <a:cs typeface="Trebuchet MS" pitchFamily="34" charset="-120"/>
               </a:rPr>
-              <a:t>3+ tables</a:t>
+              <a:t>Alias</a:t>
             </a:r>
             <a:endParaRPr lang="en-US" sz="900" dirty="0"/>
           </a:p>
@@ -6695,34 +7076,34 @@
       </p:sp>
       <p:sp>
         <p:nvSpPr>
-          <p:cNvPr id="19" name="Shape 17"/>
-          <p:cNvSpPr/>
-          <p:nvPr/>
-        </p:nvSpPr>
-        <p:spPr>
-          <a:xfrm>
-            <a:off x="2743200" y="2468880"/>
-            <a:ext cx="5943600" cy="475488"/>
-          </a:xfrm>
-          <a:prstGeom prst="rect">
-            <a:avLst/>
-          </a:prstGeom>
-          <a:solidFill>
-            <a:srgbClr val="F0F0F0"/>
-          </a:solidFill>
-          <a:ln/>
-        </p:spPr>
-      </p:sp>
-      <p:sp>
-        <p:nvSpPr>
-          <p:cNvPr id="20" name="Text 18"/>
-          <p:cNvSpPr/>
-          <p:nvPr/>
-        </p:nvSpPr>
-        <p:spPr>
-          <a:xfrm>
-            <a:off x="2834640" y="2468880"/>
-            <a:ext cx="5760720" cy="475488"/>
+          <p:cNvPr id="21" name="Shape 19"/>
+          <p:cNvSpPr/>
+          <p:nvPr/>
+        </p:nvSpPr>
+        <p:spPr>
+          <a:xfrm>
+            <a:off x="2743200" y="2350008"/>
+            <a:ext cx="5943600" cy="411480"/>
+          </a:xfrm>
+          <a:prstGeom prst="rect">
+            <a:avLst/>
+          </a:prstGeom>
+          <a:solidFill>
+            <a:srgbClr val="E3F2FD"/>
+          </a:solidFill>
+          <a:ln/>
+        </p:spPr>
+      </p:sp>
+      <p:sp>
+        <p:nvSpPr>
+          <p:cNvPr id="22" name="Text 20"/>
+          <p:cNvSpPr/>
+          <p:nvPr/>
+        </p:nvSpPr>
+        <p:spPr>
+          <a:xfrm>
+            <a:off x="2834640" y="2350008"/>
+            <a:ext cx="5760720" cy="411480"/>
           </a:xfrm>
           <a:prstGeom prst="rect">
             <a:avLst/>
@@ -6746,7 +7127,7 @@
                 <a:ea typeface="Calibri" pitchFamily="34" charset="-122"/>
                 <a:cs typeface="Calibri" pitchFamily="34" charset="-120"/>
               </a:rPr>
-              <a:t>Enchaîner les JOIN : FROM a JOIN b ON ... JOIN c ON ...</a:t>
+              <a:t>a=artiste, al=album — obligatoire en auto-jointure</a:t>
             </a:r>
             <a:endParaRPr lang="en-US" sz="900" dirty="0"/>
           </a:p>
@@ -6754,34 +7135,34 @@
       </p:sp>
       <p:sp>
         <p:nvSpPr>
-          <p:cNvPr id="21" name="Shape 19"/>
-          <p:cNvSpPr/>
-          <p:nvPr/>
-        </p:nvSpPr>
-        <p:spPr>
-          <a:xfrm>
-            <a:off x="457200" y="2971800"/>
-            <a:ext cx="2286000" cy="475488"/>
-          </a:xfrm>
-          <a:prstGeom prst="rect">
-            <a:avLst/>
-          </a:prstGeom>
-          <a:solidFill>
-            <a:srgbClr val="E3F2FD"/>
-          </a:solidFill>
-          <a:ln/>
-        </p:spPr>
-      </p:sp>
-      <p:sp>
-        <p:nvSpPr>
-          <p:cNvPr id="22" name="Text 20"/>
-          <p:cNvSpPr/>
-          <p:nvPr/>
-        </p:nvSpPr>
-        <p:spPr>
-          <a:xfrm>
-            <a:off x="548640" y="2971800"/>
-            <a:ext cx="2103120" cy="475488"/>
+          <p:cNvPr id="23" name="Shape 21"/>
+          <p:cNvSpPr/>
+          <p:nvPr/>
+        </p:nvSpPr>
+        <p:spPr>
+          <a:xfrm>
+            <a:off x="457200" y="2788920"/>
+            <a:ext cx="2286000" cy="411480"/>
+          </a:xfrm>
+          <a:prstGeom prst="rect">
+            <a:avLst/>
+          </a:prstGeom>
+          <a:solidFill>
+            <a:srgbClr val="F0F0F0"/>
+          </a:solidFill>
+          <a:ln/>
+        </p:spPr>
+      </p:sp>
+      <p:sp>
+        <p:nvSpPr>
+          <p:cNvPr id="24" name="Text 22"/>
+          <p:cNvSpPr/>
+          <p:nvPr/>
+        </p:nvSpPr>
+        <p:spPr>
+          <a:xfrm>
+            <a:off x="548640" y="2788920"/>
+            <a:ext cx="2103120" cy="411480"/>
           </a:xfrm>
           <a:prstGeom prst="rect">
             <a:avLst/>
@@ -6805,7 +7186,7 @@
                 <a:ea typeface="Trebuchet MS" pitchFamily="34" charset="-122"/>
                 <a:cs typeface="Trebuchet MS" pitchFamily="34" charset="-120"/>
               </a:rPr>
-              <a:t>Alias tables</a:t>
+              <a:t>CROSS JOIN</a:t>
             </a:r>
             <a:endParaRPr lang="en-US" sz="900" dirty="0"/>
           </a:p>
@@ -6813,34 +7194,34 @@
       </p:sp>
       <p:sp>
         <p:nvSpPr>
-          <p:cNvPr id="23" name="Shape 21"/>
-          <p:cNvSpPr/>
-          <p:nvPr/>
-        </p:nvSpPr>
-        <p:spPr>
-          <a:xfrm>
-            <a:off x="2743200" y="2971800"/>
-            <a:ext cx="5943600" cy="475488"/>
-          </a:xfrm>
-          <a:prstGeom prst="rect">
-            <a:avLst/>
-          </a:prstGeom>
-          <a:solidFill>
-            <a:srgbClr val="E3F2FD"/>
-          </a:solidFill>
-          <a:ln/>
-        </p:spPr>
-      </p:sp>
-      <p:sp>
-        <p:nvSpPr>
-          <p:cNvPr id="24" name="Text 22"/>
-          <p:cNvSpPr/>
-          <p:nvPr/>
-        </p:nvSpPr>
-        <p:spPr>
-          <a:xfrm>
-            <a:off x="2834640" y="2971800"/>
-            <a:ext cx="5760720" cy="475488"/>
+          <p:cNvPr id="25" name="Shape 23"/>
+          <p:cNvSpPr/>
+          <p:nvPr/>
+        </p:nvSpPr>
+        <p:spPr>
+          <a:xfrm>
+            <a:off x="2743200" y="2788920"/>
+            <a:ext cx="5943600" cy="411480"/>
+          </a:xfrm>
+          <a:prstGeom prst="rect">
+            <a:avLst/>
+          </a:prstGeom>
+          <a:solidFill>
+            <a:srgbClr val="F0F0F0"/>
+          </a:solidFill>
+          <a:ln/>
+        </p:spPr>
+      </p:sp>
+      <p:sp>
+        <p:nvSpPr>
+          <p:cNvPr id="26" name="Text 24"/>
+          <p:cNvSpPr/>
+          <p:nvPr/>
+        </p:nvSpPr>
+        <p:spPr>
+          <a:xfrm>
+            <a:off x="2834640" y="2788920"/>
+            <a:ext cx="5760720" cy="411480"/>
           </a:xfrm>
           <a:prstGeom prst="rect">
             <a:avLst/>
@@ -6864,7 +7245,7 @@
                 <a:ea typeface="Calibri" pitchFamily="34" charset="-122"/>
                 <a:cs typeface="Calibri" pitchFamily="34" charset="-120"/>
               </a:rPr>
-              <a:t>a pour artiste, al pour album — obligatoire en auto-jointure</a:t>
+              <a:t>Produit cartesien : toutes les combinaisons</a:t>
             </a:r>
             <a:endParaRPr lang="en-US" sz="900" dirty="0"/>
           </a:p>
@@ -6872,34 +7253,34 @@
       </p:sp>
       <p:sp>
         <p:nvSpPr>
-          <p:cNvPr id="25" name="Shape 23"/>
-          <p:cNvSpPr/>
-          <p:nvPr/>
-        </p:nvSpPr>
-        <p:spPr>
-          <a:xfrm>
-            <a:off x="457200" y="3474720"/>
-            <a:ext cx="2286000" cy="475488"/>
-          </a:xfrm>
-          <a:prstGeom prst="rect">
-            <a:avLst/>
-          </a:prstGeom>
-          <a:solidFill>
-            <a:srgbClr val="F0F0F0"/>
-          </a:solidFill>
-          <a:ln/>
-        </p:spPr>
-      </p:sp>
-      <p:sp>
-        <p:nvSpPr>
-          <p:cNvPr id="26" name="Text 24"/>
-          <p:cNvSpPr/>
-          <p:nvPr/>
-        </p:nvSpPr>
-        <p:spPr>
-          <a:xfrm>
-            <a:off x="548640" y="3474720"/>
-            <a:ext cx="2103120" cy="475488"/>
+          <p:cNvPr id="27" name="Shape 25"/>
+          <p:cNvSpPr/>
+          <p:nvPr/>
+        </p:nvSpPr>
+        <p:spPr>
+          <a:xfrm>
+            <a:off x="457200" y="3227832"/>
+            <a:ext cx="2286000" cy="411480"/>
+          </a:xfrm>
+          <a:prstGeom prst="rect">
+            <a:avLst/>
+          </a:prstGeom>
+          <a:solidFill>
+            <a:srgbClr val="E3F2FD"/>
+          </a:solidFill>
+          <a:ln/>
+        </p:spPr>
+      </p:sp>
+      <p:sp>
+        <p:nvSpPr>
+          <p:cNvPr id="28" name="Text 26"/>
+          <p:cNvSpPr/>
+          <p:nvPr/>
+        </p:nvSpPr>
+        <p:spPr>
+          <a:xfrm>
+            <a:off x="548640" y="3227832"/>
+            <a:ext cx="2103120" cy="411480"/>
           </a:xfrm>
           <a:prstGeom prst="rect">
             <a:avLst/>
@@ -6923,7 +7304,7 @@
                 <a:ea typeface="Trebuchet MS" pitchFamily="34" charset="-122"/>
                 <a:cs typeface="Trebuchet MS" pitchFamily="34" charset="-120"/>
               </a:rPr>
-              <a:t>CROSS JOIN</a:t>
+              <a:t>GROUP_CONCAT</a:t>
             </a:r>
             <a:endParaRPr lang="en-US" sz="900" dirty="0"/>
           </a:p>
@@ -6931,34 +7312,34 @@
       </p:sp>
       <p:sp>
         <p:nvSpPr>
-          <p:cNvPr id="27" name="Shape 25"/>
-          <p:cNvSpPr/>
-          <p:nvPr/>
-        </p:nvSpPr>
-        <p:spPr>
-          <a:xfrm>
-            <a:off x="2743200" y="3474720"/>
-            <a:ext cx="5943600" cy="475488"/>
-          </a:xfrm>
-          <a:prstGeom prst="rect">
-            <a:avLst/>
-          </a:prstGeom>
-          <a:solidFill>
-            <a:srgbClr val="F0F0F0"/>
-          </a:solidFill>
-          <a:ln/>
-        </p:spPr>
-      </p:sp>
-      <p:sp>
-        <p:nvSpPr>
-          <p:cNvPr id="28" name="Text 26"/>
-          <p:cNvSpPr/>
-          <p:nvPr/>
-        </p:nvSpPr>
-        <p:spPr>
-          <a:xfrm>
-            <a:off x="2834640" y="3474720"/>
-            <a:ext cx="5760720" cy="475488"/>
+          <p:cNvPr id="29" name="Shape 27"/>
+          <p:cNvSpPr/>
+          <p:nvPr/>
+        </p:nvSpPr>
+        <p:spPr>
+          <a:xfrm>
+            <a:off x="2743200" y="3227832"/>
+            <a:ext cx="5943600" cy="411480"/>
+          </a:xfrm>
+          <a:prstGeom prst="rect">
+            <a:avLst/>
+          </a:prstGeom>
+          <a:solidFill>
+            <a:srgbClr val="E3F2FD"/>
+          </a:solidFill>
+          <a:ln/>
+        </p:spPr>
+      </p:sp>
+      <p:sp>
+        <p:nvSpPr>
+          <p:cNvPr id="30" name="Text 28"/>
+          <p:cNvSpPr/>
+          <p:nvPr/>
+        </p:nvSpPr>
+        <p:spPr>
+          <a:xfrm>
+            <a:off x="2834640" y="3227832"/>
+            <a:ext cx="5760720" cy="411480"/>
           </a:xfrm>
           <a:prstGeom prst="rect">
             <a:avLst/>
@@ -6982,125 +7363,7 @@
                 <a:ea typeface="Calibri" pitchFamily="34" charset="-122"/>
                 <a:cs typeface="Calibri" pitchFamily="34" charset="-120"/>
               </a:rPr>
-              <a:t>Produit cartésien : toutes les combinaisons</a:t>
-            </a:r>
-            <a:endParaRPr lang="en-US" sz="900" dirty="0"/>
-          </a:p>
-        </p:txBody>
-      </p:sp>
-      <p:sp>
-        <p:nvSpPr>
-          <p:cNvPr id="29" name="Shape 27"/>
-          <p:cNvSpPr/>
-          <p:nvPr/>
-        </p:nvSpPr>
-        <p:spPr>
-          <a:xfrm>
-            <a:off x="457200" y="3977640"/>
-            <a:ext cx="2286000" cy="475488"/>
-          </a:xfrm>
-          <a:prstGeom prst="rect">
-            <a:avLst/>
-          </a:prstGeom>
-          <a:solidFill>
-            <a:srgbClr val="E3F2FD"/>
-          </a:solidFill>
-          <a:ln/>
-        </p:spPr>
-      </p:sp>
-      <p:sp>
-        <p:nvSpPr>
-          <p:cNvPr id="30" name="Text 28"/>
-          <p:cNvSpPr/>
-          <p:nvPr/>
-        </p:nvSpPr>
-        <p:spPr>
-          <a:xfrm>
-            <a:off x="548640" y="3977640"/>
-            <a:ext cx="2103120" cy="475488"/>
-          </a:xfrm>
-          <a:prstGeom prst="rect">
-            <a:avLst/>
-          </a:prstGeom>
-          <a:noFill/>
-          <a:ln/>
-        </p:spPr>
-        <p:txBody>
-          <a:bodyPr wrap="square" lIns="0" tIns="0" rIns="0" bIns="0" rtlCol="0" anchor="ctr"/>
-          <a:lstStyle/>
-          <a:p>
-            <a:pPr indent="0" marL="0">
-              <a:buNone/>
-            </a:pPr>
-            <a:r>
-              <a:rPr lang="en-US" sz="900" b="1" dirty="0">
-                <a:solidFill>
-                  <a:srgbClr val="0D47A1"/>
-                </a:solidFill>
-                <a:latin typeface="Trebuchet MS" pitchFamily="34" charset="0"/>
-                <a:ea typeface="Trebuchet MS" pitchFamily="34" charset="-122"/>
-                <a:cs typeface="Trebuchet MS" pitchFamily="34" charset="-120"/>
-              </a:rPr>
-              <a:t>GROUP_CONCAT</a:t>
-            </a:r>
-            <a:endParaRPr lang="en-US" sz="900" dirty="0"/>
-          </a:p>
-        </p:txBody>
-      </p:sp>
-      <p:sp>
-        <p:nvSpPr>
-          <p:cNvPr id="31" name="Shape 29"/>
-          <p:cNvSpPr/>
-          <p:nvPr/>
-        </p:nvSpPr>
-        <p:spPr>
-          <a:xfrm>
-            <a:off x="2743200" y="3977640"/>
-            <a:ext cx="5943600" cy="475488"/>
-          </a:xfrm>
-          <a:prstGeom prst="rect">
-            <a:avLst/>
-          </a:prstGeom>
-          <a:solidFill>
-            <a:srgbClr val="E3F2FD"/>
-          </a:solidFill>
-          <a:ln/>
-        </p:spPr>
-      </p:sp>
-      <p:sp>
-        <p:nvSpPr>
-          <p:cNvPr id="32" name="Text 30"/>
-          <p:cNvSpPr/>
-          <p:nvPr/>
-        </p:nvSpPr>
-        <p:spPr>
-          <a:xfrm>
-            <a:off x="2834640" y="3977640"/>
-            <a:ext cx="5760720" cy="475488"/>
-          </a:xfrm>
-          <a:prstGeom prst="rect">
-            <a:avLst/>
-          </a:prstGeom>
-          <a:noFill/>
-          <a:ln/>
-        </p:spPr>
-        <p:txBody>
-          <a:bodyPr wrap="square" lIns="0" tIns="0" rIns="0" bIns="0" rtlCol="0" anchor="ctr"/>
-          <a:lstStyle/>
-          <a:p>
-            <a:pPr indent="0" marL="0">
-              <a:buNone/>
-            </a:pPr>
-            <a:r>
-              <a:rPr lang="en-US" sz="900" dirty="0">
-                <a:solidFill>
-                  <a:srgbClr val="333333"/>
-                </a:solidFill>
-                <a:latin typeface="Calibri" pitchFamily="34" charset="0"/>
-                <a:ea typeface="Calibri" pitchFamily="34" charset="-122"/>
-                <a:cs typeface="Calibri" pitchFamily="34" charset="-120"/>
-              </a:rPr>
-              <a:t>Concaténer des valeurs groupées en une ligne (genres d'un artiste)</a:t>
+              <a:t>Concatener des valeurs groupees en une ligne</a:t>
             </a:r>
             <a:endParaRPr lang="en-US" sz="900" dirty="0"/>
           </a:p>
